--- a/Template/Out/Multimodal Studio - AI Builder Cup.pptx
+++ b/Template/Out/Multimodal Studio - AI Builder Cup.pptx
@@ -7085,7 +7085,7 @@
                 <a:cs typeface="Google Sans Flex"/>
                 <a:sym typeface="Google Sans Flex"/>
               </a:rPr>
-              <a:t>Team leader: Anil Kumar  ·  anil8860556664@gmail.com</a:t>
+              <a:t>Team leader name: M Sai Teja</a:t>
             </a:r>
             <a:endParaRPr sz="1800">
               <a:latin typeface="Google Sans Flex"/>
@@ -7113,7 +7113,7 @@
                 <a:cs typeface="Google Sans Flex"/>
                 <a:sym typeface="Google Sans Flex"/>
               </a:rPr>
-              <a:t>Member: M Sai Teja  ·  macharlasaiteja@gmail.com.  A chapter still becomes slides by hand, then a recording. Students get a flat read-aloud. We wanted a video they would actually replay.</a:t>
+              <a:t>Problem statement: A teacher still rebuilds a chapter as slides, then records it. The voice and the picture do not move together, so students get a page read aloud.</a:t>
             </a:r>
             <a:endParaRPr sz="1800">
               <a:latin typeface="Google Sans Flex"/>
@@ -7412,7 +7412,7 @@
                 <a:cs typeface="Google Sans Flex"/>
                 <a:sym typeface="Google Sans Flex"/>
               </a:rPr>
-              <a:t>No GPU. The only bill is the Gemini API.</a:t>
+              <a:t>No GPU. A normal video on Gemini Flash is a few rupees.</a:t>
             </a:r>
           </a:p>
           <a:p>
@@ -7434,51 +7434,7 @@
                 <a:cs typeface="Google Sans Flex"/>
                 <a:sym typeface="Google Sans Flex"/>
               </a:rPr>
-              <a:t>On Flash, a normal video is a few rupees. Argon costs more, so we turn it on when the source needs it, not for every run.</a:t>
-            </a:r>
-          </a:p>
-          <a:p>
-            <a:pPr algn="l">
-              <a:spcBef>
-                <a:spcPts val="0"/>
-              </a:spcBef>
-              <a:spcAft>
-                <a:spcPts val="800"/>
-              </a:spcAft>
-            </a:pPr>
-            <a:r>
-              <a:rPr sz="1400" b="0" i="0">
-                <a:solidFill>
-                  <a:srgbClr val="1F1F1F"/>
-                </a:solidFill>
-                <a:latin typeface="Google Sans Flex"/>
-                <a:ea typeface="Google Sans Flex"/>
-                <a:cs typeface="Google Sans Flex"/>
-                <a:sym typeface="Google Sans Flex"/>
-              </a:rPr>
-              <a:t>Cloud Run and Firestore should stay inside the free tier for the number of people who will open this during review.</a:t>
-            </a:r>
-          </a:p>
-          <a:p>
-            <a:pPr algn="l">
-              <a:spcBef>
-                <a:spcPts val="0"/>
-              </a:spcBef>
-              <a:spcAft>
-                <a:spcPts val="800"/>
-              </a:spcAft>
-            </a:pPr>
-            <a:r>
-              <a:rPr sz="1400" b="0" i="0">
-                <a:solidFill>
-                  <a:srgbClr val="1F1F1F"/>
-                </a:solidFill>
-                <a:latin typeface="Google Sans Flex"/>
-                <a:ea typeface="Google Sans Flex"/>
-                <a:cs typeface="Google Sans Flex"/>
-                <a:sym typeface="Google Sans Flex"/>
-              </a:rPr>
-              <a:t>We have not switched on a paid hosting plan. The API key is the thing that has to be set.</a:t>
+              <a:t>Cloud Run and Firestore stay in the free tier for review traffic.</a:t>
             </a:r>
           </a:p>
         </p:txBody>
@@ -7717,8 +7673,8 @@
         </p:blipFill>
         <p:spPr>
           <a:xfrm>
-            <a:off x="292608" y="1783080"/>
-            <a:ext cx="2743200" cy="1362456"/>
+            <a:off x="365760" y="1874519"/>
+            <a:ext cx="2651760" cy="1316736"/>
           </a:xfrm>
           <a:prstGeom prst="rect">
             <a:avLst/>
@@ -7733,8 +7689,8 @@
         </p:nvSpPr>
         <p:spPr>
           <a:xfrm>
-            <a:off x="292608" y="3218688"/>
-            <a:ext cx="2743200" cy="1371600"/>
+            <a:off x="365760" y="3273552"/>
+            <a:ext cx="2651760" cy="822960"/>
           </a:xfrm>
           <a:prstGeom prst="rect">
             <a:avLst/>
@@ -7763,7 +7719,7 @@
                 <a:cs typeface="Google Sans Flex"/>
                 <a:sym typeface="Google Sans Flex"/>
               </a:rPr>
-              <a:t>Where a run starts. File on the left, format and voice, then run.</a:t>
+              <a:t>Studio. Drop the file and run.</a:t>
             </a:r>
           </a:p>
         </p:txBody>
@@ -7784,8 +7740,8 @@
         </p:blipFill>
         <p:spPr>
           <a:xfrm>
-            <a:off x="3172968" y="1783080"/>
-            <a:ext cx="2743200" cy="1362456"/>
+            <a:off x="3246120" y="1874519"/>
+            <a:ext cx="2651760" cy="1316736"/>
           </a:xfrm>
           <a:prstGeom prst="rect">
             <a:avLst/>
@@ -7800,8 +7756,8 @@
         </p:nvSpPr>
         <p:spPr>
           <a:xfrm>
-            <a:off x="3172968" y="3218688"/>
-            <a:ext cx="2743200" cy="1371600"/>
+            <a:off x="3246120" y="3273552"/>
+            <a:ext cx="2651760" cy="822960"/>
           </a:xfrm>
           <a:prstGeom prst="rect">
             <a:avLst/>
@@ -7830,7 +7786,7 @@
                 <a:cs typeface="Google Sans Flex"/>
                 <a:sym typeface="Google Sans Flex"/>
               </a:rPr>
-              <a:t>Kore is the voice in the demo. You can hear it before you commit.</a:t>
+              <a:t>Pick a voice before you run.</a:t>
             </a:r>
           </a:p>
         </p:txBody>
@@ -7851,8 +7807,8 @@
         </p:blipFill>
         <p:spPr>
           <a:xfrm>
-            <a:off x="6053327" y="1783080"/>
-            <a:ext cx="2743200" cy="1362456"/>
+            <a:off x="6126479" y="1874519"/>
+            <a:ext cx="2651760" cy="1316736"/>
           </a:xfrm>
           <a:prstGeom prst="rect">
             <a:avLst/>
@@ -7867,8 +7823,8 @@
         </p:nvSpPr>
         <p:spPr>
           <a:xfrm>
-            <a:off x="6053327" y="3218688"/>
-            <a:ext cx="2743200" cy="1371600"/>
+            <a:off x="6126479" y="3273552"/>
+            <a:ext cx="2651760" cy="822960"/>
           </a:xfrm>
           <a:prstGeom prst="rect">
             <a:avLst/>
@@ -7897,7 +7853,7 @@
                 <a:cs typeface="Google Sans Flex"/>
                 <a:sym typeface="Google Sans Flex"/>
               </a:rPr>
-              <a:t>Old runs stay here. Open one again instead of starting over.</a:t>
+              <a:t>Past runs stay here.</a:t>
             </a:r>
           </a:p>
         </p:txBody>
@@ -8115,7 +8071,7 @@
                 <a:cs typeface="Google Sans Flex"/>
                 <a:sym typeface="Google Sans Flex"/>
               </a:rPr>
-              <a:t>There is no benchmark table on purpose. We did not want a number on this slide that we had not measured.</a:t>
+              <a:t>A chapter-length run finishes. Filming the slides is the slow step.</a:t>
             </a:r>
           </a:p>
           <a:p>
@@ -8137,51 +8093,7 @@
                 <a:cs typeface="Google Sans Flex"/>
                 <a:sym typeface="Google Sans Flex"/>
               </a:rPr>
-              <a:t>Every run does write down how long each step took. That lives with the job, not in a slide we typed.</a:t>
-            </a:r>
-          </a:p>
-          <a:p>
-            <a:pPr algn="l">
-              <a:spcBef>
-                <a:spcPts val="0"/>
-              </a:spcBef>
-              <a:spcAft>
-                <a:spcPts val="800"/>
-              </a:spcAft>
-            </a:pPr>
-            <a:r>
-              <a:rPr sz="1400" b="0" i="0">
-                <a:solidFill>
-                  <a:srgbClr val="1F1F1F"/>
-                </a:solidFill>
-                <a:latin typeface="Google Sans Flex"/>
-                <a:ea typeface="Google Sans Flex"/>
-                <a:cs typeface="Google Sans Flex"/>
-                <a:sym typeface="Google Sans Flex"/>
-              </a:rPr>
-              <a:t>Filming is the slow step. We shoot the movement at the start of a slide and hold the frame, so a long voiceover is not a screenshot every fraction of a second.</a:t>
-            </a:r>
-          </a:p>
-          <a:p>
-            <a:pPr algn="l">
-              <a:spcBef>
-                <a:spcPts val="0"/>
-              </a:spcBef>
-              <a:spcAft>
-                <a:spcPts val="800"/>
-              </a:spcAft>
-            </a:pPr>
-            <a:r>
-              <a:rPr sz="1400" b="0" i="0">
-                <a:solidFill>
-                  <a:srgbClr val="1F1F1F"/>
-                </a:solidFill>
-                <a:latin typeface="Google Sans Flex"/>
-                <a:ea typeface="Google Sans Flex"/>
-                <a:cs typeface="Google Sans Flex"/>
-                <a:sym typeface="Google Sans Flex"/>
-              </a:rPr>
-              <a:t>If Gemini is busy, that step waits and tries again. The run does not stop in the middle and leave a broken file.</a:t>
+              <a:t>We have not published a benchmark table. Each job does record how long its own steps took.</a:t>
             </a:r>
           </a:p>
         </p:txBody>
@@ -8399,7 +8311,7 @@
                 <a:cs typeface="Google Sans Flex"/>
                 <a:sym typeface="Google Sans Flex"/>
               </a:rPr>
-              <a:t>Next we want the Studio to feel more obvious: fewer choices, a clearer next step, and the look of the slides kept in step with the style you picked.</a:t>
+              <a:t>Next: handwritten teaching slides, and Manim-style motion when the chapter has a formula.</a:t>
             </a:r>
           </a:p>
           <a:p>
@@ -8421,51 +8333,7 @@
                 <a:cs typeface="Google Sans Flex"/>
                 <a:sym typeface="Google Sans Flex"/>
               </a:rPr>
-              <a:t>Handwritten teaching templates, separate from the board we have now, so a maths or science idea can look drawn rather than typed.</a:t>
-            </a:r>
-          </a:p>
-          <a:p>
-            <a:pPr algn="l">
-              <a:spcBef>
-                <a:spcPts val="0"/>
-              </a:spcBef>
-              <a:spcAft>
-                <a:spcPts val="800"/>
-              </a:spcAft>
-            </a:pPr>
-            <a:r>
-              <a:rPr sz="1400" b="0" i="0">
-                <a:solidFill>
-                  <a:srgbClr val="1F1F1F"/>
-                </a:solidFill>
-                <a:latin typeface="Google Sans Flex"/>
-                <a:ea typeface="Google Sans Flex"/>
-                <a:cs typeface="Google Sans Flex"/>
-                <a:sym typeface="Google Sans Flex"/>
-              </a:rPr>
-              <a:t>Manim-style motion for formulas. Predefined YouTuber looks, plus a custom one. Better animation models, both the ones we ship and ones a teacher can add.</a:t>
-            </a:r>
-          </a:p>
-          <a:p>
-            <a:pPr algn="l">
-              <a:spcBef>
-                <a:spcPts val="0"/>
-              </a:spcBef>
-              <a:spcAft>
-                <a:spcPts val="800"/>
-              </a:spcAft>
-            </a:pPr>
-            <a:r>
-              <a:rPr sz="1400" b="0" i="0">
-                <a:solidFill>
-                  <a:srgbClr val="1F1F1F"/>
-                </a:solidFill>
-                <a:latin typeface="Google Sans Flex"/>
-                <a:ea typeface="Google Sans Flex"/>
-                <a:cs typeface="Google Sans Flex"/>
-                <a:sym typeface="Google Sans Flex"/>
-              </a:rPr>
-              <a:t>New animation skills you can drop in, the way a style is picked today. A Short cut from the long lesson without doing it by hand.</a:t>
+              <a:t>After that, a few YouTuber looks you can pick, or make your own.</a:t>
             </a:r>
           </a:p>
         </p:txBody>
@@ -8808,7 +8676,7 @@
                 <a:cs typeface="Google Sans Flex"/>
                 <a:sym typeface="Google Sans Flex"/>
               </a:rPr>
-              <a:t>Demo video: 3 to 4 minutes of one real file becoming an MP4. Link still to be pasted.</a:t>
+              <a:t>Demo video: still to record (3 to 4 minutes, one real file).</a:t>
             </a:r>
           </a:p>
           <a:p>
@@ -8831,28 +8699,6 @@
                 <a:sym typeface="Google Sans Flex"/>
               </a:rPr>
               <a:t>Product: https://multimodal-studio-469528918286.us-central1.run.app</a:t>
-            </a:r>
-          </a:p>
-          <a:p>
-            <a:pPr algn="l">
-              <a:spcBef>
-                <a:spcPts val="800"/>
-              </a:spcBef>
-              <a:spcAft>
-                <a:spcPts val="0"/>
-              </a:spcAft>
-            </a:pPr>
-            <a:r>
-              <a:rPr sz="1300" b="0" i="0">
-                <a:solidFill>
-                  <a:srgbClr val="1F1F1F"/>
-                </a:solidFill>
-                <a:latin typeface="Google Sans Flex"/>
-                <a:ea typeface="Google Sans Flex"/>
-                <a:cs typeface="Google Sans Flex"/>
-                <a:sym typeface="Google Sans Flex"/>
-              </a:rPr>
-              <a:t>That link opens in Studio. There is no login.</a:t>
             </a:r>
           </a:p>
         </p:txBody>
@@ -9503,7 +9349,7 @@
                 <a:cs typeface="Google Sans Flex"/>
                 <a:sym typeface="Google Sans Flex"/>
               </a:rPr>
-              <a:t>Anil Kumar leads the team. M Sai Teja builds with him. We kept turning chapters into slides and then sitting down to record.</a:t>
+              <a:t>M Sai Teja leads and built this.</a:t>
             </a:r>
           </a:p>
           <a:p>
@@ -9525,7 +9371,7 @@
                 <a:cs typeface="Google Sans Flex"/>
                 <a:sym typeface="Google Sans Flex"/>
               </a:rPr>
-              <a:t>Multimodal Studio is for a teacher, a tutor, or a student who wants the idea to stick. Drop the PDF or the notes, say the age, and you get a video with a voice already on it.</a:t>
+              <a:t>You drop a chapter or a set of notes. You get a short video a class can replay. Gemini writes the slides. Gemini 3.8 Live speaks them.</a:t>
             </a:r>
           </a:p>
           <a:p>
@@ -9547,7 +9393,7 @@
                 <a:cs typeface="Google Sans Flex"/>
                 <a:sym typeface="Google Sans Flex"/>
               </a:rPr>
-              <a:t>The fun is in the timing. The highlight moves when the sentence does, so it feels like someone explaining, not a page being read out. Gemini writes it. Gemini 3.8 Live speaks it. The review link opens with no login.</a:t>
+              <a:t>The highlight moves with the sentence, so it feels like someone explaining, not a page being read out.</a:t>
             </a:r>
           </a:p>
         </p:txBody>
@@ -9897,7 +9743,7 @@
                 <a:cs typeface="Google Sans Flex SemiBold"/>
                 <a:sym typeface="Google Sans Flex SemiBold"/>
               </a:rPr>
-              <a:t>How it is different</a:t>
+              <a:t>Different from what exists</a:t>
             </a:r>
           </a:p>
           <a:p>
@@ -9919,7 +9765,7 @@
                 <a:cs typeface="Google Sans Flex"/>
                 <a:sym typeface="Google Sans Flex"/>
               </a:rPr>
-              <a:t>Slide tools stop at the deck. Read-aloud tools stay in one tone and ignore the picture. A teacher was still doing the joining. This goes from the file to a video a class can replay.</a:t>
+              <a:t>Slide tools stop at the deck. Read-aloud tools ignore the picture. Neither gives a class a video.</a:t>
             </a:r>
           </a:p>
           <a:p>
@@ -9941,7 +9787,7 @@
                 <a:cs typeface="Google Sans Flex SemiBold"/>
                 <a:sym typeface="Google Sans Flex SemiBold"/>
               </a:rPr>
-              <a:t>How it solves it</a:t>
+              <a:t>How it solves the problem</a:t>
             </a:r>
           </a:p>
           <a:p>
@@ -9963,7 +9809,7 @@
                 <a:cs typeface="Google Sans Flex"/>
                 <a:sym typeface="Google Sans Flex"/>
               </a:rPr>
-              <a:t>The slow part was the middle: slides a student can follow, a voice with some life in it, and a highlight that walks with the sentence. That middle is the product.</a:t>
+              <a:t>One file goes in. A video comes out. The teacher does not record, and does not line the voice up by hand.</a:t>
             </a:r>
           </a:p>
           <a:p>
@@ -9985,7 +9831,7 @@
                 <a:cs typeface="Google Sans Flex SemiBold"/>
                 <a:sym typeface="Google Sans Flex SemiBold"/>
               </a:rPr>
-              <a:t>What we would defend</a:t>
+              <a:t>USP</a:t>
             </a:r>
           </a:p>
           <a:p>
@@ -10007,7 +9853,7 @@
                 <a:cs typeface="Google Sans Flex"/>
                 <a:sym typeface="Google Sans Flex"/>
               </a:rPr>
-              <a:t>One Gemini key. A voice that does not sound like a station announcement. A link anyone on the review team can open.</a:t>
+              <a:t>The voice and the highlight stay in time. That is the part a normal deck and a normal voiceover both miss.</a:t>
             </a:r>
           </a:p>
         </p:txBody>
@@ -10225,7 +10071,7 @@
                 <a:cs typeface="Google Sans Flex"/>
                 <a:sym typeface="Google Sans Flex"/>
               </a:rPr>
-              <a:t>A teacher can turn one chapter into a YouTube lesson, a Short, or a Reel. The length follows the format.</a:t>
+              <a:t>Drop a PDF. Get a video for YouTube or a Short.</a:t>
             </a:r>
           </a:p>
           <a:p>
@@ -10247,7 +10093,7 @@
                 <a:cs typeface="Google Sans Flex"/>
                 <a:sym typeface="Google Sans Flex"/>
               </a:rPr>
-              <a:t>Age and how much the viewer already knows change the wording. A class of 16-year-olds does not get the same script as a beginner.</a:t>
+              <a:t>Say the age. The wording changes for that class.</a:t>
             </a:r>
           </a:p>
           <a:p>
@@ -10269,73 +10115,7 @@
                 <a:cs typeface="Google Sans Flex"/>
                 <a:sym typeface="Google Sans Flex"/>
               </a:rPr>
-              <a:t>Gemini 3.8 Live speaks it. Kore is the demo voice. You can preview before you run.</a:t>
-            </a:r>
-          </a:p>
-          <a:p>
-            <a:pPr algn="l">
-              <a:spcBef>
-                <a:spcPts val="0"/>
-              </a:spcBef>
-              <a:spcAft>
-                <a:spcPts val="800"/>
-              </a:spcAft>
-            </a:pPr>
-            <a:r>
-              <a:rPr sz="1300" b="0" i="0">
-                <a:solidFill>
-                  <a:srgbClr val="1F1F1F"/>
-                </a:solidFill>
-                <a:latin typeface="Google Sans Flex"/>
-                <a:ea typeface="Google Sans Flex"/>
-                <a:cs typeface="Google Sans Flex"/>
-                <a:sym typeface="Google Sans Flex"/>
-              </a:rPr>
-              <a:t>A long PDF can be split into topics, then one video or a few, so a unit does not have to be one 40-minute file.</a:t>
-            </a:r>
-          </a:p>
-          <a:p>
-            <a:pPr algn="l">
-              <a:spcBef>
-                <a:spcPts val="0"/>
-              </a:spcBef>
-              <a:spcAft>
-                <a:spcPts val="800"/>
-              </a:spcAft>
-            </a:pPr>
-            <a:r>
-              <a:rPr sz="1300" b="0" i="0">
-                <a:solidFill>
-                  <a:srgbClr val="1F1F1F"/>
-                </a:solidFill>
-                <a:latin typeface="Google Sans Flex"/>
-                <a:ea typeface="Google Sans Flex"/>
-                <a:cs typeface="Google Sans Flex"/>
-                <a:sym typeface="Google Sans Flex"/>
-              </a:rPr>
-              <a:t>It flags a slide that repeats the one before it, and the on-screen highlight stays with the voice.</a:t>
-            </a:r>
-          </a:p>
-          <a:p>
-            <a:pPr algn="l">
-              <a:spcBef>
-                <a:spcPts val="0"/>
-              </a:spcBef>
-              <a:spcAft>
-                <a:spcPts val="800"/>
-              </a:spcAft>
-            </a:pPr>
-            <a:r>
-              <a:rPr sz="1300" b="0" i="0">
-                <a:solidFill>
-                  <a:srgbClr val="1F1F1F"/>
-                </a:solidFill>
-                <a:latin typeface="Google Sans Flex"/>
-                <a:ea typeface="Google Sans Flex"/>
-                <a:cs typeface="Google Sans Flex"/>
-                <a:sym typeface="Google Sans Flex"/>
-              </a:rPr>
-              <a:t>Title, description, and thumbnail come out with the file.</a:t>
+              <a:t>Gemini 3.8 Live speaks it, and the highlight follows the voice.</a:t>
             </a:r>
           </a:p>
         </p:txBody>
@@ -10950,29 +10730,7 @@
                 <a:cs typeface="Google Sans Flex"/>
                 <a:sym typeface="Google Sans Flex"/>
               </a:rPr>
-              <a:t>Same path if you uploaded the file, or if the overnight job picked a paper.</a:t>
-            </a:r>
-          </a:p>
-          <a:p>
-            <a:pPr algn="l">
-              <a:spcBef>
-                <a:spcPts val="0"/>
-              </a:spcBef>
-              <a:spcAft>
-                <a:spcPts val="800"/>
-              </a:spcAft>
-            </a:pPr>
-            <a:r>
-              <a:rPr sz="1400" b="0" i="0">
-                <a:solidFill>
-                  <a:srgbClr val="1F1F1F"/>
-                </a:solidFill>
-                <a:latin typeface="Google Sans Flex"/>
-                <a:ea typeface="Google Sans Flex"/>
-                <a:cs typeface="Google Sans Flex"/>
-                <a:sym typeface="Google Sans Flex"/>
-              </a:rPr>
-              <a:t>Speaking is Gemini 3.8 Live, so the voice has pauses and a bit of warmth. It is not a flat read-out.</a:t>
+              <a:t>Upload a chapter, or let the queue pick a paper. Then one path to the video.</a:t>
             </a:r>
           </a:p>
         </p:txBody>
@@ -11205,7 +10963,7 @@
               </a:spcAft>
             </a:pPr>
             <a:r>
-              <a:rPr sz="1300" b="0" i="0">
+              <a:rPr sz="1400" b="0" i="0">
                 <a:solidFill>
                   <a:srgbClr val="1F1F1F"/>
                 </a:solidFill>
@@ -11214,7 +10972,7 @@
                 <a:cs typeface="Google Sans Flex SemiBold"/>
                 <a:sym typeface="Google Sans Flex SemiBold"/>
               </a:rPr>
-              <a:t>What you actually see</a:t>
+              <a:t>The Studio page</a:t>
             </a:r>
           </a:p>
           <a:p>
@@ -11236,73 +10994,7 @@
                 <a:cs typeface="Google Sans Flex"/>
                 <a:sym typeface="Google Sans Flex"/>
               </a:rPr>
-              <a:t>The file goes on the left.</a:t>
-            </a:r>
-          </a:p>
-          <a:p>
-            <a:pPr algn="l">
-              <a:spcBef>
-                <a:spcPts val="0"/>
-              </a:spcBef>
-              <a:spcAft>
-                <a:spcPts val="800"/>
-              </a:spcAft>
-            </a:pPr>
-            <a:r>
-              <a:rPr sz="1300" b="0" i="0">
-                <a:solidFill>
-                  <a:srgbClr val="1F1F1F"/>
-                </a:solidFill>
-                <a:latin typeface="Google Sans Flex"/>
-                <a:ea typeface="Google Sans Flex"/>
-                <a:cs typeface="Google Sans Flex"/>
-                <a:sym typeface="Google Sans Flex"/>
-              </a:rPr>
-              <a:t>Format and voice are next to it.</a:t>
-            </a:r>
-          </a:p>
-          <a:p>
-            <a:pPr algn="l">
-              <a:spcBef>
-                <a:spcPts val="0"/>
-              </a:spcBef>
-              <a:spcAft>
-                <a:spcPts val="800"/>
-              </a:spcAft>
-            </a:pPr>
-            <a:r>
-              <a:rPr sz="1300" b="0" i="0">
-                <a:solidFill>
-                  <a:srgbClr val="1F1F1F"/>
-                </a:solidFill>
-                <a:latin typeface="Google Sans Flex"/>
-                <a:ea typeface="Google Sans Flex"/>
-                <a:cs typeface="Google Sans Flex"/>
-                <a:sym typeface="Google Sans Flex"/>
-              </a:rPr>
-              <a:t>You press run and wait on the same page.</a:t>
-            </a:r>
-          </a:p>
-          <a:p>
-            <a:pPr algn="l">
-              <a:spcBef>
-                <a:spcPts val="0"/>
-              </a:spcBef>
-              <a:spcAft>
-                <a:spcPts val="800"/>
-              </a:spcAft>
-            </a:pPr>
-            <a:r>
-              <a:rPr sz="1300" b="0" i="0">
-                <a:solidFill>
-                  <a:srgbClr val="1F1F1F"/>
-                </a:solidFill>
-                <a:latin typeface="Google Sans Flex"/>
-                <a:ea typeface="Google Sans Flex"/>
-                <a:cs typeface="Google Sans Flex"/>
-                <a:sym typeface="Google Sans Flex"/>
-              </a:rPr>
-              <a:t>The MP4 plays there when it is done. History keeps the old ones.</a:t>
+              <a:t>File on the left. Format and voice beside it. Run, then play the video on the same page.</a:t>
             </a:r>
           </a:p>
         </p:txBody>
@@ -11520,7 +11212,7 @@
                 <a:cs typeface="Google Sans Flex"/>
                 <a:sym typeface="Google Sans Flex"/>
               </a:rPr>
-              <a:t>Browser  →  our Python app on Cloud Run  →  Gemini  →  an MP4</a:t>
+              <a:t>Studio page  →  Cloud Run  →  Gemini  →  MP4</a:t>
             </a:r>
           </a:p>
           <a:p>
@@ -11542,7 +11234,7 @@
                 <a:cs typeface="Google Sans Flex"/>
                 <a:sym typeface="Google Sans Flex"/>
               </a:rPr>
-              <a:t>The page is the Studio you saw. The server asks Gemini 3.8 Flash (or Argon) to read the file and write the slides. Gemini 3.8 Live speaks them. A headless Chrome photographs the slides. FFmpeg puts the sound on.</a:t>
+              <a:t>Gemini 3.8 Flash reads the file and writes the slides. Gemini 3.8 Live speaks them. Chrome films the frames. FFmpeg joins the sound.</a:t>
             </a:r>
           </a:p>
           <a:p>
@@ -11564,7 +11256,7 @@
                 <a:cs typeface="Google Sans Flex"/>
                 <a:sym typeface="Google Sans Flex"/>
               </a:rPr>
-              <a:t>Each job is saved on the machine and copied to Firestore. Firebase Hosting only serves this pitch. The app itself is Cloud Run.</a:t>
+              <a:t>Each job is copied to Firestore. This pitch page is on Firebase Hosting.</a:t>
             </a:r>
           </a:p>
         </p:txBody>
@@ -11782,7 +11474,7 @@
                 <a:cs typeface="Google Sans Flex"/>
                 <a:sym typeface="Google Sans Flex"/>
               </a:rPr>
-              <a:t>Writing, and reading pages: Gemini 3.8 Flash. Gemini 4 Argon when the source is dense and we want it to think harder.</a:t>
+              <a:t>Gemini 3.8 Flash writes the slides. Gemini 4 Argon is there when the chapter is dense.</a:t>
             </a:r>
           </a:p>
           <a:p>
@@ -11804,7 +11496,7 @@
                 <a:cs typeface="Google Sans Flex"/>
                 <a:sym typeface="Google Sans Flex"/>
               </a:rPr>
-              <a:t>Voice: Gemini 3.8 Live. Same family as the in-app assistant. We stopped using a separate flat text-to-speech voice.</a:t>
+              <a:t>Gemini 3.8 Live is the voice.</a:t>
             </a:r>
           </a:p>
           <a:p>
@@ -11826,51 +11518,7 @@
                 <a:cs typeface="Google Sans Flex"/>
                 <a:sym typeface="Google Sans Flex"/>
               </a:rPr>
-              <a:t>Thumbnail only: Nano Banana. It does not draw the slides.</a:t>
-            </a:r>
-          </a:p>
-          <a:p>
-            <a:pPr algn="l">
-              <a:spcBef>
-                <a:spcPts val="0"/>
-              </a:spcBef>
-              <a:spcAft>
-                <a:spcPts val="800"/>
-              </a:spcAft>
-            </a:pPr>
-            <a:r>
-              <a:rPr sz="1400" b="0" i="0">
-                <a:solidFill>
-                  <a:srgbClr val="1F1F1F"/>
-                </a:solidFill>
-                <a:latin typeface="Google Sans Flex"/>
-                <a:ea typeface="Google Sans Flex"/>
-                <a:cs typeface="Google Sans Flex"/>
-                <a:sym typeface="Google Sans Flex"/>
-              </a:rPr>
-              <a:t>App: Python, FastAPI, HTML slides, headless Chrome, FFmpeg.</a:t>
-            </a:r>
-          </a:p>
-          <a:p>
-            <a:pPr algn="l">
-              <a:spcBef>
-                <a:spcPts val="0"/>
-              </a:spcBef>
-              <a:spcAft>
-                <a:spcPts val="800"/>
-              </a:spcAft>
-            </a:pPr>
-            <a:r>
-              <a:rPr sz="1400" b="0" i="0">
-                <a:solidFill>
-                  <a:srgbClr val="1F1F1F"/>
-                </a:solidFill>
-                <a:latin typeface="Google Sans Flex"/>
-                <a:ea typeface="Google Sans Flex"/>
-                <a:cs typeface="Google Sans Flex"/>
-                <a:sym typeface="Google Sans Flex"/>
-              </a:rPr>
-              <a:t>Hosting: Cloud Run. This page: Firebase Hosting. Job copy: Firestore.</a:t>
+              <a:t>Cloud Run hosts the app. Firestore keeps each job. Firebase Hosting serves this pitch.</a:t>
             </a:r>
           </a:p>
         </p:txBody>

--- a/Template/Out/Multimodal Studio - AI Builder Cup.pptx
+++ b/Template/Out/Multimodal Studio - AI Builder Cup.pptx
@@ -7376,65 +7376,243 @@
       </p:sp>
       <p:sp>
         <p:nvSpPr>
-          <p:cNvPr id="128" name="TextBox 127"/>
-          <p:cNvSpPr txBox="1"/>
+          <p:cNvPr id="128" name="Rounded Rectangle 127"/>
+          <p:cNvSpPr/>
           <p:nvPr/>
         </p:nvSpPr>
         <p:spPr>
           <a:xfrm>
-            <a:off x="292608" y="1371600"/>
-            <a:ext cx="8549640" cy="3520440"/>
-          </a:xfrm>
-          <a:prstGeom prst="rect">
-            <a:avLst/>
-          </a:prstGeom>
-          <a:noFill/>
-        </p:spPr>
+            <a:off x="292608" y="1600200"/>
+            <a:ext cx="2779776" cy="2286000"/>
+          </a:xfrm>
+          <a:prstGeom prst="roundRect">
+            <a:avLst>
+              <a:gd name="adj" fmla="val 7000"/>
+            </a:avLst>
+          </a:prstGeom>
+          <a:solidFill>
+            <a:srgbClr val="E8F0FE"/>
+          </a:solidFill>
+          <a:ln>
+            <a:noFill/>
+          </a:ln>
+          <a:effectLst/>
+        </p:spPr>
+        <p:style>
+          <a:lnRef idx="1">
+            <a:schemeClr val="accent1"/>
+          </a:lnRef>
+          <a:fillRef idx="3">
+            <a:schemeClr val="accent1"/>
+          </a:fillRef>
+          <a:effectRef idx="2">
+            <a:schemeClr val="accent1"/>
+          </a:effectRef>
+          <a:fontRef idx="minor">
+            <a:schemeClr val="lt1"/>
+          </a:fontRef>
+        </p:style>
         <p:txBody>
-          <a:bodyPr wrap="square"/>
+          <a:bodyPr rtlCol="0" anchor="t" wrap="square" lIns="182880" rIns="182880" tIns="146304" bIns="109728"/>
           <a:lstStyle/>
           <a:p>
             <a:pPr algn="l">
-              <a:spcBef>
-                <a:spcPts val="0"/>
-              </a:spcBef>
-              <a:spcAft>
-                <a:spcPts val="800"/>
+              <a:spcAft>
+                <a:spcPts val="400"/>
               </a:spcAft>
             </a:pPr>
             <a:r>
-              <a:rPr sz="1400" b="0" i="0">
+              <a:rPr sz="2200" b="0" i="0">
                 <a:solidFill>
                   <a:srgbClr val="1F1F1F"/>
+                </a:solidFill>
+                <a:latin typeface="Google Sans Flex SemiBold"/>
+                <a:ea typeface="Google Sans Flex SemiBold"/>
+                <a:cs typeface="Google Sans Flex SemiBold"/>
+                <a:sym typeface="Google Sans Flex SemiBold"/>
+              </a:rPr>
+              <a:t>No GPU</a:t>
+            </a:r>
+          </a:p>
+          <a:p>
+            <a:pPr algn="l">
+              <a:spcAft>
+                <a:spcPts val="0"/>
+              </a:spcAft>
+            </a:pPr>
+            <a:r>
+              <a:rPr sz="1300" b="0" i="0">
+                <a:solidFill>
+                  <a:srgbClr val="3C4043"/>
                 </a:solidFill>
                 <a:latin typeface="Google Sans Flex"/>
                 <a:ea typeface="Google Sans Flex"/>
                 <a:cs typeface="Google Sans Flex"/>
                 <a:sym typeface="Google Sans Flex"/>
               </a:rPr>
-              <a:t>No GPU. A normal video on Gemini Flash is a few rupees.</a:t>
-            </a:r>
-          </a:p>
+              <a:t>Every model call goes to Gemini. The looks and drawn animation are plain CSS, so they add no cost.</a:t>
+            </a:r>
+          </a:p>
+        </p:txBody>
+      </p:sp>
+      <p:sp>
+        <p:nvSpPr>
+          <p:cNvPr id="129" name="Rounded Rectangle 128"/>
+          <p:cNvSpPr/>
+          <p:nvPr/>
+        </p:nvSpPr>
+        <p:spPr>
+          <a:xfrm>
+            <a:off x="3182112" y="1600200"/>
+            <a:ext cx="2779776" cy="2286000"/>
+          </a:xfrm>
+          <a:prstGeom prst="roundRect">
+            <a:avLst>
+              <a:gd name="adj" fmla="val 7000"/>
+            </a:avLst>
+          </a:prstGeom>
+          <a:solidFill>
+            <a:srgbClr val="E6F4EA"/>
+          </a:solidFill>
+          <a:ln>
+            <a:noFill/>
+          </a:ln>
+          <a:effectLst/>
+        </p:spPr>
+        <p:style>
+          <a:lnRef idx="1">
+            <a:schemeClr val="accent1"/>
+          </a:lnRef>
+          <a:fillRef idx="3">
+            <a:schemeClr val="accent1"/>
+          </a:fillRef>
+          <a:effectRef idx="2">
+            <a:schemeClr val="accent1"/>
+          </a:effectRef>
+          <a:fontRef idx="minor">
+            <a:schemeClr val="lt1"/>
+          </a:fontRef>
+        </p:style>
+        <p:txBody>
+          <a:bodyPr rtlCol="0" anchor="t" wrap="square" lIns="182880" rIns="182880" tIns="146304" bIns="109728"/>
+          <a:lstStyle/>
           <a:p>
             <a:pPr algn="l">
-              <a:spcBef>
-                <a:spcPts val="0"/>
-              </a:spcBef>
-              <a:spcAft>
-                <a:spcPts val="800"/>
+              <a:spcAft>
+                <a:spcPts val="400"/>
               </a:spcAft>
             </a:pPr>
             <a:r>
-              <a:rPr sz="1400" b="0" i="0">
+              <a:rPr sz="2200" b="0" i="0">
                 <a:solidFill>
                   <a:srgbClr val="1F1F1F"/>
+                </a:solidFill>
+                <a:latin typeface="Google Sans Flex SemiBold"/>
+                <a:ea typeface="Google Sans Flex SemiBold"/>
+                <a:cs typeface="Google Sans Flex SemiBold"/>
+                <a:sym typeface="Google Sans Flex SemiBold"/>
+              </a:rPr>
+              <a:t>Free tier</a:t>
+            </a:r>
+          </a:p>
+          <a:p>
+            <a:pPr algn="l">
+              <a:spcAft>
+                <a:spcPts val="0"/>
+              </a:spcAft>
+            </a:pPr>
+            <a:r>
+              <a:rPr sz="1300" b="0" i="0">
+                <a:solidFill>
+                  <a:srgbClr val="3C4043"/>
                 </a:solidFill>
                 <a:latin typeface="Google Sans Flex"/>
                 <a:ea typeface="Google Sans Flex"/>
                 <a:cs typeface="Google Sans Flex"/>
                 <a:sym typeface="Google Sans Flex"/>
               </a:rPr>
-              <a:t>Cloud Run and Firestore stay in the free tier for review traffic.</a:t>
+              <a:t>Cloud Run and Firestore stay free at review traffic.</a:t>
+            </a:r>
+          </a:p>
+        </p:txBody>
+      </p:sp>
+      <p:sp>
+        <p:nvSpPr>
+          <p:cNvPr id="130" name="Rounded Rectangle 129"/>
+          <p:cNvSpPr/>
+          <p:nvPr/>
+        </p:nvSpPr>
+        <p:spPr>
+          <a:xfrm>
+            <a:off x="6071616" y="1600200"/>
+            <a:ext cx="2779776" cy="2286000"/>
+          </a:xfrm>
+          <a:prstGeom prst="roundRect">
+            <a:avLst>
+              <a:gd name="adj" fmla="val 7000"/>
+            </a:avLst>
+          </a:prstGeom>
+          <a:solidFill>
+            <a:srgbClr val="FEF7E0"/>
+          </a:solidFill>
+          <a:ln>
+            <a:noFill/>
+          </a:ln>
+          <a:effectLst/>
+        </p:spPr>
+        <p:style>
+          <a:lnRef idx="1">
+            <a:schemeClr val="accent1"/>
+          </a:lnRef>
+          <a:fillRef idx="3">
+            <a:schemeClr val="accent1"/>
+          </a:fillRef>
+          <a:effectRef idx="2">
+            <a:schemeClr val="accent1"/>
+          </a:effectRef>
+          <a:fontRef idx="minor">
+            <a:schemeClr val="lt1"/>
+          </a:fontRef>
+        </p:style>
+        <p:txBody>
+          <a:bodyPr rtlCol="0" anchor="t" wrap="square" lIns="182880" rIns="182880" tIns="146304" bIns="109728"/>
+          <a:lstStyle/>
+          <a:p>
+            <a:pPr algn="l">
+              <a:spcAft>
+                <a:spcPts val="400"/>
+              </a:spcAft>
+            </a:pPr>
+            <a:r>
+              <a:rPr sz="2200" b="0" i="0">
+                <a:solidFill>
+                  <a:srgbClr val="1F1F1F"/>
+                </a:solidFill>
+                <a:latin typeface="Google Sans Flex SemiBold"/>
+                <a:ea typeface="Google Sans Flex SemiBold"/>
+                <a:cs typeface="Google Sans Flex SemiBold"/>
+                <a:sym typeface="Google Sans Flex SemiBold"/>
+              </a:rPr>
+              <a:t>A few rupees</a:t>
+            </a:r>
+          </a:p>
+          <a:p>
+            <a:pPr algn="l">
+              <a:spcAft>
+                <a:spcPts val="0"/>
+              </a:spcAft>
+            </a:pPr>
+            <a:r>
+              <a:rPr sz="1300" b="0" i="0">
+                <a:solidFill>
+                  <a:srgbClr val="3C4043"/>
+                </a:solidFill>
+                <a:latin typeface="Google Sans Flex"/>
+                <a:ea typeface="Google Sans Flex"/>
+                <a:cs typeface="Google Sans Flex"/>
+                <a:sym typeface="Google Sans Flex"/>
+              </a:rPr>
+              <a:t>One normal video on Gemini Flash costs a few rupees.</a:t>
             </a:r>
           </a:p>
         </p:txBody>
@@ -7614,52 +7792,9 @@
           </a:p>
         </p:txBody>
       </p:sp>
-      <p:sp>
-        <p:nvSpPr>
-          <p:cNvPr id="136" name="TextBox 135"/>
-          <p:cNvSpPr txBox="1"/>
-          <p:nvPr/>
-        </p:nvSpPr>
-        <p:spPr>
-          <a:xfrm>
-            <a:off x="292608" y="1298448"/>
-            <a:ext cx="8549640" cy="365760"/>
-          </a:xfrm>
-          <a:prstGeom prst="rect">
-            <a:avLst/>
-          </a:prstGeom>
-          <a:noFill/>
-        </p:spPr>
-        <p:txBody>
-          <a:bodyPr wrap="square"/>
-          <a:lstStyle/>
-          <a:p>
-            <a:pPr algn="l">
-              <a:spcBef>
-                <a:spcPts val="0"/>
-              </a:spcBef>
-              <a:spcAft>
-                <a:spcPts val="800"/>
-              </a:spcAft>
-            </a:pPr>
-            <a:r>
-              <a:rPr sz="1300" b="0" i="0">
-                <a:solidFill>
-                  <a:srgbClr val="1F1F1F"/>
-                </a:solidFill>
-                <a:latin typeface="Google Sans Flex"/>
-                <a:ea typeface="Google Sans Flex"/>
-                <a:cs typeface="Google Sans Flex"/>
-                <a:sym typeface="Google Sans Flex"/>
-              </a:rPr>
-              <a:t>These are screens from the app we run, not drawings of a future one.</a:t>
-            </a:r>
-          </a:p>
-        </p:txBody>
-      </p:sp>
       <p:pic>
         <p:nvPicPr>
-          <p:cNvPr id="137" name="Picture 136" descr="studio.png"/>
+          <p:cNvPr id="136" name="Picture 135" descr="looks-sheet.png"/>
           <p:cNvPicPr>
             <a:picLocks noChangeAspect="1"/>
           </p:cNvPicPr>
@@ -7673,24 +7808,29 @@
         </p:blipFill>
         <p:spPr>
           <a:xfrm>
-            <a:off x="365760" y="1874519"/>
-            <a:ext cx="2651760" cy="1316736"/>
+            <a:off x="292608" y="1325880"/>
+            <a:ext cx="8558784" cy="3218688"/>
           </a:xfrm>
           <a:prstGeom prst="rect">
             <a:avLst/>
           </a:prstGeom>
+          <a:ln w="12700">
+            <a:solidFill>
+              <a:srgbClr val="DADCE0"/>
+            </a:solidFill>
+          </a:ln>
         </p:spPr>
       </p:pic>
       <p:sp>
         <p:nvSpPr>
-          <p:cNvPr id="138" name="TextBox 137"/>
+          <p:cNvPr id="137" name="TextBox 136"/>
           <p:cNvSpPr txBox="1"/>
           <p:nvPr/>
         </p:nvSpPr>
         <p:spPr>
           <a:xfrm>
-            <a:off x="365760" y="3273552"/>
-            <a:ext cx="2651760" cy="822960"/>
+            <a:off x="292608" y="4572000"/>
+            <a:ext cx="8558784" cy="274320"/>
           </a:xfrm>
           <a:prstGeom prst="rect">
             <a:avLst/>
@@ -7698,162 +7838,21 @@
           <a:noFill/>
         </p:spPr>
         <p:txBody>
-          <a:bodyPr wrap="square"/>
+          <a:bodyPr wrap="square" lIns="0" rIns="0" tIns="0" bIns="0"/>
           <a:lstStyle/>
           <a:p>
-            <a:pPr algn="l">
-              <a:spcBef>
-                <a:spcPts val="0"/>
-              </a:spcBef>
-              <a:spcAft>
-                <a:spcPts val="800"/>
-              </a:spcAft>
-            </a:pPr>
-            <a:r>
-              <a:rPr sz="1200" b="0" i="0">
+            <a:pPr algn="l"/>
+            <a:r>
+              <a:rPr sz="1100" b="0" i="0">
                 <a:solidFill>
-                  <a:srgbClr val="1F1F1F"/>
+                  <a:srgbClr val="5F6368"/>
                 </a:solidFill>
                 <a:latin typeface="Google Sans Flex"/>
                 <a:ea typeface="Google Sans Flex"/>
                 <a:cs typeface="Google Sans Flex"/>
                 <a:sym typeface="Google Sans Flex"/>
               </a:rPr>
-              <a:t>Studio. Drop the file and run.</a:t>
-            </a:r>
-          </a:p>
-        </p:txBody>
-      </p:sp>
-      <p:pic>
-        <p:nvPicPr>
-          <p:cNvPr id="139" name="Picture 138" descr="voices.png"/>
-          <p:cNvPicPr>
-            <a:picLocks noChangeAspect="1"/>
-          </p:cNvPicPr>
-          <p:nvPr/>
-        </p:nvPicPr>
-        <p:blipFill>
-          <a:blip r:embed="rId6"/>
-          <a:stretch>
-            <a:fillRect/>
-          </a:stretch>
-        </p:blipFill>
-        <p:spPr>
-          <a:xfrm>
-            <a:off x="3246120" y="1874519"/>
-            <a:ext cx="2651760" cy="1316736"/>
-          </a:xfrm>
-          <a:prstGeom prst="rect">
-            <a:avLst/>
-          </a:prstGeom>
-        </p:spPr>
-      </p:pic>
-      <p:sp>
-        <p:nvSpPr>
-          <p:cNvPr id="140" name="TextBox 139"/>
-          <p:cNvSpPr txBox="1"/>
-          <p:nvPr/>
-        </p:nvSpPr>
-        <p:spPr>
-          <a:xfrm>
-            <a:off x="3246120" y="3273552"/>
-            <a:ext cx="2651760" cy="822960"/>
-          </a:xfrm>
-          <a:prstGeom prst="rect">
-            <a:avLst/>
-          </a:prstGeom>
-          <a:noFill/>
-        </p:spPr>
-        <p:txBody>
-          <a:bodyPr wrap="square"/>
-          <a:lstStyle/>
-          <a:p>
-            <a:pPr algn="l">
-              <a:spcBef>
-                <a:spcPts val="0"/>
-              </a:spcBef>
-              <a:spcAft>
-                <a:spcPts val="800"/>
-              </a:spcAft>
-            </a:pPr>
-            <a:r>
-              <a:rPr sz="1200" b="0" i="0">
-                <a:solidFill>
-                  <a:srgbClr val="1F1F1F"/>
-                </a:solidFill>
-                <a:latin typeface="Google Sans Flex"/>
-                <a:ea typeface="Google Sans Flex"/>
-                <a:cs typeface="Google Sans Flex"/>
-                <a:sym typeface="Google Sans Flex"/>
-              </a:rPr>
-              <a:t>Pick a voice before you run.</a:t>
-            </a:r>
-          </a:p>
-        </p:txBody>
-      </p:sp>
-      <p:pic>
-        <p:nvPicPr>
-          <p:cNvPr id="141" name="Picture 140" descr="history.png"/>
-          <p:cNvPicPr>
-            <a:picLocks noChangeAspect="1"/>
-          </p:cNvPicPr>
-          <p:nvPr/>
-        </p:nvPicPr>
-        <p:blipFill>
-          <a:blip r:embed="rId7"/>
-          <a:stretch>
-            <a:fillRect/>
-          </a:stretch>
-        </p:blipFill>
-        <p:spPr>
-          <a:xfrm>
-            <a:off x="6126479" y="1874519"/>
-            <a:ext cx="2651760" cy="1316736"/>
-          </a:xfrm>
-          <a:prstGeom prst="rect">
-            <a:avLst/>
-          </a:prstGeom>
-        </p:spPr>
-      </p:pic>
-      <p:sp>
-        <p:nvSpPr>
-          <p:cNvPr id="142" name="TextBox 141"/>
-          <p:cNvSpPr txBox="1"/>
-          <p:nvPr/>
-        </p:nvSpPr>
-        <p:spPr>
-          <a:xfrm>
-            <a:off x="6126479" y="3273552"/>
-            <a:ext cx="2651760" cy="822960"/>
-          </a:xfrm>
-          <a:prstGeom prst="rect">
-            <a:avLst/>
-          </a:prstGeom>
-          <a:noFill/>
-        </p:spPr>
-        <p:txBody>
-          <a:bodyPr wrap="square"/>
-          <a:lstStyle/>
-          <a:p>
-            <a:pPr algn="l">
-              <a:spcBef>
-                <a:spcPts val="0"/>
-              </a:spcBef>
-              <a:spcAft>
-                <a:spcPts val="800"/>
-              </a:spcAft>
-            </a:pPr>
-            <a:r>
-              <a:rPr sz="1200" b="0" i="0">
-                <a:solidFill>
-                  <a:srgbClr val="1F1F1F"/>
-                </a:solidFill>
-                <a:latin typeface="Google Sans Flex"/>
-                <a:ea typeface="Google Sans Flex"/>
-                <a:cs typeface="Google Sans Flex"/>
-                <a:sym typeface="Google Sans Flex"/>
-              </a:rPr>
-              <a:t>Past runs stay here.</a:t>
+              <a:t>Top row: whiteboard, broadcast, poster. Bottom row: editorial, bento, notebook. Real frames from our renderer.</a:t>
             </a:r>
           </a:p>
         </p:txBody>
@@ -8035,65 +8034,548 @@
       </p:sp>
       <p:sp>
         <p:nvSpPr>
-          <p:cNvPr id="144" name="TextBox 143"/>
-          <p:cNvSpPr txBox="1"/>
+          <p:cNvPr id="144" name="Rounded Rectangle 143"/>
+          <p:cNvSpPr/>
           <p:nvPr/>
         </p:nvSpPr>
         <p:spPr>
           <a:xfrm>
             <a:off x="292608" y="1371600"/>
-            <a:ext cx="8549640" cy="3520440"/>
-          </a:xfrm>
-          <a:prstGeom prst="rect">
-            <a:avLst/>
-          </a:prstGeom>
-          <a:noFill/>
-        </p:spPr>
+            <a:ext cx="4206240" cy="1554480"/>
+          </a:xfrm>
+          <a:prstGeom prst="roundRect">
+            <a:avLst>
+              <a:gd name="adj" fmla="val 7000"/>
+            </a:avLst>
+          </a:prstGeom>
+          <a:solidFill>
+            <a:srgbClr val="FCE8E6"/>
+          </a:solidFill>
+          <a:ln>
+            <a:noFill/>
+          </a:ln>
+          <a:effectLst/>
+        </p:spPr>
+        <p:style>
+          <a:lnRef idx="1">
+            <a:schemeClr val="accent1"/>
+          </a:lnRef>
+          <a:fillRef idx="3">
+            <a:schemeClr val="accent1"/>
+          </a:fillRef>
+          <a:effectRef idx="2">
+            <a:schemeClr val="accent1"/>
+          </a:effectRef>
+          <a:fontRef idx="minor">
+            <a:schemeClr val="lt1"/>
+          </a:fontRef>
+        </p:style>
         <p:txBody>
-          <a:bodyPr wrap="square"/>
+          <a:bodyPr rtlCol="0" anchor="t" wrap="square" lIns="146304" rIns="146304" tIns="501091" bIns="87782"/>
           <a:lstStyle/>
           <a:p>
             <a:pPr algn="l">
-              <a:spcBef>
-                <a:spcPts val="0"/>
-              </a:spcBef>
-              <a:spcAft>
-                <a:spcPts val="800"/>
+              <a:spcAft>
+                <a:spcPts val="400"/>
               </a:spcAft>
             </a:pPr>
             <a:r>
               <a:rPr sz="1400" b="0" i="0">
                 <a:solidFill>
                   <a:srgbClr val="1F1F1F"/>
+                </a:solidFill>
+                <a:latin typeface="Google Sans Flex SemiBold"/>
+                <a:ea typeface="Google Sans Flex SemiBold"/>
+                <a:cs typeface="Google Sans Flex SemiBold"/>
+                <a:sym typeface="Google Sans Flex SemiBold"/>
+              </a:rPr>
+              <a:t>Slowest step</a:t>
+            </a:r>
+          </a:p>
+          <a:p>
+            <a:pPr algn="l">
+              <a:spcAft>
+                <a:spcPts val="0"/>
+              </a:spcAft>
+            </a:pPr>
+            <a:r>
+              <a:rPr sz="1250" b="0" i="0">
+                <a:solidFill>
+                  <a:srgbClr val="3C4043"/>
                 </a:solidFill>
                 <a:latin typeface="Google Sans Flex"/>
                 <a:ea typeface="Google Sans Flex"/>
                 <a:cs typeface="Google Sans Flex"/>
                 <a:sym typeface="Google Sans Flex"/>
               </a:rPr>
-              <a:t>A chapter-length run finishes. Filming the slides is the slow step.</a:t>
-            </a:r>
-          </a:p>
+              <a:t>Filming the slides in Chrome takes the longest.</a:t>
+            </a:r>
+          </a:p>
+        </p:txBody>
+      </p:sp>
+      <p:sp>
+        <p:nvSpPr>
+          <p:cNvPr id="145" name="Oval 144"/>
+          <p:cNvSpPr/>
+          <p:nvPr/>
+        </p:nvSpPr>
+        <p:spPr>
+          <a:xfrm>
+            <a:off x="438912" y="1474012"/>
+            <a:ext cx="292608" cy="292608"/>
+          </a:xfrm>
+          <a:prstGeom prst="ellipse">
+            <a:avLst/>
+          </a:prstGeom>
+          <a:solidFill>
+            <a:srgbClr val="EA4335"/>
+          </a:solidFill>
+          <a:ln>
+            <a:noFill/>
+          </a:ln>
+          <a:effectLst/>
+        </p:spPr>
+        <p:style>
+          <a:lnRef idx="1">
+            <a:schemeClr val="accent1"/>
+          </a:lnRef>
+          <a:fillRef idx="3">
+            <a:schemeClr val="accent1"/>
+          </a:fillRef>
+          <a:effectRef idx="2">
+            <a:schemeClr val="accent1"/>
+          </a:effectRef>
+          <a:fontRef idx="minor">
+            <a:schemeClr val="lt1"/>
+          </a:fontRef>
+        </p:style>
+        <p:txBody>
+          <a:bodyPr rtlCol="0" anchor="ctr" lIns="0" rIns="0" tIns="0" bIns="0"/>
+          <a:lstStyle/>
+          <a:p>
+            <a:pPr algn="ctr"/>
+            <a:r>
+              <a:rPr sz="1200" b="0" i="0">
+                <a:solidFill>
+                  <a:srgbClr val="FFFFFF"/>
+                </a:solidFill>
+                <a:latin typeface="Google Sans Flex SemiBold"/>
+                <a:ea typeface="Google Sans Flex SemiBold"/>
+                <a:cs typeface="Google Sans Flex SemiBold"/>
+                <a:sym typeface="Google Sans Flex SemiBold"/>
+              </a:rPr>
+              <a:t>1</a:t>
+            </a:r>
+          </a:p>
+        </p:txBody>
+      </p:sp>
+      <p:sp>
+        <p:nvSpPr>
+          <p:cNvPr id="146" name="Rounded Rectangle 145"/>
+          <p:cNvSpPr/>
+          <p:nvPr/>
+        </p:nvSpPr>
+        <p:spPr>
+          <a:xfrm>
+            <a:off x="4645152" y="1371600"/>
+            <a:ext cx="4206240" cy="1554480"/>
+          </a:xfrm>
+          <a:prstGeom prst="roundRect">
+            <a:avLst>
+              <a:gd name="adj" fmla="val 7000"/>
+            </a:avLst>
+          </a:prstGeom>
+          <a:solidFill>
+            <a:srgbClr val="E8F0FE"/>
+          </a:solidFill>
+          <a:ln>
+            <a:noFill/>
+          </a:ln>
+          <a:effectLst/>
+        </p:spPr>
+        <p:style>
+          <a:lnRef idx="1">
+            <a:schemeClr val="accent1"/>
+          </a:lnRef>
+          <a:fillRef idx="3">
+            <a:schemeClr val="accent1"/>
+          </a:fillRef>
+          <a:effectRef idx="2">
+            <a:schemeClr val="accent1"/>
+          </a:effectRef>
+          <a:fontRef idx="minor">
+            <a:schemeClr val="lt1"/>
+          </a:fontRef>
+        </p:style>
+        <p:txBody>
+          <a:bodyPr rtlCol="0" anchor="t" wrap="square" lIns="146304" rIns="146304" tIns="501091" bIns="87782"/>
+          <a:lstStyle/>
           <a:p>
             <a:pPr algn="l">
-              <a:spcBef>
-                <a:spcPts val="0"/>
-              </a:spcBef>
-              <a:spcAft>
-                <a:spcPts val="800"/>
+              <a:spcAft>
+                <a:spcPts val="400"/>
               </a:spcAft>
             </a:pPr>
             <a:r>
               <a:rPr sz="1400" b="0" i="0">
                 <a:solidFill>
                   <a:srgbClr val="1F1F1F"/>
+                </a:solidFill>
+                <a:latin typeface="Google Sans Flex SemiBold"/>
+                <a:ea typeface="Google Sans Flex SemiBold"/>
+                <a:cs typeface="Google Sans Flex SemiBold"/>
+                <a:sym typeface="Google Sans Flex SemiBold"/>
+              </a:rPr>
+              <a:t>Run side by side</a:t>
+            </a:r>
+          </a:p>
+          <a:p>
+            <a:pPr algn="l">
+              <a:spcAft>
+                <a:spcPts val="0"/>
+              </a:spcAft>
+            </a:pPr>
+            <a:r>
+              <a:rPr sz="1250" b="0" i="0">
+                <a:solidFill>
+                  <a:srgbClr val="3C4043"/>
                 </a:solidFill>
                 <a:latin typeface="Google Sans Flex"/>
                 <a:ea typeface="Google Sans Flex"/>
                 <a:cs typeface="Google Sans Flex"/>
                 <a:sym typeface="Google Sans Flex"/>
               </a:rPr>
-              <a:t>We have not published a benchmark table. Each job does record how long its own steps took.</a:t>
+              <a:t>Slide writing and voice clips go out a few at a time, not one by one.</a:t>
+            </a:r>
+          </a:p>
+        </p:txBody>
+      </p:sp>
+      <p:sp>
+        <p:nvSpPr>
+          <p:cNvPr id="147" name="Oval 146"/>
+          <p:cNvSpPr/>
+          <p:nvPr/>
+        </p:nvSpPr>
+        <p:spPr>
+          <a:xfrm>
+            <a:off x="4791456" y="1474012"/>
+            <a:ext cx="292608" cy="292608"/>
+          </a:xfrm>
+          <a:prstGeom prst="ellipse">
+            <a:avLst/>
+          </a:prstGeom>
+          <a:solidFill>
+            <a:srgbClr val="4285F4"/>
+          </a:solidFill>
+          <a:ln>
+            <a:noFill/>
+          </a:ln>
+          <a:effectLst/>
+        </p:spPr>
+        <p:style>
+          <a:lnRef idx="1">
+            <a:schemeClr val="accent1"/>
+          </a:lnRef>
+          <a:fillRef idx="3">
+            <a:schemeClr val="accent1"/>
+          </a:fillRef>
+          <a:effectRef idx="2">
+            <a:schemeClr val="accent1"/>
+          </a:effectRef>
+          <a:fontRef idx="minor">
+            <a:schemeClr val="lt1"/>
+          </a:fontRef>
+        </p:style>
+        <p:txBody>
+          <a:bodyPr rtlCol="0" anchor="ctr" lIns="0" rIns="0" tIns="0" bIns="0"/>
+          <a:lstStyle/>
+          <a:p>
+            <a:pPr algn="ctr"/>
+            <a:r>
+              <a:rPr sz="1200" b="0" i="0">
+                <a:solidFill>
+                  <a:srgbClr val="FFFFFF"/>
+                </a:solidFill>
+                <a:latin typeface="Google Sans Flex SemiBold"/>
+                <a:ea typeface="Google Sans Flex SemiBold"/>
+                <a:cs typeface="Google Sans Flex SemiBold"/>
+                <a:sym typeface="Google Sans Flex SemiBold"/>
+              </a:rPr>
+              <a:t>2</a:t>
+            </a:r>
+          </a:p>
+        </p:txBody>
+      </p:sp>
+      <p:sp>
+        <p:nvSpPr>
+          <p:cNvPr id="148" name="Rounded Rectangle 147"/>
+          <p:cNvSpPr/>
+          <p:nvPr/>
+        </p:nvSpPr>
+        <p:spPr>
+          <a:xfrm>
+            <a:off x="292608" y="3063240"/>
+            <a:ext cx="4206240" cy="1554480"/>
+          </a:xfrm>
+          <a:prstGeom prst="roundRect">
+            <a:avLst>
+              <a:gd name="adj" fmla="val 7000"/>
+            </a:avLst>
+          </a:prstGeom>
+          <a:solidFill>
+            <a:srgbClr val="E6F4EA"/>
+          </a:solidFill>
+          <a:ln>
+            <a:noFill/>
+          </a:ln>
+          <a:effectLst/>
+        </p:spPr>
+        <p:style>
+          <a:lnRef idx="1">
+            <a:schemeClr val="accent1"/>
+          </a:lnRef>
+          <a:fillRef idx="3">
+            <a:schemeClr val="accent1"/>
+          </a:fillRef>
+          <a:effectRef idx="2">
+            <a:schemeClr val="accent1"/>
+          </a:effectRef>
+          <a:fontRef idx="minor">
+            <a:schemeClr val="lt1"/>
+          </a:fontRef>
+        </p:style>
+        <p:txBody>
+          <a:bodyPr rtlCol="0" anchor="t" wrap="square" lIns="146304" rIns="146304" tIns="501091" bIns="87782"/>
+          <a:lstStyle/>
+          <a:p>
+            <a:pPr algn="l">
+              <a:spcAft>
+                <a:spcPts val="400"/>
+              </a:spcAft>
+            </a:pPr>
+            <a:r>
+              <a:rPr sz="1400" b="0" i="0">
+                <a:solidFill>
+                  <a:srgbClr val="1F1F1F"/>
+                </a:solidFill>
+                <a:latin typeface="Google Sans Flex SemiBold"/>
+                <a:ea typeface="Google Sans Flex SemiBold"/>
+                <a:cs typeface="Google Sans Flex SemiBold"/>
+                <a:sym typeface="Google Sans Flex SemiBold"/>
+              </a:rPr>
+              <a:t>Fit at run time</a:t>
+            </a:r>
+          </a:p>
+          <a:p>
+            <a:pPr algn="l">
+              <a:spcAft>
+                <a:spcPts val="0"/>
+              </a:spcAft>
+            </a:pPr>
+            <a:r>
+              <a:rPr sz="1250" b="0" i="0">
+                <a:solidFill>
+                  <a:srgbClr val="3C4043"/>
+                </a:solidFill>
+                <a:latin typeface="Google Sans Flex"/>
+                <a:ea typeface="Google Sans Flex"/>
+                <a:cs typeface="Google Sans Flex"/>
+                <a:sym typeface="Google Sans Flex"/>
+              </a:rPr>
+              <a:t>Each slide measures itself and takes the biggest type that still fits, so nothing clips.</a:t>
+            </a:r>
+          </a:p>
+        </p:txBody>
+      </p:sp>
+      <p:sp>
+        <p:nvSpPr>
+          <p:cNvPr id="149" name="Oval 148"/>
+          <p:cNvSpPr/>
+          <p:nvPr/>
+        </p:nvSpPr>
+        <p:spPr>
+          <a:xfrm>
+            <a:off x="438912" y="3165652"/>
+            <a:ext cx="292608" cy="292608"/>
+          </a:xfrm>
+          <a:prstGeom prst="ellipse">
+            <a:avLst/>
+          </a:prstGeom>
+          <a:solidFill>
+            <a:srgbClr val="1E8E3E"/>
+          </a:solidFill>
+          <a:ln>
+            <a:noFill/>
+          </a:ln>
+          <a:effectLst/>
+        </p:spPr>
+        <p:style>
+          <a:lnRef idx="1">
+            <a:schemeClr val="accent1"/>
+          </a:lnRef>
+          <a:fillRef idx="3">
+            <a:schemeClr val="accent1"/>
+          </a:fillRef>
+          <a:effectRef idx="2">
+            <a:schemeClr val="accent1"/>
+          </a:effectRef>
+          <a:fontRef idx="minor">
+            <a:schemeClr val="lt1"/>
+          </a:fontRef>
+        </p:style>
+        <p:txBody>
+          <a:bodyPr rtlCol="0" anchor="ctr" lIns="0" rIns="0" tIns="0" bIns="0"/>
+          <a:lstStyle/>
+          <a:p>
+            <a:pPr algn="ctr"/>
+            <a:r>
+              <a:rPr sz="1200" b="0" i="0">
+                <a:solidFill>
+                  <a:srgbClr val="FFFFFF"/>
+                </a:solidFill>
+                <a:latin typeface="Google Sans Flex SemiBold"/>
+                <a:ea typeface="Google Sans Flex SemiBold"/>
+                <a:cs typeface="Google Sans Flex SemiBold"/>
+                <a:sym typeface="Google Sans Flex SemiBold"/>
+              </a:rPr>
+              <a:t>3</a:t>
+            </a:r>
+          </a:p>
+        </p:txBody>
+      </p:sp>
+      <p:sp>
+        <p:nvSpPr>
+          <p:cNvPr id="150" name="Rounded Rectangle 149"/>
+          <p:cNvSpPr/>
+          <p:nvPr/>
+        </p:nvSpPr>
+        <p:spPr>
+          <a:xfrm>
+            <a:off x="4645152" y="3063240"/>
+            <a:ext cx="4206240" cy="1554480"/>
+          </a:xfrm>
+          <a:prstGeom prst="roundRect">
+            <a:avLst>
+              <a:gd name="adj" fmla="val 7000"/>
+            </a:avLst>
+          </a:prstGeom>
+          <a:solidFill>
+            <a:srgbClr val="FEF7E0"/>
+          </a:solidFill>
+          <a:ln>
+            <a:noFill/>
+          </a:ln>
+          <a:effectLst/>
+        </p:spPr>
+        <p:style>
+          <a:lnRef idx="1">
+            <a:schemeClr val="accent1"/>
+          </a:lnRef>
+          <a:fillRef idx="3">
+            <a:schemeClr val="accent1"/>
+          </a:fillRef>
+          <a:effectRef idx="2">
+            <a:schemeClr val="accent1"/>
+          </a:effectRef>
+          <a:fontRef idx="minor">
+            <a:schemeClr val="lt1"/>
+          </a:fontRef>
+        </p:style>
+        <p:txBody>
+          <a:bodyPr rtlCol="0" anchor="t" wrap="square" lIns="146304" rIns="146304" tIns="501091" bIns="87782"/>
+          <a:lstStyle/>
+          <a:p>
+            <a:pPr algn="l">
+              <a:spcAft>
+                <a:spcPts val="400"/>
+              </a:spcAft>
+            </a:pPr>
+            <a:r>
+              <a:rPr sz="1400" b="0" i="0">
+                <a:solidFill>
+                  <a:srgbClr val="1F1F1F"/>
+                </a:solidFill>
+                <a:latin typeface="Google Sans Flex SemiBold"/>
+                <a:ea typeface="Google Sans Flex SemiBold"/>
+                <a:cs typeface="Google Sans Flex SemiBold"/>
+                <a:sym typeface="Google Sans Flex SemiBold"/>
+              </a:rPr>
+              <a:t>Honest status</a:t>
+            </a:r>
+          </a:p>
+          <a:p>
+            <a:pPr algn="l">
+              <a:spcAft>
+                <a:spcPts val="0"/>
+              </a:spcAft>
+            </a:pPr>
+            <a:r>
+              <a:rPr sz="1250" b="0" i="0">
+                <a:solidFill>
+                  <a:srgbClr val="3C4043"/>
+                </a:solidFill>
+                <a:latin typeface="Google Sans Flex"/>
+                <a:ea typeface="Google Sans Flex"/>
+                <a:cs typeface="Google Sans Flex"/>
+                <a:sym typeface="Google Sans Flex"/>
+              </a:rPr>
+              <a:t>Sample decks checked in 16:9, 9:16 and square. A full MP4 on the new looks is still to confirm.</a:t>
+            </a:r>
+          </a:p>
+        </p:txBody>
+      </p:sp>
+      <p:sp>
+        <p:nvSpPr>
+          <p:cNvPr id="151" name="Oval 150"/>
+          <p:cNvSpPr/>
+          <p:nvPr/>
+        </p:nvSpPr>
+        <p:spPr>
+          <a:xfrm>
+            <a:off x="4791456" y="3165652"/>
+            <a:ext cx="292608" cy="292608"/>
+          </a:xfrm>
+          <a:prstGeom prst="ellipse">
+            <a:avLst/>
+          </a:prstGeom>
+          <a:solidFill>
+            <a:srgbClr val="F9AB00"/>
+          </a:solidFill>
+          <a:ln>
+            <a:noFill/>
+          </a:ln>
+          <a:effectLst/>
+        </p:spPr>
+        <p:style>
+          <a:lnRef idx="1">
+            <a:schemeClr val="accent1"/>
+          </a:lnRef>
+          <a:fillRef idx="3">
+            <a:schemeClr val="accent1"/>
+          </a:fillRef>
+          <a:effectRef idx="2">
+            <a:schemeClr val="accent1"/>
+          </a:effectRef>
+          <a:fontRef idx="minor">
+            <a:schemeClr val="lt1"/>
+          </a:fontRef>
+        </p:style>
+        <p:txBody>
+          <a:bodyPr rtlCol="0" anchor="ctr" lIns="0" rIns="0" tIns="0" bIns="0"/>
+          <a:lstStyle/>
+          <a:p>
+            <a:pPr algn="ctr"/>
+            <a:r>
+              <a:rPr sz="1200" b="0" i="0">
+                <a:solidFill>
+                  <a:srgbClr val="FFFFFF"/>
+                </a:solidFill>
+                <a:latin typeface="Google Sans Flex SemiBold"/>
+                <a:ea typeface="Google Sans Flex SemiBold"/>
+                <a:cs typeface="Google Sans Flex SemiBold"/>
+                <a:sym typeface="Google Sans Flex SemiBold"/>
+              </a:rPr>
+              <a:t>4</a:t>
             </a:r>
           </a:p>
         </p:txBody>
@@ -8275,65 +8757,548 @@
       </p:sp>
       <p:sp>
         <p:nvSpPr>
-          <p:cNvPr id="152" name="TextBox 151"/>
-          <p:cNvSpPr txBox="1"/>
+          <p:cNvPr id="152" name="Rounded Rectangle 151"/>
+          <p:cNvSpPr/>
           <p:nvPr/>
         </p:nvSpPr>
         <p:spPr>
           <a:xfrm>
             <a:off x="292608" y="1371600"/>
-            <a:ext cx="8549640" cy="3520440"/>
-          </a:xfrm>
-          <a:prstGeom prst="rect">
-            <a:avLst/>
-          </a:prstGeom>
-          <a:noFill/>
-        </p:spPr>
+            <a:ext cx="4206240" cy="1554480"/>
+          </a:xfrm>
+          <a:prstGeom prst="roundRect">
+            <a:avLst>
+              <a:gd name="adj" fmla="val 7000"/>
+            </a:avLst>
+          </a:prstGeom>
+          <a:solidFill>
+            <a:srgbClr val="E6F4EA"/>
+          </a:solidFill>
+          <a:ln>
+            <a:noFill/>
+          </a:ln>
+          <a:effectLst/>
+        </p:spPr>
+        <p:style>
+          <a:lnRef idx="1">
+            <a:schemeClr val="accent1"/>
+          </a:lnRef>
+          <a:fillRef idx="3">
+            <a:schemeClr val="accent1"/>
+          </a:fillRef>
+          <a:effectRef idx="2">
+            <a:schemeClr val="accent1"/>
+          </a:effectRef>
+          <a:fontRef idx="minor">
+            <a:schemeClr val="lt1"/>
+          </a:fontRef>
+        </p:style>
         <p:txBody>
-          <a:bodyPr wrap="square"/>
+          <a:bodyPr rtlCol="0" anchor="t" wrap="square" lIns="146304" rIns="146304" tIns="501091" bIns="87782"/>
           <a:lstStyle/>
           <a:p>
             <a:pPr algn="l">
-              <a:spcBef>
-                <a:spcPts val="0"/>
-              </a:spcBef>
-              <a:spcAft>
-                <a:spcPts val="800"/>
+              <a:spcAft>
+                <a:spcPts val="400"/>
               </a:spcAft>
             </a:pPr>
             <a:r>
               <a:rPr sz="1400" b="0" i="0">
                 <a:solidFill>
                   <a:srgbClr val="1F1F1F"/>
+                </a:solidFill>
+                <a:latin typeface="Google Sans Flex SemiBold"/>
+                <a:ea typeface="Google Sans Flex SemiBold"/>
+                <a:cs typeface="Google Sans Flex SemiBold"/>
+                <a:sym typeface="Google Sans Flex SemiBold"/>
+              </a:rPr>
+              <a:t>Built: six unique looks</a:t>
+            </a:r>
+          </a:p>
+          <a:p>
+            <a:pPr algn="l">
+              <a:spcAft>
+                <a:spcPts val="0"/>
+              </a:spcAft>
+            </a:pPr>
+            <a:r>
+              <a:rPr sz="1250" b="0" i="0">
+                <a:solidFill>
+                  <a:srgbClr val="3C4043"/>
                 </a:solidFill>
                 <a:latin typeface="Google Sans Flex"/>
                 <a:ea typeface="Google Sans Flex"/>
                 <a:cs typeface="Google Sans Flex"/>
                 <a:sym typeface="Google Sans Flex"/>
               </a:rPr>
-              <a:t>Next: handwritten teaching slides, and Manim-style motion when the chapter has a formula.</a:t>
-            </a:r>
-          </a:p>
+              <a:t>Whiteboard, notebook, poster, editorial, broadcast and bento. Structure, font and motion differ, not only colour.</a:t>
+            </a:r>
+          </a:p>
+        </p:txBody>
+      </p:sp>
+      <p:sp>
+        <p:nvSpPr>
+          <p:cNvPr id="153" name="Oval 152"/>
+          <p:cNvSpPr/>
+          <p:nvPr/>
+        </p:nvSpPr>
+        <p:spPr>
+          <a:xfrm>
+            <a:off x="438912" y="1474012"/>
+            <a:ext cx="292608" cy="292608"/>
+          </a:xfrm>
+          <a:prstGeom prst="ellipse">
+            <a:avLst/>
+          </a:prstGeom>
+          <a:solidFill>
+            <a:srgbClr val="1E8E3E"/>
+          </a:solidFill>
+          <a:ln>
+            <a:noFill/>
+          </a:ln>
+          <a:effectLst/>
+        </p:spPr>
+        <p:style>
+          <a:lnRef idx="1">
+            <a:schemeClr val="accent1"/>
+          </a:lnRef>
+          <a:fillRef idx="3">
+            <a:schemeClr val="accent1"/>
+          </a:fillRef>
+          <a:effectRef idx="2">
+            <a:schemeClr val="accent1"/>
+          </a:effectRef>
+          <a:fontRef idx="minor">
+            <a:schemeClr val="lt1"/>
+          </a:fontRef>
+        </p:style>
+        <p:txBody>
+          <a:bodyPr rtlCol="0" anchor="ctr" lIns="0" rIns="0" tIns="0" bIns="0"/>
+          <a:lstStyle/>
+          <a:p>
+            <a:pPr algn="ctr"/>
+            <a:r>
+              <a:rPr sz="1200" b="0" i="0">
+                <a:solidFill>
+                  <a:srgbClr val="FFFFFF"/>
+                </a:solidFill>
+                <a:latin typeface="Google Sans Flex SemiBold"/>
+                <a:ea typeface="Google Sans Flex SemiBold"/>
+                <a:cs typeface="Google Sans Flex SemiBold"/>
+                <a:sym typeface="Google Sans Flex SemiBold"/>
+              </a:rPr>
+              <a:t>1</a:t>
+            </a:r>
+          </a:p>
+        </p:txBody>
+      </p:sp>
+      <p:sp>
+        <p:nvSpPr>
+          <p:cNvPr id="154" name="Rounded Rectangle 153"/>
+          <p:cNvSpPr/>
+          <p:nvPr/>
+        </p:nvSpPr>
+        <p:spPr>
+          <a:xfrm>
+            <a:off x="4645152" y="1371600"/>
+            <a:ext cx="4206240" cy="1554480"/>
+          </a:xfrm>
+          <a:prstGeom prst="roundRect">
+            <a:avLst>
+              <a:gd name="adj" fmla="val 7000"/>
+            </a:avLst>
+          </a:prstGeom>
+          <a:solidFill>
+            <a:srgbClr val="E6F4EA"/>
+          </a:solidFill>
+          <a:ln>
+            <a:noFill/>
+          </a:ln>
+          <a:effectLst/>
+        </p:spPr>
+        <p:style>
+          <a:lnRef idx="1">
+            <a:schemeClr val="accent1"/>
+          </a:lnRef>
+          <a:fillRef idx="3">
+            <a:schemeClr val="accent1"/>
+          </a:fillRef>
+          <a:effectRef idx="2">
+            <a:schemeClr val="accent1"/>
+          </a:effectRef>
+          <a:fontRef idx="minor">
+            <a:schemeClr val="lt1"/>
+          </a:fontRef>
+        </p:style>
+        <p:txBody>
+          <a:bodyPr rtlCol="0" anchor="t" wrap="square" lIns="146304" rIns="146304" tIns="501091" bIns="87782"/>
+          <a:lstStyle/>
           <a:p>
             <a:pPr algn="l">
-              <a:spcBef>
-                <a:spcPts val="0"/>
-              </a:spcBef>
-              <a:spcAft>
-                <a:spcPts val="800"/>
+              <a:spcAft>
+                <a:spcPts val="400"/>
               </a:spcAft>
             </a:pPr>
             <a:r>
               <a:rPr sz="1400" b="0" i="0">
                 <a:solidFill>
                   <a:srgbClr val="1F1F1F"/>
+                </a:solidFill>
+                <a:latin typeface="Google Sans Flex SemiBold"/>
+                <a:ea typeface="Google Sans Flex SemiBold"/>
+                <a:cs typeface="Google Sans Flex SemiBold"/>
+                <a:sym typeface="Google Sans Flex SemiBold"/>
+              </a:rPr>
+              <a:t>Built: hand-drawn motion</a:t>
+            </a:r>
+          </a:p>
+          <a:p>
+            <a:pPr algn="l">
+              <a:spcAft>
+                <a:spcPts val="0"/>
+              </a:spcAft>
+            </a:pPr>
+            <a:r>
+              <a:rPr sz="1250" b="0" i="0">
+                <a:solidFill>
+                  <a:srgbClr val="3C4043"/>
                 </a:solidFill>
                 <a:latin typeface="Google Sans Flex"/>
                 <a:ea typeface="Google Sans Flex"/>
                 <a:cs typeface="Google Sans Flex"/>
                 <a:sym typeface="Google Sans Flex"/>
               </a:rPr>
-              <a:t>After that, a few YouTuber looks you can pick, or make your own.</a:t>
+              <a:t>Underlines and doodles draw themselves, and a marker sweeps under the point being explained.</a:t>
+            </a:r>
+          </a:p>
+        </p:txBody>
+      </p:sp>
+      <p:sp>
+        <p:nvSpPr>
+          <p:cNvPr id="155" name="Oval 154"/>
+          <p:cNvSpPr/>
+          <p:nvPr/>
+        </p:nvSpPr>
+        <p:spPr>
+          <a:xfrm>
+            <a:off x="4791456" y="1474012"/>
+            <a:ext cx="292608" cy="292608"/>
+          </a:xfrm>
+          <a:prstGeom prst="ellipse">
+            <a:avLst/>
+          </a:prstGeom>
+          <a:solidFill>
+            <a:srgbClr val="1E8E3E"/>
+          </a:solidFill>
+          <a:ln>
+            <a:noFill/>
+          </a:ln>
+          <a:effectLst/>
+        </p:spPr>
+        <p:style>
+          <a:lnRef idx="1">
+            <a:schemeClr val="accent1"/>
+          </a:lnRef>
+          <a:fillRef idx="3">
+            <a:schemeClr val="accent1"/>
+          </a:fillRef>
+          <a:effectRef idx="2">
+            <a:schemeClr val="accent1"/>
+          </a:effectRef>
+          <a:fontRef idx="minor">
+            <a:schemeClr val="lt1"/>
+          </a:fontRef>
+        </p:style>
+        <p:txBody>
+          <a:bodyPr rtlCol="0" anchor="ctr" lIns="0" rIns="0" tIns="0" bIns="0"/>
+          <a:lstStyle/>
+          <a:p>
+            <a:pPr algn="ctr"/>
+            <a:r>
+              <a:rPr sz="1200" b="0" i="0">
+                <a:solidFill>
+                  <a:srgbClr val="FFFFFF"/>
+                </a:solidFill>
+                <a:latin typeface="Google Sans Flex SemiBold"/>
+                <a:ea typeface="Google Sans Flex SemiBold"/>
+                <a:cs typeface="Google Sans Flex SemiBold"/>
+                <a:sym typeface="Google Sans Flex SemiBold"/>
+              </a:rPr>
+              <a:t>2</a:t>
+            </a:r>
+          </a:p>
+        </p:txBody>
+      </p:sp>
+      <p:sp>
+        <p:nvSpPr>
+          <p:cNvPr id="156" name="Rounded Rectangle 155"/>
+          <p:cNvSpPr/>
+          <p:nvPr/>
+        </p:nvSpPr>
+        <p:spPr>
+          <a:xfrm>
+            <a:off x="292608" y="3063240"/>
+            <a:ext cx="4206240" cy="1554480"/>
+          </a:xfrm>
+          <a:prstGeom prst="roundRect">
+            <a:avLst>
+              <a:gd name="adj" fmla="val 7000"/>
+            </a:avLst>
+          </a:prstGeom>
+          <a:solidFill>
+            <a:srgbClr val="E8F0FE"/>
+          </a:solidFill>
+          <a:ln>
+            <a:noFill/>
+          </a:ln>
+          <a:effectLst/>
+        </p:spPr>
+        <p:style>
+          <a:lnRef idx="1">
+            <a:schemeClr val="accent1"/>
+          </a:lnRef>
+          <a:fillRef idx="3">
+            <a:schemeClr val="accent1"/>
+          </a:fillRef>
+          <a:effectRef idx="2">
+            <a:schemeClr val="accent1"/>
+          </a:effectRef>
+          <a:fontRef idx="minor">
+            <a:schemeClr val="lt1"/>
+          </a:fontRef>
+        </p:style>
+        <p:txBody>
+          <a:bodyPr rtlCol="0" anchor="t" wrap="square" lIns="146304" rIns="146304" tIns="501091" bIns="87782"/>
+          <a:lstStyle/>
+          <a:p>
+            <a:pPr algn="l">
+              <a:spcAft>
+                <a:spcPts val="400"/>
+              </a:spcAft>
+            </a:pPr>
+            <a:r>
+              <a:rPr sz="1400" b="0" i="0">
+                <a:solidFill>
+                  <a:srgbClr val="1F1F1F"/>
+                </a:solidFill>
+                <a:latin typeface="Google Sans Flex SemiBold"/>
+                <a:ea typeface="Google Sans Flex SemiBold"/>
+                <a:cs typeface="Google Sans Flex SemiBold"/>
+                <a:sym typeface="Google Sans Flex SemiBold"/>
+              </a:rPr>
+              <a:t>Next: Manim-style motion</a:t>
+            </a:r>
+          </a:p>
+          <a:p>
+            <a:pPr algn="l">
+              <a:spcAft>
+                <a:spcPts val="0"/>
+              </a:spcAft>
+            </a:pPr>
+            <a:r>
+              <a:rPr sz="1250" b="0" i="0">
+                <a:solidFill>
+                  <a:srgbClr val="3C4043"/>
+                </a:solidFill>
+                <a:latin typeface="Google Sans Flex"/>
+                <a:ea typeface="Google Sans Flex"/>
+                <a:cs typeface="Google Sans Flex"/>
+                <a:sym typeface="Google Sans Flex"/>
+              </a:rPr>
+              <a:t>Animated formulas and graphs when the chapter has maths.</a:t>
+            </a:r>
+          </a:p>
+        </p:txBody>
+      </p:sp>
+      <p:sp>
+        <p:nvSpPr>
+          <p:cNvPr id="157" name="Oval 156"/>
+          <p:cNvSpPr/>
+          <p:nvPr/>
+        </p:nvSpPr>
+        <p:spPr>
+          <a:xfrm>
+            <a:off x="438912" y="3165652"/>
+            <a:ext cx="292608" cy="292608"/>
+          </a:xfrm>
+          <a:prstGeom prst="ellipse">
+            <a:avLst/>
+          </a:prstGeom>
+          <a:solidFill>
+            <a:srgbClr val="4285F4"/>
+          </a:solidFill>
+          <a:ln>
+            <a:noFill/>
+          </a:ln>
+          <a:effectLst/>
+        </p:spPr>
+        <p:style>
+          <a:lnRef idx="1">
+            <a:schemeClr val="accent1"/>
+          </a:lnRef>
+          <a:fillRef idx="3">
+            <a:schemeClr val="accent1"/>
+          </a:fillRef>
+          <a:effectRef idx="2">
+            <a:schemeClr val="accent1"/>
+          </a:effectRef>
+          <a:fontRef idx="minor">
+            <a:schemeClr val="lt1"/>
+          </a:fontRef>
+        </p:style>
+        <p:txBody>
+          <a:bodyPr rtlCol="0" anchor="ctr" lIns="0" rIns="0" tIns="0" bIns="0"/>
+          <a:lstStyle/>
+          <a:p>
+            <a:pPr algn="ctr"/>
+            <a:r>
+              <a:rPr sz="1200" b="0" i="0">
+                <a:solidFill>
+                  <a:srgbClr val="FFFFFF"/>
+                </a:solidFill>
+                <a:latin typeface="Google Sans Flex SemiBold"/>
+                <a:ea typeface="Google Sans Flex SemiBold"/>
+                <a:cs typeface="Google Sans Flex SemiBold"/>
+                <a:sym typeface="Google Sans Flex SemiBold"/>
+              </a:rPr>
+              <a:t>3</a:t>
+            </a:r>
+          </a:p>
+        </p:txBody>
+      </p:sp>
+      <p:sp>
+        <p:nvSpPr>
+          <p:cNvPr id="158" name="Rounded Rectangle 157"/>
+          <p:cNvSpPr/>
+          <p:nvPr/>
+        </p:nvSpPr>
+        <p:spPr>
+          <a:xfrm>
+            <a:off x="4645152" y="3063240"/>
+            <a:ext cx="4206240" cy="1554480"/>
+          </a:xfrm>
+          <a:prstGeom prst="roundRect">
+            <a:avLst>
+              <a:gd name="adj" fmla="val 7000"/>
+            </a:avLst>
+          </a:prstGeom>
+          <a:solidFill>
+            <a:srgbClr val="FCE8E6"/>
+          </a:solidFill>
+          <a:ln>
+            <a:noFill/>
+          </a:ln>
+          <a:effectLst/>
+        </p:spPr>
+        <p:style>
+          <a:lnRef idx="1">
+            <a:schemeClr val="accent1"/>
+          </a:lnRef>
+          <a:fillRef idx="3">
+            <a:schemeClr val="accent1"/>
+          </a:fillRef>
+          <a:effectRef idx="2">
+            <a:schemeClr val="accent1"/>
+          </a:effectRef>
+          <a:fontRef idx="minor">
+            <a:schemeClr val="lt1"/>
+          </a:fontRef>
+        </p:style>
+        <p:txBody>
+          <a:bodyPr rtlCol="0" anchor="t" wrap="square" lIns="146304" rIns="146304" tIns="501091" bIns="87782"/>
+          <a:lstStyle/>
+          <a:p>
+            <a:pPr algn="l">
+              <a:spcAft>
+                <a:spcPts val="400"/>
+              </a:spcAft>
+            </a:pPr>
+            <a:r>
+              <a:rPr sz="1400" b="0" i="0">
+                <a:solidFill>
+                  <a:srgbClr val="1F1F1F"/>
+                </a:solidFill>
+                <a:latin typeface="Google Sans Flex SemiBold"/>
+                <a:ea typeface="Google Sans Flex SemiBold"/>
+                <a:cs typeface="Google Sans Flex SemiBold"/>
+                <a:sym typeface="Google Sans Flex SemiBold"/>
+              </a:rPr>
+              <a:t>Next: questions mid-video</a:t>
+            </a:r>
+          </a:p>
+          <a:p>
+            <a:pPr algn="l">
+              <a:spcAft>
+                <a:spcPts val="0"/>
+              </a:spcAft>
+            </a:pPr>
+            <a:r>
+              <a:rPr sz="1250" b="0" i="0">
+                <a:solidFill>
+                  <a:srgbClr val="3C4043"/>
+                </a:solidFill>
+                <a:latin typeface="Google Sans Flex"/>
+                <a:ea typeface="Google Sans Flex"/>
+                <a:cs typeface="Google Sans Flex"/>
+                <a:sym typeface="Google Sans Flex"/>
+              </a:rPr>
+              <a:t>A pause with a question after each section, so students answer instead of only watching.</a:t>
+            </a:r>
+          </a:p>
+        </p:txBody>
+      </p:sp>
+      <p:sp>
+        <p:nvSpPr>
+          <p:cNvPr id="159" name="Oval 158"/>
+          <p:cNvSpPr/>
+          <p:nvPr/>
+        </p:nvSpPr>
+        <p:spPr>
+          <a:xfrm>
+            <a:off x="4791456" y="3165652"/>
+            <a:ext cx="292608" cy="292608"/>
+          </a:xfrm>
+          <a:prstGeom prst="ellipse">
+            <a:avLst/>
+          </a:prstGeom>
+          <a:solidFill>
+            <a:srgbClr val="EA4335"/>
+          </a:solidFill>
+          <a:ln>
+            <a:noFill/>
+          </a:ln>
+          <a:effectLst/>
+        </p:spPr>
+        <p:style>
+          <a:lnRef idx="1">
+            <a:schemeClr val="accent1"/>
+          </a:lnRef>
+          <a:fillRef idx="3">
+            <a:schemeClr val="accent1"/>
+          </a:fillRef>
+          <a:effectRef idx="2">
+            <a:schemeClr val="accent1"/>
+          </a:effectRef>
+          <a:fontRef idx="minor">
+            <a:schemeClr val="lt1"/>
+          </a:fontRef>
+        </p:style>
+        <p:txBody>
+          <a:bodyPr rtlCol="0" anchor="ctr" lIns="0" rIns="0" tIns="0" bIns="0"/>
+          <a:lstStyle/>
+          <a:p>
+            <a:pPr algn="ctr"/>
+            <a:r>
+              <a:rPr sz="1200" b="0" i="0">
+                <a:solidFill>
+                  <a:srgbClr val="FFFFFF"/>
+                </a:solidFill>
+                <a:latin typeface="Google Sans Flex SemiBold"/>
+                <a:ea typeface="Google Sans Flex SemiBold"/>
+                <a:cs typeface="Google Sans Flex SemiBold"/>
+                <a:sym typeface="Google Sans Flex SemiBold"/>
+              </a:rPr>
+              <a:t>4</a:t>
             </a:r>
           </a:p>
         </p:txBody>
@@ -8560,6 +9525,26 @@
             </a:endParaRPr>
           </a:p>
           <a:p>
+            <a:pPr algn="l">
+              <a:spcAft>
+                <a:spcPts val="600"/>
+              </a:spcAft>
+            </a:pPr>
+            <a:r>
+              <a:rPr sz="1300" b="0" i="0">
+                <a:solidFill>
+                  <a:srgbClr val="4285F4"/>
+                </a:solidFill>
+                <a:latin typeface="Google Sans Flex"/>
+                <a:ea typeface="Google Sans Flex"/>
+                <a:cs typeface="Google Sans Flex"/>
+                <a:sym typeface="Google Sans Flex"/>
+                <a:hlinkClick r:id="rId5"/>
+              </a:rPr>
+              <a:t>https://github.com/saitej123/Gemini-Multimodal-Studio</a:t>
+            </a:r>
+          </a:p>
+          <a:p>
             <a:pPr indent="-317500" lvl="0" marL="457200" rtl="0" algn="l">
               <a:spcBef>
                 <a:spcPts val="0"/>
@@ -8588,6 +9573,25 @@
             </a:endParaRPr>
           </a:p>
           <a:p>
+            <a:pPr algn="l">
+              <a:spcAft>
+                <a:spcPts val="600"/>
+              </a:spcAft>
+            </a:pPr>
+            <a:r>
+              <a:rPr sz="1300" b="0" i="0">
+                <a:solidFill>
+                  <a:srgbClr val="5F6368"/>
+                </a:solidFill>
+                <a:latin typeface="Google Sans Flex"/>
+                <a:ea typeface="Google Sans Flex"/>
+                <a:cs typeface="Google Sans Flex"/>
+                <a:sym typeface="Google Sans Flex"/>
+              </a:rPr>
+              <a:t>Still to record: 3 to 4 minutes, one real file.</a:t>
+            </a:r>
+          </a:p>
+          <a:p>
             <a:pPr indent="-317500" lvl="0" marL="457200" rtl="0" algn="l">
               <a:spcBef>
                 <a:spcPts val="0"/>
@@ -8616,6 +9620,26 @@
             </a:endParaRPr>
           </a:p>
           <a:p>
+            <a:pPr algn="l">
+              <a:spcAft>
+                <a:spcPts val="600"/>
+              </a:spcAft>
+            </a:pPr>
+            <a:r>
+              <a:rPr sz="1300" b="0" i="0">
+                <a:solidFill>
+                  <a:srgbClr val="4285F4"/>
+                </a:solidFill>
+                <a:latin typeface="Google Sans Flex"/>
+                <a:ea typeface="Google Sans Flex"/>
+                <a:cs typeface="Google Sans Flex"/>
+                <a:sym typeface="Google Sans Flex"/>
+                <a:hlinkClick r:id="rId6"/>
+              </a:rPr>
+              <a:t>https://multimodal-studio-469528918286.us-central1.run.app</a:t>
+            </a:r>
+          </a:p>
+          <a:p>
             <a:pPr indent="0" lvl="0" marL="0" rtl="0" algn="l">
               <a:spcBef>
                 <a:spcPts val="0"/>
@@ -8634,72 +9658,6 @@
               <a:cs typeface="Google Sans Flex Medium"/>
               <a:sym typeface="Google Sans Flex Medium"/>
             </a:endParaRPr>
-          </a:p>
-          <a:p>
-            <a:pPr algn="l">
-              <a:spcBef>
-                <a:spcPts val="800"/>
-              </a:spcBef>
-              <a:spcAft>
-                <a:spcPts val="0"/>
-              </a:spcAft>
-            </a:pPr>
-            <a:r>
-              <a:rPr sz="1300" b="0" i="0">
-                <a:solidFill>
-                  <a:srgbClr val="1F1F1F"/>
-                </a:solidFill>
-                <a:latin typeface="Google Sans Flex"/>
-                <a:ea typeface="Google Sans Flex"/>
-                <a:cs typeface="Google Sans Flex"/>
-                <a:sym typeface="Google Sans Flex"/>
-              </a:rPr>
-              <a:t>GitHub: https://github.com/saitej123/Gemini-Multimodal-Studio</a:t>
-            </a:r>
-          </a:p>
-          <a:p>
-            <a:pPr algn="l">
-              <a:spcBef>
-                <a:spcPts val="800"/>
-              </a:spcBef>
-              <a:spcAft>
-                <a:spcPts val="0"/>
-              </a:spcAft>
-            </a:pPr>
-            <a:r>
-              <a:rPr sz="1300" b="0" i="0">
-                <a:solidFill>
-                  <a:srgbClr val="1F1F1F"/>
-                </a:solidFill>
-                <a:latin typeface="Google Sans Flex"/>
-                <a:ea typeface="Google Sans Flex"/>
-                <a:cs typeface="Google Sans Flex"/>
-                <a:sym typeface="Google Sans Flex"/>
-              </a:rPr>
-              <a:t>Demo video: still to record (3 to 4 minutes, one real file).</a:t>
-            </a:r>
-          </a:p>
-          <a:p>
-            <a:pPr algn="l">
-              <a:spcBef>
-                <a:spcPts val="800"/>
-              </a:spcBef>
-              <a:spcAft>
-                <a:spcPts val="0"/>
-              </a:spcAft>
-            </a:pPr>
-            <a:r>
-              <a:rPr sz="1300" b="0" i="0">
-                <a:solidFill>
-                  <a:srgbClr val="1F1F1F"/>
-                </a:solidFill>
-                <a:latin typeface="Google Sans Flex"/>
-                <a:ea typeface="Google Sans Flex"/>
-                <a:cs typeface="Google Sans Flex"/>
-                <a:sym typeface="Google Sans Flex"/>
-              </a:rPr>
-              <a:t>Product: https://multimodal-studio-469528918286.us-central1.run.app</a:t>
-            </a:r>
           </a:p>
         </p:txBody>
       </p:sp>
@@ -9319,8 +10277,8 @@
         </p:nvSpPr>
         <p:spPr>
           <a:xfrm>
-            <a:off x="292608" y="1371600"/>
-            <a:ext cx="8549640" cy="3520440"/>
+            <a:off x="292608" y="1298448"/>
+            <a:ext cx="8558784" cy="822960"/>
           </a:xfrm>
           <a:prstGeom prst="rect">
             <a:avLst/>
@@ -9328,72 +10286,504 @@
           <a:noFill/>
         </p:spPr>
         <p:txBody>
-          <a:bodyPr wrap="square"/>
+          <a:bodyPr wrap="square" lIns="0" rIns="0" tIns="0" bIns="0"/>
           <a:lstStyle/>
           <a:p>
-            <a:pPr algn="l">
-              <a:spcBef>
-                <a:spcPts val="0"/>
-              </a:spcBef>
-              <a:spcAft>
-                <a:spcPts val="800"/>
-              </a:spcAft>
-            </a:pPr>
-            <a:r>
-              <a:rPr sz="1400" b="0" i="0">
+            <a:pPr algn="l"/>
+            <a:r>
+              <a:rPr sz="2600" b="0" i="0">
                 <a:solidFill>
                   <a:srgbClr val="1F1F1F"/>
+                </a:solidFill>
+                <a:latin typeface="Google Sans Flex SemiBold"/>
+                <a:ea typeface="Google Sans Flex SemiBold"/>
+                <a:cs typeface="Google Sans Flex SemiBold"/>
+                <a:sym typeface="Google Sans Flex SemiBold"/>
+              </a:rPr>
+              <a:t>Drop a chapter. Get a lesson students keep watching.</a:t>
+            </a:r>
+          </a:p>
+        </p:txBody>
+      </p:sp>
+      <p:sp>
+        <p:nvSpPr>
+          <p:cNvPr id="73" name="TextBox 72"/>
+          <p:cNvSpPr txBox="1"/>
+          <p:nvPr/>
+        </p:nvSpPr>
+        <p:spPr>
+          <a:xfrm>
+            <a:off x="292608" y="1938528"/>
+            <a:ext cx="8558784" cy="457200"/>
+          </a:xfrm>
+          <a:prstGeom prst="rect">
+            <a:avLst/>
+          </a:prstGeom>
+          <a:noFill/>
+        </p:spPr>
+        <p:txBody>
+          <a:bodyPr wrap="square" lIns="0" rIns="0" tIns="0" bIns="0"/>
+          <a:lstStyle/>
+          <a:p>
+            <a:pPr algn="l"/>
+            <a:r>
+              <a:rPr sz="1300" b="0" i="0">
+                <a:solidFill>
+                  <a:srgbClr val="5F6368"/>
                 </a:solidFill>
                 <a:latin typeface="Google Sans Flex"/>
                 <a:ea typeface="Google Sans Flex"/>
                 <a:cs typeface="Google Sans Flex"/>
                 <a:sym typeface="Google Sans Flex"/>
               </a:rPr>
-              <a:t>M Sai Teja leads and built this.</a:t>
-            </a:r>
-          </a:p>
+              <a:t>Six real looks, hand-drawn motion, and a highlight that follows the voice. It plays like a teacher at the board, not a deck read aloud.</a:t>
+            </a:r>
+          </a:p>
+        </p:txBody>
+      </p:sp>
+      <p:sp>
+        <p:nvSpPr>
+          <p:cNvPr id="74" name="Rounded Rectangle 73"/>
+          <p:cNvSpPr/>
+          <p:nvPr/>
+        </p:nvSpPr>
+        <p:spPr>
+          <a:xfrm>
+            <a:off x="292608" y="2542032"/>
+            <a:ext cx="2779776" cy="1783080"/>
+          </a:xfrm>
+          <a:prstGeom prst="roundRect">
+            <a:avLst>
+              <a:gd name="adj" fmla="val 7000"/>
+            </a:avLst>
+          </a:prstGeom>
+          <a:solidFill>
+            <a:srgbClr val="E8F0FE"/>
+          </a:solidFill>
+          <a:ln>
+            <a:noFill/>
+          </a:ln>
+          <a:effectLst/>
+        </p:spPr>
+        <p:style>
+          <a:lnRef idx="1">
+            <a:schemeClr val="accent1"/>
+          </a:lnRef>
+          <a:fillRef idx="3">
+            <a:schemeClr val="accent1"/>
+          </a:fillRef>
+          <a:effectRef idx="2">
+            <a:schemeClr val="accent1"/>
+          </a:effectRef>
+          <a:fontRef idx="minor">
+            <a:schemeClr val="lt1"/>
+          </a:fontRef>
+        </p:style>
+        <p:txBody>
+          <a:bodyPr rtlCol="0" anchor="t" wrap="square" lIns="146304" rIns="146304" tIns="501091" bIns="87782"/>
+          <a:lstStyle/>
           <a:p>
             <a:pPr algn="l">
-              <a:spcBef>
-                <a:spcPts val="0"/>
-              </a:spcBef>
-              <a:spcAft>
-                <a:spcPts val="800"/>
+              <a:spcAft>
+                <a:spcPts val="400"/>
               </a:spcAft>
             </a:pPr>
             <a:r>
-              <a:rPr sz="1400" b="0" i="0">
+              <a:rPr sz="1500" b="0" i="0">
                 <a:solidFill>
                   <a:srgbClr val="1F1F1F"/>
+                </a:solidFill>
+                <a:latin typeface="Google Sans Flex SemiBold"/>
+                <a:ea typeface="Google Sans Flex SemiBold"/>
+                <a:cs typeface="Google Sans Flex SemiBold"/>
+                <a:sym typeface="Google Sans Flex SemiBold"/>
+              </a:rPr>
+              <a:t>You give</a:t>
+            </a:r>
+          </a:p>
+          <a:p>
+            <a:pPr algn="l">
+              <a:spcAft>
+                <a:spcPts val="0"/>
+              </a:spcAft>
+            </a:pPr>
+            <a:r>
+              <a:rPr sz="1200" b="0" i="0">
+                <a:solidFill>
+                  <a:srgbClr val="3C4043"/>
                 </a:solidFill>
                 <a:latin typeface="Google Sans Flex"/>
                 <a:ea typeface="Google Sans Flex"/>
                 <a:cs typeface="Google Sans Flex"/>
                 <a:sym typeface="Google Sans Flex"/>
               </a:rPr>
-              <a:t>You drop a chapter or a set of notes. You get a short video a class can replay. Gemini writes the slides. Gemini 3.8 Live speaks them.</a:t>
-            </a:r>
-          </a:p>
+              <a:t>A PDF, a few notes, or just a topic. Pick the class age, the video shape and a look.</a:t>
+            </a:r>
+          </a:p>
+        </p:txBody>
+      </p:sp>
+      <p:sp>
+        <p:nvSpPr>
+          <p:cNvPr id="75" name="Oval 74"/>
+          <p:cNvSpPr/>
+          <p:nvPr/>
+        </p:nvSpPr>
+        <p:spPr>
+          <a:xfrm>
+            <a:off x="438912" y="2644444"/>
+            <a:ext cx="292608" cy="292608"/>
+          </a:xfrm>
+          <a:prstGeom prst="ellipse">
+            <a:avLst/>
+          </a:prstGeom>
+          <a:solidFill>
+            <a:srgbClr val="4285F4"/>
+          </a:solidFill>
+          <a:ln>
+            <a:noFill/>
+          </a:ln>
+          <a:effectLst/>
+        </p:spPr>
+        <p:style>
+          <a:lnRef idx="1">
+            <a:schemeClr val="accent1"/>
+          </a:lnRef>
+          <a:fillRef idx="3">
+            <a:schemeClr val="accent1"/>
+          </a:fillRef>
+          <a:effectRef idx="2">
+            <a:schemeClr val="accent1"/>
+          </a:effectRef>
+          <a:fontRef idx="minor">
+            <a:schemeClr val="lt1"/>
+          </a:fontRef>
+        </p:style>
+        <p:txBody>
+          <a:bodyPr rtlCol="0" anchor="ctr" lIns="0" rIns="0" tIns="0" bIns="0"/>
+          <a:lstStyle/>
+          <a:p>
+            <a:pPr algn="ctr"/>
+            <a:r>
+              <a:rPr sz="1200" b="0" i="0">
+                <a:solidFill>
+                  <a:srgbClr val="FFFFFF"/>
+                </a:solidFill>
+                <a:latin typeface="Google Sans Flex SemiBold"/>
+                <a:ea typeface="Google Sans Flex SemiBold"/>
+                <a:cs typeface="Google Sans Flex SemiBold"/>
+                <a:sym typeface="Google Sans Flex SemiBold"/>
+              </a:rPr>
+              <a:t>1</a:t>
+            </a:r>
+          </a:p>
+        </p:txBody>
+      </p:sp>
+      <p:sp>
+        <p:nvSpPr>
+          <p:cNvPr id="76" name="Rounded Rectangle 75"/>
+          <p:cNvSpPr/>
+          <p:nvPr/>
+        </p:nvSpPr>
+        <p:spPr>
+          <a:xfrm>
+            <a:off x="3182112" y="2542032"/>
+            <a:ext cx="2779776" cy="1783080"/>
+          </a:xfrm>
+          <a:prstGeom prst="roundRect">
+            <a:avLst>
+              <a:gd name="adj" fmla="val 7000"/>
+            </a:avLst>
+          </a:prstGeom>
+          <a:solidFill>
+            <a:srgbClr val="FCE8E6"/>
+          </a:solidFill>
+          <a:ln>
+            <a:noFill/>
+          </a:ln>
+          <a:effectLst/>
+        </p:spPr>
+        <p:style>
+          <a:lnRef idx="1">
+            <a:schemeClr val="accent1"/>
+          </a:lnRef>
+          <a:fillRef idx="3">
+            <a:schemeClr val="accent1"/>
+          </a:fillRef>
+          <a:effectRef idx="2">
+            <a:schemeClr val="accent1"/>
+          </a:effectRef>
+          <a:fontRef idx="minor">
+            <a:schemeClr val="lt1"/>
+          </a:fontRef>
+        </p:style>
+        <p:txBody>
+          <a:bodyPr rtlCol="0" anchor="t" wrap="square" lIns="146304" rIns="146304" tIns="501091" bIns="87782"/>
+          <a:lstStyle/>
           <a:p>
             <a:pPr algn="l">
-              <a:spcBef>
-                <a:spcPts val="0"/>
-              </a:spcBef>
-              <a:spcAft>
-                <a:spcPts val="800"/>
+              <a:spcAft>
+                <a:spcPts val="400"/>
               </a:spcAft>
             </a:pPr>
             <a:r>
-              <a:rPr sz="1400" b="0" i="0">
+              <a:rPr sz="1500" b="0" i="0">
                 <a:solidFill>
                   <a:srgbClr val="1F1F1F"/>
+                </a:solidFill>
+                <a:latin typeface="Google Sans Flex SemiBold"/>
+                <a:ea typeface="Google Sans Flex SemiBold"/>
+                <a:cs typeface="Google Sans Flex SemiBold"/>
+                <a:sym typeface="Google Sans Flex SemiBold"/>
+              </a:rPr>
+              <a:t>Studio does</a:t>
+            </a:r>
+          </a:p>
+          <a:p>
+            <a:pPr algn="l">
+              <a:spcAft>
+                <a:spcPts val="0"/>
+              </a:spcAft>
+            </a:pPr>
+            <a:r>
+              <a:rPr sz="1200" b="0" i="0">
+                <a:solidFill>
+                  <a:srgbClr val="3C4043"/>
                 </a:solidFill>
                 <a:latin typeface="Google Sans Flex"/>
                 <a:ea typeface="Google Sans Flex"/>
                 <a:cs typeface="Google Sans Flex"/>
                 <a:sym typeface="Google Sans Flex"/>
               </a:rPr>
-              <a:t>The highlight moves with the sentence, so it feels like someone explaining, not a page being read out.</a:t>
+              <a:t>Writes short slides sized to the content, speaks each one, draws the strokes on and films it all.</a:t>
+            </a:r>
+          </a:p>
+        </p:txBody>
+      </p:sp>
+      <p:sp>
+        <p:nvSpPr>
+          <p:cNvPr id="77" name="Oval 76"/>
+          <p:cNvSpPr/>
+          <p:nvPr/>
+        </p:nvSpPr>
+        <p:spPr>
+          <a:xfrm>
+            <a:off x="3328416" y="2644444"/>
+            <a:ext cx="292608" cy="292608"/>
+          </a:xfrm>
+          <a:prstGeom prst="ellipse">
+            <a:avLst/>
+          </a:prstGeom>
+          <a:solidFill>
+            <a:srgbClr val="EA4335"/>
+          </a:solidFill>
+          <a:ln>
+            <a:noFill/>
+          </a:ln>
+          <a:effectLst/>
+        </p:spPr>
+        <p:style>
+          <a:lnRef idx="1">
+            <a:schemeClr val="accent1"/>
+          </a:lnRef>
+          <a:fillRef idx="3">
+            <a:schemeClr val="accent1"/>
+          </a:fillRef>
+          <a:effectRef idx="2">
+            <a:schemeClr val="accent1"/>
+          </a:effectRef>
+          <a:fontRef idx="minor">
+            <a:schemeClr val="lt1"/>
+          </a:fontRef>
+        </p:style>
+        <p:txBody>
+          <a:bodyPr rtlCol="0" anchor="ctr" lIns="0" rIns="0" tIns="0" bIns="0"/>
+          <a:lstStyle/>
+          <a:p>
+            <a:pPr algn="ctr"/>
+            <a:r>
+              <a:rPr sz="1200" b="0" i="0">
+                <a:solidFill>
+                  <a:srgbClr val="FFFFFF"/>
+                </a:solidFill>
+                <a:latin typeface="Google Sans Flex SemiBold"/>
+                <a:ea typeface="Google Sans Flex SemiBold"/>
+                <a:cs typeface="Google Sans Flex SemiBold"/>
+                <a:sym typeface="Google Sans Flex SemiBold"/>
+              </a:rPr>
+              <a:t>2</a:t>
+            </a:r>
+          </a:p>
+        </p:txBody>
+      </p:sp>
+      <p:sp>
+        <p:nvSpPr>
+          <p:cNvPr id="78" name="Rounded Rectangle 77"/>
+          <p:cNvSpPr/>
+          <p:nvPr/>
+        </p:nvSpPr>
+        <p:spPr>
+          <a:xfrm>
+            <a:off x="6071616" y="2542032"/>
+            <a:ext cx="2779776" cy="1783080"/>
+          </a:xfrm>
+          <a:prstGeom prst="roundRect">
+            <a:avLst>
+              <a:gd name="adj" fmla="val 7000"/>
+            </a:avLst>
+          </a:prstGeom>
+          <a:solidFill>
+            <a:srgbClr val="E6F4EA"/>
+          </a:solidFill>
+          <a:ln>
+            <a:noFill/>
+          </a:ln>
+          <a:effectLst/>
+        </p:spPr>
+        <p:style>
+          <a:lnRef idx="1">
+            <a:schemeClr val="accent1"/>
+          </a:lnRef>
+          <a:fillRef idx="3">
+            <a:schemeClr val="accent1"/>
+          </a:fillRef>
+          <a:effectRef idx="2">
+            <a:schemeClr val="accent1"/>
+          </a:effectRef>
+          <a:fontRef idx="minor">
+            <a:schemeClr val="lt1"/>
+          </a:fontRef>
+        </p:style>
+        <p:txBody>
+          <a:bodyPr rtlCol="0" anchor="t" wrap="square" lIns="146304" rIns="146304" tIns="501091" bIns="87782"/>
+          <a:lstStyle/>
+          <a:p>
+            <a:pPr algn="l">
+              <a:spcAft>
+                <a:spcPts val="400"/>
+              </a:spcAft>
+            </a:pPr>
+            <a:r>
+              <a:rPr sz="1500" b="0" i="0">
+                <a:solidFill>
+                  <a:srgbClr val="1F1F1F"/>
+                </a:solidFill>
+                <a:latin typeface="Google Sans Flex SemiBold"/>
+                <a:ea typeface="Google Sans Flex SemiBold"/>
+                <a:cs typeface="Google Sans Flex SemiBold"/>
+                <a:sym typeface="Google Sans Flex SemiBold"/>
+              </a:rPr>
+              <a:t>Class gets</a:t>
+            </a:r>
+          </a:p>
+          <a:p>
+            <a:pPr algn="l">
+              <a:spcAft>
+                <a:spcPts val="0"/>
+              </a:spcAft>
+            </a:pPr>
+            <a:r>
+              <a:rPr sz="1200" b="0" i="0">
+                <a:solidFill>
+                  <a:srgbClr val="3C4043"/>
+                </a:solidFill>
+                <a:latin typeface="Google Sans Flex"/>
+                <a:ea typeface="Google Sans Flex"/>
+                <a:cs typeface="Google Sans Flex"/>
+                <a:sym typeface="Google Sans Flex"/>
+              </a:rPr>
+              <a:t>A short MP4 for YouTube, a Short or a Reel. Replay it, share it, no recording by the teacher.</a:t>
+            </a:r>
+          </a:p>
+        </p:txBody>
+      </p:sp>
+      <p:sp>
+        <p:nvSpPr>
+          <p:cNvPr id="79" name="Oval 78"/>
+          <p:cNvSpPr/>
+          <p:nvPr/>
+        </p:nvSpPr>
+        <p:spPr>
+          <a:xfrm>
+            <a:off x="6217920" y="2644444"/>
+            <a:ext cx="292608" cy="292608"/>
+          </a:xfrm>
+          <a:prstGeom prst="ellipse">
+            <a:avLst/>
+          </a:prstGeom>
+          <a:solidFill>
+            <a:srgbClr val="1E8E3E"/>
+          </a:solidFill>
+          <a:ln>
+            <a:noFill/>
+          </a:ln>
+          <a:effectLst/>
+        </p:spPr>
+        <p:style>
+          <a:lnRef idx="1">
+            <a:schemeClr val="accent1"/>
+          </a:lnRef>
+          <a:fillRef idx="3">
+            <a:schemeClr val="accent1"/>
+          </a:fillRef>
+          <a:effectRef idx="2">
+            <a:schemeClr val="accent1"/>
+          </a:effectRef>
+          <a:fontRef idx="minor">
+            <a:schemeClr val="lt1"/>
+          </a:fontRef>
+        </p:style>
+        <p:txBody>
+          <a:bodyPr rtlCol="0" anchor="ctr" lIns="0" rIns="0" tIns="0" bIns="0"/>
+          <a:lstStyle/>
+          <a:p>
+            <a:pPr algn="ctr"/>
+            <a:r>
+              <a:rPr sz="1200" b="0" i="0">
+                <a:solidFill>
+                  <a:srgbClr val="FFFFFF"/>
+                </a:solidFill>
+                <a:latin typeface="Google Sans Flex SemiBold"/>
+                <a:ea typeface="Google Sans Flex SemiBold"/>
+                <a:cs typeface="Google Sans Flex SemiBold"/>
+                <a:sym typeface="Google Sans Flex SemiBold"/>
+              </a:rPr>
+              <a:t>3</a:t>
+            </a:r>
+          </a:p>
+        </p:txBody>
+      </p:sp>
+      <p:sp>
+        <p:nvSpPr>
+          <p:cNvPr id="80" name="TextBox 79"/>
+          <p:cNvSpPr txBox="1"/>
+          <p:nvPr/>
+        </p:nvSpPr>
+        <p:spPr>
+          <a:xfrm>
+            <a:off x="292608" y="4498848"/>
+            <a:ext cx="8558784" cy="274320"/>
+          </a:xfrm>
+          <a:prstGeom prst="rect">
+            <a:avLst/>
+          </a:prstGeom>
+          <a:noFill/>
+        </p:spPr>
+        <p:txBody>
+          <a:bodyPr wrap="square" lIns="0" rIns="0" tIns="0" bIns="0"/>
+          <a:lstStyle/>
+          <a:p>
+            <a:pPr algn="l"/>
+            <a:r>
+              <a:rPr sz="1100" b="0" i="0">
+                <a:solidFill>
+                  <a:srgbClr val="5F6368"/>
+                </a:solidFill>
+                <a:latin typeface="Google Sans Flex"/>
+                <a:ea typeface="Google Sans Flex"/>
+                <a:cs typeface="Google Sans Flex"/>
+                <a:sym typeface="Google Sans Flex"/>
+              </a:rPr>
+              <a:t>Built by M Sai Teja (team leader) with Anil Kumar.</a:t>
             </a:r>
           </a:p>
         </p:txBody>
@@ -9707,30 +11097,49 @@
       </p:sp>
       <p:sp>
         <p:nvSpPr>
-          <p:cNvPr id="80" name="TextBox 79"/>
-          <p:cNvSpPr txBox="1"/>
+          <p:cNvPr id="80" name="Rounded Rectangle 79"/>
+          <p:cNvSpPr/>
           <p:nvPr/>
         </p:nvSpPr>
         <p:spPr>
           <a:xfrm>
-            <a:off x="292608" y="2121408"/>
-            <a:ext cx="8549640" cy="2788920"/>
-          </a:xfrm>
-          <a:prstGeom prst="rect">
-            <a:avLst/>
-          </a:prstGeom>
-          <a:noFill/>
-        </p:spPr>
+            <a:off x="292608" y="2240280"/>
+            <a:ext cx="2779776" cy="2514600"/>
+          </a:xfrm>
+          <a:prstGeom prst="roundRect">
+            <a:avLst>
+              <a:gd name="adj" fmla="val 7000"/>
+            </a:avLst>
+          </a:prstGeom>
+          <a:solidFill>
+            <a:srgbClr val="E8F0FE"/>
+          </a:solidFill>
+          <a:ln>
+            <a:noFill/>
+          </a:ln>
+          <a:effectLst/>
+        </p:spPr>
+        <p:style>
+          <a:lnRef idx="1">
+            <a:schemeClr val="accent1"/>
+          </a:lnRef>
+          <a:fillRef idx="3">
+            <a:schemeClr val="accent1"/>
+          </a:fillRef>
+          <a:effectRef idx="2">
+            <a:schemeClr val="accent1"/>
+          </a:effectRef>
+          <a:fontRef idx="minor">
+            <a:schemeClr val="lt1"/>
+          </a:fontRef>
+        </p:style>
         <p:txBody>
-          <a:bodyPr wrap="square"/>
+          <a:bodyPr rtlCol="0" anchor="t" wrap="square" lIns="146304" rIns="146304" tIns="501091" bIns="87782"/>
           <a:lstStyle/>
           <a:p>
             <a:pPr algn="l">
-              <a:spcBef>
-                <a:spcPts val="0"/>
-              </a:spcBef>
-              <a:spcAft>
-                <a:spcPts val="800"/>
+              <a:spcAft>
+                <a:spcPts val="400"/>
               </a:spcAft>
             </a:pPr>
             <a:r>
@@ -9748,33 +11157,126 @@
           </a:p>
           <a:p>
             <a:pPr algn="l">
-              <a:spcBef>
-                <a:spcPts val="0"/>
-              </a:spcBef>
-              <a:spcAft>
-                <a:spcPts val="800"/>
+              <a:spcAft>
+                <a:spcPts val="0"/>
               </a:spcAft>
             </a:pPr>
             <a:r>
-              <a:rPr sz="1300" b="0" i="0">
+              <a:rPr sz="1200" b="0" i="0">
                 <a:solidFill>
-                  <a:srgbClr val="1F1F1F"/>
+                  <a:srgbClr val="3C4043"/>
                 </a:solidFill>
                 <a:latin typeface="Google Sans Flex"/>
                 <a:ea typeface="Google Sans Flex"/>
                 <a:cs typeface="Google Sans Flex"/>
                 <a:sym typeface="Google Sans Flex"/>
               </a:rPr>
-              <a:t>Slide tools stop at the deck. Read-aloud tools ignore the picture. Neither gives a class a video.</a:t>
-            </a:r>
-          </a:p>
+              <a:t>Slide tools stop at the deck. Read-aloud tools ignore the picture. Neither gives a class a finished video that looks made for the lesson.</a:t>
+            </a:r>
+          </a:p>
+        </p:txBody>
+      </p:sp>
+      <p:sp>
+        <p:nvSpPr>
+          <p:cNvPr id="81" name="Oval 80"/>
+          <p:cNvSpPr/>
+          <p:nvPr/>
+        </p:nvSpPr>
+        <p:spPr>
+          <a:xfrm>
+            <a:off x="438912" y="2342692"/>
+            <a:ext cx="292608" cy="292608"/>
+          </a:xfrm>
+          <a:prstGeom prst="ellipse">
+            <a:avLst/>
+          </a:prstGeom>
+          <a:solidFill>
+            <a:srgbClr val="4285F4"/>
+          </a:solidFill>
+          <a:ln>
+            <a:noFill/>
+          </a:ln>
+          <a:effectLst/>
+        </p:spPr>
+        <p:style>
+          <a:lnRef idx="1">
+            <a:schemeClr val="accent1"/>
+          </a:lnRef>
+          <a:fillRef idx="3">
+            <a:schemeClr val="accent1"/>
+          </a:fillRef>
+          <a:effectRef idx="2">
+            <a:schemeClr val="accent1"/>
+          </a:effectRef>
+          <a:fontRef idx="minor">
+            <a:schemeClr val="lt1"/>
+          </a:fontRef>
+        </p:style>
+        <p:txBody>
+          <a:bodyPr rtlCol="0" anchor="ctr" lIns="0" rIns="0" tIns="0" bIns="0"/>
+          <a:lstStyle/>
+          <a:p>
+            <a:pPr algn="ctr"/>
+            <a:r>
+              <a:rPr sz="1200" b="0" i="0">
+                <a:solidFill>
+                  <a:srgbClr val="FFFFFF"/>
+                </a:solidFill>
+                <a:latin typeface="Google Sans Flex SemiBold"/>
+                <a:ea typeface="Google Sans Flex SemiBold"/>
+                <a:cs typeface="Google Sans Flex SemiBold"/>
+                <a:sym typeface="Google Sans Flex SemiBold"/>
+              </a:rPr>
+              <a:t>1</a:t>
+            </a:r>
+          </a:p>
+        </p:txBody>
+      </p:sp>
+      <p:sp>
+        <p:nvSpPr>
+          <p:cNvPr id="82" name="Rounded Rectangle 81"/>
+          <p:cNvSpPr/>
+          <p:nvPr/>
+        </p:nvSpPr>
+        <p:spPr>
+          <a:xfrm>
+            <a:off x="3182112" y="2240280"/>
+            <a:ext cx="2779776" cy="2514600"/>
+          </a:xfrm>
+          <a:prstGeom prst="roundRect">
+            <a:avLst>
+              <a:gd name="adj" fmla="val 7000"/>
+            </a:avLst>
+          </a:prstGeom>
+          <a:solidFill>
+            <a:srgbClr val="FCE8E6"/>
+          </a:solidFill>
+          <a:ln>
+            <a:noFill/>
+          </a:ln>
+          <a:effectLst/>
+        </p:spPr>
+        <p:style>
+          <a:lnRef idx="1">
+            <a:schemeClr val="accent1"/>
+          </a:lnRef>
+          <a:fillRef idx="3">
+            <a:schemeClr val="accent1"/>
+          </a:fillRef>
+          <a:effectRef idx="2">
+            <a:schemeClr val="accent1"/>
+          </a:effectRef>
+          <a:fontRef idx="minor">
+            <a:schemeClr val="lt1"/>
+          </a:fontRef>
+        </p:style>
+        <p:txBody>
+          <a:bodyPr rtlCol="0" anchor="t" wrap="square" lIns="146304" rIns="146304" tIns="501091" bIns="87782"/>
+          <a:lstStyle/>
           <a:p>
             <a:pPr algn="l">
-              <a:spcBef>
-                <a:spcPts val="0"/>
-              </a:spcBef>
-              <a:spcAft>
-                <a:spcPts val="800"/>
+              <a:spcAft>
+                <a:spcPts val="400"/>
               </a:spcAft>
             </a:pPr>
             <a:r>
@@ -9787,38 +11289,131 @@
                 <a:cs typeface="Google Sans Flex SemiBold"/>
                 <a:sym typeface="Google Sans Flex SemiBold"/>
               </a:rPr>
-              <a:t>How it solves the problem</a:t>
+              <a:t>How it fixes ed-tech drop-off</a:t>
             </a:r>
           </a:p>
           <a:p>
             <a:pPr algn="l">
-              <a:spcBef>
-                <a:spcPts val="0"/>
-              </a:spcBef>
-              <a:spcAft>
-                <a:spcPts val="800"/>
+              <a:spcAft>
+                <a:spcPts val="0"/>
               </a:spcAft>
             </a:pPr>
             <a:r>
-              <a:rPr sz="1300" b="0" i="0">
+              <a:rPr sz="1200" b="0" i="0">
                 <a:solidFill>
-                  <a:srgbClr val="1F1F1F"/>
+                  <a:srgbClr val="3C4043"/>
                 </a:solidFill>
                 <a:latin typeface="Google Sans Flex"/>
                 <a:ea typeface="Google Sans Flex"/>
                 <a:cs typeface="Google Sans Flex"/>
                 <a:sym typeface="Google Sans Flex"/>
               </a:rPr>
-              <a:t>One file goes in. A video comes out. The teacher does not record, and does not line the voice up by hand.</a:t>
-            </a:r>
-          </a:p>
+              <a:t>Students leave static decks and flat read-alouds. Here the look changes with the lesson, the screen moves with the voice, and the pen draws as it explains.</a:t>
+            </a:r>
+          </a:p>
+        </p:txBody>
+      </p:sp>
+      <p:sp>
+        <p:nvSpPr>
+          <p:cNvPr id="83" name="Oval 82"/>
+          <p:cNvSpPr/>
+          <p:nvPr/>
+        </p:nvSpPr>
+        <p:spPr>
+          <a:xfrm>
+            <a:off x="3328416" y="2342692"/>
+            <a:ext cx="292608" cy="292608"/>
+          </a:xfrm>
+          <a:prstGeom prst="ellipse">
+            <a:avLst/>
+          </a:prstGeom>
+          <a:solidFill>
+            <a:srgbClr val="EA4335"/>
+          </a:solidFill>
+          <a:ln>
+            <a:noFill/>
+          </a:ln>
+          <a:effectLst/>
+        </p:spPr>
+        <p:style>
+          <a:lnRef idx="1">
+            <a:schemeClr val="accent1"/>
+          </a:lnRef>
+          <a:fillRef idx="3">
+            <a:schemeClr val="accent1"/>
+          </a:fillRef>
+          <a:effectRef idx="2">
+            <a:schemeClr val="accent1"/>
+          </a:effectRef>
+          <a:fontRef idx="minor">
+            <a:schemeClr val="lt1"/>
+          </a:fontRef>
+        </p:style>
+        <p:txBody>
+          <a:bodyPr rtlCol="0" anchor="ctr" lIns="0" rIns="0" tIns="0" bIns="0"/>
+          <a:lstStyle/>
+          <a:p>
+            <a:pPr algn="ctr"/>
+            <a:r>
+              <a:rPr sz="1200" b="0" i="0">
+                <a:solidFill>
+                  <a:srgbClr val="FFFFFF"/>
+                </a:solidFill>
+                <a:latin typeface="Google Sans Flex SemiBold"/>
+                <a:ea typeface="Google Sans Flex SemiBold"/>
+                <a:cs typeface="Google Sans Flex SemiBold"/>
+                <a:sym typeface="Google Sans Flex SemiBold"/>
+              </a:rPr>
+              <a:t>2</a:t>
+            </a:r>
+          </a:p>
+        </p:txBody>
+      </p:sp>
+      <p:sp>
+        <p:nvSpPr>
+          <p:cNvPr id="84" name="Rounded Rectangle 83"/>
+          <p:cNvSpPr/>
+          <p:nvPr/>
+        </p:nvSpPr>
+        <p:spPr>
+          <a:xfrm>
+            <a:off x="6071616" y="2240280"/>
+            <a:ext cx="2779776" cy="2514600"/>
+          </a:xfrm>
+          <a:prstGeom prst="roundRect">
+            <a:avLst>
+              <a:gd name="adj" fmla="val 7000"/>
+            </a:avLst>
+          </a:prstGeom>
+          <a:solidFill>
+            <a:srgbClr val="E6F4EA"/>
+          </a:solidFill>
+          <a:ln>
+            <a:noFill/>
+          </a:ln>
+          <a:effectLst/>
+        </p:spPr>
+        <p:style>
+          <a:lnRef idx="1">
+            <a:schemeClr val="accent1"/>
+          </a:lnRef>
+          <a:fillRef idx="3">
+            <a:schemeClr val="accent1"/>
+          </a:fillRef>
+          <a:effectRef idx="2">
+            <a:schemeClr val="accent1"/>
+          </a:effectRef>
+          <a:fontRef idx="minor">
+            <a:schemeClr val="lt1"/>
+          </a:fontRef>
+        </p:style>
+        <p:txBody>
+          <a:bodyPr rtlCol="0" anchor="t" wrap="square" lIns="146304" rIns="146304" tIns="501091" bIns="87782"/>
+          <a:lstStyle/>
           <a:p>
             <a:pPr algn="l">
-              <a:spcBef>
-                <a:spcPts val="0"/>
-              </a:spcBef>
-              <a:spcAft>
-                <a:spcPts val="800"/>
+              <a:spcAft>
+                <a:spcPts val="400"/>
               </a:spcAft>
             </a:pPr>
             <a:r>
@@ -9836,24 +11431,77 @@
           </a:p>
           <a:p>
             <a:pPr algn="l">
-              <a:spcBef>
-                <a:spcPts val="0"/>
-              </a:spcBef>
-              <a:spcAft>
-                <a:spcPts val="800"/>
+              <a:spcAft>
+                <a:spcPts val="0"/>
               </a:spcAft>
             </a:pPr>
             <a:r>
-              <a:rPr sz="1300" b="0" i="0">
+              <a:rPr sz="1200" b="0" i="0">
                 <a:solidFill>
-                  <a:srgbClr val="1F1F1F"/>
+                  <a:srgbClr val="3C4043"/>
                 </a:solidFill>
                 <a:latin typeface="Google Sans Flex"/>
                 <a:ea typeface="Google Sans Flex"/>
                 <a:cs typeface="Google Sans Flex"/>
                 <a:sym typeface="Google Sans Flex"/>
               </a:rPr>
-              <a:t>The voice and the highlight stay in time. That is the part a normal deck and a normal voiceover both miss.</a:t>
+              <a:t>Voice, highlight and hand-drawn strokes move together, point by point. Each template is built differently, not just recoloured.</a:t>
+            </a:r>
+          </a:p>
+        </p:txBody>
+      </p:sp>
+      <p:sp>
+        <p:nvSpPr>
+          <p:cNvPr id="85" name="Oval 84"/>
+          <p:cNvSpPr/>
+          <p:nvPr/>
+        </p:nvSpPr>
+        <p:spPr>
+          <a:xfrm>
+            <a:off x="6217920" y="2342692"/>
+            <a:ext cx="292608" cy="292608"/>
+          </a:xfrm>
+          <a:prstGeom prst="ellipse">
+            <a:avLst/>
+          </a:prstGeom>
+          <a:solidFill>
+            <a:srgbClr val="1E8E3E"/>
+          </a:solidFill>
+          <a:ln>
+            <a:noFill/>
+          </a:ln>
+          <a:effectLst/>
+        </p:spPr>
+        <p:style>
+          <a:lnRef idx="1">
+            <a:schemeClr val="accent1"/>
+          </a:lnRef>
+          <a:fillRef idx="3">
+            <a:schemeClr val="accent1"/>
+          </a:fillRef>
+          <a:effectRef idx="2">
+            <a:schemeClr val="accent1"/>
+          </a:effectRef>
+          <a:fontRef idx="minor">
+            <a:schemeClr val="lt1"/>
+          </a:fontRef>
+        </p:style>
+        <p:txBody>
+          <a:bodyPr rtlCol="0" anchor="ctr" lIns="0" rIns="0" tIns="0" bIns="0"/>
+          <a:lstStyle/>
+          <a:p>
+            <a:pPr algn="ctr"/>
+            <a:r>
+              <a:rPr sz="1200" b="0" i="0">
+                <a:solidFill>
+                  <a:srgbClr val="FFFFFF"/>
+                </a:solidFill>
+                <a:latin typeface="Google Sans Flex SemiBold"/>
+                <a:ea typeface="Google Sans Flex SemiBold"/>
+                <a:cs typeface="Google Sans Flex SemiBold"/>
+                <a:sym typeface="Google Sans Flex SemiBold"/>
+              </a:rPr>
+              <a:t>3</a:t>
             </a:r>
           </a:p>
         </p:txBody>
@@ -10035,87 +11683,822 @@
       </p:sp>
       <p:sp>
         <p:nvSpPr>
-          <p:cNvPr id="88" name="TextBox 87"/>
-          <p:cNvSpPr txBox="1"/>
+          <p:cNvPr id="88" name="Rounded Rectangle 87"/>
+          <p:cNvSpPr/>
           <p:nvPr/>
         </p:nvSpPr>
         <p:spPr>
           <a:xfrm>
             <a:off x="292608" y="1371600"/>
-            <a:ext cx="8549640" cy="3520440"/>
-          </a:xfrm>
-          <a:prstGeom prst="rect">
-            <a:avLst/>
-          </a:prstGeom>
-          <a:noFill/>
-        </p:spPr>
+            <a:ext cx="2779776" cy="1517904"/>
+          </a:xfrm>
+          <a:prstGeom prst="roundRect">
+            <a:avLst>
+              <a:gd name="adj" fmla="val 7000"/>
+            </a:avLst>
+          </a:prstGeom>
+          <a:solidFill>
+            <a:srgbClr val="E8F0FE"/>
+          </a:solidFill>
+          <a:ln>
+            <a:noFill/>
+          </a:ln>
+          <a:effectLst/>
+        </p:spPr>
+        <p:style>
+          <a:lnRef idx="1">
+            <a:schemeClr val="accent1"/>
+          </a:lnRef>
+          <a:fillRef idx="3">
+            <a:schemeClr val="accent1"/>
+          </a:fillRef>
+          <a:effectRef idx="2">
+            <a:schemeClr val="accent1"/>
+          </a:effectRef>
+          <a:fontRef idx="minor">
+            <a:schemeClr val="lt1"/>
+          </a:fontRef>
+        </p:style>
         <p:txBody>
-          <a:bodyPr wrap="square"/>
+          <a:bodyPr rtlCol="0" anchor="t" wrap="square" lIns="128016" rIns="128016" tIns="486460" bIns="76809"/>
           <a:lstStyle/>
           <a:p>
             <a:pPr algn="l">
-              <a:spcBef>
-                <a:spcPts val="0"/>
-              </a:spcBef>
-              <a:spcAft>
-                <a:spcPts val="800"/>
+              <a:spcAft>
+                <a:spcPts val="400"/>
               </a:spcAft>
             </a:pPr>
             <a:r>
               <a:rPr sz="1300" b="0" i="0">
                 <a:solidFill>
                   <a:srgbClr val="1F1F1F"/>
+                </a:solidFill>
+                <a:latin typeface="Google Sans Flex SemiBold"/>
+                <a:ea typeface="Google Sans Flex SemiBold"/>
+                <a:cs typeface="Google Sans Flex SemiBold"/>
+                <a:sym typeface="Google Sans Flex SemiBold"/>
+              </a:rPr>
+              <a:t>One file in, one video out</a:t>
+            </a:r>
+          </a:p>
+          <a:p>
+            <a:pPr algn="l">
+              <a:spcAft>
+                <a:spcPts val="0"/>
+              </a:spcAft>
+            </a:pPr>
+            <a:r>
+              <a:rPr sz="1150" b="0" i="0">
+                <a:solidFill>
+                  <a:srgbClr val="3C4043"/>
                 </a:solidFill>
                 <a:latin typeface="Google Sans Flex"/>
                 <a:ea typeface="Google Sans Flex"/>
                 <a:cs typeface="Google Sans Flex"/>
                 <a:sym typeface="Google Sans Flex"/>
               </a:rPr>
-              <a:t>Drop a PDF. Get a video for YouTube or a Short.</a:t>
-            </a:r>
-          </a:p>
+              <a:t>PDF, notes or a topic. No slide editing, no recording.</a:t>
+            </a:r>
+          </a:p>
+        </p:txBody>
+      </p:sp>
+      <p:sp>
+        <p:nvSpPr>
+          <p:cNvPr id="89" name="Oval 88"/>
+          <p:cNvSpPr/>
+          <p:nvPr/>
+        </p:nvSpPr>
+        <p:spPr>
+          <a:xfrm>
+            <a:off x="420624" y="1461211"/>
+            <a:ext cx="292608" cy="292608"/>
+          </a:xfrm>
+          <a:prstGeom prst="ellipse">
+            <a:avLst/>
+          </a:prstGeom>
+          <a:solidFill>
+            <a:srgbClr val="4285F4"/>
+          </a:solidFill>
+          <a:ln>
+            <a:noFill/>
+          </a:ln>
+          <a:effectLst/>
+        </p:spPr>
+        <p:style>
+          <a:lnRef idx="1">
+            <a:schemeClr val="accent1"/>
+          </a:lnRef>
+          <a:fillRef idx="3">
+            <a:schemeClr val="accent1"/>
+          </a:fillRef>
+          <a:effectRef idx="2">
+            <a:schemeClr val="accent1"/>
+          </a:effectRef>
+          <a:fontRef idx="minor">
+            <a:schemeClr val="lt1"/>
+          </a:fontRef>
+        </p:style>
+        <p:txBody>
+          <a:bodyPr rtlCol="0" anchor="ctr" lIns="0" rIns="0" tIns="0" bIns="0"/>
+          <a:lstStyle/>
+          <a:p>
+            <a:pPr algn="ctr"/>
+            <a:r>
+              <a:rPr sz="1200" b="0" i="0">
+                <a:solidFill>
+                  <a:srgbClr val="FFFFFF"/>
+                </a:solidFill>
+                <a:latin typeface="Google Sans Flex SemiBold"/>
+                <a:ea typeface="Google Sans Flex SemiBold"/>
+                <a:cs typeface="Google Sans Flex SemiBold"/>
+                <a:sym typeface="Google Sans Flex SemiBold"/>
+              </a:rPr>
+              <a:t>1</a:t>
+            </a:r>
+          </a:p>
+        </p:txBody>
+      </p:sp>
+      <p:sp>
+        <p:nvSpPr>
+          <p:cNvPr id="90" name="Rounded Rectangle 89"/>
+          <p:cNvSpPr/>
+          <p:nvPr/>
+        </p:nvSpPr>
+        <p:spPr>
+          <a:xfrm>
+            <a:off x="3182112" y="1371600"/>
+            <a:ext cx="2779776" cy="1517904"/>
+          </a:xfrm>
+          <a:prstGeom prst="roundRect">
+            <a:avLst>
+              <a:gd name="adj" fmla="val 7000"/>
+            </a:avLst>
+          </a:prstGeom>
+          <a:solidFill>
+            <a:srgbClr val="FCE8E6"/>
+          </a:solidFill>
+          <a:ln>
+            <a:noFill/>
+          </a:ln>
+          <a:effectLst/>
+        </p:spPr>
+        <p:style>
+          <a:lnRef idx="1">
+            <a:schemeClr val="accent1"/>
+          </a:lnRef>
+          <a:fillRef idx="3">
+            <a:schemeClr val="accent1"/>
+          </a:fillRef>
+          <a:effectRef idx="2">
+            <a:schemeClr val="accent1"/>
+          </a:effectRef>
+          <a:fontRef idx="minor">
+            <a:schemeClr val="lt1"/>
+          </a:fontRef>
+        </p:style>
+        <p:txBody>
+          <a:bodyPr rtlCol="0" anchor="t" wrap="square" lIns="128016" rIns="128016" tIns="486460" bIns="76809"/>
+          <a:lstStyle/>
           <a:p>
             <a:pPr algn="l">
-              <a:spcBef>
-                <a:spcPts val="0"/>
-              </a:spcBef>
-              <a:spcAft>
-                <a:spcPts val="800"/>
+              <a:spcAft>
+                <a:spcPts val="400"/>
               </a:spcAft>
             </a:pPr>
             <a:r>
               <a:rPr sz="1300" b="0" i="0">
                 <a:solidFill>
                   <a:srgbClr val="1F1F1F"/>
+                </a:solidFill>
+                <a:latin typeface="Google Sans Flex SemiBold"/>
+                <a:ea typeface="Google Sans Flex SemiBold"/>
+                <a:cs typeface="Google Sans Flex SemiBold"/>
+                <a:sym typeface="Google Sans Flex SemiBold"/>
+              </a:rPr>
+              <a:t>Pitched at the class</a:t>
+            </a:r>
+          </a:p>
+          <a:p>
+            <a:pPr algn="l">
+              <a:spcAft>
+                <a:spcPts val="0"/>
+              </a:spcAft>
+            </a:pPr>
+            <a:r>
+              <a:rPr sz="1150" b="0" i="0">
+                <a:solidFill>
+                  <a:srgbClr val="3C4043"/>
                 </a:solidFill>
                 <a:latin typeface="Google Sans Flex"/>
                 <a:ea typeface="Google Sans Flex"/>
                 <a:cs typeface="Google Sans Flex"/>
                 <a:sym typeface="Google Sans Flex"/>
               </a:rPr>
-              <a:t>Say the age. The wording changes for that class.</a:t>
-            </a:r>
-          </a:p>
+              <a:t>Pick the age and what students already know. The wording follows.</a:t>
+            </a:r>
+          </a:p>
+        </p:txBody>
+      </p:sp>
+      <p:sp>
+        <p:nvSpPr>
+          <p:cNvPr id="91" name="Oval 90"/>
+          <p:cNvSpPr/>
+          <p:nvPr/>
+        </p:nvSpPr>
+        <p:spPr>
+          <a:xfrm>
+            <a:off x="3310128" y="1461211"/>
+            <a:ext cx="292608" cy="292608"/>
+          </a:xfrm>
+          <a:prstGeom prst="ellipse">
+            <a:avLst/>
+          </a:prstGeom>
+          <a:solidFill>
+            <a:srgbClr val="EA4335"/>
+          </a:solidFill>
+          <a:ln>
+            <a:noFill/>
+          </a:ln>
+          <a:effectLst/>
+        </p:spPr>
+        <p:style>
+          <a:lnRef idx="1">
+            <a:schemeClr val="accent1"/>
+          </a:lnRef>
+          <a:fillRef idx="3">
+            <a:schemeClr val="accent1"/>
+          </a:fillRef>
+          <a:effectRef idx="2">
+            <a:schemeClr val="accent1"/>
+          </a:effectRef>
+          <a:fontRef idx="minor">
+            <a:schemeClr val="lt1"/>
+          </a:fontRef>
+        </p:style>
+        <p:txBody>
+          <a:bodyPr rtlCol="0" anchor="ctr" lIns="0" rIns="0" tIns="0" bIns="0"/>
+          <a:lstStyle/>
+          <a:p>
+            <a:pPr algn="ctr"/>
+            <a:r>
+              <a:rPr sz="1200" b="0" i="0">
+                <a:solidFill>
+                  <a:srgbClr val="FFFFFF"/>
+                </a:solidFill>
+                <a:latin typeface="Google Sans Flex SemiBold"/>
+                <a:ea typeface="Google Sans Flex SemiBold"/>
+                <a:cs typeface="Google Sans Flex SemiBold"/>
+                <a:sym typeface="Google Sans Flex SemiBold"/>
+              </a:rPr>
+              <a:t>2</a:t>
+            </a:r>
+          </a:p>
+        </p:txBody>
+      </p:sp>
+      <p:sp>
+        <p:nvSpPr>
+          <p:cNvPr id="92" name="Rounded Rectangle 91"/>
+          <p:cNvSpPr/>
+          <p:nvPr/>
+        </p:nvSpPr>
+        <p:spPr>
+          <a:xfrm>
+            <a:off x="6071616" y="1371600"/>
+            <a:ext cx="2779776" cy="1517904"/>
+          </a:xfrm>
+          <a:prstGeom prst="roundRect">
+            <a:avLst>
+              <a:gd name="adj" fmla="val 7000"/>
+            </a:avLst>
+          </a:prstGeom>
+          <a:solidFill>
+            <a:srgbClr val="FEF7E0"/>
+          </a:solidFill>
+          <a:ln>
+            <a:noFill/>
+          </a:ln>
+          <a:effectLst/>
+        </p:spPr>
+        <p:style>
+          <a:lnRef idx="1">
+            <a:schemeClr val="accent1"/>
+          </a:lnRef>
+          <a:fillRef idx="3">
+            <a:schemeClr val="accent1"/>
+          </a:fillRef>
+          <a:effectRef idx="2">
+            <a:schemeClr val="accent1"/>
+          </a:effectRef>
+          <a:fontRef idx="minor">
+            <a:schemeClr val="lt1"/>
+          </a:fontRef>
+        </p:style>
+        <p:txBody>
+          <a:bodyPr rtlCol="0" anchor="t" wrap="square" lIns="128016" rIns="128016" tIns="486460" bIns="76809"/>
+          <a:lstStyle/>
           <a:p>
             <a:pPr algn="l">
-              <a:spcBef>
-                <a:spcPts val="0"/>
-              </a:spcBef>
-              <a:spcAft>
-                <a:spcPts val="800"/>
+              <a:spcAft>
+                <a:spcPts val="400"/>
               </a:spcAft>
             </a:pPr>
             <a:r>
               <a:rPr sz="1300" b="0" i="0">
                 <a:solidFill>
                   <a:srgbClr val="1F1F1F"/>
+                </a:solidFill>
+                <a:latin typeface="Google Sans Flex SemiBold"/>
+                <a:ea typeface="Google Sans Flex SemiBold"/>
+                <a:cs typeface="Google Sans Flex SemiBold"/>
+                <a:sym typeface="Google Sans Flex SemiBold"/>
+              </a:rPr>
+              <a:t>Six real templates</a:t>
+            </a:r>
+          </a:p>
+          <a:p>
+            <a:pPr algn="l">
+              <a:spcAft>
+                <a:spcPts val="0"/>
+              </a:spcAft>
+            </a:pPr>
+            <a:r>
+              <a:rPr sz="1150" b="0" i="0">
+                <a:solidFill>
+                  <a:srgbClr val="3C4043"/>
                 </a:solidFill>
                 <a:latin typeface="Google Sans Flex"/>
                 <a:ea typeface="Google Sans Flex"/>
                 <a:cs typeface="Google Sans Flex"/>
                 <a:sym typeface="Google Sans Flex"/>
               </a:rPr>
-              <a:t>Gemini 3.8 Live speaks it, and the highlight follows the voice.</a:t>
+              <a:t>Whiteboard, notebook, poster, editorial, broadcast, bento. Own layout, font and motion each.</a:t>
+            </a:r>
+          </a:p>
+        </p:txBody>
+      </p:sp>
+      <p:sp>
+        <p:nvSpPr>
+          <p:cNvPr id="93" name="Oval 92"/>
+          <p:cNvSpPr/>
+          <p:nvPr/>
+        </p:nvSpPr>
+        <p:spPr>
+          <a:xfrm>
+            <a:off x="6199632" y="1461211"/>
+            <a:ext cx="292608" cy="292608"/>
+          </a:xfrm>
+          <a:prstGeom prst="ellipse">
+            <a:avLst/>
+          </a:prstGeom>
+          <a:solidFill>
+            <a:srgbClr val="F9AB00"/>
+          </a:solidFill>
+          <a:ln>
+            <a:noFill/>
+          </a:ln>
+          <a:effectLst/>
+        </p:spPr>
+        <p:style>
+          <a:lnRef idx="1">
+            <a:schemeClr val="accent1"/>
+          </a:lnRef>
+          <a:fillRef idx="3">
+            <a:schemeClr val="accent1"/>
+          </a:fillRef>
+          <a:effectRef idx="2">
+            <a:schemeClr val="accent1"/>
+          </a:effectRef>
+          <a:fontRef idx="minor">
+            <a:schemeClr val="lt1"/>
+          </a:fontRef>
+        </p:style>
+        <p:txBody>
+          <a:bodyPr rtlCol="0" anchor="ctr" lIns="0" rIns="0" tIns="0" bIns="0"/>
+          <a:lstStyle/>
+          <a:p>
+            <a:pPr algn="ctr"/>
+            <a:r>
+              <a:rPr sz="1200" b="0" i="0">
+                <a:solidFill>
+                  <a:srgbClr val="FFFFFF"/>
+                </a:solidFill>
+                <a:latin typeface="Google Sans Flex SemiBold"/>
+                <a:ea typeface="Google Sans Flex SemiBold"/>
+                <a:cs typeface="Google Sans Flex SemiBold"/>
+                <a:sym typeface="Google Sans Flex SemiBold"/>
+              </a:rPr>
+              <a:t>3</a:t>
+            </a:r>
+          </a:p>
+        </p:txBody>
+      </p:sp>
+      <p:sp>
+        <p:nvSpPr>
+          <p:cNvPr id="94" name="Rounded Rectangle 93"/>
+          <p:cNvSpPr/>
+          <p:nvPr/>
+        </p:nvSpPr>
+        <p:spPr>
+          <a:xfrm>
+            <a:off x="292608" y="2999232"/>
+            <a:ext cx="2779776" cy="1517904"/>
+          </a:xfrm>
+          <a:prstGeom prst="roundRect">
+            <a:avLst>
+              <a:gd name="adj" fmla="val 7000"/>
+            </a:avLst>
+          </a:prstGeom>
+          <a:solidFill>
+            <a:srgbClr val="E6F4EA"/>
+          </a:solidFill>
+          <a:ln>
+            <a:noFill/>
+          </a:ln>
+          <a:effectLst/>
+        </p:spPr>
+        <p:style>
+          <a:lnRef idx="1">
+            <a:schemeClr val="accent1"/>
+          </a:lnRef>
+          <a:fillRef idx="3">
+            <a:schemeClr val="accent1"/>
+          </a:fillRef>
+          <a:effectRef idx="2">
+            <a:schemeClr val="accent1"/>
+          </a:effectRef>
+          <a:fontRef idx="minor">
+            <a:schemeClr val="lt1"/>
+          </a:fontRef>
+        </p:style>
+        <p:txBody>
+          <a:bodyPr rtlCol="0" anchor="t" wrap="square" lIns="128016" rIns="128016" tIns="486460" bIns="76809"/>
+          <a:lstStyle/>
+          <a:p>
+            <a:pPr algn="l">
+              <a:spcAft>
+                <a:spcPts val="400"/>
+              </a:spcAft>
+            </a:pPr>
+            <a:r>
+              <a:rPr sz="1300" b="0" i="0">
+                <a:solidFill>
+                  <a:srgbClr val="1F1F1F"/>
+                </a:solidFill>
+                <a:latin typeface="Google Sans Flex SemiBold"/>
+                <a:ea typeface="Google Sans Flex SemiBold"/>
+                <a:cs typeface="Google Sans Flex SemiBold"/>
+                <a:sym typeface="Google Sans Flex SemiBold"/>
+              </a:rPr>
+              <a:t>Fits the content</a:t>
+            </a:r>
+          </a:p>
+          <a:p>
+            <a:pPr algn="l">
+              <a:spcAft>
+                <a:spcPts val="0"/>
+              </a:spcAft>
+            </a:pPr>
+            <a:r>
+              <a:rPr sz="1150" b="0" i="0">
+                <a:solidFill>
+                  <a:srgbClr val="3C4043"/>
+                </a:solidFill>
+                <a:latin typeface="Google Sans Flex"/>
+                <a:ea typeface="Google Sans Flex"/>
+                <a:cs typeface="Google Sans Flex"/>
+                <a:sym typeface="Google Sans Flex"/>
+              </a:rPr>
+              <a:t>Type is sized per slide: short ideas go big, dense ones shrink. The whole frame is used.</a:t>
+            </a:r>
+          </a:p>
+        </p:txBody>
+      </p:sp>
+      <p:sp>
+        <p:nvSpPr>
+          <p:cNvPr id="95" name="Oval 94"/>
+          <p:cNvSpPr/>
+          <p:nvPr/>
+        </p:nvSpPr>
+        <p:spPr>
+          <a:xfrm>
+            <a:off x="420624" y="3088843"/>
+            <a:ext cx="292608" cy="292608"/>
+          </a:xfrm>
+          <a:prstGeom prst="ellipse">
+            <a:avLst/>
+          </a:prstGeom>
+          <a:solidFill>
+            <a:srgbClr val="1E8E3E"/>
+          </a:solidFill>
+          <a:ln>
+            <a:noFill/>
+          </a:ln>
+          <a:effectLst/>
+        </p:spPr>
+        <p:style>
+          <a:lnRef idx="1">
+            <a:schemeClr val="accent1"/>
+          </a:lnRef>
+          <a:fillRef idx="3">
+            <a:schemeClr val="accent1"/>
+          </a:fillRef>
+          <a:effectRef idx="2">
+            <a:schemeClr val="accent1"/>
+          </a:effectRef>
+          <a:fontRef idx="minor">
+            <a:schemeClr val="lt1"/>
+          </a:fontRef>
+        </p:style>
+        <p:txBody>
+          <a:bodyPr rtlCol="0" anchor="ctr" lIns="0" rIns="0" tIns="0" bIns="0"/>
+          <a:lstStyle/>
+          <a:p>
+            <a:pPr algn="ctr"/>
+            <a:r>
+              <a:rPr sz="1200" b="0" i="0">
+                <a:solidFill>
+                  <a:srgbClr val="FFFFFF"/>
+                </a:solidFill>
+                <a:latin typeface="Google Sans Flex SemiBold"/>
+                <a:ea typeface="Google Sans Flex SemiBold"/>
+                <a:cs typeface="Google Sans Flex SemiBold"/>
+                <a:sym typeface="Google Sans Flex SemiBold"/>
+              </a:rPr>
+              <a:t>4</a:t>
+            </a:r>
+          </a:p>
+        </p:txBody>
+      </p:sp>
+      <p:sp>
+        <p:nvSpPr>
+          <p:cNvPr id="96" name="Rounded Rectangle 95"/>
+          <p:cNvSpPr/>
+          <p:nvPr/>
+        </p:nvSpPr>
+        <p:spPr>
+          <a:xfrm>
+            <a:off x="3182112" y="2999232"/>
+            <a:ext cx="2779776" cy="1517904"/>
+          </a:xfrm>
+          <a:prstGeom prst="roundRect">
+            <a:avLst>
+              <a:gd name="adj" fmla="val 7000"/>
+            </a:avLst>
+          </a:prstGeom>
+          <a:solidFill>
+            <a:srgbClr val="E8F0FE"/>
+          </a:solidFill>
+          <a:ln>
+            <a:noFill/>
+          </a:ln>
+          <a:effectLst/>
+        </p:spPr>
+        <p:style>
+          <a:lnRef idx="1">
+            <a:schemeClr val="accent1"/>
+          </a:lnRef>
+          <a:fillRef idx="3">
+            <a:schemeClr val="accent1"/>
+          </a:fillRef>
+          <a:effectRef idx="2">
+            <a:schemeClr val="accent1"/>
+          </a:effectRef>
+          <a:fontRef idx="minor">
+            <a:schemeClr val="lt1"/>
+          </a:fontRef>
+        </p:style>
+        <p:txBody>
+          <a:bodyPr rtlCol="0" anchor="t" wrap="square" lIns="128016" rIns="128016" tIns="486460" bIns="76809"/>
+          <a:lstStyle/>
+          <a:p>
+            <a:pPr algn="l">
+              <a:spcAft>
+                <a:spcPts val="400"/>
+              </a:spcAft>
+            </a:pPr>
+            <a:r>
+              <a:rPr sz="1300" b="0" i="0">
+                <a:solidFill>
+                  <a:srgbClr val="1F1F1F"/>
+                </a:solidFill>
+                <a:latin typeface="Google Sans Flex SemiBold"/>
+                <a:ea typeface="Google Sans Flex SemiBold"/>
+                <a:cs typeface="Google Sans Flex SemiBold"/>
+                <a:sym typeface="Google Sans Flex SemiBold"/>
+              </a:rPr>
+              <a:t>Voice, highlight and pen in time</a:t>
+            </a:r>
+          </a:p>
+          <a:p>
+            <a:pPr algn="l">
+              <a:spcAft>
+                <a:spcPts val="0"/>
+              </a:spcAft>
+            </a:pPr>
+            <a:r>
+              <a:rPr sz="1150" b="0" i="0">
+                <a:solidFill>
+                  <a:srgbClr val="3C4043"/>
+                </a:solidFill>
+                <a:latin typeface="Google Sans Flex"/>
+                <a:ea typeface="Google Sans Flex"/>
+                <a:cs typeface="Google Sans Flex"/>
+                <a:sym typeface="Google Sans Flex"/>
+              </a:rPr>
+              <a:t>Gemini 3.8 Live speaks. The highlight moves point by point and lines draw on as it is explained.</a:t>
+            </a:r>
+          </a:p>
+        </p:txBody>
+      </p:sp>
+      <p:sp>
+        <p:nvSpPr>
+          <p:cNvPr id="97" name="Oval 96"/>
+          <p:cNvSpPr/>
+          <p:nvPr/>
+        </p:nvSpPr>
+        <p:spPr>
+          <a:xfrm>
+            <a:off x="3310128" y="3088843"/>
+            <a:ext cx="292608" cy="292608"/>
+          </a:xfrm>
+          <a:prstGeom prst="ellipse">
+            <a:avLst/>
+          </a:prstGeom>
+          <a:solidFill>
+            <a:srgbClr val="4285F4"/>
+          </a:solidFill>
+          <a:ln>
+            <a:noFill/>
+          </a:ln>
+          <a:effectLst/>
+        </p:spPr>
+        <p:style>
+          <a:lnRef idx="1">
+            <a:schemeClr val="accent1"/>
+          </a:lnRef>
+          <a:fillRef idx="3">
+            <a:schemeClr val="accent1"/>
+          </a:fillRef>
+          <a:effectRef idx="2">
+            <a:schemeClr val="accent1"/>
+          </a:effectRef>
+          <a:fontRef idx="minor">
+            <a:schemeClr val="lt1"/>
+          </a:fontRef>
+        </p:style>
+        <p:txBody>
+          <a:bodyPr rtlCol="0" anchor="ctr" lIns="0" rIns="0" tIns="0" bIns="0"/>
+          <a:lstStyle/>
+          <a:p>
+            <a:pPr algn="ctr"/>
+            <a:r>
+              <a:rPr sz="1200" b="0" i="0">
+                <a:solidFill>
+                  <a:srgbClr val="FFFFFF"/>
+                </a:solidFill>
+                <a:latin typeface="Google Sans Flex SemiBold"/>
+                <a:ea typeface="Google Sans Flex SemiBold"/>
+                <a:cs typeface="Google Sans Flex SemiBold"/>
+                <a:sym typeface="Google Sans Flex SemiBold"/>
+              </a:rPr>
+              <a:t>5</a:t>
+            </a:r>
+          </a:p>
+        </p:txBody>
+      </p:sp>
+      <p:sp>
+        <p:nvSpPr>
+          <p:cNvPr id="98" name="Rounded Rectangle 97"/>
+          <p:cNvSpPr/>
+          <p:nvPr/>
+        </p:nvSpPr>
+        <p:spPr>
+          <a:xfrm>
+            <a:off x="6071616" y="2999232"/>
+            <a:ext cx="2779776" cy="1517904"/>
+          </a:xfrm>
+          <a:prstGeom prst="roundRect">
+            <a:avLst>
+              <a:gd name="adj" fmla="val 7000"/>
+            </a:avLst>
+          </a:prstGeom>
+          <a:solidFill>
+            <a:srgbClr val="FCE8E6"/>
+          </a:solidFill>
+          <a:ln>
+            <a:noFill/>
+          </a:ln>
+          <a:effectLst/>
+        </p:spPr>
+        <p:style>
+          <a:lnRef idx="1">
+            <a:schemeClr val="accent1"/>
+          </a:lnRef>
+          <a:fillRef idx="3">
+            <a:schemeClr val="accent1"/>
+          </a:fillRef>
+          <a:effectRef idx="2">
+            <a:schemeClr val="accent1"/>
+          </a:effectRef>
+          <a:fontRef idx="minor">
+            <a:schemeClr val="lt1"/>
+          </a:fontRef>
+        </p:style>
+        <p:txBody>
+          <a:bodyPr rtlCol="0" anchor="t" wrap="square" lIns="128016" rIns="128016" tIns="486460" bIns="76809"/>
+          <a:lstStyle/>
+          <a:p>
+            <a:pPr algn="l">
+              <a:spcAft>
+                <a:spcPts val="400"/>
+              </a:spcAft>
+            </a:pPr>
+            <a:r>
+              <a:rPr sz="1300" b="0" i="0">
+                <a:solidFill>
+                  <a:srgbClr val="1F1F1F"/>
+                </a:solidFill>
+                <a:latin typeface="Google Sans Flex SemiBold"/>
+                <a:ea typeface="Google Sans Flex SemiBold"/>
+                <a:cs typeface="Google Sans Flex SemiBold"/>
+                <a:sym typeface="Google Sans Flex SemiBold"/>
+              </a:rPr>
+              <a:t>Ready for YouTube</a:t>
+            </a:r>
+          </a:p>
+          <a:p>
+            <a:pPr algn="l">
+              <a:spcAft>
+                <a:spcPts val="0"/>
+              </a:spcAft>
+            </a:pPr>
+            <a:r>
+              <a:rPr sz="1150" b="0" i="0">
+                <a:solidFill>
+                  <a:srgbClr val="3C4043"/>
+                </a:solidFill>
+                <a:latin typeface="Google Sans Flex"/>
+                <a:ea typeface="Google Sans Flex"/>
+                <a:cs typeface="Google Sans Flex"/>
+                <a:sym typeface="Google Sans Flex"/>
+              </a:rPr>
+              <a:t>Landscape, Shorts, Reels or square from the same run.</a:t>
+            </a:r>
+          </a:p>
+        </p:txBody>
+      </p:sp>
+      <p:sp>
+        <p:nvSpPr>
+          <p:cNvPr id="99" name="Oval 98"/>
+          <p:cNvSpPr/>
+          <p:nvPr/>
+        </p:nvSpPr>
+        <p:spPr>
+          <a:xfrm>
+            <a:off x="6199632" y="3088843"/>
+            <a:ext cx="292608" cy="292608"/>
+          </a:xfrm>
+          <a:prstGeom prst="ellipse">
+            <a:avLst/>
+          </a:prstGeom>
+          <a:solidFill>
+            <a:srgbClr val="EA4335"/>
+          </a:solidFill>
+          <a:ln>
+            <a:noFill/>
+          </a:ln>
+          <a:effectLst/>
+        </p:spPr>
+        <p:style>
+          <a:lnRef idx="1">
+            <a:schemeClr val="accent1"/>
+          </a:lnRef>
+          <a:fillRef idx="3">
+            <a:schemeClr val="accent1"/>
+          </a:fillRef>
+          <a:effectRef idx="2">
+            <a:schemeClr val="accent1"/>
+          </a:effectRef>
+          <a:fontRef idx="minor">
+            <a:schemeClr val="lt1"/>
+          </a:fontRef>
+        </p:style>
+        <p:txBody>
+          <a:bodyPr rtlCol="0" anchor="ctr" lIns="0" rIns="0" tIns="0" bIns="0"/>
+          <a:lstStyle/>
+          <a:p>
+            <a:pPr algn="ctr"/>
+            <a:r>
+              <a:rPr sz="1200" b="0" i="0">
+                <a:solidFill>
+                  <a:srgbClr val="FFFFFF"/>
+                </a:solidFill>
+                <a:latin typeface="Google Sans Flex SemiBold"/>
+                <a:ea typeface="Google Sans Flex SemiBold"/>
+                <a:cs typeface="Google Sans Flex SemiBold"/>
+                <a:sym typeface="Google Sans Flex SemiBold"/>
+              </a:rPr>
+              <a:t>6</a:t>
             </a:r>
           </a:p>
         </p:txBody>
@@ -10297,71 +12680,27 @@
       </p:sp>
       <p:sp>
         <p:nvSpPr>
-          <p:cNvPr id="96" name="TextBox 95"/>
-          <p:cNvSpPr txBox="1"/>
-          <p:nvPr/>
-        </p:nvSpPr>
-        <p:spPr>
-          <a:xfrm>
-            <a:off x="292608" y="1298448"/>
-            <a:ext cx="8549640" cy="548640"/>
-          </a:xfrm>
-          <a:prstGeom prst="rect">
-            <a:avLst/>
-          </a:prstGeom>
-          <a:noFill/>
-        </p:spPr>
-        <p:txBody>
-          <a:bodyPr wrap="square"/>
-          <a:lstStyle/>
-          <a:p>
-            <a:pPr algn="l">
-              <a:spcBef>
-                <a:spcPts val="0"/>
-              </a:spcBef>
-              <a:spcAft>
-                <a:spcPts val="800"/>
-              </a:spcAft>
-            </a:pPr>
-            <a:r>
-              <a:rPr sz="1300" b="0" i="0">
-                <a:solidFill>
-                  <a:srgbClr val="1F1F1F"/>
-                </a:solidFill>
-                <a:latin typeface="Google Sans Flex"/>
-                <a:ea typeface="Google Sans Flex"/>
-                <a:cs typeface="Google Sans Flex"/>
-                <a:sym typeface="Google Sans Flex"/>
-              </a:rPr>
-              <a:t>Two ways in. You drop something, or the admin queue picks a paper overnight. After that it is one path.</a:t>
-            </a:r>
-          </a:p>
-        </p:txBody>
-      </p:sp>
-      <p:sp>
-        <p:nvSpPr>
-          <p:cNvPr id="97" name="Rounded Rectangle 96"/>
+          <p:cNvPr id="96" name="Rounded Rectangle 95"/>
           <p:cNvSpPr/>
           <p:nvPr/>
         </p:nvSpPr>
         <p:spPr>
           <a:xfrm>
-            <a:off x="292608" y="1965960"/>
-            <a:ext cx="1353312" cy="868680"/>
+            <a:off x="292608" y="1600200"/>
+            <a:ext cx="1280160" cy="1417320"/>
           </a:xfrm>
           <a:prstGeom prst="roundRect">
             <a:avLst>
-              <a:gd name="adj" fmla="val 15000"/>
+              <a:gd name="adj" fmla="val 7000"/>
             </a:avLst>
           </a:prstGeom>
           <a:solidFill>
-            <a:srgbClr val="F8F9FA"/>
+            <a:srgbClr val="E8F0FE"/>
           </a:solidFill>
           <a:ln>
-            <a:solidFill>
-              <a:srgbClr val="DADCE0"/>
-            </a:solidFill>
+            <a:noFill/>
           </a:ln>
+          <a:effectLst/>
         </p:spPr>
         <p:style>
           <a:lnRef idx="1">
@@ -10378,10 +12717,14 @@
           </a:fontRef>
         </p:style>
         <p:txBody>
-          <a:bodyPr rtlCol="0" anchor="ctr" wrap="square"/>
+          <a:bodyPr rtlCol="0" anchor="t" wrap="square" lIns="109728" rIns="109728" tIns="471830" bIns="65836"/>
           <a:lstStyle/>
           <a:p>
-            <a:pPr algn="ctr"/>
+            <a:pPr algn="l">
+              <a:spcAft>
+                <a:spcPts val="400"/>
+              </a:spcAft>
+            </a:pPr>
             <a:r>
               <a:rPr sz="1300" b="0" i="0">
                 <a:solidFill>
@@ -10395,32 +12738,48 @@
               <a:t>Drop a file</a:t>
             </a:r>
           </a:p>
+          <a:p>
+            <a:pPr algn="l">
+              <a:spcAft>
+                <a:spcPts val="0"/>
+              </a:spcAft>
+            </a:pPr>
+            <a:r>
+              <a:rPr sz="1100" b="0" i="0">
+                <a:solidFill>
+                  <a:srgbClr val="3C4043"/>
+                </a:solidFill>
+                <a:latin typeface="Google Sans Flex"/>
+                <a:ea typeface="Google Sans Flex"/>
+                <a:cs typeface="Google Sans Flex"/>
+                <a:sym typeface="Google Sans Flex"/>
+              </a:rPr>
+              <a:t>PDF, notes or topic</a:t>
+            </a:r>
+          </a:p>
         </p:txBody>
       </p:sp>
       <p:sp>
         <p:nvSpPr>
-          <p:cNvPr id="98" name="Rounded Rectangle 97"/>
+          <p:cNvPr id="97" name="Oval 96"/>
           <p:cNvSpPr/>
           <p:nvPr/>
         </p:nvSpPr>
         <p:spPr>
           <a:xfrm>
-            <a:off x="1755648" y="1965960"/>
-            <a:ext cx="1353312" cy="868680"/>
-          </a:xfrm>
-          <a:prstGeom prst="roundRect">
-            <a:avLst>
-              <a:gd name="adj" fmla="val 15000"/>
-            </a:avLst>
+            <a:off x="402336" y="1677009"/>
+            <a:ext cx="292608" cy="292608"/>
+          </a:xfrm>
+          <a:prstGeom prst="ellipse">
+            <a:avLst/>
           </a:prstGeom>
           <a:solidFill>
-            <a:srgbClr val="F8F9FA"/>
+            <a:srgbClr val="4285F4"/>
           </a:solidFill>
           <a:ln>
-            <a:solidFill>
-              <a:srgbClr val="DADCE0"/>
-            </a:solidFill>
+            <a:noFill/>
           </a:ln>
+          <a:effectLst/>
         </p:spPr>
         <p:style>
           <a:lnRef idx="1">
@@ -10437,10 +12796,108 @@
           </a:fontRef>
         </p:style>
         <p:txBody>
-          <a:bodyPr rtlCol="0" anchor="ctr" wrap="square"/>
+          <a:bodyPr rtlCol="0" anchor="ctr" lIns="0" rIns="0" tIns="0" bIns="0"/>
           <a:lstStyle/>
           <a:p>
             <a:pPr algn="ctr"/>
+            <a:r>
+              <a:rPr sz="1200" b="0" i="0">
+                <a:solidFill>
+                  <a:srgbClr val="FFFFFF"/>
+                </a:solidFill>
+                <a:latin typeface="Google Sans Flex SemiBold"/>
+                <a:ea typeface="Google Sans Flex SemiBold"/>
+                <a:cs typeface="Google Sans Flex SemiBold"/>
+                <a:sym typeface="Google Sans Flex SemiBold"/>
+              </a:rPr>
+              <a:t>1</a:t>
+            </a:r>
+          </a:p>
+        </p:txBody>
+      </p:sp>
+      <p:cxnSp>
+        <p:nvCxnSpPr>
+          <p:cNvPr id="98" name="Connector 97"/>
+          <p:cNvCxnSpPr/>
+          <p:nvPr/>
+        </p:nvCxnSpPr>
+        <p:spPr>
+          <a:xfrm>
+            <a:off x="1581912" y="2313432"/>
+            <a:ext cx="157276" cy="0"/>
+          </a:xfrm>
+          <a:prstGeom prst="line">
+            <a:avLst/>
+          </a:prstGeom>
+          <a:ln w="19050">
+            <a:solidFill>
+              <a:srgbClr val="5F6368"/>
+            </a:solidFill>
+            <a:tailEnd type="triangle" w="med" len="med"/>
+          </a:ln>
+        </p:spPr>
+        <p:style>
+          <a:lnRef idx="2">
+            <a:schemeClr val="accent1"/>
+          </a:lnRef>
+          <a:fillRef idx="0">
+            <a:schemeClr val="accent1"/>
+          </a:fillRef>
+          <a:effectRef idx="1">
+            <a:schemeClr val="accent1"/>
+          </a:effectRef>
+          <a:fontRef idx="minor">
+            <a:schemeClr val="tx1"/>
+          </a:fontRef>
+        </p:style>
+      </p:cxnSp>
+      <p:sp>
+        <p:nvSpPr>
+          <p:cNvPr id="99" name="Rounded Rectangle 98"/>
+          <p:cNvSpPr/>
+          <p:nvPr/>
+        </p:nvSpPr>
+        <p:spPr>
+          <a:xfrm>
+            <a:off x="1748332" y="1600200"/>
+            <a:ext cx="1280160" cy="1417320"/>
+          </a:xfrm>
+          <a:prstGeom prst="roundRect">
+            <a:avLst>
+              <a:gd name="adj" fmla="val 7000"/>
+            </a:avLst>
+          </a:prstGeom>
+          <a:solidFill>
+            <a:srgbClr val="FCE8E6"/>
+          </a:solidFill>
+          <a:ln>
+            <a:noFill/>
+          </a:ln>
+          <a:effectLst/>
+        </p:spPr>
+        <p:style>
+          <a:lnRef idx="1">
+            <a:schemeClr val="accent1"/>
+          </a:lnRef>
+          <a:fillRef idx="3">
+            <a:schemeClr val="accent1"/>
+          </a:fillRef>
+          <a:effectRef idx="2">
+            <a:schemeClr val="accent1"/>
+          </a:effectRef>
+          <a:fontRef idx="minor">
+            <a:schemeClr val="lt1"/>
+          </a:fontRef>
+        </p:style>
+        <p:txBody>
+          <a:bodyPr rtlCol="0" anchor="t" wrap="square" lIns="109728" rIns="109728" tIns="471830" bIns="65836"/>
+          <a:lstStyle/>
+          <a:p>
+            <a:pPr algn="l">
+              <a:spcAft>
+                <a:spcPts val="400"/>
+              </a:spcAft>
+            </a:pPr>
             <a:r>
               <a:rPr sz="1300" b="0" i="0">
                 <a:solidFill>
@@ -10454,32 +12911,48 @@
               <a:t>Read it</a:t>
             </a:r>
           </a:p>
+          <a:p>
+            <a:pPr algn="l">
+              <a:spcAft>
+                <a:spcPts val="0"/>
+              </a:spcAft>
+            </a:pPr>
+            <a:r>
+              <a:rPr sz="1100" b="0" i="0">
+                <a:solidFill>
+                  <a:srgbClr val="3C4043"/>
+                </a:solidFill>
+                <a:latin typeface="Google Sans Flex"/>
+                <a:ea typeface="Google Sans Flex"/>
+                <a:cs typeface="Google Sans Flex"/>
+                <a:sym typeface="Google Sans Flex"/>
+              </a:rPr>
+              <a:t>Gemini reads each page</a:t>
+            </a:r>
+          </a:p>
         </p:txBody>
       </p:sp>
       <p:sp>
         <p:nvSpPr>
-          <p:cNvPr id="99" name="Rounded Rectangle 98"/>
+          <p:cNvPr id="100" name="Oval 99"/>
           <p:cNvSpPr/>
           <p:nvPr/>
         </p:nvSpPr>
         <p:spPr>
           <a:xfrm>
-            <a:off x="3218688" y="1965960"/>
-            <a:ext cx="1353312" cy="868680"/>
-          </a:xfrm>
-          <a:prstGeom prst="roundRect">
-            <a:avLst>
-              <a:gd name="adj" fmla="val 15000"/>
-            </a:avLst>
+            <a:off x="1858060" y="1677009"/>
+            <a:ext cx="292608" cy="292608"/>
+          </a:xfrm>
+          <a:prstGeom prst="ellipse">
+            <a:avLst/>
           </a:prstGeom>
           <a:solidFill>
-            <a:srgbClr val="F8F9FA"/>
+            <a:srgbClr val="EA4335"/>
           </a:solidFill>
           <a:ln>
-            <a:solidFill>
-              <a:srgbClr val="DADCE0"/>
-            </a:solidFill>
+            <a:noFill/>
           </a:ln>
+          <a:effectLst/>
         </p:spPr>
         <p:style>
           <a:lnRef idx="1">
@@ -10496,10 +12969,108 @@
           </a:fontRef>
         </p:style>
         <p:txBody>
-          <a:bodyPr rtlCol="0" anchor="ctr" wrap="square"/>
+          <a:bodyPr rtlCol="0" anchor="ctr" lIns="0" rIns="0" tIns="0" bIns="0"/>
           <a:lstStyle/>
           <a:p>
             <a:pPr algn="ctr"/>
+            <a:r>
+              <a:rPr sz="1200" b="0" i="0">
+                <a:solidFill>
+                  <a:srgbClr val="FFFFFF"/>
+                </a:solidFill>
+                <a:latin typeface="Google Sans Flex SemiBold"/>
+                <a:ea typeface="Google Sans Flex SemiBold"/>
+                <a:cs typeface="Google Sans Flex SemiBold"/>
+                <a:sym typeface="Google Sans Flex SemiBold"/>
+              </a:rPr>
+              <a:t>2</a:t>
+            </a:r>
+          </a:p>
+        </p:txBody>
+      </p:sp>
+      <p:cxnSp>
+        <p:nvCxnSpPr>
+          <p:cNvPr id="101" name="Connector 100"/>
+          <p:cNvCxnSpPr/>
+          <p:nvPr/>
+        </p:nvCxnSpPr>
+        <p:spPr>
+          <a:xfrm>
+            <a:off x="3037636" y="2313432"/>
+            <a:ext cx="157277" cy="0"/>
+          </a:xfrm>
+          <a:prstGeom prst="line">
+            <a:avLst/>
+          </a:prstGeom>
+          <a:ln w="19050">
+            <a:solidFill>
+              <a:srgbClr val="5F6368"/>
+            </a:solidFill>
+            <a:tailEnd type="triangle" w="med" len="med"/>
+          </a:ln>
+        </p:spPr>
+        <p:style>
+          <a:lnRef idx="2">
+            <a:schemeClr val="accent1"/>
+          </a:lnRef>
+          <a:fillRef idx="0">
+            <a:schemeClr val="accent1"/>
+          </a:fillRef>
+          <a:effectRef idx="1">
+            <a:schemeClr val="accent1"/>
+          </a:effectRef>
+          <a:fontRef idx="minor">
+            <a:schemeClr val="tx1"/>
+          </a:fontRef>
+        </p:style>
+      </p:cxnSp>
+      <p:sp>
+        <p:nvSpPr>
+          <p:cNvPr id="102" name="Rounded Rectangle 101"/>
+          <p:cNvSpPr/>
+          <p:nvPr/>
+        </p:nvSpPr>
+        <p:spPr>
+          <a:xfrm>
+            <a:off x="3204057" y="1600200"/>
+            <a:ext cx="1280160" cy="1417320"/>
+          </a:xfrm>
+          <a:prstGeom prst="roundRect">
+            <a:avLst>
+              <a:gd name="adj" fmla="val 7000"/>
+            </a:avLst>
+          </a:prstGeom>
+          <a:solidFill>
+            <a:srgbClr val="FEF7E0"/>
+          </a:solidFill>
+          <a:ln>
+            <a:noFill/>
+          </a:ln>
+          <a:effectLst/>
+        </p:spPr>
+        <p:style>
+          <a:lnRef idx="1">
+            <a:schemeClr val="accent1"/>
+          </a:lnRef>
+          <a:fillRef idx="3">
+            <a:schemeClr val="accent1"/>
+          </a:fillRef>
+          <a:effectRef idx="2">
+            <a:schemeClr val="accent1"/>
+          </a:effectRef>
+          <a:fontRef idx="minor">
+            <a:schemeClr val="lt1"/>
+          </a:fontRef>
+        </p:style>
+        <p:txBody>
+          <a:bodyPr rtlCol="0" anchor="t" wrap="square" lIns="109728" rIns="109728" tIns="471830" bIns="65836"/>
+          <a:lstStyle/>
+          <a:p>
+            <a:pPr algn="l">
+              <a:spcAft>
+                <a:spcPts val="400"/>
+              </a:spcAft>
+            </a:pPr>
             <a:r>
               <a:rPr sz="1300" b="0" i="0">
                 <a:solidFill>
@@ -10513,32 +13084,48 @@
               <a:t>Write slides</a:t>
             </a:r>
           </a:p>
+          <a:p>
+            <a:pPr algn="l">
+              <a:spcAft>
+                <a:spcPts val="0"/>
+              </a:spcAft>
+            </a:pPr>
+            <a:r>
+              <a:rPr sz="1100" b="0" i="0">
+                <a:solidFill>
+                  <a:srgbClr val="3C4043"/>
+                </a:solidFill>
+                <a:latin typeface="Google Sans Flex"/>
+                <a:ea typeface="Google Sans Flex"/>
+                <a:cs typeface="Google Sans Flex"/>
+                <a:sym typeface="Google Sans Flex"/>
+              </a:rPr>
+              <a:t>Flash picks the look</a:t>
+            </a:r>
+          </a:p>
         </p:txBody>
       </p:sp>
       <p:sp>
         <p:nvSpPr>
-          <p:cNvPr id="100" name="Rounded Rectangle 99"/>
+          <p:cNvPr id="103" name="Oval 102"/>
           <p:cNvSpPr/>
           <p:nvPr/>
         </p:nvSpPr>
         <p:spPr>
           <a:xfrm>
-            <a:off x="4681728" y="1965960"/>
-            <a:ext cx="1353312" cy="868680"/>
-          </a:xfrm>
-          <a:prstGeom prst="roundRect">
-            <a:avLst>
-              <a:gd name="adj" fmla="val 15000"/>
-            </a:avLst>
+            <a:off x="3313785" y="1677009"/>
+            <a:ext cx="292608" cy="292608"/>
+          </a:xfrm>
+          <a:prstGeom prst="ellipse">
+            <a:avLst/>
           </a:prstGeom>
           <a:solidFill>
-            <a:srgbClr val="F8F9FA"/>
+            <a:srgbClr val="F9AB00"/>
           </a:solidFill>
           <a:ln>
-            <a:solidFill>
-              <a:srgbClr val="DADCE0"/>
-            </a:solidFill>
+            <a:noFill/>
           </a:ln>
+          <a:effectLst/>
         </p:spPr>
         <p:style>
           <a:lnRef idx="1">
@@ -10555,10 +13142,108 @@
           </a:fontRef>
         </p:style>
         <p:txBody>
-          <a:bodyPr rtlCol="0" anchor="ctr" wrap="square"/>
+          <a:bodyPr rtlCol="0" anchor="ctr" lIns="0" rIns="0" tIns="0" bIns="0"/>
           <a:lstStyle/>
           <a:p>
             <a:pPr algn="ctr"/>
+            <a:r>
+              <a:rPr sz="1200" b="0" i="0">
+                <a:solidFill>
+                  <a:srgbClr val="FFFFFF"/>
+                </a:solidFill>
+                <a:latin typeface="Google Sans Flex SemiBold"/>
+                <a:ea typeface="Google Sans Flex SemiBold"/>
+                <a:cs typeface="Google Sans Flex SemiBold"/>
+                <a:sym typeface="Google Sans Flex SemiBold"/>
+              </a:rPr>
+              <a:t>3</a:t>
+            </a:r>
+          </a:p>
+        </p:txBody>
+      </p:sp>
+      <p:cxnSp>
+        <p:nvCxnSpPr>
+          <p:cNvPr id="104" name="Connector 103"/>
+          <p:cNvCxnSpPr/>
+          <p:nvPr/>
+        </p:nvCxnSpPr>
+        <p:spPr>
+          <a:xfrm>
+            <a:off x="4493361" y="2313432"/>
+            <a:ext cx="157277" cy="0"/>
+          </a:xfrm>
+          <a:prstGeom prst="line">
+            <a:avLst/>
+          </a:prstGeom>
+          <a:ln w="19050">
+            <a:solidFill>
+              <a:srgbClr val="5F6368"/>
+            </a:solidFill>
+            <a:tailEnd type="triangle" w="med" len="med"/>
+          </a:ln>
+        </p:spPr>
+        <p:style>
+          <a:lnRef idx="2">
+            <a:schemeClr val="accent1"/>
+          </a:lnRef>
+          <a:fillRef idx="0">
+            <a:schemeClr val="accent1"/>
+          </a:fillRef>
+          <a:effectRef idx="1">
+            <a:schemeClr val="accent1"/>
+          </a:effectRef>
+          <a:fontRef idx="minor">
+            <a:schemeClr val="tx1"/>
+          </a:fontRef>
+        </p:style>
+      </p:cxnSp>
+      <p:sp>
+        <p:nvSpPr>
+          <p:cNvPr id="105" name="Rounded Rectangle 104"/>
+          <p:cNvSpPr/>
+          <p:nvPr/>
+        </p:nvSpPr>
+        <p:spPr>
+          <a:xfrm>
+            <a:off x="4659782" y="1600200"/>
+            <a:ext cx="1280160" cy="1417320"/>
+          </a:xfrm>
+          <a:prstGeom prst="roundRect">
+            <a:avLst>
+              <a:gd name="adj" fmla="val 7000"/>
+            </a:avLst>
+          </a:prstGeom>
+          <a:solidFill>
+            <a:srgbClr val="E6F4EA"/>
+          </a:solidFill>
+          <a:ln>
+            <a:noFill/>
+          </a:ln>
+          <a:effectLst/>
+        </p:spPr>
+        <p:style>
+          <a:lnRef idx="1">
+            <a:schemeClr val="accent1"/>
+          </a:lnRef>
+          <a:fillRef idx="3">
+            <a:schemeClr val="accent1"/>
+          </a:fillRef>
+          <a:effectRef idx="2">
+            <a:schemeClr val="accent1"/>
+          </a:effectRef>
+          <a:fontRef idx="minor">
+            <a:schemeClr val="lt1"/>
+          </a:fontRef>
+        </p:style>
+        <p:txBody>
+          <a:bodyPr rtlCol="0" anchor="t" wrap="square" lIns="109728" rIns="109728" tIns="471830" bIns="65836"/>
+          <a:lstStyle/>
+          <a:p>
+            <a:pPr algn="l">
+              <a:spcAft>
+                <a:spcPts val="400"/>
+              </a:spcAft>
+            </a:pPr>
             <a:r>
               <a:rPr sz="1300" b="0" i="0">
                 <a:solidFill>
@@ -10572,32 +13257,48 @@
               <a:t>Speak them</a:t>
             </a:r>
           </a:p>
+          <a:p>
+            <a:pPr algn="l">
+              <a:spcAft>
+                <a:spcPts val="0"/>
+              </a:spcAft>
+            </a:pPr>
+            <a:r>
+              <a:rPr sz="1100" b="0" i="0">
+                <a:solidFill>
+                  <a:srgbClr val="3C4043"/>
+                </a:solidFill>
+                <a:latin typeface="Google Sans Flex"/>
+                <a:ea typeface="Google Sans Flex"/>
+                <a:cs typeface="Google Sans Flex"/>
+                <a:sym typeface="Google Sans Flex"/>
+              </a:rPr>
+              <a:t>Gemini 3.8 Live</a:t>
+            </a:r>
+          </a:p>
         </p:txBody>
       </p:sp>
       <p:sp>
         <p:nvSpPr>
-          <p:cNvPr id="101" name="Rounded Rectangle 100"/>
+          <p:cNvPr id="106" name="Oval 105"/>
           <p:cNvSpPr/>
           <p:nvPr/>
         </p:nvSpPr>
         <p:spPr>
           <a:xfrm>
-            <a:off x="6144768" y="1965960"/>
-            <a:ext cx="1353312" cy="868680"/>
-          </a:xfrm>
-          <a:prstGeom prst="roundRect">
-            <a:avLst>
-              <a:gd name="adj" fmla="val 15000"/>
-            </a:avLst>
+            <a:off x="4769510" y="1677009"/>
+            <a:ext cx="292608" cy="292608"/>
+          </a:xfrm>
+          <a:prstGeom prst="ellipse">
+            <a:avLst/>
           </a:prstGeom>
           <a:solidFill>
-            <a:srgbClr val="F8F9FA"/>
+            <a:srgbClr val="1E8E3E"/>
           </a:solidFill>
           <a:ln>
-            <a:solidFill>
-              <a:srgbClr val="DADCE0"/>
-            </a:solidFill>
+            <a:noFill/>
           </a:ln>
+          <a:effectLst/>
         </p:spPr>
         <p:style>
           <a:lnRef idx="1">
@@ -10614,10 +13315,108 @@
           </a:fontRef>
         </p:style>
         <p:txBody>
-          <a:bodyPr rtlCol="0" anchor="ctr" wrap="square"/>
+          <a:bodyPr rtlCol="0" anchor="ctr" lIns="0" rIns="0" tIns="0" bIns="0"/>
           <a:lstStyle/>
           <a:p>
             <a:pPr algn="ctr"/>
+            <a:r>
+              <a:rPr sz="1200" b="0" i="0">
+                <a:solidFill>
+                  <a:srgbClr val="FFFFFF"/>
+                </a:solidFill>
+                <a:latin typeface="Google Sans Flex SemiBold"/>
+                <a:ea typeface="Google Sans Flex SemiBold"/>
+                <a:cs typeface="Google Sans Flex SemiBold"/>
+                <a:sym typeface="Google Sans Flex SemiBold"/>
+              </a:rPr>
+              <a:t>4</a:t>
+            </a:r>
+          </a:p>
+        </p:txBody>
+      </p:sp>
+      <p:cxnSp>
+        <p:nvCxnSpPr>
+          <p:cNvPr id="107" name="Connector 106"/>
+          <p:cNvCxnSpPr/>
+          <p:nvPr/>
+        </p:nvCxnSpPr>
+        <p:spPr>
+          <a:xfrm>
+            <a:off x="5949086" y="2313432"/>
+            <a:ext cx="157277" cy="0"/>
+          </a:xfrm>
+          <a:prstGeom prst="line">
+            <a:avLst/>
+          </a:prstGeom>
+          <a:ln w="19050">
+            <a:solidFill>
+              <a:srgbClr val="5F6368"/>
+            </a:solidFill>
+            <a:tailEnd type="triangle" w="med" len="med"/>
+          </a:ln>
+        </p:spPr>
+        <p:style>
+          <a:lnRef idx="2">
+            <a:schemeClr val="accent1"/>
+          </a:lnRef>
+          <a:fillRef idx="0">
+            <a:schemeClr val="accent1"/>
+          </a:fillRef>
+          <a:effectRef idx="1">
+            <a:schemeClr val="accent1"/>
+          </a:effectRef>
+          <a:fontRef idx="minor">
+            <a:schemeClr val="tx1"/>
+          </a:fontRef>
+        </p:style>
+      </p:cxnSp>
+      <p:sp>
+        <p:nvSpPr>
+          <p:cNvPr id="108" name="Rounded Rectangle 107"/>
+          <p:cNvSpPr/>
+          <p:nvPr/>
+        </p:nvSpPr>
+        <p:spPr>
+          <a:xfrm>
+            <a:off x="6115507" y="1600200"/>
+            <a:ext cx="1280160" cy="1417320"/>
+          </a:xfrm>
+          <a:prstGeom prst="roundRect">
+            <a:avLst>
+              <a:gd name="adj" fmla="val 7000"/>
+            </a:avLst>
+          </a:prstGeom>
+          <a:solidFill>
+            <a:srgbClr val="E8F0FE"/>
+          </a:solidFill>
+          <a:ln>
+            <a:noFill/>
+          </a:ln>
+          <a:effectLst/>
+        </p:spPr>
+        <p:style>
+          <a:lnRef idx="1">
+            <a:schemeClr val="accent1"/>
+          </a:lnRef>
+          <a:fillRef idx="3">
+            <a:schemeClr val="accent1"/>
+          </a:fillRef>
+          <a:effectRef idx="2">
+            <a:schemeClr val="accent1"/>
+          </a:effectRef>
+          <a:fontRef idx="minor">
+            <a:schemeClr val="lt1"/>
+          </a:fontRef>
+        </p:style>
+        <p:txBody>
+          <a:bodyPr rtlCol="0" anchor="t" wrap="square" lIns="109728" rIns="109728" tIns="471830" bIns="65836"/>
+          <a:lstStyle/>
+          <a:p>
+            <a:pPr algn="l">
+              <a:spcAft>
+                <a:spcPts val="400"/>
+              </a:spcAft>
+            </a:pPr>
             <a:r>
               <a:rPr sz="1300" b="0" i="0">
                 <a:solidFill>
@@ -10631,32 +13430,48 @@
               <a:t>Film frames</a:t>
             </a:r>
           </a:p>
+          <a:p>
+            <a:pPr algn="l">
+              <a:spcAft>
+                <a:spcPts val="0"/>
+              </a:spcAft>
+            </a:pPr>
+            <a:r>
+              <a:rPr sz="1100" b="0" i="0">
+                <a:solidFill>
+                  <a:srgbClr val="3C4043"/>
+                </a:solidFill>
+                <a:latin typeface="Google Sans Flex"/>
+                <a:ea typeface="Google Sans Flex"/>
+                <a:cs typeface="Google Sans Flex"/>
+                <a:sym typeface="Google Sans Flex"/>
+              </a:rPr>
+              <a:t>Chrome, incl. drawn lines</a:t>
+            </a:r>
+          </a:p>
         </p:txBody>
       </p:sp>
       <p:sp>
         <p:nvSpPr>
-          <p:cNvPr id="102" name="Rounded Rectangle 101"/>
+          <p:cNvPr id="109" name="Oval 108"/>
           <p:cNvSpPr/>
           <p:nvPr/>
         </p:nvSpPr>
         <p:spPr>
           <a:xfrm>
-            <a:off x="7607808" y="1965960"/>
-            <a:ext cx="1353312" cy="868680"/>
-          </a:xfrm>
-          <a:prstGeom prst="roundRect">
-            <a:avLst>
-              <a:gd name="adj" fmla="val 15000"/>
-            </a:avLst>
+            <a:off x="6225235" y="1677009"/>
+            <a:ext cx="292608" cy="292608"/>
+          </a:xfrm>
+          <a:prstGeom prst="ellipse">
+            <a:avLst/>
           </a:prstGeom>
           <a:solidFill>
-            <a:srgbClr val="F8F9FA"/>
+            <a:srgbClr val="4285F4"/>
           </a:solidFill>
           <a:ln>
-            <a:solidFill>
-              <a:srgbClr val="DADCE0"/>
-            </a:solidFill>
+            <a:noFill/>
           </a:ln>
+          <a:effectLst/>
         </p:spPr>
         <p:style>
           <a:lnRef idx="1">
@@ -10673,10 +13488,108 @@
           </a:fontRef>
         </p:style>
         <p:txBody>
-          <a:bodyPr rtlCol="0" anchor="ctr" wrap="square"/>
+          <a:bodyPr rtlCol="0" anchor="ctr" lIns="0" rIns="0" tIns="0" bIns="0"/>
           <a:lstStyle/>
           <a:p>
             <a:pPr algn="ctr"/>
+            <a:r>
+              <a:rPr sz="1200" b="0" i="0">
+                <a:solidFill>
+                  <a:srgbClr val="FFFFFF"/>
+                </a:solidFill>
+                <a:latin typeface="Google Sans Flex SemiBold"/>
+                <a:ea typeface="Google Sans Flex SemiBold"/>
+                <a:cs typeface="Google Sans Flex SemiBold"/>
+                <a:sym typeface="Google Sans Flex SemiBold"/>
+              </a:rPr>
+              <a:t>5</a:t>
+            </a:r>
+          </a:p>
+        </p:txBody>
+      </p:sp>
+      <p:cxnSp>
+        <p:nvCxnSpPr>
+          <p:cNvPr id="110" name="Connector 109"/>
+          <p:cNvCxnSpPr/>
+          <p:nvPr/>
+        </p:nvCxnSpPr>
+        <p:spPr>
+          <a:xfrm>
+            <a:off x="7404811" y="2313432"/>
+            <a:ext cx="157277" cy="0"/>
+          </a:xfrm>
+          <a:prstGeom prst="line">
+            <a:avLst/>
+          </a:prstGeom>
+          <a:ln w="19050">
+            <a:solidFill>
+              <a:srgbClr val="5F6368"/>
+            </a:solidFill>
+            <a:tailEnd type="triangle" w="med" len="med"/>
+          </a:ln>
+        </p:spPr>
+        <p:style>
+          <a:lnRef idx="2">
+            <a:schemeClr val="accent1"/>
+          </a:lnRef>
+          <a:fillRef idx="0">
+            <a:schemeClr val="accent1"/>
+          </a:fillRef>
+          <a:effectRef idx="1">
+            <a:schemeClr val="accent1"/>
+          </a:effectRef>
+          <a:fontRef idx="minor">
+            <a:schemeClr val="tx1"/>
+          </a:fontRef>
+        </p:style>
+      </p:cxnSp>
+      <p:sp>
+        <p:nvSpPr>
+          <p:cNvPr id="111" name="Rounded Rectangle 110"/>
+          <p:cNvSpPr/>
+          <p:nvPr/>
+        </p:nvSpPr>
+        <p:spPr>
+          <a:xfrm>
+            <a:off x="7571231" y="1600200"/>
+            <a:ext cx="1280160" cy="1417320"/>
+          </a:xfrm>
+          <a:prstGeom prst="roundRect">
+            <a:avLst>
+              <a:gd name="adj" fmla="val 7000"/>
+            </a:avLst>
+          </a:prstGeom>
+          <a:solidFill>
+            <a:srgbClr val="FCE8E6"/>
+          </a:solidFill>
+          <a:ln>
+            <a:noFill/>
+          </a:ln>
+          <a:effectLst/>
+        </p:spPr>
+        <p:style>
+          <a:lnRef idx="1">
+            <a:schemeClr val="accent1"/>
+          </a:lnRef>
+          <a:fillRef idx="3">
+            <a:schemeClr val="accent1"/>
+          </a:fillRef>
+          <a:effectRef idx="2">
+            <a:schemeClr val="accent1"/>
+          </a:effectRef>
+          <a:fontRef idx="minor">
+            <a:schemeClr val="lt1"/>
+          </a:fontRef>
+        </p:style>
+        <p:txBody>
+          <a:bodyPr rtlCol="0" anchor="t" wrap="square" lIns="109728" rIns="109728" tIns="471830" bIns="65836"/>
+          <a:lstStyle/>
+          <a:p>
+            <a:pPr algn="l">
+              <a:spcAft>
+                <a:spcPts val="400"/>
+              </a:spcAft>
+            </a:pPr>
             <a:r>
               <a:rPr sz="1300" b="0" i="0">
                 <a:solidFill>
@@ -10690,47 +13603,267 @@
               <a:t>MP4</a:t>
             </a:r>
           </a:p>
-        </p:txBody>
-      </p:sp>
-      <p:sp>
-        <p:nvSpPr>
-          <p:cNvPr id="103" name="TextBox 102"/>
-          <p:cNvSpPr txBox="1"/>
-          <p:nvPr/>
-        </p:nvSpPr>
-        <p:spPr>
-          <a:xfrm>
-            <a:off x="292608" y="3063240"/>
-            <a:ext cx="8549640" cy="1554480"/>
-          </a:xfrm>
-          <a:prstGeom prst="rect">
-            <a:avLst/>
-          </a:prstGeom>
-          <a:noFill/>
-        </p:spPr>
-        <p:txBody>
-          <a:bodyPr wrap="square"/>
-          <a:lstStyle/>
           <a:p>
             <a:pPr algn="l">
-              <a:spcBef>
-                <a:spcPts val="0"/>
-              </a:spcBef>
-              <a:spcAft>
-                <a:spcPts val="800"/>
+              <a:spcAft>
+                <a:spcPts val="0"/>
               </a:spcAft>
             </a:pPr>
             <a:r>
-              <a:rPr sz="1400" b="0" i="0">
+              <a:rPr sz="1100" b="0" i="0">
                 <a:solidFill>
-                  <a:srgbClr val="1F1F1F"/>
+                  <a:srgbClr val="3C4043"/>
                 </a:solidFill>
                 <a:latin typeface="Google Sans Flex"/>
                 <a:ea typeface="Google Sans Flex"/>
                 <a:cs typeface="Google Sans Flex"/>
                 <a:sym typeface="Google Sans Flex"/>
               </a:rPr>
-              <a:t>Upload a chapter, or let the queue pick a paper. Then one path to the video.</a:t>
+              <a:t>FFmpeg joins sound</a:t>
+            </a:r>
+          </a:p>
+        </p:txBody>
+      </p:sp>
+      <p:sp>
+        <p:nvSpPr>
+          <p:cNvPr id="112" name="Oval 111"/>
+          <p:cNvSpPr/>
+          <p:nvPr/>
+        </p:nvSpPr>
+        <p:spPr>
+          <a:xfrm>
+            <a:off x="7680959" y="1677009"/>
+            <a:ext cx="292608" cy="292608"/>
+          </a:xfrm>
+          <a:prstGeom prst="ellipse">
+            <a:avLst/>
+          </a:prstGeom>
+          <a:solidFill>
+            <a:srgbClr val="EA4335"/>
+          </a:solidFill>
+          <a:ln>
+            <a:noFill/>
+          </a:ln>
+          <a:effectLst/>
+        </p:spPr>
+        <p:style>
+          <a:lnRef idx="1">
+            <a:schemeClr val="accent1"/>
+          </a:lnRef>
+          <a:fillRef idx="3">
+            <a:schemeClr val="accent1"/>
+          </a:fillRef>
+          <a:effectRef idx="2">
+            <a:schemeClr val="accent1"/>
+          </a:effectRef>
+          <a:fontRef idx="minor">
+            <a:schemeClr val="lt1"/>
+          </a:fontRef>
+        </p:style>
+        <p:txBody>
+          <a:bodyPr rtlCol="0" anchor="ctr" lIns="0" rIns="0" tIns="0" bIns="0"/>
+          <a:lstStyle/>
+          <a:p>
+            <a:pPr algn="ctr"/>
+            <a:r>
+              <a:rPr sz="1200" b="0" i="0">
+                <a:solidFill>
+                  <a:srgbClr val="FFFFFF"/>
+                </a:solidFill>
+                <a:latin typeface="Google Sans Flex SemiBold"/>
+                <a:ea typeface="Google Sans Flex SemiBold"/>
+                <a:cs typeface="Google Sans Flex SemiBold"/>
+                <a:sym typeface="Google Sans Flex SemiBold"/>
+              </a:rPr>
+              <a:t>6</a:t>
+            </a:r>
+          </a:p>
+        </p:txBody>
+      </p:sp>
+      <p:sp>
+        <p:nvSpPr>
+          <p:cNvPr id="113" name="TextBox 112"/>
+          <p:cNvSpPr txBox="1"/>
+          <p:nvPr/>
+        </p:nvSpPr>
+        <p:spPr>
+          <a:xfrm>
+            <a:off x="292608" y="3310128"/>
+            <a:ext cx="8558784" cy="274320"/>
+          </a:xfrm>
+          <a:prstGeom prst="rect">
+            <a:avLst/>
+          </a:prstGeom>
+          <a:noFill/>
+        </p:spPr>
+        <p:txBody>
+          <a:bodyPr wrap="square" lIns="0" rIns="0" tIns="0" bIns="0"/>
+          <a:lstStyle/>
+          <a:p>
+            <a:pPr algn="l"/>
+            <a:r>
+              <a:rPr sz="1400" b="0" i="0">
+                <a:solidFill>
+                  <a:srgbClr val="1F1F1F"/>
+                </a:solidFill>
+                <a:latin typeface="Google Sans Flex SemiBold"/>
+                <a:ea typeface="Google Sans Flex SemiBold"/>
+                <a:cs typeface="Google Sans Flex SemiBold"/>
+                <a:sym typeface="Google Sans Flex SemiBold"/>
+              </a:rPr>
+              <a:t>Two ways in</a:t>
+            </a:r>
+          </a:p>
+        </p:txBody>
+      </p:sp>
+      <p:sp>
+        <p:nvSpPr>
+          <p:cNvPr id="114" name="Rounded Rectangle 113"/>
+          <p:cNvSpPr/>
+          <p:nvPr/>
+        </p:nvSpPr>
+        <p:spPr>
+          <a:xfrm>
+            <a:off x="292608" y="3639312"/>
+            <a:ext cx="4206240" cy="457200"/>
+          </a:xfrm>
+          <a:prstGeom prst="roundRect">
+            <a:avLst>
+              <a:gd name="adj" fmla="val 50000"/>
+            </a:avLst>
+          </a:prstGeom>
+          <a:solidFill>
+            <a:srgbClr val="E8F0FE"/>
+          </a:solidFill>
+          <a:ln>
+            <a:noFill/>
+          </a:ln>
+          <a:effectLst/>
+        </p:spPr>
+        <p:style>
+          <a:lnRef idx="1">
+            <a:schemeClr val="accent1"/>
+          </a:lnRef>
+          <a:fillRef idx="3">
+            <a:schemeClr val="accent1"/>
+          </a:fillRef>
+          <a:effectRef idx="2">
+            <a:schemeClr val="accent1"/>
+          </a:effectRef>
+          <a:fontRef idx="minor">
+            <a:schemeClr val="lt1"/>
+          </a:fontRef>
+        </p:style>
+        <p:txBody>
+          <a:bodyPr rtlCol="0" anchor="ctr" wrap="square" lIns="109728" rIns="109728" tIns="27432" bIns="27432"/>
+          <a:lstStyle/>
+          <a:p>
+            <a:pPr algn="ctr"/>
+            <a:r>
+              <a:rPr sz="1200" b="0" i="0">
+                <a:solidFill>
+                  <a:srgbClr val="1F1F1F"/>
+                </a:solidFill>
+                <a:latin typeface="Google Sans Flex Medium"/>
+                <a:ea typeface="Google Sans Flex Medium"/>
+                <a:cs typeface="Google Sans Flex Medium"/>
+                <a:sym typeface="Google Sans Flex Medium"/>
+              </a:rPr>
+              <a:t>A teacher drops a file in the Studio</a:t>
+            </a:r>
+          </a:p>
+        </p:txBody>
+      </p:sp>
+      <p:sp>
+        <p:nvSpPr>
+          <p:cNvPr id="115" name="Rounded Rectangle 114"/>
+          <p:cNvSpPr/>
+          <p:nvPr/>
+        </p:nvSpPr>
+        <p:spPr>
+          <a:xfrm>
+            <a:off x="4645152" y="3639312"/>
+            <a:ext cx="4206240" cy="457200"/>
+          </a:xfrm>
+          <a:prstGeom prst="roundRect">
+            <a:avLst>
+              <a:gd name="adj" fmla="val 50000"/>
+            </a:avLst>
+          </a:prstGeom>
+          <a:solidFill>
+            <a:srgbClr val="E6F4EA"/>
+          </a:solidFill>
+          <a:ln>
+            <a:noFill/>
+          </a:ln>
+          <a:effectLst/>
+        </p:spPr>
+        <p:style>
+          <a:lnRef idx="1">
+            <a:schemeClr val="accent1"/>
+          </a:lnRef>
+          <a:fillRef idx="3">
+            <a:schemeClr val="accent1"/>
+          </a:fillRef>
+          <a:effectRef idx="2">
+            <a:schemeClr val="accent1"/>
+          </a:effectRef>
+          <a:fontRef idx="minor">
+            <a:schemeClr val="lt1"/>
+          </a:fontRef>
+        </p:style>
+        <p:txBody>
+          <a:bodyPr rtlCol="0" anchor="ctr" wrap="square" lIns="109728" rIns="109728" tIns="27432" bIns="27432"/>
+          <a:lstStyle/>
+          <a:p>
+            <a:pPr algn="ctr"/>
+            <a:r>
+              <a:rPr sz="1200" b="0" i="0">
+                <a:solidFill>
+                  <a:srgbClr val="1F1F1F"/>
+                </a:solidFill>
+                <a:latin typeface="Google Sans Flex Medium"/>
+                <a:ea typeface="Google Sans Flex Medium"/>
+                <a:cs typeface="Google Sans Flex Medium"/>
+                <a:sym typeface="Google Sans Flex Medium"/>
+              </a:rPr>
+              <a:t>The admin queue picks a paper overnight</a:t>
+            </a:r>
+          </a:p>
+        </p:txBody>
+      </p:sp>
+      <p:sp>
+        <p:nvSpPr>
+          <p:cNvPr id="116" name="TextBox 115"/>
+          <p:cNvSpPr txBox="1"/>
+          <p:nvPr/>
+        </p:nvSpPr>
+        <p:spPr>
+          <a:xfrm>
+            <a:off x="292608" y="4297680"/>
+            <a:ext cx="8558784" cy="457200"/>
+          </a:xfrm>
+          <a:prstGeom prst="rect">
+            <a:avLst/>
+          </a:prstGeom>
+          <a:noFill/>
+        </p:spPr>
+        <p:txBody>
+          <a:bodyPr wrap="square" lIns="0" rIns="0" tIns="0" bIns="0"/>
+          <a:lstStyle/>
+          <a:p>
+            <a:pPr algn="l"/>
+            <a:r>
+              <a:rPr sz="1200" b="0" i="0">
+                <a:solidFill>
+                  <a:srgbClr val="5F6368"/>
+                </a:solidFill>
+                <a:latin typeface="Google Sans Flex"/>
+                <a:ea typeface="Google Sans Flex"/>
+                <a:cs typeface="Google Sans Flex"/>
+                <a:sym typeface="Google Sans Flex"/>
+              </a:rPr>
+              <a:t>After that it is one path, and the finished video lands back on the same page.</a:t>
             </a:r>
           </a:p>
         </p:txBody>
@@ -10927,43 +14060,69 @@
         <p:spPr>
           <a:xfrm>
             <a:off x="292608" y="1371600"/>
-            <a:ext cx="5623560" cy="2788920"/>
+            <a:ext cx="5577840" cy="2770632"/>
           </a:xfrm>
           <a:prstGeom prst="rect">
             <a:avLst/>
           </a:prstGeom>
+          <a:ln w="12700">
+            <a:solidFill>
+              <a:srgbClr val="DADCE0"/>
+            </a:solidFill>
+          </a:ln>
         </p:spPr>
       </p:pic>
       <p:sp>
         <p:nvSpPr>
-          <p:cNvPr id="105" name="TextBox 104"/>
-          <p:cNvSpPr txBox="1"/>
+          <p:cNvPr id="105" name="Rounded Rectangle 104"/>
+          <p:cNvSpPr/>
           <p:nvPr/>
         </p:nvSpPr>
         <p:spPr>
           <a:xfrm>
-            <a:off x="6080760" y="1371600"/>
-            <a:ext cx="2788920" cy="3108960"/>
-          </a:xfrm>
-          <a:prstGeom prst="rect">
-            <a:avLst/>
-          </a:prstGeom>
-          <a:noFill/>
-        </p:spPr>
+            <a:off x="6053328" y="1371600"/>
+            <a:ext cx="2798064" cy="896112"/>
+          </a:xfrm>
+          <a:prstGeom prst="roundRect">
+            <a:avLst>
+              <a:gd name="adj" fmla="val 7000"/>
+            </a:avLst>
+          </a:prstGeom>
+          <a:solidFill>
+            <a:srgbClr val="F8F9FA"/>
+          </a:solidFill>
+          <a:ln w="9525">
+            <a:solidFill>
+              <a:srgbClr val="DADCE0"/>
+            </a:solidFill>
+          </a:ln>
+          <a:effectLst/>
+        </p:spPr>
+        <p:style>
+          <a:lnRef idx="1">
+            <a:schemeClr val="accent1"/>
+          </a:lnRef>
+          <a:fillRef idx="3">
+            <a:schemeClr val="accent1"/>
+          </a:fillRef>
+          <a:effectRef idx="2">
+            <a:schemeClr val="accent1"/>
+          </a:effectRef>
+          <a:fontRef idx="minor">
+            <a:schemeClr val="lt1"/>
+          </a:fontRef>
+        </p:style>
         <p:txBody>
-          <a:bodyPr wrap="square"/>
+          <a:bodyPr rtlCol="0" anchor="t" wrap="square" lIns="128016" rIns="128016" tIns="102412" bIns="76809"/>
           <a:lstStyle/>
           <a:p>
             <a:pPr algn="l">
-              <a:spcBef>
-                <a:spcPts val="0"/>
-              </a:spcBef>
-              <a:spcAft>
-                <a:spcPts val="800"/>
+              <a:spcAft>
+                <a:spcPts val="400"/>
               </a:spcAft>
             </a:pPr>
             <a:r>
-              <a:rPr sz="1400" b="0" i="0">
+              <a:rPr sz="1250" b="0" i="0">
                 <a:solidFill>
                   <a:srgbClr val="1F1F1F"/>
                 </a:solidFill>
@@ -10972,29 +14131,396 @@
                 <a:cs typeface="Google Sans Flex SemiBold"/>
                 <a:sym typeface="Google Sans Flex SemiBold"/>
               </a:rPr>
-              <a:t>The Studio page</a:t>
+              <a:t>File on the left</a:t>
             </a:r>
           </a:p>
           <a:p>
             <a:pPr algn="l">
-              <a:spcBef>
-                <a:spcPts val="0"/>
-              </a:spcBef>
-              <a:spcAft>
-                <a:spcPts val="800"/>
+              <a:spcAft>
+                <a:spcPts val="0"/>
               </a:spcAft>
             </a:pPr>
             <a:r>
-              <a:rPr sz="1300" b="0" i="0">
+              <a:rPr sz="1100" b="0" i="0">
                 <a:solidFill>
-                  <a:srgbClr val="1F1F1F"/>
+                  <a:srgbClr val="3C4043"/>
                 </a:solidFill>
                 <a:latin typeface="Google Sans Flex"/>
                 <a:ea typeface="Google Sans Flex"/>
                 <a:cs typeface="Google Sans Flex"/>
                 <a:sym typeface="Google Sans Flex"/>
               </a:rPr>
-              <a:t>File on the left. Format and voice beside it. Run, then play the video on the same page.</a:t>
+              <a:t>Drop the chapter, or type a topic.</a:t>
+            </a:r>
+          </a:p>
+        </p:txBody>
+      </p:sp>
+      <p:sp>
+        <p:nvSpPr>
+          <p:cNvPr id="106" name="Oval 105"/>
+          <p:cNvSpPr/>
+          <p:nvPr/>
+        </p:nvSpPr>
+        <p:spPr>
+          <a:xfrm>
+            <a:off x="8467344" y="1463040"/>
+            <a:ext cx="256032" cy="256032"/>
+          </a:xfrm>
+          <a:prstGeom prst="ellipse">
+            <a:avLst/>
+          </a:prstGeom>
+          <a:solidFill>
+            <a:srgbClr val="4285F4"/>
+          </a:solidFill>
+          <a:ln>
+            <a:noFill/>
+          </a:ln>
+          <a:effectLst/>
+        </p:spPr>
+        <p:style>
+          <a:lnRef idx="1">
+            <a:schemeClr val="accent1"/>
+          </a:lnRef>
+          <a:fillRef idx="3">
+            <a:schemeClr val="accent1"/>
+          </a:fillRef>
+          <a:effectRef idx="2">
+            <a:schemeClr val="accent1"/>
+          </a:effectRef>
+          <a:fontRef idx="minor">
+            <a:schemeClr val="lt1"/>
+          </a:fontRef>
+        </p:style>
+        <p:txBody>
+          <a:bodyPr rtlCol="0" anchor="ctr" lIns="0" rIns="0" tIns="0" bIns="0"/>
+          <a:lstStyle/>
+          <a:p>
+            <a:pPr algn="ctr"/>
+            <a:r>
+              <a:rPr sz="1200" b="0" i="0">
+                <a:solidFill>
+                  <a:srgbClr val="FFFFFF"/>
+                </a:solidFill>
+                <a:latin typeface="Google Sans Flex SemiBold"/>
+                <a:ea typeface="Google Sans Flex SemiBold"/>
+                <a:cs typeface="Google Sans Flex SemiBold"/>
+                <a:sym typeface="Google Sans Flex SemiBold"/>
+              </a:rPr>
+              <a:t>1</a:t>
+            </a:r>
+          </a:p>
+        </p:txBody>
+      </p:sp>
+      <p:sp>
+        <p:nvSpPr>
+          <p:cNvPr id="107" name="Rounded Rectangle 106"/>
+          <p:cNvSpPr/>
+          <p:nvPr/>
+        </p:nvSpPr>
+        <p:spPr>
+          <a:xfrm>
+            <a:off x="6053328" y="2340864"/>
+            <a:ext cx="2798064" cy="896112"/>
+          </a:xfrm>
+          <a:prstGeom prst="roundRect">
+            <a:avLst>
+              <a:gd name="adj" fmla="val 7000"/>
+            </a:avLst>
+          </a:prstGeom>
+          <a:solidFill>
+            <a:srgbClr val="F8F9FA"/>
+          </a:solidFill>
+          <a:ln w="9525">
+            <a:solidFill>
+              <a:srgbClr val="DADCE0"/>
+            </a:solidFill>
+          </a:ln>
+          <a:effectLst/>
+        </p:spPr>
+        <p:style>
+          <a:lnRef idx="1">
+            <a:schemeClr val="accent1"/>
+          </a:lnRef>
+          <a:fillRef idx="3">
+            <a:schemeClr val="accent1"/>
+          </a:fillRef>
+          <a:effectRef idx="2">
+            <a:schemeClr val="accent1"/>
+          </a:effectRef>
+          <a:fontRef idx="minor">
+            <a:schemeClr val="lt1"/>
+          </a:fontRef>
+        </p:style>
+        <p:txBody>
+          <a:bodyPr rtlCol="0" anchor="t" wrap="square" lIns="128016" rIns="128016" tIns="102412" bIns="76809"/>
+          <a:lstStyle/>
+          <a:p>
+            <a:pPr algn="l">
+              <a:spcAft>
+                <a:spcPts val="400"/>
+              </a:spcAft>
+            </a:pPr>
+            <a:r>
+              <a:rPr sz="1250" b="0" i="0">
+                <a:solidFill>
+                  <a:srgbClr val="1F1F1F"/>
+                </a:solidFill>
+                <a:latin typeface="Google Sans Flex SemiBold"/>
+                <a:ea typeface="Google Sans Flex SemiBold"/>
+                <a:cs typeface="Google Sans Flex SemiBold"/>
+                <a:sym typeface="Google Sans Flex SemiBold"/>
+              </a:rPr>
+              <a:t>Shape and voice</a:t>
+            </a:r>
+          </a:p>
+          <a:p>
+            <a:pPr algn="l">
+              <a:spcAft>
+                <a:spcPts val="0"/>
+              </a:spcAft>
+            </a:pPr>
+            <a:r>
+              <a:rPr sz="1100" b="0" i="0">
+                <a:solidFill>
+                  <a:srgbClr val="3C4043"/>
+                </a:solidFill>
+                <a:latin typeface="Google Sans Flex"/>
+                <a:ea typeface="Google Sans Flex"/>
+                <a:cs typeface="Google Sans Flex"/>
+                <a:sym typeface="Google Sans Flex"/>
+              </a:rPr>
+              <a:t>Pick the class age, format, look and a Gemini voice.</a:t>
+            </a:r>
+          </a:p>
+        </p:txBody>
+      </p:sp>
+      <p:sp>
+        <p:nvSpPr>
+          <p:cNvPr id="108" name="Oval 107"/>
+          <p:cNvSpPr/>
+          <p:nvPr/>
+        </p:nvSpPr>
+        <p:spPr>
+          <a:xfrm>
+            <a:off x="8467344" y="2432304"/>
+            <a:ext cx="256032" cy="256032"/>
+          </a:xfrm>
+          <a:prstGeom prst="ellipse">
+            <a:avLst/>
+          </a:prstGeom>
+          <a:solidFill>
+            <a:srgbClr val="EA4335"/>
+          </a:solidFill>
+          <a:ln>
+            <a:noFill/>
+          </a:ln>
+          <a:effectLst/>
+        </p:spPr>
+        <p:style>
+          <a:lnRef idx="1">
+            <a:schemeClr val="accent1"/>
+          </a:lnRef>
+          <a:fillRef idx="3">
+            <a:schemeClr val="accent1"/>
+          </a:fillRef>
+          <a:effectRef idx="2">
+            <a:schemeClr val="accent1"/>
+          </a:effectRef>
+          <a:fontRef idx="minor">
+            <a:schemeClr val="lt1"/>
+          </a:fontRef>
+        </p:style>
+        <p:txBody>
+          <a:bodyPr rtlCol="0" anchor="ctr" lIns="0" rIns="0" tIns="0" bIns="0"/>
+          <a:lstStyle/>
+          <a:p>
+            <a:pPr algn="ctr"/>
+            <a:r>
+              <a:rPr sz="1200" b="0" i="0">
+                <a:solidFill>
+                  <a:srgbClr val="FFFFFF"/>
+                </a:solidFill>
+                <a:latin typeface="Google Sans Flex SemiBold"/>
+                <a:ea typeface="Google Sans Flex SemiBold"/>
+                <a:cs typeface="Google Sans Flex SemiBold"/>
+                <a:sym typeface="Google Sans Flex SemiBold"/>
+              </a:rPr>
+              <a:t>2</a:t>
+            </a:r>
+          </a:p>
+        </p:txBody>
+      </p:sp>
+      <p:sp>
+        <p:nvSpPr>
+          <p:cNvPr id="109" name="Rounded Rectangle 108"/>
+          <p:cNvSpPr/>
+          <p:nvPr/>
+        </p:nvSpPr>
+        <p:spPr>
+          <a:xfrm>
+            <a:off x="6053328" y="3310128"/>
+            <a:ext cx="2798064" cy="896112"/>
+          </a:xfrm>
+          <a:prstGeom prst="roundRect">
+            <a:avLst>
+              <a:gd name="adj" fmla="val 7000"/>
+            </a:avLst>
+          </a:prstGeom>
+          <a:solidFill>
+            <a:srgbClr val="F8F9FA"/>
+          </a:solidFill>
+          <a:ln w="9525">
+            <a:solidFill>
+              <a:srgbClr val="DADCE0"/>
+            </a:solidFill>
+          </a:ln>
+          <a:effectLst/>
+        </p:spPr>
+        <p:style>
+          <a:lnRef idx="1">
+            <a:schemeClr val="accent1"/>
+          </a:lnRef>
+          <a:fillRef idx="3">
+            <a:schemeClr val="accent1"/>
+          </a:fillRef>
+          <a:effectRef idx="2">
+            <a:schemeClr val="accent1"/>
+          </a:effectRef>
+          <a:fontRef idx="minor">
+            <a:schemeClr val="lt1"/>
+          </a:fontRef>
+        </p:style>
+        <p:txBody>
+          <a:bodyPr rtlCol="0" anchor="t" wrap="square" lIns="128016" rIns="128016" tIns="102412" bIns="76809"/>
+          <a:lstStyle/>
+          <a:p>
+            <a:pPr algn="l">
+              <a:spcAft>
+                <a:spcPts val="400"/>
+              </a:spcAft>
+            </a:pPr>
+            <a:r>
+              <a:rPr sz="1250" b="0" i="0">
+                <a:solidFill>
+                  <a:srgbClr val="1F1F1F"/>
+                </a:solidFill>
+                <a:latin typeface="Google Sans Flex SemiBold"/>
+                <a:ea typeface="Google Sans Flex SemiBold"/>
+                <a:cs typeface="Google Sans Flex SemiBold"/>
+                <a:sym typeface="Google Sans Flex SemiBold"/>
+              </a:rPr>
+              <a:t>Run and watch</a:t>
+            </a:r>
+          </a:p>
+          <a:p>
+            <a:pPr algn="l">
+              <a:spcAft>
+                <a:spcPts val="0"/>
+              </a:spcAft>
+            </a:pPr>
+            <a:r>
+              <a:rPr sz="1100" b="0" i="0">
+                <a:solidFill>
+                  <a:srgbClr val="3C4043"/>
+                </a:solidFill>
+                <a:latin typeface="Google Sans Flex"/>
+                <a:ea typeface="Google Sans Flex"/>
+                <a:cs typeface="Google Sans Flex"/>
+                <a:sym typeface="Google Sans Flex"/>
+              </a:rPr>
+              <a:t>The video plays on the same page.</a:t>
+            </a:r>
+          </a:p>
+        </p:txBody>
+      </p:sp>
+      <p:sp>
+        <p:nvSpPr>
+          <p:cNvPr id="110" name="Oval 109"/>
+          <p:cNvSpPr/>
+          <p:nvPr/>
+        </p:nvSpPr>
+        <p:spPr>
+          <a:xfrm>
+            <a:off x="8467344" y="3401568"/>
+            <a:ext cx="256032" cy="256032"/>
+          </a:xfrm>
+          <a:prstGeom prst="ellipse">
+            <a:avLst/>
+          </a:prstGeom>
+          <a:solidFill>
+            <a:srgbClr val="1E8E3E"/>
+          </a:solidFill>
+          <a:ln>
+            <a:noFill/>
+          </a:ln>
+          <a:effectLst/>
+        </p:spPr>
+        <p:style>
+          <a:lnRef idx="1">
+            <a:schemeClr val="accent1"/>
+          </a:lnRef>
+          <a:fillRef idx="3">
+            <a:schemeClr val="accent1"/>
+          </a:fillRef>
+          <a:effectRef idx="2">
+            <a:schemeClr val="accent1"/>
+          </a:effectRef>
+          <a:fontRef idx="minor">
+            <a:schemeClr val="lt1"/>
+          </a:fontRef>
+        </p:style>
+        <p:txBody>
+          <a:bodyPr rtlCol="0" anchor="ctr" lIns="0" rIns="0" tIns="0" bIns="0"/>
+          <a:lstStyle/>
+          <a:p>
+            <a:pPr algn="ctr"/>
+            <a:r>
+              <a:rPr sz="1200" b="0" i="0">
+                <a:solidFill>
+                  <a:srgbClr val="FFFFFF"/>
+                </a:solidFill>
+                <a:latin typeface="Google Sans Flex SemiBold"/>
+                <a:ea typeface="Google Sans Flex SemiBold"/>
+                <a:cs typeface="Google Sans Flex SemiBold"/>
+                <a:sym typeface="Google Sans Flex SemiBold"/>
+              </a:rPr>
+              <a:t>3</a:t>
+            </a:r>
+          </a:p>
+        </p:txBody>
+      </p:sp>
+      <p:sp>
+        <p:nvSpPr>
+          <p:cNvPr id="111" name="TextBox 110"/>
+          <p:cNvSpPr txBox="1"/>
+          <p:nvPr/>
+        </p:nvSpPr>
+        <p:spPr>
+          <a:xfrm>
+            <a:off x="292608" y="4297680"/>
+            <a:ext cx="5577840" cy="365760"/>
+          </a:xfrm>
+          <a:prstGeom prst="rect">
+            <a:avLst/>
+          </a:prstGeom>
+          <a:noFill/>
+        </p:spPr>
+        <p:txBody>
+          <a:bodyPr wrap="square" lIns="0" rIns="0" tIns="0" bIns="0"/>
+          <a:lstStyle/>
+          <a:p>
+            <a:pPr algn="l"/>
+            <a:r>
+              <a:rPr sz="1100" b="0" i="0">
+                <a:solidFill>
+                  <a:srgbClr val="5F6368"/>
+                </a:solidFill>
+                <a:latin typeface="Google Sans Flex"/>
+                <a:ea typeface="Google Sans Flex"/>
+                <a:cs typeface="Google Sans Flex"/>
+                <a:sym typeface="Google Sans Flex"/>
+              </a:rPr>
+              <a:t>Screen from the running app.</a:t>
             </a:r>
           </a:p>
         </p:txBody>
@@ -11176,87 +14702,837 @@
       </p:sp>
       <p:sp>
         <p:nvSpPr>
-          <p:cNvPr id="112" name="TextBox 111"/>
-          <p:cNvSpPr txBox="1"/>
+          <p:cNvPr id="112" name="Rounded Rectangle 111"/>
+          <p:cNvSpPr/>
           <p:nvPr/>
         </p:nvSpPr>
         <p:spPr>
           <a:xfrm>
-            <a:off x="292608" y="1371600"/>
-            <a:ext cx="8549640" cy="3520440"/>
-          </a:xfrm>
-          <a:prstGeom prst="rect">
-            <a:avLst/>
-          </a:prstGeom>
-          <a:noFill/>
-        </p:spPr>
+            <a:off x="292608" y="1554480"/>
+            <a:ext cx="2103120" cy="1097280"/>
+          </a:xfrm>
+          <a:prstGeom prst="roundRect">
+            <a:avLst>
+              <a:gd name="adj" fmla="val 7000"/>
+            </a:avLst>
+          </a:prstGeom>
+          <a:solidFill>
+            <a:srgbClr val="E8F0FE"/>
+          </a:solidFill>
+          <a:ln>
+            <a:noFill/>
+          </a:ln>
+          <a:effectLst/>
+        </p:spPr>
+        <p:style>
+          <a:lnRef idx="1">
+            <a:schemeClr val="accent1"/>
+          </a:lnRef>
+          <a:fillRef idx="3">
+            <a:schemeClr val="accent1"/>
+          </a:fillRef>
+          <a:effectRef idx="2">
+            <a:schemeClr val="accent1"/>
+          </a:effectRef>
+          <a:fontRef idx="minor">
+            <a:schemeClr val="lt1"/>
+          </a:fontRef>
+        </p:style>
         <p:txBody>
-          <a:bodyPr wrap="square"/>
+          <a:bodyPr rtlCol="0" anchor="t" wrap="square" lIns="128016" rIns="128016" tIns="102412" bIns="76809"/>
           <a:lstStyle/>
           <a:p>
             <a:pPr algn="l">
-              <a:spcBef>
-                <a:spcPts val="0"/>
-              </a:spcBef>
-              <a:spcAft>
-                <a:spcPts val="800"/>
+              <a:spcAft>
+                <a:spcPts val="400"/>
               </a:spcAft>
             </a:pPr>
             <a:r>
-              <a:rPr sz="1400" b="0" i="0">
+              <a:rPr sz="1300" b="0" i="0">
                 <a:solidFill>
                   <a:srgbClr val="1F1F1F"/>
+                </a:solidFill>
+                <a:latin typeface="Google Sans Flex SemiBold"/>
+                <a:ea typeface="Google Sans Flex SemiBold"/>
+                <a:cs typeface="Google Sans Flex SemiBold"/>
+                <a:sym typeface="Google Sans Flex SemiBold"/>
+              </a:rPr>
+              <a:t>Studio page</a:t>
+            </a:r>
+          </a:p>
+          <a:p>
+            <a:pPr algn="l">
+              <a:spcAft>
+                <a:spcPts val="0"/>
+              </a:spcAft>
+            </a:pPr>
+            <a:r>
+              <a:rPr sz="1100" b="0" i="0">
+                <a:solidFill>
+                  <a:srgbClr val="3C4043"/>
                 </a:solidFill>
                 <a:latin typeface="Google Sans Flex"/>
                 <a:ea typeface="Google Sans Flex"/>
                 <a:cs typeface="Google Sans Flex"/>
                 <a:sym typeface="Google Sans Flex"/>
               </a:rPr>
-              <a:t>Studio page  →  Cloud Run  →  Gemini  →  MP4</a:t>
-            </a:r>
-          </a:p>
-          <a:p>
-            <a:pPr algn="l">
-              <a:spcBef>
-                <a:spcPts val="0"/>
-              </a:spcBef>
-              <a:spcAft>
-                <a:spcPts val="800"/>
-              </a:spcAft>
-            </a:pPr>
+              <a:t>The teacher's browser. No login on the demo.</a:t>
+            </a:r>
+          </a:p>
+        </p:txBody>
+      </p:sp>
+      <p:sp>
+        <p:nvSpPr>
+          <p:cNvPr id="113" name="Rounded Rectangle 112"/>
+          <p:cNvSpPr/>
+          <p:nvPr/>
+        </p:nvSpPr>
+        <p:spPr>
+          <a:xfrm>
+            <a:off x="3154680" y="1371600"/>
+            <a:ext cx="2834640" cy="3246120"/>
+          </a:xfrm>
+          <a:prstGeom prst="roundRect">
+            <a:avLst>
+              <a:gd name="adj" fmla="val 4000"/>
+            </a:avLst>
+          </a:prstGeom>
+          <a:solidFill>
+            <a:srgbClr val="F8F9FA"/>
+          </a:solidFill>
+          <a:ln w="9525">
+            <a:solidFill>
+              <a:srgbClr val="DADCE0"/>
+            </a:solidFill>
+          </a:ln>
+          <a:effectLst/>
+        </p:spPr>
+        <p:style>
+          <a:lnRef idx="1">
+            <a:schemeClr val="accent1"/>
+          </a:lnRef>
+          <a:fillRef idx="3">
+            <a:schemeClr val="accent1"/>
+          </a:fillRef>
+          <a:effectRef idx="2">
+            <a:schemeClr val="accent1"/>
+          </a:effectRef>
+          <a:fontRef idx="minor">
+            <a:schemeClr val="lt1"/>
+          </a:fontRef>
+        </p:style>
+        <p:txBody>
+          <a:bodyPr rtlCol="0" anchor="ctr"/>
+          <a:lstStyle/>
+          <a:p>
+            <a:pPr algn="ctr"/>
+          </a:p>
+        </p:txBody>
+      </p:sp>
+      <p:sp>
+        <p:nvSpPr>
+          <p:cNvPr id="114" name="TextBox 113"/>
+          <p:cNvSpPr txBox="1"/>
+          <p:nvPr/>
+        </p:nvSpPr>
+        <p:spPr>
+          <a:xfrm>
+            <a:off x="3291840" y="1444752"/>
+            <a:ext cx="2560320" cy="274320"/>
+          </a:xfrm>
+          <a:prstGeom prst="rect">
+            <a:avLst/>
+          </a:prstGeom>
+          <a:noFill/>
+        </p:spPr>
+        <p:txBody>
+          <a:bodyPr wrap="square" lIns="0" rIns="0" tIns="0" bIns="0"/>
+          <a:lstStyle/>
+          <a:p>
+            <a:pPr algn="l"/>
             <a:r>
               <a:rPr sz="1400" b="0" i="0">
                 <a:solidFill>
                   <a:srgbClr val="1F1F1F"/>
+                </a:solidFill>
+                <a:latin typeface="Google Sans Flex SemiBold"/>
+                <a:ea typeface="Google Sans Flex SemiBold"/>
+                <a:cs typeface="Google Sans Flex SemiBold"/>
+                <a:sym typeface="Google Sans Flex SemiBold"/>
+              </a:rPr>
+              <a:t>Cloud Run</a:t>
+            </a:r>
+          </a:p>
+        </p:txBody>
+      </p:sp>
+      <p:sp>
+        <p:nvSpPr>
+          <p:cNvPr id="115" name="Rounded Rectangle 114"/>
+          <p:cNvSpPr/>
+          <p:nvPr/>
+        </p:nvSpPr>
+        <p:spPr>
+          <a:xfrm>
+            <a:off x="3291840" y="1828800"/>
+            <a:ext cx="2560320" cy="804672"/>
+          </a:xfrm>
+          <a:prstGeom prst="roundRect">
+            <a:avLst>
+              <a:gd name="adj" fmla="val 7000"/>
+            </a:avLst>
+          </a:prstGeom>
+          <a:solidFill>
+            <a:srgbClr val="FFFFFF"/>
+          </a:solidFill>
+          <a:ln w="9525">
+            <a:solidFill>
+              <a:srgbClr val="DADCE0"/>
+            </a:solidFill>
+          </a:ln>
+          <a:effectLst/>
+        </p:spPr>
+        <p:style>
+          <a:lnRef idx="1">
+            <a:schemeClr val="accent1"/>
+          </a:lnRef>
+          <a:fillRef idx="3">
+            <a:schemeClr val="accent1"/>
+          </a:fillRef>
+          <a:effectRef idx="2">
+            <a:schemeClr val="accent1"/>
+          </a:effectRef>
+          <a:fontRef idx="minor">
+            <a:schemeClr val="lt1"/>
+          </a:fontRef>
+        </p:style>
+        <p:txBody>
+          <a:bodyPr rtlCol="0" anchor="t" wrap="square" lIns="109728" rIns="109728" tIns="87782" bIns="65836"/>
+          <a:lstStyle/>
+          <a:p>
+            <a:pPr algn="l">
+              <a:spcAft>
+                <a:spcPts val="400"/>
+              </a:spcAft>
+            </a:pPr>
+            <a:r>
+              <a:rPr sz="1200" b="0" i="0">
+                <a:solidFill>
+                  <a:srgbClr val="1F1F1F"/>
+                </a:solidFill>
+                <a:latin typeface="Google Sans Flex SemiBold"/>
+                <a:ea typeface="Google Sans Flex SemiBold"/>
+                <a:cs typeface="Google Sans Flex SemiBold"/>
+                <a:sym typeface="Google Sans Flex SemiBold"/>
+              </a:rPr>
+              <a:t>FastAPI jobs</a:t>
+            </a:r>
+          </a:p>
+          <a:p>
+            <a:pPr algn="l">
+              <a:spcAft>
+                <a:spcPts val="0"/>
+              </a:spcAft>
+            </a:pPr>
+            <a:r>
+              <a:rPr sz="1050" b="0" i="0">
+                <a:solidFill>
+                  <a:srgbClr val="3C4043"/>
                 </a:solidFill>
                 <a:latin typeface="Google Sans Flex"/>
                 <a:ea typeface="Google Sans Flex"/>
                 <a:cs typeface="Google Sans Flex"/>
                 <a:sym typeface="Google Sans Flex"/>
               </a:rPr>
-              <a:t>Gemini 3.8 Flash reads the file and writes the slides. Gemini 3.8 Live speaks them. Chrome films the frames. FFmpeg joins the sound.</a:t>
-            </a:r>
-          </a:p>
+              <a:t>Runs the steps in order</a:t>
+            </a:r>
+          </a:p>
+        </p:txBody>
+      </p:sp>
+      <p:sp>
+        <p:nvSpPr>
+          <p:cNvPr id="116" name="Rounded Rectangle 115"/>
+          <p:cNvSpPr/>
+          <p:nvPr/>
+        </p:nvSpPr>
+        <p:spPr>
+          <a:xfrm>
+            <a:off x="3291840" y="2743200"/>
+            <a:ext cx="2560320" cy="804672"/>
+          </a:xfrm>
+          <a:prstGeom prst="roundRect">
+            <a:avLst>
+              <a:gd name="adj" fmla="val 7000"/>
+            </a:avLst>
+          </a:prstGeom>
+          <a:solidFill>
+            <a:srgbClr val="FFFFFF"/>
+          </a:solidFill>
+          <a:ln w="9525">
+            <a:solidFill>
+              <a:srgbClr val="DADCE0"/>
+            </a:solidFill>
+          </a:ln>
+          <a:effectLst/>
+        </p:spPr>
+        <p:style>
+          <a:lnRef idx="1">
+            <a:schemeClr val="accent1"/>
+          </a:lnRef>
+          <a:fillRef idx="3">
+            <a:schemeClr val="accent1"/>
+          </a:fillRef>
+          <a:effectRef idx="2">
+            <a:schemeClr val="accent1"/>
+          </a:effectRef>
+          <a:fontRef idx="minor">
+            <a:schemeClr val="lt1"/>
+          </a:fontRef>
+        </p:style>
+        <p:txBody>
+          <a:bodyPr rtlCol="0" anchor="t" wrap="square" lIns="109728" rIns="109728" tIns="87782" bIns="65836"/>
+          <a:lstStyle/>
           <a:p>
             <a:pPr algn="l">
-              <a:spcBef>
-                <a:spcPts val="0"/>
-              </a:spcBef>
-              <a:spcAft>
-                <a:spcPts val="800"/>
+              <a:spcAft>
+                <a:spcPts val="400"/>
               </a:spcAft>
             </a:pPr>
             <a:r>
-              <a:rPr sz="1400" b="0" i="0">
+              <a:rPr sz="1200" b="0" i="0">
                 <a:solidFill>
                   <a:srgbClr val="1F1F1F"/>
+                </a:solidFill>
+                <a:latin typeface="Google Sans Flex SemiBold"/>
+                <a:ea typeface="Google Sans Flex SemiBold"/>
+                <a:cs typeface="Google Sans Flex SemiBold"/>
+                <a:sym typeface="Google Sans Flex SemiBold"/>
+              </a:rPr>
+              <a:t>Chrome frames</a:t>
+            </a:r>
+          </a:p>
+          <a:p>
+            <a:pPr algn="l">
+              <a:spcAft>
+                <a:spcPts val="0"/>
+              </a:spcAft>
+            </a:pPr>
+            <a:r>
+              <a:rPr sz="1050" b="0" i="0">
+                <a:solidFill>
+                  <a:srgbClr val="3C4043"/>
                 </a:solidFill>
                 <a:latin typeface="Google Sans Flex"/>
                 <a:ea typeface="Google Sans Flex"/>
                 <a:cs typeface="Google Sans Flex"/>
                 <a:sym typeface="Google Sans Flex"/>
               </a:rPr>
-              <a:t>Each job is copied to Firestore. This pitch page is on Firebase Hosting.</a:t>
+              <a:t>Films slides and drawn lines</a:t>
+            </a:r>
+          </a:p>
+        </p:txBody>
+      </p:sp>
+      <p:sp>
+        <p:nvSpPr>
+          <p:cNvPr id="117" name="Rounded Rectangle 116"/>
+          <p:cNvSpPr/>
+          <p:nvPr/>
+        </p:nvSpPr>
+        <p:spPr>
+          <a:xfrm>
+            <a:off x="3291840" y="3657600"/>
+            <a:ext cx="2560320" cy="804672"/>
+          </a:xfrm>
+          <a:prstGeom prst="roundRect">
+            <a:avLst>
+              <a:gd name="adj" fmla="val 7000"/>
+            </a:avLst>
+          </a:prstGeom>
+          <a:solidFill>
+            <a:srgbClr val="FFFFFF"/>
+          </a:solidFill>
+          <a:ln w="9525">
+            <a:solidFill>
+              <a:srgbClr val="DADCE0"/>
+            </a:solidFill>
+          </a:ln>
+          <a:effectLst/>
+        </p:spPr>
+        <p:style>
+          <a:lnRef idx="1">
+            <a:schemeClr val="accent1"/>
+          </a:lnRef>
+          <a:fillRef idx="3">
+            <a:schemeClr val="accent1"/>
+          </a:fillRef>
+          <a:effectRef idx="2">
+            <a:schemeClr val="accent1"/>
+          </a:effectRef>
+          <a:fontRef idx="minor">
+            <a:schemeClr val="lt1"/>
+          </a:fontRef>
+        </p:style>
+        <p:txBody>
+          <a:bodyPr rtlCol="0" anchor="t" wrap="square" lIns="109728" rIns="109728" tIns="87782" bIns="65836"/>
+          <a:lstStyle/>
+          <a:p>
+            <a:pPr algn="l">
+              <a:spcAft>
+                <a:spcPts val="400"/>
+              </a:spcAft>
+            </a:pPr>
+            <a:r>
+              <a:rPr sz="1200" b="0" i="0">
+                <a:solidFill>
+                  <a:srgbClr val="1F1F1F"/>
+                </a:solidFill>
+                <a:latin typeface="Google Sans Flex SemiBold"/>
+                <a:ea typeface="Google Sans Flex SemiBold"/>
+                <a:cs typeface="Google Sans Flex SemiBold"/>
+                <a:sym typeface="Google Sans Flex SemiBold"/>
+              </a:rPr>
+              <a:t>FFmpeg</a:t>
+            </a:r>
+          </a:p>
+          <a:p>
+            <a:pPr algn="l">
+              <a:spcAft>
+                <a:spcPts val="0"/>
+              </a:spcAft>
+            </a:pPr>
+            <a:r>
+              <a:rPr sz="1050" b="0" i="0">
+                <a:solidFill>
+                  <a:srgbClr val="3C4043"/>
+                </a:solidFill>
+                <a:latin typeface="Google Sans Flex"/>
+                <a:ea typeface="Google Sans Flex"/>
+                <a:cs typeface="Google Sans Flex"/>
+                <a:sym typeface="Google Sans Flex"/>
+              </a:rPr>
+              <a:t>Joins picture and sound</a:t>
+            </a:r>
+          </a:p>
+        </p:txBody>
+      </p:sp>
+      <p:sp>
+        <p:nvSpPr>
+          <p:cNvPr id="118" name="Rounded Rectangle 117"/>
+          <p:cNvSpPr/>
+          <p:nvPr/>
+        </p:nvSpPr>
+        <p:spPr>
+          <a:xfrm>
+            <a:off x="6748272" y="1554480"/>
+            <a:ext cx="2103120" cy="1097280"/>
+          </a:xfrm>
+          <a:prstGeom prst="roundRect">
+            <a:avLst>
+              <a:gd name="adj" fmla="val 7000"/>
+            </a:avLst>
+          </a:prstGeom>
+          <a:solidFill>
+            <a:srgbClr val="FCE8E6"/>
+          </a:solidFill>
+          <a:ln>
+            <a:noFill/>
+          </a:ln>
+          <a:effectLst/>
+        </p:spPr>
+        <p:style>
+          <a:lnRef idx="1">
+            <a:schemeClr val="accent1"/>
+          </a:lnRef>
+          <a:fillRef idx="3">
+            <a:schemeClr val="accent1"/>
+          </a:fillRef>
+          <a:effectRef idx="2">
+            <a:schemeClr val="accent1"/>
+          </a:effectRef>
+          <a:fontRef idx="minor">
+            <a:schemeClr val="lt1"/>
+          </a:fontRef>
+        </p:style>
+        <p:txBody>
+          <a:bodyPr rtlCol="0" anchor="t" wrap="square" lIns="128016" rIns="128016" tIns="102412" bIns="76809"/>
+          <a:lstStyle/>
+          <a:p>
+            <a:pPr algn="l">
+              <a:spcAft>
+                <a:spcPts val="400"/>
+              </a:spcAft>
+            </a:pPr>
+            <a:r>
+              <a:rPr sz="1300" b="0" i="0">
+                <a:solidFill>
+                  <a:srgbClr val="1F1F1F"/>
+                </a:solidFill>
+                <a:latin typeface="Google Sans Flex SemiBold"/>
+                <a:ea typeface="Google Sans Flex SemiBold"/>
+                <a:cs typeface="Google Sans Flex SemiBold"/>
+                <a:sym typeface="Google Sans Flex SemiBold"/>
+              </a:rPr>
+              <a:t>Gemini</a:t>
+            </a:r>
+          </a:p>
+          <a:p>
+            <a:pPr algn="l">
+              <a:spcAft>
+                <a:spcPts val="0"/>
+              </a:spcAft>
+            </a:pPr>
+            <a:r>
+              <a:rPr sz="1100" b="0" i="0">
+                <a:solidFill>
+                  <a:srgbClr val="3C4043"/>
+                </a:solidFill>
+                <a:latin typeface="Google Sans Flex"/>
+                <a:ea typeface="Google Sans Flex"/>
+                <a:cs typeface="Google Sans Flex"/>
+                <a:sym typeface="Google Sans Flex"/>
+              </a:rPr>
+              <a:t>3.8 Flash reads and writes. 3.8 Live speaks.</a:t>
+            </a:r>
+          </a:p>
+        </p:txBody>
+      </p:sp>
+      <p:sp>
+        <p:nvSpPr>
+          <p:cNvPr id="119" name="Rounded Rectangle 118"/>
+          <p:cNvSpPr/>
+          <p:nvPr/>
+        </p:nvSpPr>
+        <p:spPr>
+          <a:xfrm>
+            <a:off x="6748272" y="2926080"/>
+            <a:ext cx="2103120" cy="868680"/>
+          </a:xfrm>
+          <a:prstGeom prst="roundRect">
+            <a:avLst>
+              <a:gd name="adj" fmla="val 7000"/>
+            </a:avLst>
+          </a:prstGeom>
+          <a:solidFill>
+            <a:srgbClr val="FEF7E0"/>
+          </a:solidFill>
+          <a:ln>
+            <a:noFill/>
+          </a:ln>
+          <a:effectLst/>
+        </p:spPr>
+        <p:style>
+          <a:lnRef idx="1">
+            <a:schemeClr val="accent1"/>
+          </a:lnRef>
+          <a:fillRef idx="3">
+            <a:schemeClr val="accent1"/>
+          </a:fillRef>
+          <a:effectRef idx="2">
+            <a:schemeClr val="accent1"/>
+          </a:effectRef>
+          <a:fontRef idx="minor">
+            <a:schemeClr val="lt1"/>
+          </a:fontRef>
+        </p:style>
+        <p:txBody>
+          <a:bodyPr rtlCol="0" anchor="t" wrap="square" lIns="128016" rIns="128016" tIns="102412" bIns="76809"/>
+          <a:lstStyle/>
+          <a:p>
+            <a:pPr algn="l">
+              <a:spcAft>
+                <a:spcPts val="400"/>
+              </a:spcAft>
+            </a:pPr>
+            <a:r>
+              <a:rPr sz="1300" b="0" i="0">
+                <a:solidFill>
+                  <a:srgbClr val="1F1F1F"/>
+                </a:solidFill>
+                <a:latin typeface="Google Sans Flex SemiBold"/>
+                <a:ea typeface="Google Sans Flex SemiBold"/>
+                <a:cs typeface="Google Sans Flex SemiBold"/>
+                <a:sym typeface="Google Sans Flex SemiBold"/>
+              </a:rPr>
+              <a:t>Firestore</a:t>
+            </a:r>
+          </a:p>
+          <a:p>
+            <a:pPr algn="l">
+              <a:spcAft>
+                <a:spcPts val="0"/>
+              </a:spcAft>
+            </a:pPr>
+            <a:r>
+              <a:rPr sz="1100" b="0" i="0">
+                <a:solidFill>
+                  <a:srgbClr val="3C4043"/>
+                </a:solidFill>
+                <a:latin typeface="Google Sans Flex"/>
+                <a:ea typeface="Google Sans Flex"/>
+                <a:cs typeface="Google Sans Flex"/>
+                <a:sym typeface="Google Sans Flex"/>
+              </a:rPr>
+              <a:t>A copy of every job.</a:t>
+            </a:r>
+          </a:p>
+        </p:txBody>
+      </p:sp>
+      <p:sp>
+        <p:nvSpPr>
+          <p:cNvPr id="120" name="Rounded Rectangle 119"/>
+          <p:cNvSpPr/>
+          <p:nvPr/>
+        </p:nvSpPr>
+        <p:spPr>
+          <a:xfrm>
+            <a:off x="292608" y="2926080"/>
+            <a:ext cx="2103120" cy="868680"/>
+          </a:xfrm>
+          <a:prstGeom prst="roundRect">
+            <a:avLst>
+              <a:gd name="adj" fmla="val 7000"/>
+            </a:avLst>
+          </a:prstGeom>
+          <a:solidFill>
+            <a:srgbClr val="E6F4EA"/>
+          </a:solidFill>
+          <a:ln>
+            <a:noFill/>
+          </a:ln>
+          <a:effectLst/>
+        </p:spPr>
+        <p:style>
+          <a:lnRef idx="1">
+            <a:schemeClr val="accent1"/>
+          </a:lnRef>
+          <a:fillRef idx="3">
+            <a:schemeClr val="accent1"/>
+          </a:fillRef>
+          <a:effectRef idx="2">
+            <a:schemeClr val="accent1"/>
+          </a:effectRef>
+          <a:fontRef idx="minor">
+            <a:schemeClr val="lt1"/>
+          </a:fontRef>
+        </p:style>
+        <p:txBody>
+          <a:bodyPr rtlCol="0" anchor="t" wrap="square" lIns="128016" rIns="128016" tIns="102412" bIns="76809"/>
+          <a:lstStyle/>
+          <a:p>
+            <a:pPr algn="l">
+              <a:spcAft>
+                <a:spcPts val="400"/>
+              </a:spcAft>
+            </a:pPr>
+            <a:r>
+              <a:rPr sz="1300" b="0" i="0">
+                <a:solidFill>
+                  <a:srgbClr val="1F1F1F"/>
+                </a:solidFill>
+                <a:latin typeface="Google Sans Flex SemiBold"/>
+                <a:ea typeface="Google Sans Flex SemiBold"/>
+                <a:cs typeface="Google Sans Flex SemiBold"/>
+                <a:sym typeface="Google Sans Flex SemiBold"/>
+              </a:rPr>
+              <a:t>MP4</a:t>
+            </a:r>
+          </a:p>
+          <a:p>
+            <a:pPr algn="l">
+              <a:spcAft>
+                <a:spcPts val="0"/>
+              </a:spcAft>
+            </a:pPr>
+            <a:r>
+              <a:rPr sz="1100" b="0" i="0">
+                <a:solidFill>
+                  <a:srgbClr val="3C4043"/>
+                </a:solidFill>
+                <a:latin typeface="Google Sans Flex"/>
+                <a:ea typeface="Google Sans Flex"/>
+                <a:cs typeface="Google Sans Flex"/>
+                <a:sym typeface="Google Sans Flex"/>
+              </a:rPr>
+              <a:t>Comes back to the teacher.</a:t>
+            </a:r>
+          </a:p>
+        </p:txBody>
+      </p:sp>
+      <p:cxnSp>
+        <p:nvCxnSpPr>
+          <p:cNvPr id="121" name="Connector 120"/>
+          <p:cNvCxnSpPr/>
+          <p:nvPr/>
+        </p:nvCxnSpPr>
+        <p:spPr>
+          <a:xfrm>
+            <a:off x="2423160" y="2103120"/>
+            <a:ext cx="713232" cy="0"/>
+          </a:xfrm>
+          <a:prstGeom prst="line">
+            <a:avLst/>
+          </a:prstGeom>
+          <a:ln w="19050">
+            <a:solidFill>
+              <a:srgbClr val="5F6368"/>
+            </a:solidFill>
+            <a:tailEnd type="triangle" w="med" len="med"/>
+          </a:ln>
+        </p:spPr>
+        <p:style>
+          <a:lnRef idx="2">
+            <a:schemeClr val="accent1"/>
+          </a:lnRef>
+          <a:fillRef idx="0">
+            <a:schemeClr val="accent1"/>
+          </a:fillRef>
+          <a:effectRef idx="1">
+            <a:schemeClr val="accent1"/>
+          </a:effectRef>
+          <a:fontRef idx="minor">
+            <a:schemeClr val="tx1"/>
+          </a:fontRef>
+        </p:style>
+      </p:cxnSp>
+      <p:cxnSp>
+        <p:nvCxnSpPr>
+          <p:cNvPr id="122" name="Connector 121"/>
+          <p:cNvCxnSpPr/>
+          <p:nvPr/>
+        </p:nvCxnSpPr>
+        <p:spPr>
+          <a:xfrm>
+            <a:off x="6007608" y="2103120"/>
+            <a:ext cx="722376" cy="0"/>
+          </a:xfrm>
+          <a:prstGeom prst="line">
+            <a:avLst/>
+          </a:prstGeom>
+          <a:ln w="19050">
+            <a:solidFill>
+              <a:srgbClr val="5F6368"/>
+            </a:solidFill>
+            <a:tailEnd type="triangle" w="med" len="med"/>
+          </a:ln>
+        </p:spPr>
+        <p:style>
+          <a:lnRef idx="2">
+            <a:schemeClr val="accent1"/>
+          </a:lnRef>
+          <a:fillRef idx="0">
+            <a:schemeClr val="accent1"/>
+          </a:fillRef>
+          <a:effectRef idx="1">
+            <a:schemeClr val="accent1"/>
+          </a:effectRef>
+          <a:fontRef idx="minor">
+            <a:schemeClr val="tx1"/>
+          </a:fontRef>
+        </p:style>
+      </p:cxnSp>
+      <p:cxnSp>
+        <p:nvCxnSpPr>
+          <p:cNvPr id="123" name="Connector 122"/>
+          <p:cNvCxnSpPr/>
+          <p:nvPr/>
+        </p:nvCxnSpPr>
+        <p:spPr>
+          <a:xfrm>
+            <a:off x="6007608" y="3355848"/>
+            <a:ext cx="722376" cy="0"/>
+          </a:xfrm>
+          <a:prstGeom prst="line">
+            <a:avLst/>
+          </a:prstGeom>
+          <a:ln w="19050">
+            <a:solidFill>
+              <a:srgbClr val="5F6368"/>
+            </a:solidFill>
+            <a:tailEnd type="triangle" w="med" len="med"/>
+          </a:ln>
+        </p:spPr>
+        <p:style>
+          <a:lnRef idx="2">
+            <a:schemeClr val="accent1"/>
+          </a:lnRef>
+          <a:fillRef idx="0">
+            <a:schemeClr val="accent1"/>
+          </a:fillRef>
+          <a:effectRef idx="1">
+            <a:schemeClr val="accent1"/>
+          </a:effectRef>
+          <a:fontRef idx="minor">
+            <a:schemeClr val="tx1"/>
+          </a:fontRef>
+        </p:style>
+      </p:cxnSp>
+      <p:cxnSp>
+        <p:nvCxnSpPr>
+          <p:cNvPr id="124" name="Connector 123"/>
+          <p:cNvCxnSpPr/>
+          <p:nvPr/>
+        </p:nvCxnSpPr>
+        <p:spPr>
+          <a:xfrm flipH="1">
+            <a:off x="2423160" y="3355848"/>
+            <a:ext cx="713232" cy="0"/>
+          </a:xfrm>
+          <a:prstGeom prst="line">
+            <a:avLst/>
+          </a:prstGeom>
+          <a:ln w="19050">
+            <a:solidFill>
+              <a:srgbClr val="5F6368"/>
+            </a:solidFill>
+            <a:tailEnd type="triangle" w="med" len="med"/>
+          </a:ln>
+        </p:spPr>
+        <p:style>
+          <a:lnRef idx="2">
+            <a:schemeClr val="accent1"/>
+          </a:lnRef>
+          <a:fillRef idx="0">
+            <a:schemeClr val="accent1"/>
+          </a:fillRef>
+          <a:effectRef idx="1">
+            <a:schemeClr val="accent1"/>
+          </a:effectRef>
+          <a:fontRef idx="minor">
+            <a:schemeClr val="tx1"/>
+          </a:fontRef>
+        </p:style>
+      </p:cxnSp>
+      <p:sp>
+        <p:nvSpPr>
+          <p:cNvPr id="125" name="TextBox 124"/>
+          <p:cNvSpPr txBox="1"/>
+          <p:nvPr/>
+        </p:nvSpPr>
+        <p:spPr>
+          <a:xfrm>
+            <a:off x="6748272" y="4023360"/>
+            <a:ext cx="2103120" cy="548640"/>
+          </a:xfrm>
+          <a:prstGeom prst="rect">
+            <a:avLst/>
+          </a:prstGeom>
+          <a:noFill/>
+        </p:spPr>
+        <p:txBody>
+          <a:bodyPr wrap="square" lIns="0" rIns="0" tIns="0" bIns="0"/>
+          <a:lstStyle/>
+          <a:p>
+            <a:pPr algn="l"/>
+            <a:r>
+              <a:rPr sz="1050" b="0" i="0">
+                <a:solidFill>
+                  <a:srgbClr val="5F6368"/>
+                </a:solidFill>
+                <a:latin typeface="Google Sans Flex"/>
+                <a:ea typeface="Google Sans Flex"/>
+                <a:cs typeface="Google Sans Flex"/>
+                <a:sym typeface="Google Sans Flex"/>
+              </a:rPr>
+              <a:t>Firebase Hosting serves this pitch page.</a:t>
             </a:r>
           </a:p>
         </p:txBody>
@@ -11438,87 +15714,522 @@
       </p:sp>
       <p:sp>
         <p:nvSpPr>
-          <p:cNvPr id="120" name="TextBox 119"/>
-          <p:cNvSpPr txBox="1"/>
+          <p:cNvPr id="120" name="Rounded Rectangle 119"/>
+          <p:cNvSpPr/>
           <p:nvPr/>
         </p:nvSpPr>
         <p:spPr>
           <a:xfrm>
             <a:off x="292608" y="1371600"/>
-            <a:ext cx="8549640" cy="3520440"/>
-          </a:xfrm>
-          <a:prstGeom prst="rect">
-            <a:avLst/>
-          </a:prstGeom>
-          <a:noFill/>
-        </p:spPr>
+            <a:ext cx="2779776" cy="1353312"/>
+          </a:xfrm>
+          <a:prstGeom prst="roundRect">
+            <a:avLst>
+              <a:gd name="adj" fmla="val 7000"/>
+            </a:avLst>
+          </a:prstGeom>
+          <a:solidFill>
+            <a:srgbClr val="E8F0FE"/>
+          </a:solidFill>
+          <a:ln>
+            <a:noFill/>
+          </a:ln>
+          <a:effectLst/>
+        </p:spPr>
+        <p:style>
+          <a:lnRef idx="1">
+            <a:schemeClr val="accent1"/>
+          </a:lnRef>
+          <a:fillRef idx="3">
+            <a:schemeClr val="accent1"/>
+          </a:fillRef>
+          <a:effectRef idx="2">
+            <a:schemeClr val="accent1"/>
+          </a:effectRef>
+          <a:fontRef idx="minor">
+            <a:schemeClr val="lt1"/>
+          </a:fontRef>
+        </p:style>
         <p:txBody>
-          <a:bodyPr wrap="square"/>
+          <a:bodyPr rtlCol="0" anchor="t" wrap="square" lIns="146304" rIns="146304" tIns="117043" bIns="87782"/>
           <a:lstStyle/>
           <a:p>
             <a:pPr algn="l">
-              <a:spcBef>
-                <a:spcPts val="0"/>
-              </a:spcBef>
-              <a:spcAft>
-                <a:spcPts val="800"/>
+              <a:spcAft>
+                <a:spcPts val="400"/>
               </a:spcAft>
             </a:pPr>
             <a:r>
               <a:rPr sz="1400" b="0" i="0">
                 <a:solidFill>
                   <a:srgbClr val="1F1F1F"/>
+                </a:solidFill>
+                <a:latin typeface="Google Sans Flex SemiBold"/>
+                <a:ea typeface="Google Sans Flex SemiBold"/>
+                <a:cs typeface="Google Sans Flex SemiBold"/>
+                <a:sym typeface="Google Sans Flex SemiBold"/>
+              </a:rPr>
+              <a:t>Gemini 3.8 Flash</a:t>
+            </a:r>
+          </a:p>
+          <a:p>
+            <a:pPr algn="l">
+              <a:spcAft>
+                <a:spcPts val="0"/>
+              </a:spcAft>
+            </a:pPr>
+            <a:r>
+              <a:rPr sz="1200" b="0" i="0">
+                <a:solidFill>
+                  <a:srgbClr val="3C4043"/>
                 </a:solidFill>
                 <a:latin typeface="Google Sans Flex"/>
                 <a:ea typeface="Google Sans Flex"/>
                 <a:cs typeface="Google Sans Flex"/>
                 <a:sym typeface="Google Sans Flex"/>
               </a:rPr>
-              <a:t>Gemini 3.8 Flash writes the slides. Gemini 4 Argon is there when the chapter is dense.</a:t>
-            </a:r>
-          </a:p>
+              <a:t>Reads the file and writes the slides.</a:t>
+            </a:r>
+          </a:p>
+        </p:txBody>
+      </p:sp>
+      <p:sp>
+        <p:nvSpPr>
+          <p:cNvPr id="121" name="Rounded Rectangle 120"/>
+          <p:cNvSpPr/>
+          <p:nvPr/>
+        </p:nvSpPr>
+        <p:spPr>
+          <a:xfrm>
+            <a:off x="3182112" y="1371600"/>
+            <a:ext cx="2779776" cy="1353312"/>
+          </a:xfrm>
+          <a:prstGeom prst="roundRect">
+            <a:avLst>
+              <a:gd name="adj" fmla="val 7000"/>
+            </a:avLst>
+          </a:prstGeom>
+          <a:solidFill>
+            <a:srgbClr val="E8F0FE"/>
+          </a:solidFill>
+          <a:ln>
+            <a:noFill/>
+          </a:ln>
+          <a:effectLst/>
+        </p:spPr>
+        <p:style>
+          <a:lnRef idx="1">
+            <a:schemeClr val="accent1"/>
+          </a:lnRef>
+          <a:fillRef idx="3">
+            <a:schemeClr val="accent1"/>
+          </a:fillRef>
+          <a:effectRef idx="2">
+            <a:schemeClr val="accent1"/>
+          </a:effectRef>
+          <a:fontRef idx="minor">
+            <a:schemeClr val="lt1"/>
+          </a:fontRef>
+        </p:style>
+        <p:txBody>
+          <a:bodyPr rtlCol="0" anchor="t" wrap="square" lIns="146304" rIns="146304" tIns="117043" bIns="87782"/>
+          <a:lstStyle/>
           <a:p>
             <a:pPr algn="l">
-              <a:spcBef>
-                <a:spcPts val="0"/>
-              </a:spcBef>
-              <a:spcAft>
-                <a:spcPts val="800"/>
+              <a:spcAft>
+                <a:spcPts val="400"/>
               </a:spcAft>
             </a:pPr>
             <a:r>
               <a:rPr sz="1400" b="0" i="0">
                 <a:solidFill>
                   <a:srgbClr val="1F1F1F"/>
+                </a:solidFill>
+                <a:latin typeface="Google Sans Flex SemiBold"/>
+                <a:ea typeface="Google Sans Flex SemiBold"/>
+                <a:cs typeface="Google Sans Flex SemiBold"/>
+                <a:sym typeface="Google Sans Flex SemiBold"/>
+              </a:rPr>
+              <a:t>Gemini 4 Argon</a:t>
+            </a:r>
+          </a:p>
+          <a:p>
+            <a:pPr algn="l">
+              <a:spcAft>
+                <a:spcPts val="0"/>
+              </a:spcAft>
+            </a:pPr>
+            <a:r>
+              <a:rPr sz="1200" b="0" i="0">
+                <a:solidFill>
+                  <a:srgbClr val="3C4043"/>
                 </a:solidFill>
                 <a:latin typeface="Google Sans Flex"/>
                 <a:ea typeface="Google Sans Flex"/>
                 <a:cs typeface="Google Sans Flex"/>
                 <a:sym typeface="Google Sans Flex"/>
               </a:rPr>
-              <a:t>Gemini 3.8 Live is the voice.</a:t>
-            </a:r>
-          </a:p>
+              <a:t>Steps in when a chapter is dense.</a:t>
+            </a:r>
+          </a:p>
+        </p:txBody>
+      </p:sp>
+      <p:sp>
+        <p:nvSpPr>
+          <p:cNvPr id="122" name="Rounded Rectangle 121"/>
+          <p:cNvSpPr/>
+          <p:nvPr/>
+        </p:nvSpPr>
+        <p:spPr>
+          <a:xfrm>
+            <a:off x="6071616" y="1371600"/>
+            <a:ext cx="2779776" cy="1353312"/>
+          </a:xfrm>
+          <a:prstGeom prst="roundRect">
+            <a:avLst>
+              <a:gd name="adj" fmla="val 7000"/>
+            </a:avLst>
+          </a:prstGeom>
+          <a:solidFill>
+            <a:srgbClr val="FCE8E6"/>
+          </a:solidFill>
+          <a:ln>
+            <a:noFill/>
+          </a:ln>
+          <a:effectLst/>
+        </p:spPr>
+        <p:style>
+          <a:lnRef idx="1">
+            <a:schemeClr val="accent1"/>
+          </a:lnRef>
+          <a:fillRef idx="3">
+            <a:schemeClr val="accent1"/>
+          </a:fillRef>
+          <a:effectRef idx="2">
+            <a:schemeClr val="accent1"/>
+          </a:effectRef>
+          <a:fontRef idx="minor">
+            <a:schemeClr val="lt1"/>
+          </a:fontRef>
+        </p:style>
+        <p:txBody>
+          <a:bodyPr rtlCol="0" anchor="t" wrap="square" lIns="146304" rIns="146304" tIns="117043" bIns="87782"/>
+          <a:lstStyle/>
           <a:p>
             <a:pPr algn="l">
-              <a:spcBef>
-                <a:spcPts val="0"/>
-              </a:spcBef>
-              <a:spcAft>
-                <a:spcPts val="800"/>
+              <a:spcAft>
+                <a:spcPts val="400"/>
               </a:spcAft>
             </a:pPr>
             <a:r>
               <a:rPr sz="1400" b="0" i="0">
                 <a:solidFill>
                   <a:srgbClr val="1F1F1F"/>
+                </a:solidFill>
+                <a:latin typeface="Google Sans Flex SemiBold"/>
+                <a:ea typeface="Google Sans Flex SemiBold"/>
+                <a:cs typeface="Google Sans Flex SemiBold"/>
+                <a:sym typeface="Google Sans Flex SemiBold"/>
+              </a:rPr>
+              <a:t>Gemini 3.8 Live</a:t>
+            </a:r>
+          </a:p>
+          <a:p>
+            <a:pPr algn="l">
+              <a:spcAft>
+                <a:spcPts val="0"/>
+              </a:spcAft>
+            </a:pPr>
+            <a:r>
+              <a:rPr sz="1200" b="0" i="0">
+                <a:solidFill>
+                  <a:srgbClr val="3C4043"/>
                 </a:solidFill>
                 <a:latin typeface="Google Sans Flex"/>
                 <a:ea typeface="Google Sans Flex"/>
                 <a:cs typeface="Google Sans Flex"/>
                 <a:sym typeface="Google Sans Flex"/>
               </a:rPr>
-              <a:t>Cloud Run hosts the app. Firestore keeps each job. Firebase Hosting serves this pitch.</a:t>
+              <a:t>The voice for every slide.</a:t>
+            </a:r>
+          </a:p>
+        </p:txBody>
+      </p:sp>
+      <p:sp>
+        <p:nvSpPr>
+          <p:cNvPr id="123" name="Rounded Rectangle 122"/>
+          <p:cNvSpPr/>
+          <p:nvPr/>
+        </p:nvSpPr>
+        <p:spPr>
+          <a:xfrm>
+            <a:off x="292608" y="2852928"/>
+            <a:ext cx="2779776" cy="1353312"/>
+          </a:xfrm>
+          <a:prstGeom prst="roundRect">
+            <a:avLst>
+              <a:gd name="adj" fmla="val 7000"/>
+            </a:avLst>
+          </a:prstGeom>
+          <a:solidFill>
+            <a:srgbClr val="FEF7E0"/>
+          </a:solidFill>
+          <a:ln>
+            <a:noFill/>
+          </a:ln>
+          <a:effectLst/>
+        </p:spPr>
+        <p:style>
+          <a:lnRef idx="1">
+            <a:schemeClr val="accent1"/>
+          </a:lnRef>
+          <a:fillRef idx="3">
+            <a:schemeClr val="accent1"/>
+          </a:fillRef>
+          <a:effectRef idx="2">
+            <a:schemeClr val="accent1"/>
+          </a:effectRef>
+          <a:fontRef idx="minor">
+            <a:schemeClr val="lt1"/>
+          </a:fontRef>
+        </p:style>
+        <p:txBody>
+          <a:bodyPr rtlCol="0" anchor="t" wrap="square" lIns="146304" rIns="146304" tIns="117043" bIns="87782"/>
+          <a:lstStyle/>
+          <a:p>
+            <a:pPr algn="l">
+              <a:spcAft>
+                <a:spcPts val="400"/>
+              </a:spcAft>
+            </a:pPr>
+            <a:r>
+              <a:rPr sz="1400" b="0" i="0">
+                <a:solidFill>
+                  <a:srgbClr val="1F1F1F"/>
+                </a:solidFill>
+                <a:latin typeface="Google Sans Flex SemiBold"/>
+                <a:ea typeface="Google Sans Flex SemiBold"/>
+                <a:cs typeface="Google Sans Flex SemiBold"/>
+                <a:sym typeface="Google Sans Flex SemiBold"/>
+              </a:rPr>
+              <a:t>Cloud Run</a:t>
+            </a:r>
+          </a:p>
+          <a:p>
+            <a:pPr algn="l">
+              <a:spcAft>
+                <a:spcPts val="0"/>
+              </a:spcAft>
+            </a:pPr>
+            <a:r>
+              <a:rPr sz="1200" b="0" i="0">
+                <a:solidFill>
+                  <a:srgbClr val="3C4043"/>
+                </a:solidFill>
+                <a:latin typeface="Google Sans Flex"/>
+                <a:ea typeface="Google Sans Flex"/>
+                <a:cs typeface="Google Sans Flex"/>
+                <a:sym typeface="Google Sans Flex"/>
+              </a:rPr>
+              <a:t>Hosts the app and the video work.</a:t>
+            </a:r>
+          </a:p>
+        </p:txBody>
+      </p:sp>
+      <p:sp>
+        <p:nvSpPr>
+          <p:cNvPr id="124" name="Rounded Rectangle 123"/>
+          <p:cNvSpPr/>
+          <p:nvPr/>
+        </p:nvSpPr>
+        <p:spPr>
+          <a:xfrm>
+            <a:off x="3182112" y="2852928"/>
+            <a:ext cx="2779776" cy="1353312"/>
+          </a:xfrm>
+          <a:prstGeom prst="roundRect">
+            <a:avLst>
+              <a:gd name="adj" fmla="val 7000"/>
+            </a:avLst>
+          </a:prstGeom>
+          <a:solidFill>
+            <a:srgbClr val="FEF7E0"/>
+          </a:solidFill>
+          <a:ln>
+            <a:noFill/>
+          </a:ln>
+          <a:effectLst/>
+        </p:spPr>
+        <p:style>
+          <a:lnRef idx="1">
+            <a:schemeClr val="accent1"/>
+          </a:lnRef>
+          <a:fillRef idx="3">
+            <a:schemeClr val="accent1"/>
+          </a:fillRef>
+          <a:effectRef idx="2">
+            <a:schemeClr val="accent1"/>
+          </a:effectRef>
+          <a:fontRef idx="minor">
+            <a:schemeClr val="lt1"/>
+          </a:fontRef>
+        </p:style>
+        <p:txBody>
+          <a:bodyPr rtlCol="0" anchor="t" wrap="square" lIns="146304" rIns="146304" tIns="117043" bIns="87782"/>
+          <a:lstStyle/>
+          <a:p>
+            <a:pPr algn="l">
+              <a:spcAft>
+                <a:spcPts val="400"/>
+              </a:spcAft>
+            </a:pPr>
+            <a:r>
+              <a:rPr sz="1400" b="0" i="0">
+                <a:solidFill>
+                  <a:srgbClr val="1F1F1F"/>
+                </a:solidFill>
+                <a:latin typeface="Google Sans Flex SemiBold"/>
+                <a:ea typeface="Google Sans Flex SemiBold"/>
+                <a:cs typeface="Google Sans Flex SemiBold"/>
+                <a:sym typeface="Google Sans Flex SemiBold"/>
+              </a:rPr>
+              <a:t>Firestore</a:t>
+            </a:r>
+          </a:p>
+          <a:p>
+            <a:pPr algn="l">
+              <a:spcAft>
+                <a:spcPts val="0"/>
+              </a:spcAft>
+            </a:pPr>
+            <a:r>
+              <a:rPr sz="1200" b="0" i="0">
+                <a:solidFill>
+                  <a:srgbClr val="3C4043"/>
+                </a:solidFill>
+                <a:latin typeface="Google Sans Flex"/>
+                <a:ea typeface="Google Sans Flex"/>
+                <a:cs typeface="Google Sans Flex"/>
+                <a:sym typeface="Google Sans Flex"/>
+              </a:rPr>
+              <a:t>Keeps a copy of each job.</a:t>
+            </a:r>
+          </a:p>
+        </p:txBody>
+      </p:sp>
+      <p:sp>
+        <p:nvSpPr>
+          <p:cNvPr id="125" name="Rounded Rectangle 124"/>
+          <p:cNvSpPr/>
+          <p:nvPr/>
+        </p:nvSpPr>
+        <p:spPr>
+          <a:xfrm>
+            <a:off x="6071616" y="2852928"/>
+            <a:ext cx="2779776" cy="1353312"/>
+          </a:xfrm>
+          <a:prstGeom prst="roundRect">
+            <a:avLst>
+              <a:gd name="adj" fmla="val 7000"/>
+            </a:avLst>
+          </a:prstGeom>
+          <a:solidFill>
+            <a:srgbClr val="E6F4EA"/>
+          </a:solidFill>
+          <a:ln>
+            <a:noFill/>
+          </a:ln>
+          <a:effectLst/>
+        </p:spPr>
+        <p:style>
+          <a:lnRef idx="1">
+            <a:schemeClr val="accent1"/>
+          </a:lnRef>
+          <a:fillRef idx="3">
+            <a:schemeClr val="accent1"/>
+          </a:fillRef>
+          <a:effectRef idx="2">
+            <a:schemeClr val="accent1"/>
+          </a:effectRef>
+          <a:fontRef idx="minor">
+            <a:schemeClr val="lt1"/>
+          </a:fontRef>
+        </p:style>
+        <p:txBody>
+          <a:bodyPr rtlCol="0" anchor="t" wrap="square" lIns="146304" rIns="146304" tIns="117043" bIns="87782"/>
+          <a:lstStyle/>
+          <a:p>
+            <a:pPr algn="l">
+              <a:spcAft>
+                <a:spcPts val="400"/>
+              </a:spcAft>
+            </a:pPr>
+            <a:r>
+              <a:rPr sz="1400" b="0" i="0">
+                <a:solidFill>
+                  <a:srgbClr val="1F1F1F"/>
+                </a:solidFill>
+                <a:latin typeface="Google Sans Flex SemiBold"/>
+                <a:ea typeface="Google Sans Flex SemiBold"/>
+                <a:cs typeface="Google Sans Flex SemiBold"/>
+                <a:sym typeface="Google Sans Flex SemiBold"/>
+              </a:rPr>
+              <a:t>Firebase Hosting</a:t>
+            </a:r>
+          </a:p>
+          <a:p>
+            <a:pPr algn="l">
+              <a:spcAft>
+                <a:spcPts val="0"/>
+              </a:spcAft>
+            </a:pPr>
+            <a:r>
+              <a:rPr sz="1200" b="0" i="0">
+                <a:solidFill>
+                  <a:srgbClr val="3C4043"/>
+                </a:solidFill>
+                <a:latin typeface="Google Sans Flex"/>
+                <a:ea typeface="Google Sans Flex"/>
+                <a:cs typeface="Google Sans Flex"/>
+                <a:sym typeface="Google Sans Flex"/>
+              </a:rPr>
+              <a:t>Serves this pitch page.</a:t>
+            </a:r>
+          </a:p>
+        </p:txBody>
+      </p:sp>
+      <p:sp>
+        <p:nvSpPr>
+          <p:cNvPr id="126" name="TextBox 125"/>
+          <p:cNvSpPr txBox="1"/>
+          <p:nvPr/>
+        </p:nvSpPr>
+        <p:spPr>
+          <a:xfrm>
+            <a:off x="292608" y="4343400"/>
+            <a:ext cx="8558784" cy="457200"/>
+          </a:xfrm>
+          <a:prstGeom prst="rect">
+            <a:avLst/>
+          </a:prstGeom>
+          <a:noFill/>
+        </p:spPr>
+        <p:txBody>
+          <a:bodyPr wrap="square" lIns="0" rIns="0" tIns="0" bIns="0"/>
+          <a:lstStyle/>
+          <a:p>
+            <a:pPr algn="l"/>
+            <a:r>
+              <a:rPr sz="1150" b="0" i="0">
+                <a:solidFill>
+                  <a:srgbClr val="5F6368"/>
+                </a:solidFill>
+                <a:latin typeface="Google Sans Flex"/>
+                <a:ea typeface="Google Sans Flex"/>
+                <a:cs typeface="Google Sans Flex"/>
+                <a:sym typeface="Google Sans Flex"/>
+              </a:rPr>
+              <a:t>Inside the container: FastAPI, Playwright and FFmpeg. The six looks and the drawn animation are plain HTML, CSS and a small script, so no extra model is called.</a:t>
             </a:r>
           </a:p>
         </p:txBody>

--- a/Template/Out/Multimodal Studio - AI Builder Cup.pptx
+++ b/Template/Out/Multimodal Studio - AI Builder Cup.pptx
@@ -21,8 +21,9 @@
     <p:sldId id="266" r:id="rId16"/>
     <p:sldId id="267" r:id="rId17"/>
     <p:sldId id="268" r:id="rId18"/>
+    <p:sldId id="272" r:id="rId28"/>
+    <p:sldId id="270" r:id="rId20"/>
     <p:sldId id="269" r:id="rId19"/>
-    <p:sldId id="270" r:id="rId20"/>
     <p:sldId id="271" r:id="rId21"/>
   </p:sldIdLst>
   <p:sldSz cy="5143500" cx="9144000"/>
@@ -7085,7 +7086,7 @@
                 <a:cs typeface="Google Sans Flex"/>
                 <a:sym typeface="Google Sans Flex"/>
               </a:rPr>
-              <a:t>Team leader name: M Sai Teja</a:t>
+              <a:t>Team leader name: M Sai Teja  |  Team member: Anil Kumar</a:t>
             </a:r>
             <a:endParaRPr sz="1800">
               <a:latin typeface="Google Sans Flex"/>
@@ -7382,8 +7383,8 @@
         </p:nvSpPr>
         <p:spPr>
           <a:xfrm>
-            <a:off x="292608" y="1600200"/>
-            <a:ext cx="2779776" cy="2286000"/>
+            <a:off x="292608" y="1325880"/>
+            <a:ext cx="2011680" cy="1051560"/>
           </a:xfrm>
           <a:prstGeom prst="roundRect">
             <a:avLst>
@@ -7413,7 +7414,7 @@
           </a:fontRef>
         </p:style>
         <p:txBody>
-          <a:bodyPr rtlCol="0" anchor="t" wrap="square" lIns="182880" rIns="182880" tIns="146304" bIns="109728"/>
+          <a:bodyPr rtlCol="0" anchor="t" wrap="square" lIns="146304" rIns="146304" tIns="117043" bIns="87782"/>
           <a:lstStyle/>
           <a:p>
             <a:pPr algn="l">
@@ -7422,7 +7423,7 @@
               </a:spcAft>
             </a:pPr>
             <a:r>
-              <a:rPr sz="2200" b="0" i="0">
+              <a:rPr sz="2000" b="0" i="0">
                 <a:solidFill>
                   <a:srgbClr val="1F1F1F"/>
                 </a:solidFill>
@@ -7431,7 +7432,7 @@
                 <a:cs typeface="Google Sans Flex SemiBold"/>
                 <a:sym typeface="Google Sans Flex SemiBold"/>
               </a:rPr>
-              <a:t>No GPU</a:t>
+              <a:t>About ₹4</a:t>
             </a:r>
           </a:p>
           <a:p>
@@ -7441,7 +7442,7 @@
               </a:spcAft>
             </a:pPr>
             <a:r>
-              <a:rPr sz="1300" b="0" i="0">
+              <a:rPr sz="1200" b="0" i="0">
                 <a:solidFill>
                   <a:srgbClr val="3C4043"/>
                 </a:solidFill>
@@ -7450,7 +7451,7 @@
                 <a:cs typeface="Google Sans Flex"/>
                 <a:sym typeface="Google Sans Flex"/>
               </a:rPr>
-              <a:t>Every model call goes to Gemini. The looks and drawn animation are plain CSS, so they add no cost.</a:t>
+              <a:t>1 min video, $0.04</a:t>
             </a:r>
           </a:p>
         </p:txBody>
@@ -7463,8 +7464,170 @@
         </p:nvSpPr>
         <p:spPr>
           <a:xfrm>
-            <a:off x="3182112" y="1600200"/>
-            <a:ext cx="2779776" cy="2286000"/>
+            <a:off x="2473451" y="1325880"/>
+            <a:ext cx="2011680" cy="1051560"/>
+          </a:xfrm>
+          <a:prstGeom prst="roundRect">
+            <a:avLst>
+              <a:gd name="adj" fmla="val 7000"/>
+            </a:avLst>
+          </a:prstGeom>
+          <a:solidFill>
+            <a:srgbClr val="FCE8E6"/>
+          </a:solidFill>
+          <a:ln>
+            <a:noFill/>
+          </a:ln>
+          <a:effectLst/>
+        </p:spPr>
+        <p:style>
+          <a:lnRef idx="1">
+            <a:schemeClr val="accent1"/>
+          </a:lnRef>
+          <a:fillRef idx="3">
+            <a:schemeClr val="accent1"/>
+          </a:fillRef>
+          <a:effectRef idx="2">
+            <a:schemeClr val="accent1"/>
+          </a:effectRef>
+          <a:fontRef idx="minor">
+            <a:schemeClr val="lt1"/>
+          </a:fontRef>
+        </p:style>
+        <p:txBody>
+          <a:bodyPr rtlCol="0" anchor="t" wrap="square" lIns="146304" rIns="146304" tIns="117043" bIns="87782"/>
+          <a:lstStyle/>
+          <a:p>
+            <a:pPr algn="l">
+              <a:spcAft>
+                <a:spcPts val="400"/>
+              </a:spcAft>
+            </a:pPr>
+            <a:r>
+              <a:rPr sz="2000" b="0" i="0">
+                <a:solidFill>
+                  <a:srgbClr val="1F1F1F"/>
+                </a:solidFill>
+                <a:latin typeface="Google Sans Flex SemiBold"/>
+                <a:ea typeface="Google Sans Flex SemiBold"/>
+                <a:cs typeface="Google Sans Flex SemiBold"/>
+                <a:sym typeface="Google Sans Flex SemiBold"/>
+              </a:rPr>
+              <a:t>About ₹9</a:t>
+            </a:r>
+          </a:p>
+          <a:p>
+            <a:pPr algn="l">
+              <a:spcAft>
+                <a:spcPts val="0"/>
+              </a:spcAft>
+            </a:pPr>
+            <a:r>
+              <a:rPr sz="1200" b="0" i="0">
+                <a:solidFill>
+                  <a:srgbClr val="3C4043"/>
+                </a:solidFill>
+                <a:latin typeface="Google Sans Flex"/>
+                <a:ea typeface="Google Sans Flex"/>
+                <a:cs typeface="Google Sans Flex"/>
+                <a:sym typeface="Google Sans Flex"/>
+              </a:rPr>
+              <a:t>3 min video, $0.10</a:t>
+            </a:r>
+          </a:p>
+        </p:txBody>
+      </p:sp>
+      <p:sp>
+        <p:nvSpPr>
+          <p:cNvPr id="130" name="Rounded Rectangle 129"/>
+          <p:cNvSpPr/>
+          <p:nvPr/>
+        </p:nvSpPr>
+        <p:spPr>
+          <a:xfrm>
+            <a:off x="4654296" y="1325880"/>
+            <a:ext cx="2011680" cy="1051560"/>
+          </a:xfrm>
+          <a:prstGeom prst="roundRect">
+            <a:avLst>
+              <a:gd name="adj" fmla="val 7000"/>
+            </a:avLst>
+          </a:prstGeom>
+          <a:solidFill>
+            <a:srgbClr val="FEF7E0"/>
+          </a:solidFill>
+          <a:ln>
+            <a:noFill/>
+          </a:ln>
+          <a:effectLst/>
+        </p:spPr>
+        <p:style>
+          <a:lnRef idx="1">
+            <a:schemeClr val="accent1"/>
+          </a:lnRef>
+          <a:fillRef idx="3">
+            <a:schemeClr val="accent1"/>
+          </a:fillRef>
+          <a:effectRef idx="2">
+            <a:schemeClr val="accent1"/>
+          </a:effectRef>
+          <a:fontRef idx="minor">
+            <a:schemeClr val="lt1"/>
+          </a:fontRef>
+        </p:style>
+        <p:txBody>
+          <a:bodyPr rtlCol="0" anchor="t" wrap="square" lIns="146304" rIns="146304" tIns="117043" bIns="87782"/>
+          <a:lstStyle/>
+          <a:p>
+            <a:pPr algn="l">
+              <a:spcAft>
+                <a:spcPts val="400"/>
+              </a:spcAft>
+            </a:pPr>
+            <a:r>
+              <a:rPr sz="2000" b="0" i="0">
+                <a:solidFill>
+                  <a:srgbClr val="1F1F1F"/>
+                </a:solidFill>
+                <a:latin typeface="Google Sans Flex SemiBold"/>
+                <a:ea typeface="Google Sans Flex SemiBold"/>
+                <a:cs typeface="Google Sans Flex SemiBold"/>
+                <a:sym typeface="Google Sans Flex SemiBold"/>
+              </a:rPr>
+              <a:t>About ₹14</a:t>
+            </a:r>
+          </a:p>
+          <a:p>
+            <a:pPr algn="l">
+              <a:spcAft>
+                <a:spcPts val="0"/>
+              </a:spcAft>
+            </a:pPr>
+            <a:r>
+              <a:rPr sz="1200" b="0" i="0">
+                <a:solidFill>
+                  <a:srgbClr val="3C4043"/>
+                </a:solidFill>
+                <a:latin typeface="Google Sans Flex"/>
+                <a:ea typeface="Google Sans Flex"/>
+                <a:cs typeface="Google Sans Flex"/>
+                <a:sym typeface="Google Sans Flex"/>
+              </a:rPr>
+              <a:t>5 min video, $0.15</a:t>
+            </a:r>
+          </a:p>
+        </p:txBody>
+      </p:sp>
+      <p:sp>
+        <p:nvSpPr>
+          <p:cNvPr id="131" name="Rounded Rectangle 130"/>
+          <p:cNvSpPr/>
+          <p:nvPr/>
+        </p:nvSpPr>
+        <p:spPr>
+          <a:xfrm>
+            <a:off x="6835140" y="1325880"/>
+            <a:ext cx="2011680" cy="1051560"/>
           </a:xfrm>
           <a:prstGeom prst="roundRect">
             <a:avLst>
@@ -7494,7 +7657,7 @@
           </a:fontRef>
         </p:style>
         <p:txBody>
-          <a:bodyPr rtlCol="0" anchor="t" wrap="square" lIns="182880" rIns="182880" tIns="146304" bIns="109728"/>
+          <a:bodyPr rtlCol="0" anchor="t" wrap="square" lIns="146304" rIns="146304" tIns="117043" bIns="87782"/>
           <a:lstStyle/>
           <a:p>
             <a:pPr algn="l">
@@ -7503,7 +7666,7 @@
               </a:spcAft>
             </a:pPr>
             <a:r>
-              <a:rPr sz="2200" b="0" i="0">
+              <a:rPr sz="2000" b="0" i="0">
                 <a:solidFill>
                   <a:srgbClr val="1F1F1F"/>
                 </a:solidFill>
@@ -7512,7 +7675,7 @@
                 <a:cs typeface="Google Sans Flex SemiBold"/>
                 <a:sym typeface="Google Sans Flex SemiBold"/>
               </a:rPr>
-              <a:t>Free tier</a:t>
+              <a:t>About ₹26</a:t>
             </a:r>
           </a:p>
           <a:p>
@@ -7522,7 +7685,7 @@
               </a:spcAft>
             </a:pPr>
             <a:r>
-              <a:rPr sz="1300" b="0" i="0">
+              <a:rPr sz="1200" b="0" i="0">
                 <a:solidFill>
                   <a:srgbClr val="3C4043"/>
                 </a:solidFill>
@@ -7531,21 +7694,21 @@
                 <a:cs typeface="Google Sans Flex"/>
                 <a:sym typeface="Google Sans Flex"/>
               </a:rPr>
-              <a:t>Cloud Run and Firestore stay free at review traffic.</a:t>
-            </a:r>
-          </a:p>
-        </p:txBody>
-      </p:sp>
-      <p:sp>
-        <p:nvSpPr>
-          <p:cNvPr id="130" name="Rounded Rectangle 129"/>
+              <a:t>10 min video, $0.30</a:t>
+            </a:r>
+          </a:p>
+        </p:txBody>
+      </p:sp>
+      <p:sp>
+        <p:nvSpPr>
+          <p:cNvPr id="132" name="Rounded Rectangle 131"/>
           <p:cNvSpPr/>
           <p:nvPr/>
         </p:nvSpPr>
         <p:spPr>
           <a:xfrm>
-            <a:off x="6071616" y="1600200"/>
-            <a:ext cx="2779776" cy="2286000"/>
+            <a:off x="292608" y="2514600"/>
+            <a:ext cx="2779776" cy="1645920"/>
           </a:xfrm>
           <a:prstGeom prst="roundRect">
             <a:avLst>
@@ -7553,7 +7716,7 @@
             </a:avLst>
           </a:prstGeom>
           <a:solidFill>
-            <a:srgbClr val="FEF7E0"/>
+            <a:srgbClr val="FCE8E6"/>
           </a:solidFill>
           <a:ln>
             <a:noFill/>
@@ -7575,7 +7738,7 @@
           </a:fontRef>
         </p:style>
         <p:txBody>
-          <a:bodyPr rtlCol="0" anchor="t" wrap="square" lIns="182880" rIns="182880" tIns="146304" bIns="109728"/>
+          <a:bodyPr rtlCol="0" anchor="t" wrap="square" lIns="146304" rIns="146304" tIns="117043" bIns="87782"/>
           <a:lstStyle/>
           <a:p>
             <a:pPr algn="l">
@@ -7584,7 +7747,7 @@
               </a:spcAft>
             </a:pPr>
             <a:r>
-              <a:rPr sz="2200" b="0" i="0">
+              <a:rPr sz="1400" b="0" i="0">
                 <a:solidFill>
                   <a:srgbClr val="1F1F1F"/>
                 </a:solidFill>
@@ -7593,7 +7756,7 @@
                 <a:cs typeface="Google Sans Flex SemiBold"/>
                 <a:sym typeface="Google Sans Flex SemiBold"/>
               </a:rPr>
-              <a:t>A few rupees</a:t>
+              <a:t>Where it goes</a:t>
             </a:r>
           </a:p>
           <a:p>
@@ -7603,7 +7766,7 @@
               </a:spcAft>
             </a:pPr>
             <a:r>
-              <a:rPr sz="1300" b="0" i="0">
+              <a:rPr sz="1200" b="0" i="0">
                 <a:solidFill>
                   <a:srgbClr val="3C4043"/>
                 </a:solidFill>
@@ -7612,7 +7775,227 @@
                 <a:cs typeface="Google Sans Flex"/>
                 <a:sym typeface="Google Sans Flex"/>
               </a:rPr>
-              <a:t>One normal video on Gemini Flash costs a few rupees.</a:t>
+              <a:t>Voice is about 73%, slide writing 16%, planning and notes 10%. Voice is the lever, so voice choice matters most.</a:t>
+            </a:r>
+          </a:p>
+        </p:txBody>
+      </p:sp>
+      <p:sp>
+        <p:nvSpPr>
+          <p:cNvPr id="133" name="Rounded Rectangle 132"/>
+          <p:cNvSpPr/>
+          <p:nvPr/>
+        </p:nvSpPr>
+        <p:spPr>
+          <a:xfrm>
+            <a:off x="3182112" y="2514600"/>
+            <a:ext cx="2779776" cy="1645920"/>
+          </a:xfrm>
+          <a:prstGeom prst="roundRect">
+            <a:avLst>
+              <a:gd name="adj" fmla="val 7000"/>
+            </a:avLst>
+          </a:prstGeom>
+          <a:solidFill>
+            <a:srgbClr val="E8F0FE"/>
+          </a:solidFill>
+          <a:ln>
+            <a:noFill/>
+          </a:ln>
+          <a:effectLst/>
+        </p:spPr>
+        <p:style>
+          <a:lnRef idx="1">
+            <a:schemeClr val="accent1"/>
+          </a:lnRef>
+          <a:fillRef idx="3">
+            <a:schemeClr val="accent1"/>
+          </a:fillRef>
+          <a:effectRef idx="2">
+            <a:schemeClr val="accent1"/>
+          </a:effectRef>
+          <a:fontRef idx="minor">
+            <a:schemeClr val="lt1"/>
+          </a:fontRef>
+        </p:style>
+        <p:txBody>
+          <a:bodyPr rtlCol="0" anchor="t" wrap="square" lIns="146304" rIns="146304" tIns="117043" bIns="87782"/>
+          <a:lstStyle/>
+          <a:p>
+            <a:pPr algn="l">
+              <a:spcAft>
+                <a:spcPts val="400"/>
+              </a:spcAft>
+            </a:pPr>
+            <a:r>
+              <a:rPr sz="1400" b="0" i="0">
+                <a:solidFill>
+                  <a:srgbClr val="1F1F1F"/>
+                </a:solidFill>
+                <a:latin typeface="Google Sans Flex SemiBold"/>
+                <a:ea typeface="Google Sans Flex SemiBold"/>
+                <a:cs typeface="Google Sans Flex SemiBold"/>
+                <a:sym typeface="Google Sans Flex SemiBold"/>
+              </a:rPr>
+              <a:t>Logged, not guessed</a:t>
+            </a:r>
+          </a:p>
+          <a:p>
+            <a:pPr algn="l">
+              <a:spcAft>
+                <a:spcPts val="0"/>
+              </a:spcAft>
+            </a:pPr>
+            <a:r>
+              <a:rPr sz="1200" b="0" i="0">
+                <a:solidFill>
+                  <a:srgbClr val="3C4043"/>
+                </a:solidFill>
+                <a:latin typeface="Google Sans Flex"/>
+                <a:ea typeface="Google Sans Flex"/>
+                <a:cs typeface="Google Sans Flex"/>
+                <a:sym typeface="Google Sans Flex"/>
+              </a:rPr>
+              <a:t>Admin &gt; Costs records every call: model, tokens and dollars, per job and per day. Two live voice tests so far: $0.002.</a:t>
+            </a:r>
+          </a:p>
+        </p:txBody>
+      </p:sp>
+      <p:sp>
+        <p:nvSpPr>
+          <p:cNvPr id="134" name="Rounded Rectangle 133"/>
+          <p:cNvSpPr/>
+          <p:nvPr/>
+        </p:nvSpPr>
+        <p:spPr>
+          <a:xfrm>
+            <a:off x="6071616" y="2514600"/>
+            <a:ext cx="2779776" cy="1645920"/>
+          </a:xfrm>
+          <a:prstGeom prst="roundRect">
+            <a:avLst>
+              <a:gd name="adj" fmla="val 7000"/>
+            </a:avLst>
+          </a:prstGeom>
+          <a:solidFill>
+            <a:srgbClr val="E6F4EA"/>
+          </a:solidFill>
+          <a:ln>
+            <a:noFill/>
+          </a:ln>
+          <a:effectLst/>
+        </p:spPr>
+        <p:style>
+          <a:lnRef idx="1">
+            <a:schemeClr val="accent1"/>
+          </a:lnRef>
+          <a:fillRef idx="3">
+            <a:schemeClr val="accent1"/>
+          </a:fillRef>
+          <a:effectRef idx="2">
+            <a:schemeClr val="accent1"/>
+          </a:effectRef>
+          <a:fontRef idx="minor">
+            <a:schemeClr val="lt1"/>
+          </a:fontRef>
+        </p:style>
+        <p:txBody>
+          <a:bodyPr rtlCol="0" anchor="t" wrap="square" lIns="146304" rIns="146304" tIns="117043" bIns="87782"/>
+          <a:lstStyle/>
+          <a:p>
+            <a:pPr algn="l">
+              <a:spcAft>
+                <a:spcPts val="400"/>
+              </a:spcAft>
+            </a:pPr>
+            <a:r>
+              <a:rPr sz="1400" b="0" i="0">
+                <a:solidFill>
+                  <a:srgbClr val="1F1F1F"/>
+                </a:solidFill>
+                <a:latin typeface="Google Sans Flex SemiBold"/>
+                <a:ea typeface="Google Sans Flex SemiBold"/>
+                <a:cs typeface="Google Sans Flex SemiBold"/>
+                <a:sym typeface="Google Sans Flex SemiBold"/>
+              </a:rPr>
+              <a:t>Hosting about ₹0</a:t>
+            </a:r>
+          </a:p>
+          <a:p>
+            <a:pPr algn="l">
+              <a:spcAft>
+                <a:spcPts val="0"/>
+              </a:spcAft>
+            </a:pPr>
+            <a:r>
+              <a:rPr sz="1200" b="0" i="0">
+                <a:solidFill>
+                  <a:srgbClr val="3C4043"/>
+                </a:solidFill>
+                <a:latin typeface="Google Sans Flex"/>
+                <a:ea typeface="Google Sans Flex"/>
+                <a:cs typeface="Google Sans Flex"/>
+                <a:sym typeface="Google Sans Flex"/>
+              </a:rPr>
+              <a:t>No GPU. Cloud Run and Firestore stay in the free tier at review traffic. Looks and drawn motion are CSS, no model call.</a:t>
+            </a:r>
+          </a:p>
+        </p:txBody>
+      </p:sp>
+      <p:sp>
+        <p:nvSpPr>
+          <p:cNvPr id="135" name="Rounded Rectangle 134"/>
+          <p:cNvSpPr/>
+          <p:nvPr/>
+        </p:nvSpPr>
+        <p:spPr>
+          <a:xfrm>
+            <a:off x="292608" y="4297680"/>
+            <a:ext cx="8558784" cy="457200"/>
+          </a:xfrm>
+          <a:prstGeom prst="roundRect">
+            <a:avLst>
+              <a:gd name="adj" fmla="val 50000"/>
+            </a:avLst>
+          </a:prstGeom>
+          <a:solidFill>
+            <a:srgbClr val="1F1F1F"/>
+          </a:solidFill>
+          <a:ln>
+            <a:noFill/>
+          </a:ln>
+          <a:effectLst/>
+        </p:spPr>
+        <p:style>
+          <a:lnRef idx="1">
+            <a:schemeClr val="accent1"/>
+          </a:lnRef>
+          <a:fillRef idx="3">
+            <a:schemeClr val="accent1"/>
+          </a:fillRef>
+          <a:effectRef idx="2">
+            <a:schemeClr val="accent1"/>
+          </a:effectRef>
+          <a:fontRef idx="minor">
+            <a:schemeClr val="lt1"/>
+          </a:fontRef>
+        </p:style>
+        <p:txBody>
+          <a:bodyPr rtlCol="0" anchor="ctr" wrap="square" lIns="109728" rIns="109728" tIns="27432" bIns="27432"/>
+          <a:lstStyle/>
+          <a:p>
+            <a:pPr algn="ctr"/>
+            <a:r>
+              <a:rPr sz="1100" b="0" i="0">
+                <a:solidFill>
+                  <a:srgbClr val="FFFFFF"/>
+                </a:solidFill>
+                <a:latin typeface="Google Sans Flex Medium"/>
+                <a:ea typeface="Google Sans Flex Medium"/>
+                <a:cs typeface="Google Sans Flex Medium"/>
+                <a:sym typeface="Google Sans Flex Medium"/>
+              </a:rPr>
+              <a:t>Estimates from the dashboard's rate table, at ₹88 per $. Flash intro rates end 31 Dec 2026; a 3 min video is then about ₹11.</a:t>
             </a:r>
           </a:p>
         </p:txBody>
@@ -8764,7 +9147,7 @@
         <p:spPr>
           <a:xfrm>
             <a:off x="292608" y="1371600"/>
-            <a:ext cx="4206240" cy="1554480"/>
+            <a:ext cx="2779776" cy="1517904"/>
           </a:xfrm>
           <a:prstGeom prst="roundRect">
             <a:avLst>
@@ -8794,7 +9177,7 @@
           </a:fontRef>
         </p:style>
         <p:txBody>
-          <a:bodyPr rtlCol="0" anchor="t" wrap="square" lIns="146304" rIns="146304" tIns="501091" bIns="87782"/>
+          <a:bodyPr rtlCol="0" anchor="t" wrap="square" lIns="128016" rIns="128016" tIns="486460" bIns="76809"/>
           <a:lstStyle/>
           <a:p>
             <a:pPr algn="l">
@@ -8803,7 +9186,7 @@
               </a:spcAft>
             </a:pPr>
             <a:r>
-              <a:rPr sz="1400" b="0" i="0">
+              <a:rPr sz="1300" b="0" i="0">
                 <a:solidFill>
                   <a:srgbClr val="1F1F1F"/>
                 </a:solidFill>
@@ -8812,7 +9195,7 @@
                 <a:cs typeface="Google Sans Flex SemiBold"/>
                 <a:sym typeface="Google Sans Flex SemiBold"/>
               </a:rPr>
-              <a:t>Built: six unique looks</a:t>
+              <a:t>Built today</a:t>
             </a:r>
           </a:p>
           <a:p>
@@ -8822,7 +9205,7 @@
               </a:spcAft>
             </a:pPr>
             <a:r>
-              <a:rPr sz="1250" b="0" i="0">
+              <a:rPr sz="1150" b="0" i="0">
                 <a:solidFill>
                   <a:srgbClr val="3C4043"/>
                 </a:solidFill>
@@ -8831,7 +9214,7 @@
                 <a:cs typeface="Google Sans Flex"/>
                 <a:sym typeface="Google Sans Flex"/>
               </a:rPr>
-              <a:t>Whiteboard, notebook, poster, editorial, broadcast and bento. Structure, font and motion differ, not only colour.</a:t>
+              <a:t>Six looks, hand-drawn strokes, type sized to fit, and a highlight that follows the voice.</a:t>
             </a:r>
           </a:p>
         </p:txBody>
@@ -8844,7 +9227,7 @@
         </p:nvSpPr>
         <p:spPr>
           <a:xfrm>
-            <a:off x="438912" y="1474012"/>
+            <a:off x="420624" y="1461211"/>
             <a:ext cx="292608" cy="292608"/>
           </a:xfrm>
           <a:prstGeom prst="ellipse">
@@ -8900,8 +9283,419 @@
         </p:nvSpPr>
         <p:spPr>
           <a:xfrm>
-            <a:off x="4645152" y="1371600"/>
-            <a:ext cx="4206240" cy="1554480"/>
+            <a:off x="3182112" y="1371600"/>
+            <a:ext cx="2779776" cy="1517904"/>
+          </a:xfrm>
+          <a:prstGeom prst="roundRect">
+            <a:avLst>
+              <a:gd name="adj" fmla="val 7000"/>
+            </a:avLst>
+          </a:prstGeom>
+          <a:solidFill>
+            <a:srgbClr val="E8F0FE"/>
+          </a:solidFill>
+          <a:ln>
+            <a:noFill/>
+          </a:ln>
+          <a:effectLst/>
+        </p:spPr>
+        <p:style>
+          <a:lnRef idx="1">
+            <a:schemeClr val="accent1"/>
+          </a:lnRef>
+          <a:fillRef idx="3">
+            <a:schemeClr val="accent1"/>
+          </a:fillRef>
+          <a:effectRef idx="2">
+            <a:schemeClr val="accent1"/>
+          </a:effectRef>
+          <a:fontRef idx="minor">
+            <a:schemeClr val="lt1"/>
+          </a:fontRef>
+        </p:style>
+        <p:txBody>
+          <a:bodyPr rtlCol="0" anchor="t" wrap="square" lIns="128016" rIns="128016" tIns="486460" bIns="76809"/>
+          <a:lstStyle/>
+          <a:p>
+            <a:pPr algn="l">
+              <a:spcAft>
+                <a:spcPts val="400"/>
+              </a:spcAft>
+            </a:pPr>
+            <a:r>
+              <a:rPr sz="1300" b="0" i="0">
+                <a:solidFill>
+                  <a:srgbClr val="1F1F1F"/>
+                </a:solidFill>
+                <a:latin typeface="Google Sans Flex SemiBold"/>
+                <a:ea typeface="Google Sans Flex SemiBold"/>
+                <a:cs typeface="Google Sans Flex SemiBold"/>
+                <a:sym typeface="Google Sans Flex SemiBold"/>
+              </a:rPr>
+              <a:t>More animation</a:t>
+            </a:r>
+          </a:p>
+          <a:p>
+            <a:pPr algn="l">
+              <a:spcAft>
+                <a:spcPts val="0"/>
+              </a:spcAft>
+            </a:pPr>
+            <a:r>
+              <a:rPr sz="1150" b="0" i="0">
+                <a:solidFill>
+                  <a:srgbClr val="3C4043"/>
+                </a:solidFill>
+                <a:latin typeface="Google Sans Flex"/>
+                <a:ea typeface="Google Sans Flex"/>
+                <a:cs typeface="Google Sans Flex"/>
+                <a:sym typeface="Google Sans Flex"/>
+              </a:rPr>
+              <a:t>Charts and arrows that build step by step, Manim-style formulas, a pen that circles key words, short moves between sections.</a:t>
+            </a:r>
+          </a:p>
+        </p:txBody>
+      </p:sp>
+      <p:sp>
+        <p:nvSpPr>
+          <p:cNvPr id="155" name="Oval 154"/>
+          <p:cNvSpPr/>
+          <p:nvPr/>
+        </p:nvSpPr>
+        <p:spPr>
+          <a:xfrm>
+            <a:off x="3310128" y="1461211"/>
+            <a:ext cx="292608" cy="292608"/>
+          </a:xfrm>
+          <a:prstGeom prst="ellipse">
+            <a:avLst/>
+          </a:prstGeom>
+          <a:solidFill>
+            <a:srgbClr val="4285F4"/>
+          </a:solidFill>
+          <a:ln>
+            <a:noFill/>
+          </a:ln>
+          <a:effectLst/>
+        </p:spPr>
+        <p:style>
+          <a:lnRef idx="1">
+            <a:schemeClr val="accent1"/>
+          </a:lnRef>
+          <a:fillRef idx="3">
+            <a:schemeClr val="accent1"/>
+          </a:fillRef>
+          <a:effectRef idx="2">
+            <a:schemeClr val="accent1"/>
+          </a:effectRef>
+          <a:fontRef idx="minor">
+            <a:schemeClr val="lt1"/>
+          </a:fontRef>
+        </p:style>
+        <p:txBody>
+          <a:bodyPr rtlCol="0" anchor="ctr" lIns="0" rIns="0" tIns="0" bIns="0"/>
+          <a:lstStyle/>
+          <a:p>
+            <a:pPr algn="ctr"/>
+            <a:r>
+              <a:rPr sz="1200" b="0" i="0">
+                <a:solidFill>
+                  <a:srgbClr val="FFFFFF"/>
+                </a:solidFill>
+                <a:latin typeface="Google Sans Flex SemiBold"/>
+                <a:ea typeface="Google Sans Flex SemiBold"/>
+                <a:cs typeface="Google Sans Flex SemiBold"/>
+                <a:sym typeface="Google Sans Flex SemiBold"/>
+              </a:rPr>
+              <a:t>2</a:t>
+            </a:r>
+          </a:p>
+        </p:txBody>
+      </p:sp>
+      <p:sp>
+        <p:nvSpPr>
+          <p:cNvPr id="156" name="Rounded Rectangle 155"/>
+          <p:cNvSpPr/>
+          <p:nvPr/>
+        </p:nvSpPr>
+        <p:spPr>
+          <a:xfrm>
+            <a:off x="6071616" y="1371600"/>
+            <a:ext cx="2779776" cy="1517904"/>
+          </a:xfrm>
+          <a:prstGeom prst="roundRect">
+            <a:avLst>
+              <a:gd name="adj" fmla="val 7000"/>
+            </a:avLst>
+          </a:prstGeom>
+          <a:solidFill>
+            <a:srgbClr val="FCE8E6"/>
+          </a:solidFill>
+          <a:ln>
+            <a:noFill/>
+          </a:ln>
+          <a:effectLst/>
+        </p:spPr>
+        <p:style>
+          <a:lnRef idx="1">
+            <a:schemeClr val="accent1"/>
+          </a:lnRef>
+          <a:fillRef idx="3">
+            <a:schemeClr val="accent1"/>
+          </a:fillRef>
+          <a:effectRef idx="2">
+            <a:schemeClr val="accent1"/>
+          </a:effectRef>
+          <a:fontRef idx="minor">
+            <a:schemeClr val="lt1"/>
+          </a:fontRef>
+        </p:style>
+        <p:txBody>
+          <a:bodyPr rtlCol="0" anchor="t" wrap="square" lIns="128016" rIns="128016" tIns="486460" bIns="76809"/>
+          <a:lstStyle/>
+          <a:p>
+            <a:pPr algn="l">
+              <a:spcAft>
+                <a:spcPts val="400"/>
+              </a:spcAft>
+            </a:pPr>
+            <a:r>
+              <a:rPr sz="1300" b="0" i="0">
+                <a:solidFill>
+                  <a:srgbClr val="1F1F1F"/>
+                </a:solidFill>
+                <a:latin typeface="Google Sans Flex SemiBold"/>
+                <a:ea typeface="Google Sans Flex SemiBold"/>
+                <a:cs typeface="Google Sans Flex SemiBold"/>
+                <a:sym typeface="Google Sans Flex SemiBold"/>
+              </a:rPr>
+              <a:t>More engaging content</a:t>
+            </a:r>
+          </a:p>
+          <a:p>
+            <a:pPr algn="l">
+              <a:spcAft>
+                <a:spcPts val="0"/>
+              </a:spcAft>
+            </a:pPr>
+            <a:r>
+              <a:rPr sz="1150" b="0" i="0">
+                <a:solidFill>
+                  <a:srgbClr val="3C4043"/>
+                </a:solidFill>
+                <a:latin typeface="Google Sans Flex"/>
+                <a:ea typeface="Google Sans Flex"/>
+                <a:cs typeface="Google Sans Flex"/>
+                <a:sym typeface="Google Sans Flex"/>
+              </a:rPr>
+              <a:t>A question after each section, a one-line recap card, a 'try it' prompt, and an optional quiz at the end.</a:t>
+            </a:r>
+          </a:p>
+        </p:txBody>
+      </p:sp>
+      <p:sp>
+        <p:nvSpPr>
+          <p:cNvPr id="157" name="Oval 156"/>
+          <p:cNvSpPr/>
+          <p:nvPr/>
+        </p:nvSpPr>
+        <p:spPr>
+          <a:xfrm>
+            <a:off x="6199632" y="1461211"/>
+            <a:ext cx="292608" cy="292608"/>
+          </a:xfrm>
+          <a:prstGeom prst="ellipse">
+            <a:avLst/>
+          </a:prstGeom>
+          <a:solidFill>
+            <a:srgbClr val="EA4335"/>
+          </a:solidFill>
+          <a:ln>
+            <a:noFill/>
+          </a:ln>
+          <a:effectLst/>
+        </p:spPr>
+        <p:style>
+          <a:lnRef idx="1">
+            <a:schemeClr val="accent1"/>
+          </a:lnRef>
+          <a:fillRef idx="3">
+            <a:schemeClr val="accent1"/>
+          </a:fillRef>
+          <a:effectRef idx="2">
+            <a:schemeClr val="accent1"/>
+          </a:effectRef>
+          <a:fontRef idx="minor">
+            <a:schemeClr val="lt1"/>
+          </a:fontRef>
+        </p:style>
+        <p:txBody>
+          <a:bodyPr rtlCol="0" anchor="ctr" lIns="0" rIns="0" tIns="0" bIns="0"/>
+          <a:lstStyle/>
+          <a:p>
+            <a:pPr algn="ctr"/>
+            <a:r>
+              <a:rPr sz="1200" b="0" i="0">
+                <a:solidFill>
+                  <a:srgbClr val="FFFFFF"/>
+                </a:solidFill>
+                <a:latin typeface="Google Sans Flex SemiBold"/>
+                <a:ea typeface="Google Sans Flex SemiBold"/>
+                <a:cs typeface="Google Sans Flex SemiBold"/>
+                <a:sym typeface="Google Sans Flex SemiBold"/>
+              </a:rPr>
+              <a:t>3</a:t>
+            </a:r>
+          </a:p>
+        </p:txBody>
+      </p:sp>
+      <p:sp>
+        <p:nvSpPr>
+          <p:cNvPr id="158" name="Rounded Rectangle 157"/>
+          <p:cNvSpPr/>
+          <p:nvPr/>
+        </p:nvSpPr>
+        <p:spPr>
+          <a:xfrm>
+            <a:off x="292608" y="2999232"/>
+            <a:ext cx="2779776" cy="1517904"/>
+          </a:xfrm>
+          <a:prstGeom prst="roundRect">
+            <a:avLst>
+              <a:gd name="adj" fmla="val 7000"/>
+            </a:avLst>
+          </a:prstGeom>
+          <a:solidFill>
+            <a:srgbClr val="FEF7E0"/>
+          </a:solidFill>
+          <a:ln>
+            <a:noFill/>
+          </a:ln>
+          <a:effectLst/>
+        </p:spPr>
+        <p:style>
+          <a:lnRef idx="1">
+            <a:schemeClr val="accent1"/>
+          </a:lnRef>
+          <a:fillRef idx="3">
+            <a:schemeClr val="accent1"/>
+          </a:fillRef>
+          <a:effectRef idx="2">
+            <a:schemeClr val="accent1"/>
+          </a:effectRef>
+          <a:fontRef idx="minor">
+            <a:schemeClr val="lt1"/>
+          </a:fontRef>
+        </p:style>
+        <p:txBody>
+          <a:bodyPr rtlCol="0" anchor="t" wrap="square" lIns="128016" rIns="128016" tIns="486460" bIns="76809"/>
+          <a:lstStyle/>
+          <a:p>
+            <a:pPr algn="l">
+              <a:spcAft>
+                <a:spcPts val="400"/>
+              </a:spcAft>
+            </a:pPr>
+            <a:r>
+              <a:rPr sz="1300" b="0" i="0">
+                <a:solidFill>
+                  <a:srgbClr val="1F1F1F"/>
+                </a:solidFill>
+                <a:latin typeface="Google Sans Flex SemiBold"/>
+                <a:ea typeface="Google Sans Flex SemiBold"/>
+                <a:cs typeface="Google Sans Flex SemiBold"/>
+                <a:sym typeface="Google Sans Flex SemiBold"/>
+              </a:rPr>
+              <a:t>Better voice</a:t>
+            </a:r>
+          </a:p>
+          <a:p>
+            <a:pPr algn="l">
+              <a:spcAft>
+                <a:spcPts val="0"/>
+              </a:spcAft>
+            </a:pPr>
+            <a:r>
+              <a:rPr sz="1150" b="0" i="0">
+                <a:solidFill>
+                  <a:srgbClr val="3C4043"/>
+                </a:solidFill>
+                <a:latin typeface="Google Sans Flex"/>
+                <a:ea typeface="Google Sans Flex"/>
+                <a:cs typeface="Google Sans Flex"/>
+                <a:sym typeface="Google Sans Flex"/>
+              </a:rPr>
+              <a:t>A voice per subject, more languages, and a slower pace for younger classes.</a:t>
+            </a:r>
+          </a:p>
+        </p:txBody>
+      </p:sp>
+      <p:sp>
+        <p:nvSpPr>
+          <p:cNvPr id="159" name="Oval 158"/>
+          <p:cNvSpPr/>
+          <p:nvPr/>
+        </p:nvSpPr>
+        <p:spPr>
+          <a:xfrm>
+            <a:off x="420624" y="3088843"/>
+            <a:ext cx="292608" cy="292608"/>
+          </a:xfrm>
+          <a:prstGeom prst="ellipse">
+            <a:avLst/>
+          </a:prstGeom>
+          <a:solidFill>
+            <a:srgbClr val="F9AB00"/>
+          </a:solidFill>
+          <a:ln>
+            <a:noFill/>
+          </a:ln>
+          <a:effectLst/>
+        </p:spPr>
+        <p:style>
+          <a:lnRef idx="1">
+            <a:schemeClr val="accent1"/>
+          </a:lnRef>
+          <a:fillRef idx="3">
+            <a:schemeClr val="accent1"/>
+          </a:fillRef>
+          <a:effectRef idx="2">
+            <a:schemeClr val="accent1"/>
+          </a:effectRef>
+          <a:fontRef idx="minor">
+            <a:schemeClr val="lt1"/>
+          </a:fontRef>
+        </p:style>
+        <p:txBody>
+          <a:bodyPr rtlCol="0" anchor="ctr" lIns="0" rIns="0" tIns="0" bIns="0"/>
+          <a:lstStyle/>
+          <a:p>
+            <a:pPr algn="ctr"/>
+            <a:r>
+              <a:rPr sz="1200" b="0" i="0">
+                <a:solidFill>
+                  <a:srgbClr val="FFFFFF"/>
+                </a:solidFill>
+                <a:latin typeface="Google Sans Flex SemiBold"/>
+                <a:ea typeface="Google Sans Flex SemiBold"/>
+                <a:cs typeface="Google Sans Flex SemiBold"/>
+                <a:sym typeface="Google Sans Flex SemiBold"/>
+              </a:rPr>
+              <a:t>4</a:t>
+            </a:r>
+          </a:p>
+        </p:txBody>
+      </p:sp>
+      <p:sp>
+        <p:nvSpPr>
+          <p:cNvPr id="160" name="Rounded Rectangle 159"/>
+          <p:cNvSpPr/>
+          <p:nvPr/>
+        </p:nvSpPr>
+        <p:spPr>
+          <a:xfrm>
+            <a:off x="3182112" y="2999232"/>
+            <a:ext cx="2779776" cy="1517904"/>
           </a:xfrm>
           <a:prstGeom prst="roundRect">
             <a:avLst>
@@ -8931,7 +9725,7 @@
           </a:fontRef>
         </p:style>
         <p:txBody>
-          <a:bodyPr rtlCol="0" anchor="t" wrap="square" lIns="146304" rIns="146304" tIns="501091" bIns="87782"/>
+          <a:bodyPr rtlCol="0" anchor="t" wrap="square" lIns="128016" rIns="128016" tIns="486460" bIns="76809"/>
           <a:lstStyle/>
           <a:p>
             <a:pPr algn="l">
@@ -8940,7 +9734,7 @@
               </a:spcAft>
             </a:pPr>
             <a:r>
-              <a:rPr sz="1400" b="0" i="0">
+              <a:rPr sz="1300" b="0" i="0">
                 <a:solidFill>
                   <a:srgbClr val="1F1F1F"/>
                 </a:solidFill>
@@ -8949,7 +9743,7 @@
                 <a:cs typeface="Google Sans Flex SemiBold"/>
                 <a:sym typeface="Google Sans Flex SemiBold"/>
               </a:rPr>
-              <a:t>Built: hand-drawn motion</a:t>
+              <a:t>A closing that lands</a:t>
             </a:r>
           </a:p>
           <a:p>
@@ -8959,7 +9753,7 @@
               </a:spcAft>
             </a:pPr>
             <a:r>
-              <a:rPr sz="1250" b="0" i="0">
+              <a:rPr sz="1150" b="0" i="0">
                 <a:solidFill>
                   <a:srgbClr val="3C4043"/>
                 </a:solidFill>
@@ -8968,20 +9762,20 @@
                 <a:cs typeface="Google Sans Flex"/>
                 <a:sym typeface="Google Sans Flex"/>
               </a:rPr>
-              <a:t>Underlines and doodles draw themselves, and a marker sweeps under the point being explained.</a:t>
-            </a:r>
-          </a:p>
-        </p:txBody>
-      </p:sp>
-      <p:sp>
-        <p:nvSpPr>
-          <p:cNvPr id="155" name="Oval 154"/>
+              <a:t>Every video ends on a recap, one question and one next step.</a:t>
+            </a:r>
+          </a:p>
+        </p:txBody>
+      </p:sp>
+      <p:sp>
+        <p:nvSpPr>
+          <p:cNvPr id="161" name="Oval 160"/>
           <p:cNvSpPr/>
           <p:nvPr/>
         </p:nvSpPr>
         <p:spPr>
           <a:xfrm>
-            <a:off x="4791456" y="1474012"/>
+            <a:off x="3310128" y="3088843"/>
             <a:ext cx="292608" cy="292608"/>
           </a:xfrm>
           <a:prstGeom prst="ellipse">
@@ -9024,21 +9818,21 @@
                 <a:cs typeface="Google Sans Flex SemiBold"/>
                 <a:sym typeface="Google Sans Flex SemiBold"/>
               </a:rPr>
-              <a:t>2</a:t>
-            </a:r>
-          </a:p>
-        </p:txBody>
-      </p:sp>
-      <p:sp>
-        <p:nvSpPr>
-          <p:cNvPr id="156" name="Rounded Rectangle 155"/>
+              <a:t>5</a:t>
+            </a:r>
+          </a:p>
+        </p:txBody>
+      </p:sp>
+      <p:sp>
+        <p:nvSpPr>
+          <p:cNvPr id="162" name="Rounded Rectangle 161"/>
           <p:cNvSpPr/>
           <p:nvPr/>
         </p:nvSpPr>
         <p:spPr>
           <a:xfrm>
-            <a:off x="292608" y="3063240"/>
-            <a:ext cx="4206240" cy="1554480"/>
+            <a:off x="6071616" y="2999232"/>
+            <a:ext cx="2779776" cy="1517904"/>
           </a:xfrm>
           <a:prstGeom prst="roundRect">
             <a:avLst>
@@ -9068,7 +9862,7 @@
           </a:fontRef>
         </p:style>
         <p:txBody>
-          <a:bodyPr rtlCol="0" anchor="t" wrap="square" lIns="146304" rIns="146304" tIns="501091" bIns="87782"/>
+          <a:bodyPr rtlCol="0" anchor="t" wrap="square" lIns="128016" rIns="128016" tIns="486460" bIns="76809"/>
           <a:lstStyle/>
           <a:p>
             <a:pPr algn="l">
@@ -9077,7 +9871,7 @@
               </a:spcAft>
             </a:pPr>
             <a:r>
-              <a:rPr sz="1400" b="0" i="0">
+              <a:rPr sz="1300" b="0" i="0">
                 <a:solidFill>
                   <a:srgbClr val="1F1F1F"/>
                 </a:solidFill>
@@ -9086,7 +9880,7 @@
                 <a:cs typeface="Google Sans Flex SemiBold"/>
                 <a:sym typeface="Google Sans Flex SemiBold"/>
               </a:rPr>
-              <a:t>Next: Manim-style motion</a:t>
+              <a:t>Learn from use</a:t>
             </a:r>
           </a:p>
           <a:p>
@@ -9096,7 +9890,7 @@
               </a:spcAft>
             </a:pPr>
             <a:r>
-              <a:rPr sz="1250" b="0" i="0">
+              <a:rPr sz="1150" b="0" i="0">
                 <a:solidFill>
                   <a:srgbClr val="3C4043"/>
                 </a:solidFill>
@@ -9105,20 +9899,20 @@
                 <a:cs typeface="Google Sans Flex"/>
                 <a:sym typeface="Google Sans Flex"/>
               </a:rPr>
-              <a:t>Animated formulas and graphs when the chapter has maths.</a:t>
-            </a:r>
-          </a:p>
-        </p:txBody>
-      </p:sp>
-      <p:sp>
-        <p:nvSpPr>
-          <p:cNvPr id="157" name="Oval 156"/>
+              <a:t>Admin &gt; Costs and the job logs show slow or costly steps. We tune those first and keep what teachers replay.</a:t>
+            </a:r>
+          </a:p>
+        </p:txBody>
+      </p:sp>
+      <p:sp>
+        <p:nvSpPr>
+          <p:cNvPr id="163" name="Oval 162"/>
           <p:cNvSpPr/>
           <p:nvPr/>
         </p:nvSpPr>
         <p:spPr>
           <a:xfrm>
-            <a:off x="438912" y="3165652"/>
+            <a:off x="6199632" y="3088843"/>
             <a:ext cx="292608" cy="292608"/>
           </a:xfrm>
           <a:prstGeom prst="ellipse">
@@ -9161,144 +9955,7 @@
                 <a:cs typeface="Google Sans Flex SemiBold"/>
                 <a:sym typeface="Google Sans Flex SemiBold"/>
               </a:rPr>
-              <a:t>3</a:t>
-            </a:r>
-          </a:p>
-        </p:txBody>
-      </p:sp>
-      <p:sp>
-        <p:nvSpPr>
-          <p:cNvPr id="158" name="Rounded Rectangle 157"/>
-          <p:cNvSpPr/>
-          <p:nvPr/>
-        </p:nvSpPr>
-        <p:spPr>
-          <a:xfrm>
-            <a:off x="4645152" y="3063240"/>
-            <a:ext cx="4206240" cy="1554480"/>
-          </a:xfrm>
-          <a:prstGeom prst="roundRect">
-            <a:avLst>
-              <a:gd name="adj" fmla="val 7000"/>
-            </a:avLst>
-          </a:prstGeom>
-          <a:solidFill>
-            <a:srgbClr val="FCE8E6"/>
-          </a:solidFill>
-          <a:ln>
-            <a:noFill/>
-          </a:ln>
-          <a:effectLst/>
-        </p:spPr>
-        <p:style>
-          <a:lnRef idx="1">
-            <a:schemeClr val="accent1"/>
-          </a:lnRef>
-          <a:fillRef idx="3">
-            <a:schemeClr val="accent1"/>
-          </a:fillRef>
-          <a:effectRef idx="2">
-            <a:schemeClr val="accent1"/>
-          </a:effectRef>
-          <a:fontRef idx="minor">
-            <a:schemeClr val="lt1"/>
-          </a:fontRef>
-        </p:style>
-        <p:txBody>
-          <a:bodyPr rtlCol="0" anchor="t" wrap="square" lIns="146304" rIns="146304" tIns="501091" bIns="87782"/>
-          <a:lstStyle/>
-          <a:p>
-            <a:pPr algn="l">
-              <a:spcAft>
-                <a:spcPts val="400"/>
-              </a:spcAft>
-            </a:pPr>
-            <a:r>
-              <a:rPr sz="1400" b="0" i="0">
-                <a:solidFill>
-                  <a:srgbClr val="1F1F1F"/>
-                </a:solidFill>
-                <a:latin typeface="Google Sans Flex SemiBold"/>
-                <a:ea typeface="Google Sans Flex SemiBold"/>
-                <a:cs typeface="Google Sans Flex SemiBold"/>
-                <a:sym typeface="Google Sans Flex SemiBold"/>
-              </a:rPr>
-              <a:t>Next: questions mid-video</a:t>
-            </a:r>
-          </a:p>
-          <a:p>
-            <a:pPr algn="l">
-              <a:spcAft>
-                <a:spcPts val="0"/>
-              </a:spcAft>
-            </a:pPr>
-            <a:r>
-              <a:rPr sz="1250" b="0" i="0">
-                <a:solidFill>
-                  <a:srgbClr val="3C4043"/>
-                </a:solidFill>
-                <a:latin typeface="Google Sans Flex"/>
-                <a:ea typeface="Google Sans Flex"/>
-                <a:cs typeface="Google Sans Flex"/>
-                <a:sym typeface="Google Sans Flex"/>
-              </a:rPr>
-              <a:t>A pause with a question after each section, so students answer instead of only watching.</a:t>
-            </a:r>
-          </a:p>
-        </p:txBody>
-      </p:sp>
-      <p:sp>
-        <p:nvSpPr>
-          <p:cNvPr id="159" name="Oval 158"/>
-          <p:cNvSpPr/>
-          <p:nvPr/>
-        </p:nvSpPr>
-        <p:spPr>
-          <a:xfrm>
-            <a:off x="4791456" y="3165652"/>
-            <a:ext cx="292608" cy="292608"/>
-          </a:xfrm>
-          <a:prstGeom prst="ellipse">
-            <a:avLst/>
-          </a:prstGeom>
-          <a:solidFill>
-            <a:srgbClr val="EA4335"/>
-          </a:solidFill>
-          <a:ln>
-            <a:noFill/>
-          </a:ln>
-          <a:effectLst/>
-        </p:spPr>
-        <p:style>
-          <a:lnRef idx="1">
-            <a:schemeClr val="accent1"/>
-          </a:lnRef>
-          <a:fillRef idx="3">
-            <a:schemeClr val="accent1"/>
-          </a:fillRef>
-          <a:effectRef idx="2">
-            <a:schemeClr val="accent1"/>
-          </a:effectRef>
-          <a:fontRef idx="minor">
-            <a:schemeClr val="lt1"/>
-          </a:fontRef>
-        </p:style>
-        <p:txBody>
-          <a:bodyPr rtlCol="0" anchor="ctr" lIns="0" rIns="0" tIns="0" bIns="0"/>
-          <a:lstStyle/>
-          <a:p>
-            <a:pPr algn="ctr"/>
-            <a:r>
-              <a:rPr sz="1200" b="0" i="0">
-                <a:solidFill>
-                  <a:srgbClr val="FFFFFF"/>
-                </a:solidFill>
-                <a:latin typeface="Google Sans Flex SemiBold"/>
-                <a:ea typeface="Google Sans Flex SemiBold"/>
-                <a:cs typeface="Google Sans Flex SemiBold"/>
-                <a:sym typeface="Google Sans Flex SemiBold"/>
-              </a:rPr>
-              <a:t>4</a:t>
+              <a:t>6</a:t>
             </a:r>
           </a:p>
         </p:txBody>
@@ -9784,6 +10441,664 @@
           </a:p>
         </p:txBody>
       </p:sp>
+      <p:sp>
+        <p:nvSpPr>
+          <p:cNvPr id="151" name="Google Shape;151;p25"/>
+          <p:cNvSpPr txBox="1"/>
+          <p:nvPr/>
+        </p:nvSpPr>
+        <p:spPr>
+          <a:xfrm>
+            <a:off x="265350" y="663825"/>
+            <a:ext cx="8943000" cy="561900"/>
+          </a:xfrm>
+          <a:prstGeom prst="rect">
+            <a:avLst/>
+          </a:prstGeom>
+          <a:noFill/>
+          <a:ln>
+            <a:noFill/>
+          </a:ln>
+        </p:spPr>
+        <p:txBody>
+          <a:bodyPr anchorCtr="0" anchor="t" bIns="91425" lIns="91425" spcFirstLastPara="1" rIns="91425" wrap="square" tIns="91425">
+            <a:noAutofit/>
+          </a:bodyPr>
+          <a:lstStyle/>
+          <a:p>
+            <a:pPr indent="0" lvl="0" marL="0" rtl="0" algn="l">
+              <a:spcBef>
+                <a:spcPts val="0"/>
+              </a:spcBef>
+              <a:spcAft>
+                <a:spcPts val="0"/>
+              </a:spcAft>
+              <a:buNone/>
+            </a:pPr>
+            <a:r>
+              <a:rPr lang="en-GB" sz="1600">
+                <a:latin typeface="Google Sans Flex Medium"/>
+                <a:ea typeface="Google Sans Flex Medium"/>
+                <a:cs typeface="Google Sans Flex Medium"/>
+                <a:sym typeface="Google Sans Flex Medium"/>
+              </a:rPr>
+              <a:t>Additional Details: where it helps most</a:t>
+            </a:r>
+            <a:endParaRPr sz="1600">
+              <a:latin typeface="Google Sans Flex Medium"/>
+              <a:ea typeface="Google Sans Flex Medium"/>
+              <a:cs typeface="Google Sans Flex Medium"/>
+              <a:sym typeface="Google Sans Flex Medium"/>
+            </a:endParaRPr>
+          </a:p>
+        </p:txBody>
+      </p:sp>
+      <p:sp>
+        <p:nvSpPr>
+          <p:cNvPr id="167" name="Rounded Rectangle 166"/>
+          <p:cNvSpPr/>
+          <p:nvPr/>
+        </p:nvSpPr>
+        <p:spPr>
+          <a:xfrm>
+            <a:off x="292608" y="1371600"/>
+            <a:ext cx="4206240" cy="1389888"/>
+          </a:xfrm>
+          <a:prstGeom prst="roundRect">
+            <a:avLst>
+              <a:gd name="adj" fmla="val 7000"/>
+            </a:avLst>
+          </a:prstGeom>
+          <a:solidFill>
+            <a:srgbClr val="E8F0FE"/>
+          </a:solidFill>
+          <a:ln>
+            <a:noFill/>
+          </a:ln>
+          <a:effectLst/>
+        </p:spPr>
+        <p:style>
+          <a:lnRef idx="1">
+            <a:schemeClr val="accent1"/>
+          </a:lnRef>
+          <a:fillRef idx="3">
+            <a:schemeClr val="accent1"/>
+          </a:fillRef>
+          <a:effectRef idx="2">
+            <a:schemeClr val="accent1"/>
+          </a:effectRef>
+          <a:fontRef idx="minor">
+            <a:schemeClr val="lt1"/>
+          </a:fontRef>
+        </p:style>
+        <p:txBody>
+          <a:bodyPr rtlCol="0" anchor="t" wrap="square" lIns="146304" rIns="146304" tIns="501091" bIns="87782"/>
+          <a:lstStyle/>
+          <a:p>
+            <a:pPr algn="l">
+              <a:spcAft>
+                <a:spcPts val="400"/>
+              </a:spcAft>
+            </a:pPr>
+            <a:r>
+              <a:rPr sz="1400" b="0" i="0">
+                <a:solidFill>
+                  <a:srgbClr val="1F1F1F"/>
+                </a:solidFill>
+                <a:latin typeface="Google Sans Flex SemiBold"/>
+                <a:ea typeface="Google Sans Flex SemiBold"/>
+                <a:cs typeface="Google Sans Flex SemiBold"/>
+                <a:sym typeface="Google Sans Flex SemiBold"/>
+              </a:rPr>
+              <a:t>Voice</a:t>
+            </a:r>
+          </a:p>
+          <a:p>
+            <a:pPr algn="l">
+              <a:spcAft>
+                <a:spcPts val="0"/>
+              </a:spcAft>
+            </a:pPr>
+            <a:r>
+              <a:rPr sz="1200" b="0" i="0">
+                <a:solidFill>
+                  <a:srgbClr val="3C4043"/>
+                </a:solidFill>
+                <a:latin typeface="Google Sans Flex"/>
+                <a:ea typeface="Google Sans Flex"/>
+                <a:cs typeface="Google Sans Flex"/>
+                <a:sym typeface="Google Sans Flex"/>
+              </a:rPr>
+              <a:t>Gemini 3.8 Live speaks every slide. Strongest where students listen: revision clips, commutes, language practice. Next: more voices and languages.</a:t>
+            </a:r>
+          </a:p>
+        </p:txBody>
+      </p:sp>
+      <p:sp>
+        <p:nvSpPr>
+          <p:cNvPr id="168" name="Oval 167"/>
+          <p:cNvSpPr/>
+          <p:nvPr/>
+        </p:nvSpPr>
+        <p:spPr>
+          <a:xfrm>
+            <a:off x="438912" y="1474012"/>
+            <a:ext cx="292608" cy="292608"/>
+          </a:xfrm>
+          <a:prstGeom prst="ellipse">
+            <a:avLst/>
+          </a:prstGeom>
+          <a:solidFill>
+            <a:srgbClr val="4285F4"/>
+          </a:solidFill>
+          <a:ln>
+            <a:noFill/>
+          </a:ln>
+          <a:effectLst/>
+        </p:spPr>
+        <p:style>
+          <a:lnRef idx="1">
+            <a:schemeClr val="accent1"/>
+          </a:lnRef>
+          <a:fillRef idx="3">
+            <a:schemeClr val="accent1"/>
+          </a:fillRef>
+          <a:effectRef idx="2">
+            <a:schemeClr val="accent1"/>
+          </a:effectRef>
+          <a:fontRef idx="minor">
+            <a:schemeClr val="lt1"/>
+          </a:fontRef>
+        </p:style>
+        <p:txBody>
+          <a:bodyPr rtlCol="0" anchor="ctr" lIns="0" rIns="0" tIns="0" bIns="0"/>
+          <a:lstStyle/>
+          <a:p>
+            <a:pPr algn="ctr"/>
+            <a:r>
+              <a:rPr sz="1200" b="0" i="0">
+                <a:solidFill>
+                  <a:srgbClr val="FFFFFF"/>
+                </a:solidFill>
+                <a:latin typeface="Google Sans Flex SemiBold"/>
+                <a:ea typeface="Google Sans Flex SemiBold"/>
+                <a:cs typeface="Google Sans Flex SemiBold"/>
+                <a:sym typeface="Google Sans Flex SemiBold"/>
+              </a:rPr>
+              <a:t>1</a:t>
+            </a:r>
+          </a:p>
+        </p:txBody>
+      </p:sp>
+      <p:sp>
+        <p:nvSpPr>
+          <p:cNvPr id="169" name="Rounded Rectangle 168"/>
+          <p:cNvSpPr/>
+          <p:nvPr/>
+        </p:nvSpPr>
+        <p:spPr>
+          <a:xfrm>
+            <a:off x="4645152" y="1371600"/>
+            <a:ext cx="4206240" cy="1389888"/>
+          </a:xfrm>
+          <a:prstGeom prst="roundRect">
+            <a:avLst>
+              <a:gd name="adj" fmla="val 7000"/>
+            </a:avLst>
+          </a:prstGeom>
+          <a:solidFill>
+            <a:srgbClr val="E6F4EA"/>
+          </a:solidFill>
+          <a:ln>
+            <a:noFill/>
+          </a:ln>
+          <a:effectLst/>
+        </p:spPr>
+        <p:style>
+          <a:lnRef idx="1">
+            <a:schemeClr val="accent1"/>
+          </a:lnRef>
+          <a:fillRef idx="3">
+            <a:schemeClr val="accent1"/>
+          </a:fillRef>
+          <a:effectRef idx="2">
+            <a:schemeClr val="accent1"/>
+          </a:effectRef>
+          <a:fontRef idx="minor">
+            <a:schemeClr val="lt1"/>
+          </a:fontRef>
+        </p:style>
+        <p:txBody>
+          <a:bodyPr rtlCol="0" anchor="t" wrap="square" lIns="146304" rIns="146304" tIns="501091" bIns="87782"/>
+          <a:lstStyle/>
+          <a:p>
+            <a:pPr algn="l">
+              <a:spcAft>
+                <a:spcPts val="400"/>
+              </a:spcAft>
+            </a:pPr>
+            <a:r>
+              <a:rPr sz="1400" b="0" i="0">
+                <a:solidFill>
+                  <a:srgbClr val="1F1F1F"/>
+                </a:solidFill>
+                <a:latin typeface="Google Sans Flex SemiBold"/>
+                <a:ea typeface="Google Sans Flex SemiBold"/>
+                <a:cs typeface="Google Sans Flex SemiBold"/>
+                <a:sym typeface="Google Sans Flex SemiBold"/>
+              </a:rPr>
+              <a:t>Closing</a:t>
+            </a:r>
+          </a:p>
+          <a:p>
+            <a:pPr algn="l">
+              <a:spcAft>
+                <a:spcPts val="0"/>
+              </a:spcAft>
+            </a:pPr>
+            <a:r>
+              <a:rPr sz="1200" b="0" i="0">
+                <a:solidFill>
+                  <a:srgbClr val="3C4043"/>
+                </a:solidFill>
+                <a:latin typeface="Google Sans Flex"/>
+                <a:ea typeface="Google Sans Flex"/>
+                <a:cs typeface="Google Sans Flex"/>
+                <a:sym typeface="Google Sans Flex"/>
+              </a:rPr>
+              <a:t>End on a recap, a question and one next step. A clean close is what brings a student back for the next lesson.</a:t>
+            </a:r>
+          </a:p>
+        </p:txBody>
+      </p:sp>
+      <p:sp>
+        <p:nvSpPr>
+          <p:cNvPr id="170" name="Oval 169"/>
+          <p:cNvSpPr/>
+          <p:nvPr/>
+        </p:nvSpPr>
+        <p:spPr>
+          <a:xfrm>
+            <a:off x="4791456" y="1474012"/>
+            <a:ext cx="292608" cy="292608"/>
+          </a:xfrm>
+          <a:prstGeom prst="ellipse">
+            <a:avLst/>
+          </a:prstGeom>
+          <a:solidFill>
+            <a:srgbClr val="1E8E3E"/>
+          </a:solidFill>
+          <a:ln>
+            <a:noFill/>
+          </a:ln>
+          <a:effectLst/>
+        </p:spPr>
+        <p:style>
+          <a:lnRef idx="1">
+            <a:schemeClr val="accent1"/>
+          </a:lnRef>
+          <a:fillRef idx="3">
+            <a:schemeClr val="accent1"/>
+          </a:fillRef>
+          <a:effectRef idx="2">
+            <a:schemeClr val="accent1"/>
+          </a:effectRef>
+          <a:fontRef idx="minor">
+            <a:schemeClr val="lt1"/>
+          </a:fontRef>
+        </p:style>
+        <p:txBody>
+          <a:bodyPr rtlCol="0" anchor="ctr" lIns="0" rIns="0" tIns="0" bIns="0"/>
+          <a:lstStyle/>
+          <a:p>
+            <a:pPr algn="ctr"/>
+            <a:r>
+              <a:rPr sz="1200" b="0" i="0">
+                <a:solidFill>
+                  <a:srgbClr val="FFFFFF"/>
+                </a:solidFill>
+                <a:latin typeface="Google Sans Flex SemiBold"/>
+                <a:ea typeface="Google Sans Flex SemiBold"/>
+                <a:cs typeface="Google Sans Flex SemiBold"/>
+                <a:sym typeface="Google Sans Flex SemiBold"/>
+              </a:rPr>
+              <a:t>2</a:t>
+            </a:r>
+          </a:p>
+        </p:txBody>
+      </p:sp>
+      <p:sp>
+        <p:nvSpPr>
+          <p:cNvPr id="171" name="Rounded Rectangle 170"/>
+          <p:cNvSpPr/>
+          <p:nvPr/>
+        </p:nvSpPr>
+        <p:spPr>
+          <a:xfrm>
+            <a:off x="292608" y="2880360"/>
+            <a:ext cx="4206240" cy="1389888"/>
+          </a:xfrm>
+          <a:prstGeom prst="roundRect">
+            <a:avLst>
+              <a:gd name="adj" fmla="val 7000"/>
+            </a:avLst>
+          </a:prstGeom>
+          <a:solidFill>
+            <a:srgbClr val="FCE8E6"/>
+          </a:solidFill>
+          <a:ln>
+            <a:noFill/>
+          </a:ln>
+          <a:effectLst/>
+        </p:spPr>
+        <p:style>
+          <a:lnRef idx="1">
+            <a:schemeClr val="accent1"/>
+          </a:lnRef>
+          <a:fillRef idx="3">
+            <a:schemeClr val="accent1"/>
+          </a:fillRef>
+          <a:effectRef idx="2">
+            <a:schemeClr val="accent1"/>
+          </a:effectRef>
+          <a:fontRef idx="minor">
+            <a:schemeClr val="lt1"/>
+          </a:fontRef>
+        </p:style>
+        <p:txBody>
+          <a:bodyPr rtlCol="0" anchor="t" wrap="square" lIns="146304" rIns="146304" tIns="501091" bIns="87782"/>
+          <a:lstStyle/>
+          <a:p>
+            <a:pPr algn="l">
+              <a:spcAft>
+                <a:spcPts val="400"/>
+              </a:spcAft>
+            </a:pPr>
+            <a:r>
+              <a:rPr sz="1400" b="0" i="0">
+                <a:solidFill>
+                  <a:srgbClr val="1F1F1F"/>
+                </a:solidFill>
+                <a:latin typeface="Google Sans Flex SemiBold"/>
+                <a:ea typeface="Google Sans Flex SemiBold"/>
+                <a:cs typeface="Google Sans Flex SemiBold"/>
+                <a:sym typeface="Google Sans Flex SemiBold"/>
+              </a:rPr>
+              <a:t>Avatar</a:t>
+            </a:r>
+          </a:p>
+          <a:p>
+            <a:pPr algn="l">
+              <a:spcAft>
+                <a:spcPts val="0"/>
+              </a:spcAft>
+            </a:pPr>
+            <a:r>
+              <a:rPr sz="1200" b="0" i="0">
+                <a:solidFill>
+                  <a:srgbClr val="3C4043"/>
+                </a:solidFill>
+                <a:latin typeface="Google Sans Flex"/>
+                <a:ea typeface="Google Sans Flex"/>
+                <a:cs typeface="Google Sans Flex"/>
+                <a:sym typeface="Google Sans Flex"/>
+              </a:rPr>
+              <a:t>Next: a presenter avatar for the intro and the closing, with many to choose from, so students see a face as well as hear a voice.</a:t>
+            </a:r>
+          </a:p>
+        </p:txBody>
+      </p:sp>
+      <p:sp>
+        <p:nvSpPr>
+          <p:cNvPr id="172" name="Oval 171"/>
+          <p:cNvSpPr/>
+          <p:nvPr/>
+        </p:nvSpPr>
+        <p:spPr>
+          <a:xfrm>
+            <a:off x="438912" y="2982772"/>
+            <a:ext cx="292608" cy="292608"/>
+          </a:xfrm>
+          <a:prstGeom prst="ellipse">
+            <a:avLst/>
+          </a:prstGeom>
+          <a:solidFill>
+            <a:srgbClr val="EA4335"/>
+          </a:solidFill>
+          <a:ln>
+            <a:noFill/>
+          </a:ln>
+          <a:effectLst/>
+        </p:spPr>
+        <p:style>
+          <a:lnRef idx="1">
+            <a:schemeClr val="accent1"/>
+          </a:lnRef>
+          <a:fillRef idx="3">
+            <a:schemeClr val="accent1"/>
+          </a:fillRef>
+          <a:effectRef idx="2">
+            <a:schemeClr val="accent1"/>
+          </a:effectRef>
+          <a:fontRef idx="minor">
+            <a:schemeClr val="lt1"/>
+          </a:fontRef>
+        </p:style>
+        <p:txBody>
+          <a:bodyPr rtlCol="0" anchor="ctr" lIns="0" rIns="0" tIns="0" bIns="0"/>
+          <a:lstStyle/>
+          <a:p>
+            <a:pPr algn="ctr"/>
+            <a:r>
+              <a:rPr sz="1200" b="0" i="0">
+                <a:solidFill>
+                  <a:srgbClr val="FFFFFF"/>
+                </a:solidFill>
+                <a:latin typeface="Google Sans Flex SemiBold"/>
+                <a:ea typeface="Google Sans Flex SemiBold"/>
+                <a:cs typeface="Google Sans Flex SemiBold"/>
+                <a:sym typeface="Google Sans Flex SemiBold"/>
+              </a:rPr>
+              <a:t>3</a:t>
+            </a:r>
+          </a:p>
+        </p:txBody>
+      </p:sp>
+      <p:sp>
+        <p:nvSpPr>
+          <p:cNvPr id="173" name="Rounded Rectangle 172"/>
+          <p:cNvSpPr/>
+          <p:nvPr/>
+        </p:nvSpPr>
+        <p:spPr>
+          <a:xfrm>
+            <a:off x="4645152" y="2880360"/>
+            <a:ext cx="4206240" cy="1389888"/>
+          </a:xfrm>
+          <a:prstGeom prst="roundRect">
+            <a:avLst>
+              <a:gd name="adj" fmla="val 7000"/>
+            </a:avLst>
+          </a:prstGeom>
+          <a:solidFill>
+            <a:srgbClr val="FEF7E0"/>
+          </a:solidFill>
+          <a:ln>
+            <a:noFill/>
+          </a:ln>
+          <a:effectLst/>
+        </p:spPr>
+        <p:style>
+          <a:lnRef idx="1">
+            <a:schemeClr val="accent1"/>
+          </a:lnRef>
+          <a:fillRef idx="3">
+            <a:schemeClr val="accent1"/>
+          </a:fillRef>
+          <a:effectRef idx="2">
+            <a:schemeClr val="accent1"/>
+          </a:effectRef>
+          <a:fontRef idx="minor">
+            <a:schemeClr val="lt1"/>
+          </a:fontRef>
+        </p:style>
+        <p:txBody>
+          <a:bodyPr rtlCol="0" anchor="t" wrap="square" lIns="146304" rIns="146304" tIns="501091" bIns="87782"/>
+          <a:lstStyle/>
+          <a:p>
+            <a:pPr algn="l">
+              <a:spcAft>
+                <a:spcPts val="400"/>
+              </a:spcAft>
+            </a:pPr>
+            <a:r>
+              <a:rPr sz="1400" b="0" i="0">
+                <a:solidFill>
+                  <a:srgbClr val="1F1F1F"/>
+                </a:solidFill>
+                <a:latin typeface="Google Sans Flex SemiBold"/>
+                <a:ea typeface="Google Sans Flex SemiBold"/>
+                <a:cs typeface="Google Sans Flex SemiBold"/>
+                <a:sym typeface="Google Sans Flex SemiBold"/>
+              </a:rPr>
+              <a:t>Who gains most</a:t>
+            </a:r>
+          </a:p>
+          <a:p>
+            <a:pPr algn="l">
+              <a:spcAft>
+                <a:spcPts val="0"/>
+              </a:spcAft>
+            </a:pPr>
+            <a:r>
+              <a:rPr sz="1200" b="0" i="0">
+                <a:solidFill>
+                  <a:srgbClr val="3C4043"/>
+                </a:solidFill>
+                <a:latin typeface="Google Sans Flex"/>
+                <a:ea typeface="Google Sans Flex"/>
+                <a:cs typeface="Google Sans Flex"/>
+                <a:sym typeface="Google Sans Flex"/>
+              </a:rPr>
+              <a:t>Teachers with no time to record, coaching classes, company onboarding, and creators turning a chapter into Shorts.</a:t>
+            </a:r>
+          </a:p>
+        </p:txBody>
+      </p:sp>
+      <p:sp>
+        <p:nvSpPr>
+          <p:cNvPr id="174" name="Oval 173"/>
+          <p:cNvSpPr/>
+          <p:nvPr/>
+        </p:nvSpPr>
+        <p:spPr>
+          <a:xfrm>
+            <a:off x="4791456" y="2982772"/>
+            <a:ext cx="292608" cy="292608"/>
+          </a:xfrm>
+          <a:prstGeom prst="ellipse">
+            <a:avLst/>
+          </a:prstGeom>
+          <a:solidFill>
+            <a:srgbClr val="F9AB00"/>
+          </a:solidFill>
+          <a:ln>
+            <a:noFill/>
+          </a:ln>
+          <a:effectLst/>
+        </p:spPr>
+        <p:style>
+          <a:lnRef idx="1">
+            <a:schemeClr val="accent1"/>
+          </a:lnRef>
+          <a:fillRef idx="3">
+            <a:schemeClr val="accent1"/>
+          </a:fillRef>
+          <a:effectRef idx="2">
+            <a:schemeClr val="accent1"/>
+          </a:effectRef>
+          <a:fontRef idx="minor">
+            <a:schemeClr val="lt1"/>
+          </a:fontRef>
+        </p:style>
+        <p:txBody>
+          <a:bodyPr rtlCol="0" anchor="ctr" lIns="0" rIns="0" tIns="0" bIns="0"/>
+          <a:lstStyle/>
+          <a:p>
+            <a:pPr algn="ctr"/>
+            <a:r>
+              <a:rPr sz="1200" b="0" i="0">
+                <a:solidFill>
+                  <a:srgbClr val="FFFFFF"/>
+                </a:solidFill>
+                <a:latin typeface="Google Sans Flex SemiBold"/>
+                <a:ea typeface="Google Sans Flex SemiBold"/>
+                <a:cs typeface="Google Sans Flex SemiBold"/>
+                <a:sym typeface="Google Sans Flex SemiBold"/>
+              </a:rPr>
+              <a:t>4</a:t>
+            </a:r>
+          </a:p>
+        </p:txBody>
+      </p:sp>
+      <p:sp>
+        <p:nvSpPr>
+          <p:cNvPr id="175" name="Rounded Rectangle 174"/>
+          <p:cNvSpPr/>
+          <p:nvPr/>
+        </p:nvSpPr>
+        <p:spPr>
+          <a:xfrm>
+            <a:off x="292608" y="4434840"/>
+            <a:ext cx="8558784" cy="384048"/>
+          </a:xfrm>
+          <a:prstGeom prst="roundRect">
+            <a:avLst>
+              <a:gd name="adj" fmla="val 50000"/>
+            </a:avLst>
+          </a:prstGeom>
+          <a:solidFill>
+            <a:srgbClr val="1F1F1F"/>
+          </a:solidFill>
+          <a:ln>
+            <a:noFill/>
+          </a:ln>
+          <a:effectLst/>
+        </p:spPr>
+        <p:style>
+          <a:lnRef idx="1">
+            <a:schemeClr val="accent1"/>
+          </a:lnRef>
+          <a:fillRef idx="3">
+            <a:schemeClr val="accent1"/>
+          </a:fillRef>
+          <a:effectRef idx="2">
+            <a:schemeClr val="accent1"/>
+          </a:effectRef>
+          <a:fontRef idx="minor">
+            <a:schemeClr val="lt1"/>
+          </a:fontRef>
+        </p:style>
+        <p:txBody>
+          <a:bodyPr rtlCol="0" anchor="ctr" wrap="square" lIns="109728" rIns="109728" tIns="27432" bIns="27432"/>
+          <a:lstStyle/>
+          <a:p>
+            <a:pPr algn="ctr"/>
+            <a:r>
+              <a:rPr sz="1200" b="0" i="0">
+                <a:solidFill>
+                  <a:srgbClr val="FFFFFF"/>
+                </a:solidFill>
+                <a:latin typeface="Google Sans Flex Medium"/>
+                <a:ea typeface="Google Sans Flex Medium"/>
+                <a:cs typeface="Google Sans Flex Medium"/>
+                <a:sym typeface="Google Sans Flex Medium"/>
+              </a:rPr>
+              <a:t>Our edge: voice, pen and highlight in time. Next: a face that opens and closes the lesson.</a:t>
+            </a:r>
+          </a:p>
+        </p:txBody>
+      </p:sp>
     </p:spTree>
   </p:cSld>
   <p:clrMapOvr>
@@ -9864,6 +11179,879 @@
           </a:ln>
         </p:spPr>
       </p:pic>
+    </p:spTree>
+  </p:cSld>
+  <p:clrMapOvr>
+    <a:masterClrMapping/>
+  </p:clrMapOvr>
+</p:sld>
+</file>
+
+<file path=ppt/slides/slide17.xml><?xml version="1.0" encoding="utf-8"?>
+<p:sld xmlns:a="http://schemas.openxmlformats.org/drawingml/2006/main" xmlns:p="http://schemas.openxmlformats.org/presentationml/2006/main" xmlns:r="http://schemas.openxmlformats.org/officeDocument/2006/relationships">
+  <p:cSld>
+    <p:spTree>
+      <p:nvGrpSpPr>
+        <p:cNvPr id="1" name=""/>
+        <p:cNvGrpSpPr/>
+        <p:nvPr/>
+      </p:nvGrpSpPr>
+      <p:grpSpPr/>
+      <p:pic>
+        <p:nvPicPr>
+          <p:cNvPr id="148" name="Google Shape;148;p25" title="Frame 144.png"/>
+          <p:cNvPicPr preferRelativeResize="0"/>
+          <p:nvPr/>
+        </p:nvPicPr>
+        <p:blipFill rotWithShape="1">
+          <a:blip r:embed="rId2">
+            <a:alphaModFix/>
+          </a:blip>
+          <a:srcRect b="98001" l="0" r="0" t="0"/>
+          <a:stretch/>
+        </p:blipFill>
+        <p:spPr>
+          <a:xfrm>
+            <a:off x="0" y="5093562"/>
+            <a:ext cx="9144000" cy="54275"/>
+          </a:xfrm>
+          <a:prstGeom prst="rect">
+            <a:avLst/>
+          </a:prstGeom>
+          <a:noFill/>
+          <a:ln>
+            <a:noFill/>
+          </a:ln>
+        </p:spPr>
+      </p:pic>
+      <p:pic>
+        <p:nvPicPr>
+          <p:cNvPr id="149" name="Google Shape;149;p25" title="Group 427319979.png"/>
+          <p:cNvPicPr preferRelativeResize="0"/>
+          <p:nvPr/>
+        </p:nvPicPr>
+        <p:blipFill>
+          <a:blip r:embed="rId3">
+            <a:alphaModFix/>
+          </a:blip>
+          <a:stretch>
+            <a:fillRect/>
+          </a:stretch>
+        </p:blipFill>
+        <p:spPr>
+          <a:xfrm>
+            <a:off x="0" y="1"/>
+            <a:ext cx="9144000" cy="507359"/>
+          </a:xfrm>
+          <a:prstGeom prst="rect">
+            <a:avLst/>
+          </a:prstGeom>
+          <a:noFill/>
+          <a:ln>
+            <a:noFill/>
+          </a:ln>
+        </p:spPr>
+      </p:pic>
+      <p:sp>
+        <p:nvSpPr>
+          <p:cNvPr id="150" name="Google Shape;150;p25"/>
+          <p:cNvSpPr/>
+          <p:nvPr/>
+        </p:nvSpPr>
+        <p:spPr>
+          <a:xfrm>
+            <a:off x="-29250" y="5071875"/>
+            <a:ext cx="9173400" cy="97800"/>
+          </a:xfrm>
+          <a:prstGeom prst="rect">
+            <a:avLst/>
+          </a:prstGeom>
+          <a:solidFill>
+            <a:schemeClr val="dk1"/>
+          </a:solidFill>
+          <a:ln>
+            <a:noFill/>
+          </a:ln>
+        </p:spPr>
+        <p:txBody>
+          <a:bodyPr anchorCtr="0" anchor="ctr" bIns="91425" lIns="91425" spcFirstLastPara="1" rIns="91425" wrap="square" tIns="91425">
+            <a:noAutofit/>
+          </a:bodyPr>
+          <a:lstStyle/>
+          <a:p>
+            <a:pPr indent="0" lvl="0" marL="0" rtl="0" algn="ctr">
+              <a:spcBef>
+                <a:spcPts val="0"/>
+              </a:spcBef>
+              <a:spcAft>
+                <a:spcPts val="0"/>
+              </a:spcAft>
+              <a:buNone/>
+            </a:pPr>
+            <a:r>
+              <a:t/>
+            </a:r>
+            <a:endParaRPr/>
+          </a:p>
+        </p:txBody>
+      </p:sp>
+      <p:sp>
+        <p:nvSpPr>
+          <p:cNvPr id="151" name="Google Shape;151;p25"/>
+          <p:cNvSpPr txBox="1"/>
+          <p:nvPr/>
+        </p:nvSpPr>
+        <p:spPr>
+          <a:xfrm>
+            <a:off x="265350" y="663825"/>
+            <a:ext cx="8943000" cy="561900"/>
+          </a:xfrm>
+          <a:prstGeom prst="rect">
+            <a:avLst/>
+          </a:prstGeom>
+          <a:noFill/>
+          <a:ln>
+            <a:noFill/>
+          </a:ln>
+        </p:spPr>
+        <p:txBody>
+          <a:bodyPr anchorCtr="0" anchor="t" bIns="91425" lIns="91425" spcFirstLastPara="1" rIns="91425" wrap="square" tIns="91425">
+            <a:noAutofit/>
+          </a:bodyPr>
+          <a:lstStyle/>
+          <a:p>
+            <a:pPr indent="0" lvl="0" marL="0" rtl="0" algn="l">
+              <a:spcBef>
+                <a:spcPts val="0"/>
+              </a:spcBef>
+              <a:spcAft>
+                <a:spcPts val="0"/>
+              </a:spcAft>
+              <a:buNone/>
+            </a:pPr>
+            <a:r>
+              <a:rPr lang="en-GB" sz="1600">
+                <a:latin typeface="Google Sans Flex Medium"/>
+                <a:ea typeface="Google Sans Flex Medium"/>
+                <a:cs typeface="Google Sans Flex Medium"/>
+                <a:sym typeface="Google Sans Flex Medium"/>
+              </a:rPr>
+              <a:t>Additional Details: add a look, or use none</a:t>
+            </a:r>
+            <a:endParaRPr sz="1600">
+              <a:latin typeface="Google Sans Flex Medium"/>
+              <a:ea typeface="Google Sans Flex Medium"/>
+              <a:cs typeface="Google Sans Flex Medium"/>
+              <a:sym typeface="Google Sans Flex Medium"/>
+            </a:endParaRPr>
+          </a:p>
+        </p:txBody>
+      </p:sp>
+      <p:sp>
+        <p:nvSpPr>
+          <p:cNvPr id="152" name="TextBox 151"/>
+          <p:cNvSpPr txBox="1"/>
+          <p:nvPr/>
+        </p:nvSpPr>
+        <p:spPr>
+          <a:xfrm>
+            <a:off x="292608" y="1298448"/>
+            <a:ext cx="1828800" cy="274320"/>
+          </a:xfrm>
+          <a:prstGeom prst="rect">
+            <a:avLst/>
+          </a:prstGeom>
+          <a:noFill/>
+        </p:spPr>
+        <p:txBody>
+          <a:bodyPr wrap="square" lIns="0" rIns="0" tIns="0" bIns="0"/>
+          <a:lstStyle/>
+          <a:p>
+            <a:pPr algn="l"/>
+            <a:r>
+              <a:rPr sz="1200" b="0" i="0">
+                <a:solidFill>
+                  <a:srgbClr val="1F1F1F"/>
+                </a:solidFill>
+                <a:latin typeface="Google Sans Flex SemiBold"/>
+                <a:ea typeface="Google Sans Flex SemiBold"/>
+                <a:cs typeface="Google Sans Flex SemiBold"/>
+                <a:sym typeface="Google Sans Flex SemiBold"/>
+              </a:rPr>
+              <a:t>Pick one, or both:</a:t>
+            </a:r>
+          </a:p>
+        </p:txBody>
+      </p:sp>
+      <p:sp>
+        <p:nvSpPr>
+          <p:cNvPr id="153" name="Rounded Rectangle 152"/>
+          <p:cNvSpPr/>
+          <p:nvPr/>
+        </p:nvSpPr>
+        <p:spPr>
+          <a:xfrm>
+            <a:off x="1828800" y="1280160"/>
+            <a:ext cx="1645920" cy="310896"/>
+          </a:xfrm>
+          <a:prstGeom prst="roundRect">
+            <a:avLst>
+              <a:gd name="adj" fmla="val 50000"/>
+            </a:avLst>
+          </a:prstGeom>
+          <a:solidFill>
+            <a:srgbClr val="E8F0FE"/>
+          </a:solidFill>
+          <a:ln>
+            <a:noFill/>
+          </a:ln>
+          <a:effectLst/>
+        </p:spPr>
+        <p:style>
+          <a:lnRef idx="1">
+            <a:schemeClr val="accent1"/>
+          </a:lnRef>
+          <a:fillRef idx="3">
+            <a:schemeClr val="accent1"/>
+          </a:fillRef>
+          <a:effectRef idx="2">
+            <a:schemeClr val="accent1"/>
+          </a:effectRef>
+          <a:fontRef idx="minor">
+            <a:schemeClr val="lt1"/>
+          </a:fontRef>
+        </p:style>
+        <p:txBody>
+          <a:bodyPr rtlCol="0" anchor="ctr" wrap="square" lIns="109728" rIns="109728" tIns="27432" bIns="27432"/>
+          <a:lstStyle/>
+          <a:p>
+            <a:pPr algn="ctr"/>
+            <a:r>
+              <a:rPr sz="1100" b="0" i="0">
+                <a:solidFill>
+                  <a:srgbClr val="1F1F1F"/>
+                </a:solidFill>
+                <a:latin typeface="Google Sans Flex Medium"/>
+                <a:ea typeface="Google Sans Flex Medium"/>
+                <a:cs typeface="Google Sans Flex Medium"/>
+                <a:sym typeface="Google Sans Flex Medium"/>
+              </a:rPr>
+              <a:t>Template</a:t>
+            </a:r>
+          </a:p>
+        </p:txBody>
+      </p:sp>
+      <p:sp>
+        <p:nvSpPr>
+          <p:cNvPr id="154" name="Rounded Rectangle 153"/>
+          <p:cNvSpPr/>
+          <p:nvPr/>
+        </p:nvSpPr>
+        <p:spPr>
+          <a:xfrm>
+            <a:off x="3584448" y="1280160"/>
+            <a:ext cx="1645920" cy="310896"/>
+          </a:xfrm>
+          <a:prstGeom prst="roundRect">
+            <a:avLst>
+              <a:gd name="adj" fmla="val 50000"/>
+            </a:avLst>
+          </a:prstGeom>
+          <a:solidFill>
+            <a:srgbClr val="FCE8E6"/>
+          </a:solidFill>
+          <a:ln>
+            <a:noFill/>
+          </a:ln>
+          <a:effectLst/>
+        </p:spPr>
+        <p:style>
+          <a:lnRef idx="1">
+            <a:schemeClr val="accent1"/>
+          </a:lnRef>
+          <a:fillRef idx="3">
+            <a:schemeClr val="accent1"/>
+          </a:fillRef>
+          <a:effectRef idx="2">
+            <a:schemeClr val="accent1"/>
+          </a:effectRef>
+          <a:fontRef idx="minor">
+            <a:schemeClr val="lt1"/>
+          </a:fontRef>
+        </p:style>
+        <p:txBody>
+          <a:bodyPr rtlCol="0" anchor="ctr" wrap="square" lIns="109728" rIns="109728" tIns="27432" bIns="27432"/>
+          <a:lstStyle/>
+          <a:p>
+            <a:pPr algn="ctr"/>
+            <a:r>
+              <a:rPr sz="1100" b="0" i="0">
+                <a:solidFill>
+                  <a:srgbClr val="1F1F1F"/>
+                </a:solidFill>
+                <a:latin typeface="Google Sans Flex Medium"/>
+                <a:ea typeface="Google Sans Flex Medium"/>
+                <a:cs typeface="Google Sans Flex Medium"/>
+                <a:sym typeface="Google Sans Flex Medium"/>
+              </a:rPr>
+              <a:t>No template</a:t>
+            </a:r>
+          </a:p>
+        </p:txBody>
+      </p:sp>
+      <p:sp>
+        <p:nvSpPr>
+          <p:cNvPr id="155" name="Rounded Rectangle 154"/>
+          <p:cNvSpPr/>
+          <p:nvPr/>
+        </p:nvSpPr>
+        <p:spPr>
+          <a:xfrm>
+            <a:off x="5340096" y="1280160"/>
+            <a:ext cx="1645920" cy="310896"/>
+          </a:xfrm>
+          <a:prstGeom prst="roundRect">
+            <a:avLst>
+              <a:gd name="adj" fmla="val 50000"/>
+            </a:avLst>
+          </a:prstGeom>
+          <a:solidFill>
+            <a:srgbClr val="FEF7E0"/>
+          </a:solidFill>
+          <a:ln>
+            <a:noFill/>
+          </a:ln>
+          <a:effectLst/>
+        </p:spPr>
+        <p:style>
+          <a:lnRef idx="1">
+            <a:schemeClr val="accent1"/>
+          </a:lnRef>
+          <a:fillRef idx="3">
+            <a:schemeClr val="accent1"/>
+          </a:fillRef>
+          <a:effectRef idx="2">
+            <a:schemeClr val="accent1"/>
+          </a:effectRef>
+          <a:fontRef idx="minor">
+            <a:schemeClr val="lt1"/>
+          </a:fontRef>
+        </p:style>
+        <p:txBody>
+          <a:bodyPr rtlCol="0" anchor="ctr" wrap="square" lIns="109728" rIns="109728" tIns="27432" bIns="27432"/>
+          <a:lstStyle/>
+          <a:p>
+            <a:pPr algn="ctr"/>
+            <a:r>
+              <a:rPr sz="1100" b="0" i="0">
+                <a:solidFill>
+                  <a:srgbClr val="1F1F1F"/>
+                </a:solidFill>
+                <a:latin typeface="Google Sans Flex Medium"/>
+                <a:ea typeface="Google Sans Flex Medium"/>
+                <a:cs typeface="Google Sans Flex Medium"/>
+                <a:sym typeface="Google Sans Flex Medium"/>
+              </a:rPr>
+              <a:t>Skill</a:t>
+            </a:r>
+          </a:p>
+        </p:txBody>
+      </p:sp>
+      <p:sp>
+        <p:nvSpPr>
+          <p:cNvPr id="156" name="Rounded Rectangle 155"/>
+          <p:cNvSpPr/>
+          <p:nvPr/>
+        </p:nvSpPr>
+        <p:spPr>
+          <a:xfrm>
+            <a:off x="7095744" y="1280160"/>
+            <a:ext cx="1645920" cy="310896"/>
+          </a:xfrm>
+          <a:prstGeom prst="roundRect">
+            <a:avLst>
+              <a:gd name="adj" fmla="val 50000"/>
+            </a:avLst>
+          </a:prstGeom>
+          <a:solidFill>
+            <a:srgbClr val="E6F4EA"/>
+          </a:solidFill>
+          <a:ln>
+            <a:noFill/>
+          </a:ln>
+          <a:effectLst/>
+        </p:spPr>
+        <p:style>
+          <a:lnRef idx="1">
+            <a:schemeClr val="accent1"/>
+          </a:lnRef>
+          <a:fillRef idx="3">
+            <a:schemeClr val="accent1"/>
+          </a:fillRef>
+          <a:effectRef idx="2">
+            <a:schemeClr val="accent1"/>
+          </a:effectRef>
+          <a:fontRef idx="minor">
+            <a:schemeClr val="lt1"/>
+          </a:fontRef>
+        </p:style>
+        <p:txBody>
+          <a:bodyPr rtlCol="0" anchor="ctr" wrap="square" lIns="109728" rIns="109728" tIns="27432" bIns="27432"/>
+          <a:lstStyle/>
+          <a:p>
+            <a:pPr algn="ctr"/>
+            <a:r>
+              <a:rPr sz="1100" b="0" i="0">
+                <a:solidFill>
+                  <a:srgbClr val="1F1F1F"/>
+                </a:solidFill>
+                <a:latin typeface="Google Sans Flex Medium"/>
+                <a:ea typeface="Google Sans Flex Medium"/>
+                <a:cs typeface="Google Sans Flex Medium"/>
+                <a:sym typeface="Google Sans Flex Medium"/>
+              </a:rPr>
+              <a:t>Template + skill</a:t>
+            </a:r>
+          </a:p>
+        </p:txBody>
+      </p:sp>
+      <p:sp>
+        <p:nvSpPr>
+          <p:cNvPr id="157" name="Rounded Rectangle 156"/>
+          <p:cNvSpPr/>
+          <p:nvPr/>
+        </p:nvSpPr>
+        <p:spPr>
+          <a:xfrm>
+            <a:off x="292608" y="1755648"/>
+            <a:ext cx="4206240" cy="2834640"/>
+          </a:xfrm>
+          <a:prstGeom prst="roundRect">
+            <a:avLst>
+              <a:gd name="adj" fmla="val 7000"/>
+            </a:avLst>
+          </a:prstGeom>
+          <a:solidFill>
+            <a:srgbClr val="E8F0FE"/>
+          </a:solidFill>
+          <a:ln>
+            <a:noFill/>
+          </a:ln>
+          <a:effectLst/>
+        </p:spPr>
+        <p:style>
+          <a:lnRef idx="1">
+            <a:schemeClr val="accent1"/>
+          </a:lnRef>
+          <a:fillRef idx="3">
+            <a:schemeClr val="accent1"/>
+          </a:fillRef>
+          <a:effectRef idx="2">
+            <a:schemeClr val="accent1"/>
+          </a:effectRef>
+          <a:fontRef idx="minor">
+            <a:schemeClr val="lt1"/>
+          </a:fontRef>
+        </p:style>
+        <p:txBody>
+          <a:bodyPr rtlCol="0" anchor="t" wrap="square" lIns="146304" rIns="146304" tIns="501091" bIns="87782"/>
+          <a:lstStyle/>
+          <a:p>
+            <a:pPr algn="l">
+              <a:spcAft>
+                <a:spcPts val="400"/>
+              </a:spcAft>
+            </a:pPr>
+            <a:r>
+              <a:rPr sz="1500" b="0" i="0">
+                <a:solidFill>
+                  <a:srgbClr val="1F1F1F"/>
+                </a:solidFill>
+                <a:latin typeface="Google Sans Flex SemiBold"/>
+                <a:ea typeface="Google Sans Flex SemiBold"/>
+                <a:cs typeface="Google Sans Flex SemiBold"/>
+                <a:sym typeface="Google Sans Flex SemiBold"/>
+              </a:rPr>
+              <a:t>Add a new template</a:t>
+            </a:r>
+          </a:p>
+          <a:p>
+            <a:pPr algn="l">
+              <a:spcAft>
+                <a:spcPts val="400"/>
+              </a:spcAft>
+            </a:pPr>
+            <a:r>
+              <a:rPr sz="1250" b="0" i="0">
+                <a:solidFill>
+                  <a:srgbClr val="3C4043"/>
+                </a:solidFill>
+                <a:latin typeface="Google Sans Flex"/>
+                <a:ea typeface="Google Sans Flex"/>
+                <a:cs typeface="Google Sans Flex"/>
+                <a:sym typeface="Google Sans Flex"/>
+              </a:rPr>
+              <a:t>1. Add one style entry: a name, a font pair and colours (video_options.py).</a:t>
+            </a:r>
+          </a:p>
+          <a:p>
+            <a:pPr algn="l">
+              <a:spcAft>
+                <a:spcPts val="400"/>
+              </a:spcAft>
+            </a:pPr>
+            <a:r>
+              <a:rPr sz="1250" b="0" i="0">
+                <a:solidFill>
+                  <a:srgbClr val="3C4043"/>
+                </a:solidFill>
+                <a:latin typeface="Google Sans Flex"/>
+                <a:ea typeface="Google Sans Flex"/>
+                <a:cs typeface="Google Sans Flex"/>
+                <a:sym typeface="Google Sans Flex"/>
+              </a:rPr>
+              <a:t>2. Map it to a layout family: split, band, sketch, poster, bento or notebook. A new family is one block of CSS (edu_theme.py).</a:t>
+            </a:r>
+          </a:p>
+          <a:p>
+            <a:pPr algn="l">
+              <a:spcAft>
+                <a:spcPts val="400"/>
+              </a:spcAft>
+            </a:pPr>
+            <a:r>
+              <a:rPr sz="1250" b="0" i="0">
+                <a:solidFill>
+                  <a:srgbClr val="3C4043"/>
+                </a:solidFill>
+                <a:latin typeface="Google Sans Flex"/>
+                <a:ea typeface="Google Sans Flex"/>
+                <a:cs typeface="Google Sans Flex"/>
+                <a:sym typeface="Google Sans Flex"/>
+              </a:rPr>
+              <a:t>3. It shows up in the style picker. Run the sample preview and check fit in 16:9, 9:16 and square.</a:t>
+            </a:r>
+          </a:p>
+          <a:p>
+            <a:pPr algn="l">
+              <a:spcAft>
+                <a:spcPts val="400"/>
+              </a:spcAft>
+            </a:pPr>
+            <a:r>
+              <a:rPr sz="1250" b="0" i="0">
+                <a:solidFill>
+                  <a:srgbClr val="3C4043"/>
+                </a:solidFill>
+                <a:latin typeface="Google Sans Flex"/>
+                <a:ea typeface="Google Sans Flex"/>
+                <a:cs typeface="Google Sans Flex"/>
+                <a:sym typeface="Google Sans Flex"/>
+              </a:rPr>
+              <a:t>No change to the pipeline: slides, voice and capture stay the same.</a:t>
+            </a:r>
+          </a:p>
+        </p:txBody>
+      </p:sp>
+      <p:sp>
+        <p:nvSpPr>
+          <p:cNvPr id="158" name="Oval 157"/>
+          <p:cNvSpPr/>
+          <p:nvPr/>
+        </p:nvSpPr>
+        <p:spPr>
+          <a:xfrm>
+            <a:off x="438912" y="1858060"/>
+            <a:ext cx="292608" cy="292608"/>
+          </a:xfrm>
+          <a:prstGeom prst="ellipse">
+            <a:avLst/>
+          </a:prstGeom>
+          <a:solidFill>
+            <a:srgbClr val="4285F4"/>
+          </a:solidFill>
+          <a:ln>
+            <a:noFill/>
+          </a:ln>
+          <a:effectLst/>
+        </p:spPr>
+        <p:style>
+          <a:lnRef idx="1">
+            <a:schemeClr val="accent1"/>
+          </a:lnRef>
+          <a:fillRef idx="3">
+            <a:schemeClr val="accent1"/>
+          </a:fillRef>
+          <a:effectRef idx="2">
+            <a:schemeClr val="accent1"/>
+          </a:effectRef>
+          <a:fontRef idx="minor">
+            <a:schemeClr val="lt1"/>
+          </a:fontRef>
+        </p:style>
+        <p:txBody>
+          <a:bodyPr rtlCol="0" anchor="ctr" lIns="0" rIns="0" tIns="0" bIns="0"/>
+          <a:lstStyle/>
+          <a:p>
+            <a:pPr algn="ctr"/>
+            <a:r>
+              <a:rPr sz="1200" b="0" i="0">
+                <a:solidFill>
+                  <a:srgbClr val="FFFFFF"/>
+                </a:solidFill>
+                <a:latin typeface="Google Sans Flex SemiBold"/>
+                <a:ea typeface="Google Sans Flex SemiBold"/>
+                <a:cs typeface="Google Sans Flex SemiBold"/>
+                <a:sym typeface="Google Sans Flex SemiBold"/>
+              </a:rPr>
+              <a:t>1</a:t>
+            </a:r>
+          </a:p>
+        </p:txBody>
+      </p:sp>
+      <p:sp>
+        <p:nvSpPr>
+          <p:cNvPr id="159" name="Rounded Rectangle 158"/>
+          <p:cNvSpPr/>
+          <p:nvPr/>
+        </p:nvSpPr>
+        <p:spPr>
+          <a:xfrm>
+            <a:off x="4645152" y="1755648"/>
+            <a:ext cx="4206240" cy="896112"/>
+          </a:xfrm>
+          <a:prstGeom prst="roundRect">
+            <a:avLst>
+              <a:gd name="adj" fmla="val 7000"/>
+            </a:avLst>
+          </a:prstGeom>
+          <a:solidFill>
+            <a:srgbClr val="FCE8E6"/>
+          </a:solidFill>
+          <a:ln>
+            <a:noFill/>
+          </a:ln>
+          <a:effectLst/>
+        </p:spPr>
+        <p:style>
+          <a:lnRef idx="1">
+            <a:schemeClr val="accent1"/>
+          </a:lnRef>
+          <a:fillRef idx="3">
+            <a:schemeClr val="accent1"/>
+          </a:fillRef>
+          <a:effectRef idx="2">
+            <a:schemeClr val="accent1"/>
+          </a:effectRef>
+          <a:fontRef idx="minor">
+            <a:schemeClr val="lt1"/>
+          </a:fontRef>
+        </p:style>
+        <p:txBody>
+          <a:bodyPr rtlCol="0" anchor="t" wrap="square" lIns="118872" rIns="118872" tIns="95097" bIns="71323"/>
+          <a:lstStyle/>
+          <a:p>
+            <a:pPr algn="l">
+              <a:spcAft>
+                <a:spcPts val="400"/>
+              </a:spcAft>
+            </a:pPr>
+            <a:r>
+              <a:rPr sz="1250" b="0" i="0">
+                <a:solidFill>
+                  <a:srgbClr val="1F1F1F"/>
+                </a:solidFill>
+                <a:latin typeface="Google Sans Flex SemiBold"/>
+                <a:ea typeface="Google Sans Flex SemiBold"/>
+                <a:cs typeface="Google Sans Flex SemiBold"/>
+                <a:sym typeface="Google Sans Flex SemiBold"/>
+              </a:rPr>
+              <a:t>No template</a:t>
+            </a:r>
+          </a:p>
+          <a:p>
+            <a:pPr algn="l">
+              <a:spcAft>
+                <a:spcPts val="0"/>
+              </a:spcAft>
+            </a:pPr>
+            <a:r>
+              <a:rPr sz="1050" b="0" i="0">
+                <a:solidFill>
+                  <a:srgbClr val="3C4043"/>
+                </a:solidFill>
+                <a:latin typeface="Google Sans Flex"/>
+                <a:ea typeface="Google Sans Flex"/>
+                <a:cs typeface="Google Sans Flex"/>
+                <a:sym typeface="Google Sans Flex"/>
+              </a:rPr>
+              <a:t>Auto already matches a layout to the document. A template-free layout builder is written; we keep it off until it never overflows.</a:t>
+            </a:r>
+          </a:p>
+        </p:txBody>
+      </p:sp>
+      <p:sp>
+        <p:nvSpPr>
+          <p:cNvPr id="160" name="Rounded Rectangle 159"/>
+          <p:cNvSpPr/>
+          <p:nvPr/>
+        </p:nvSpPr>
+        <p:spPr>
+          <a:xfrm>
+            <a:off x="4645152" y="2724912"/>
+            <a:ext cx="4206240" cy="896112"/>
+          </a:xfrm>
+          <a:prstGeom prst="roundRect">
+            <a:avLst>
+              <a:gd name="adj" fmla="val 7000"/>
+            </a:avLst>
+          </a:prstGeom>
+          <a:solidFill>
+            <a:srgbClr val="FEF7E0"/>
+          </a:solidFill>
+          <a:ln>
+            <a:noFill/>
+          </a:ln>
+          <a:effectLst/>
+        </p:spPr>
+        <p:style>
+          <a:lnRef idx="1">
+            <a:schemeClr val="accent1"/>
+          </a:lnRef>
+          <a:fillRef idx="3">
+            <a:schemeClr val="accent1"/>
+          </a:fillRef>
+          <a:effectRef idx="2">
+            <a:schemeClr val="accent1"/>
+          </a:effectRef>
+          <a:fontRef idx="minor">
+            <a:schemeClr val="lt1"/>
+          </a:fontRef>
+        </p:style>
+        <p:txBody>
+          <a:bodyPr rtlCol="0" anchor="t" wrap="square" lIns="118872" rIns="118872" tIns="95097" bIns="71323"/>
+          <a:lstStyle/>
+          <a:p>
+            <a:pPr algn="l">
+              <a:spcAft>
+                <a:spcPts val="400"/>
+              </a:spcAft>
+            </a:pPr>
+            <a:r>
+              <a:rPr sz="1250" b="0" i="0">
+                <a:solidFill>
+                  <a:srgbClr val="1F1F1F"/>
+                </a:solidFill>
+                <a:latin typeface="Google Sans Flex SemiBold"/>
+                <a:ea typeface="Google Sans Flex SemiBold"/>
+                <a:cs typeface="Google Sans Flex SemiBold"/>
+                <a:sym typeface="Google Sans Flex SemiBold"/>
+              </a:rPr>
+              <a:t>Skill option</a:t>
+            </a:r>
+          </a:p>
+          <a:p>
+            <a:pPr algn="l">
+              <a:spcAft>
+                <a:spcPts val="0"/>
+              </a:spcAft>
+            </a:pPr>
+            <a:r>
+              <a:rPr sz="1050" b="0" i="0">
+                <a:solidFill>
+                  <a:srgbClr val="3C4043"/>
+                </a:solidFill>
+                <a:latin typeface="Google Sans Flex"/>
+                <a:ea typeface="Google Sans Flex"/>
+                <a:cs typeface="Google Sans Flex"/>
+                <a:sym typeface="Google Sans Flex"/>
+              </a:rPr>
+              <a:t>An animation skill picks the motion per slide. The HyperFrames group is in the picker today.</a:t>
+            </a:r>
+          </a:p>
+        </p:txBody>
+      </p:sp>
+      <p:sp>
+        <p:nvSpPr>
+          <p:cNvPr id="161" name="Rounded Rectangle 160"/>
+          <p:cNvSpPr/>
+          <p:nvPr/>
+        </p:nvSpPr>
+        <p:spPr>
+          <a:xfrm>
+            <a:off x="4645152" y="3694176"/>
+            <a:ext cx="4206240" cy="896112"/>
+          </a:xfrm>
+          <a:prstGeom prst="roundRect">
+            <a:avLst>
+              <a:gd name="adj" fmla="val 7000"/>
+            </a:avLst>
+          </a:prstGeom>
+          <a:solidFill>
+            <a:srgbClr val="E6F4EA"/>
+          </a:solidFill>
+          <a:ln>
+            <a:noFill/>
+          </a:ln>
+          <a:effectLst/>
+        </p:spPr>
+        <p:style>
+          <a:lnRef idx="1">
+            <a:schemeClr val="accent1"/>
+          </a:lnRef>
+          <a:fillRef idx="3">
+            <a:schemeClr val="accent1"/>
+          </a:fillRef>
+          <a:effectRef idx="2">
+            <a:schemeClr val="accent1"/>
+          </a:effectRef>
+          <a:fontRef idx="minor">
+            <a:schemeClr val="lt1"/>
+          </a:fontRef>
+        </p:style>
+        <p:txBody>
+          <a:bodyPr rtlCol="0" anchor="t" wrap="square" lIns="118872" rIns="118872" tIns="95097" bIns="71323"/>
+          <a:lstStyle/>
+          <a:p>
+            <a:pPr algn="l">
+              <a:spcAft>
+                <a:spcPts val="400"/>
+              </a:spcAft>
+            </a:pPr>
+            <a:r>
+              <a:rPr sz="1250" b="0" i="0">
+                <a:solidFill>
+                  <a:srgbClr val="1F1F1F"/>
+                </a:solidFill>
+                <a:latin typeface="Google Sans Flex SemiBold"/>
+                <a:ea typeface="Google Sans Flex SemiBold"/>
+                <a:cs typeface="Google Sans Flex SemiBold"/>
+                <a:sym typeface="Google Sans Flex SemiBold"/>
+              </a:rPr>
+              <a:t>Both</a:t>
+            </a:r>
+          </a:p>
+          <a:p>
+            <a:pPr algn="l">
+              <a:spcAft>
+                <a:spcPts val="0"/>
+              </a:spcAft>
+            </a:pPr>
+            <a:r>
+              <a:rPr sz="1050" b="0" i="0">
+                <a:solidFill>
+                  <a:srgbClr val="3C4043"/>
+                </a:solidFill>
+                <a:latin typeface="Google Sans Flex"/>
+                <a:ea typeface="Google Sans Flex"/>
+                <a:cs typeface="Google Sans Flex"/>
+                <a:sym typeface="Google Sans Flex"/>
+              </a:rPr>
+              <a:t>One switch on the Studio page: a template for the look, a skill for the motion, or none of either.</a:t>
+            </a:r>
+          </a:p>
+        </p:txBody>
+      </p:sp>
     </p:spTree>
   </p:cSld>
   <p:clrMapOvr>
@@ -10783,7 +12971,7 @@
                 <a:cs typeface="Google Sans Flex"/>
                 <a:sym typeface="Google Sans Flex"/>
               </a:rPr>
-              <a:t>Built by M Sai Teja (team leader) with Anil Kumar.</a:t>
+              <a:t>Team: M Sai Teja (leader, built the app) and Anil Kumar.</a:t>
             </a:r>
           </a:p>
         </p:txBody>
@@ -11426,7 +13614,7 @@
                 <a:cs typeface="Google Sans Flex SemiBold"/>
                 <a:sym typeface="Google Sans Flex SemiBold"/>
               </a:rPr>
-              <a:t>USP</a:t>
+              <a:t>USP: a voice-led lesson</a:t>
             </a:r>
           </a:p>
           <a:p>
@@ -11445,7 +13633,7 @@
                 <a:cs typeface="Google Sans Flex"/>
                 <a:sym typeface="Google Sans Flex"/>
               </a:rPr>
-              <a:t>Voice, highlight and hand-drawn strokes move together, point by point. Each template is built differently, not just recoloured.</a:t>
+              <a:t>Voice, highlight and hand-drawn strokes move together, point by point. Each look is built differently, not recoloured. Strongest where students listen: revision, training, language practice.</a:t>
             </a:r>
           </a:p>
         </p:txBody>

--- a/Template/Out/Multimodal Studio - AI Builder Cup.pptx
+++ b/Template/Out/Multimodal Studio - AI Builder Cup.pptx
@@ -21,6 +21,7 @@
     <p:sldId id="266" r:id="rId16"/>
     <p:sldId id="267" r:id="rId17"/>
     <p:sldId id="268" r:id="rId18"/>
+    <p:sldId id="273" r:id="rId29"/>
     <p:sldId id="272" r:id="rId28"/>
     <p:sldId id="270" r:id="rId20"/>
     <p:sldId id="269" r:id="rId19"/>
@@ -7856,7 +7857,7 @@
                 <a:cs typeface="Google Sans Flex"/>
                 <a:sym typeface="Google Sans Flex"/>
               </a:rPr>
-              <a:t>Admin &gt; Costs records every call: model, tokens and dollars, per job and per day. Two live voice tests so far: $0.002.</a:t>
+              <a:t>Admin &gt; Costs logs every call: model, real token count, dollars, per job and day. Firestore when hosted, SQLite on a laptop.</a:t>
             </a:r>
           </a:p>
         </p:txBody>
@@ -8235,7 +8236,7 @@
                 <a:cs typeface="Google Sans Flex"/>
                 <a:sym typeface="Google Sans Flex"/>
               </a:rPr>
-              <a:t>Top row: whiteboard, broadcast, poster. Bottom row: editorial, bento, notebook. Real frames from our renderer.</a:t>
+              <a:t>Six of the twelve looks: whiteboard, broadcast, poster, editorial, bento, notebook. Real frames from our renderer.</a:t>
             </a:r>
           </a:p>
         </p:txBody>
@@ -9214,7 +9215,7 @@
                 <a:cs typeface="Google Sans Flex"/>
                 <a:sym typeface="Google Sans Flex"/>
               </a:rPr>
-              <a:t>Six looks, hand-drawn strokes, type sized to fit, and a highlight that follows the voice.</a:t>
+              <a:t>Twelve looks, stamp/flip/zoom/type-in motion, hand-drawn strokes, type sized to fit, and a highlight that follows the voice.</a:t>
             </a:r>
           </a:p>
         </p:txBody>
@@ -12048,6 +12049,1160 @@
                 <a:sym typeface="Google Sans Flex"/>
               </a:rPr>
               <a:t>One switch on the Studio page: a template for the look, a skill for the motion, or none of either.</a:t>
+            </a:r>
+          </a:p>
+        </p:txBody>
+      </p:sp>
+    </p:spTree>
+  </p:cSld>
+  <p:clrMapOvr>
+    <a:masterClrMapping/>
+  </p:clrMapOvr>
+</p:sld>
+</file>
+
+<file path=ppt/slides/slide18.xml><?xml version="1.0" encoding="utf-8"?>
+<p:sld xmlns:a="http://schemas.openxmlformats.org/drawingml/2006/main" xmlns:p="http://schemas.openxmlformats.org/presentationml/2006/main" xmlns:r="http://schemas.openxmlformats.org/officeDocument/2006/relationships">
+  <p:cSld>
+    <p:spTree>
+      <p:nvGrpSpPr>
+        <p:cNvPr id="1" name=""/>
+        <p:cNvGrpSpPr/>
+        <p:nvPr/>
+      </p:nvGrpSpPr>
+      <p:grpSpPr/>
+      <p:pic>
+        <p:nvPicPr>
+          <p:cNvPr id="148" name="Google Shape;148;p25" title="Frame 144.png"/>
+          <p:cNvPicPr preferRelativeResize="0"/>
+          <p:nvPr/>
+        </p:nvPicPr>
+        <p:blipFill rotWithShape="1">
+          <a:blip r:embed="rId2">
+            <a:alphaModFix/>
+          </a:blip>
+          <a:srcRect b="98001" l="0" r="0" t="0"/>
+          <a:stretch/>
+        </p:blipFill>
+        <p:spPr>
+          <a:xfrm>
+            <a:off x="0" y="5093562"/>
+            <a:ext cx="9144000" cy="54275"/>
+          </a:xfrm>
+          <a:prstGeom prst="rect">
+            <a:avLst/>
+          </a:prstGeom>
+          <a:noFill/>
+          <a:ln>
+            <a:noFill/>
+          </a:ln>
+        </p:spPr>
+      </p:pic>
+      <p:pic>
+        <p:nvPicPr>
+          <p:cNvPr id="149" name="Google Shape;149;p25" title="Group 427319979.png"/>
+          <p:cNvPicPr preferRelativeResize="0"/>
+          <p:nvPr/>
+        </p:nvPicPr>
+        <p:blipFill>
+          <a:blip r:embed="rId3">
+            <a:alphaModFix/>
+          </a:blip>
+          <a:stretch>
+            <a:fillRect/>
+          </a:stretch>
+        </p:blipFill>
+        <p:spPr>
+          <a:xfrm>
+            <a:off x="0" y="1"/>
+            <a:ext cx="9144000" cy="507359"/>
+          </a:xfrm>
+          <a:prstGeom prst="rect">
+            <a:avLst/>
+          </a:prstGeom>
+          <a:noFill/>
+          <a:ln>
+            <a:noFill/>
+          </a:ln>
+        </p:spPr>
+      </p:pic>
+      <p:sp>
+        <p:nvSpPr>
+          <p:cNvPr id="150" name="Google Shape;150;p25"/>
+          <p:cNvSpPr/>
+          <p:nvPr/>
+        </p:nvSpPr>
+        <p:spPr>
+          <a:xfrm>
+            <a:off x="-29250" y="5071875"/>
+            <a:ext cx="9173400" cy="97800"/>
+          </a:xfrm>
+          <a:prstGeom prst="rect">
+            <a:avLst/>
+          </a:prstGeom>
+          <a:solidFill>
+            <a:schemeClr val="dk1"/>
+          </a:solidFill>
+          <a:ln>
+            <a:noFill/>
+          </a:ln>
+        </p:spPr>
+        <p:txBody>
+          <a:bodyPr anchorCtr="0" anchor="ctr" bIns="91425" lIns="91425" spcFirstLastPara="1" rIns="91425" wrap="square" tIns="91425">
+            <a:noAutofit/>
+          </a:bodyPr>
+          <a:lstStyle/>
+          <a:p>
+            <a:pPr indent="0" lvl="0" marL="0" rtl="0" algn="ctr">
+              <a:spcBef>
+                <a:spcPts val="0"/>
+              </a:spcBef>
+              <a:spcAft>
+                <a:spcPts val="0"/>
+              </a:spcAft>
+              <a:buNone/>
+            </a:pPr>
+            <a:r>
+              <a:t/>
+            </a:r>
+            <a:endParaRPr/>
+          </a:p>
+        </p:txBody>
+      </p:sp>
+      <p:sp>
+        <p:nvSpPr>
+          <p:cNvPr id="151" name="Google Shape;151;p25"/>
+          <p:cNvSpPr txBox="1"/>
+          <p:nvPr/>
+        </p:nvSpPr>
+        <p:spPr>
+          <a:xfrm>
+            <a:off x="265350" y="663825"/>
+            <a:ext cx="8943000" cy="561900"/>
+          </a:xfrm>
+          <a:prstGeom prst="rect">
+            <a:avLst/>
+          </a:prstGeom>
+          <a:noFill/>
+          <a:ln>
+            <a:noFill/>
+          </a:ln>
+        </p:spPr>
+        <p:txBody>
+          <a:bodyPr anchorCtr="0" anchor="t" bIns="91425" lIns="91425" spcFirstLastPara="1" rIns="91425" wrap="square" tIns="91425">
+            <a:noAutofit/>
+          </a:bodyPr>
+          <a:lstStyle/>
+          <a:p>
+            <a:pPr indent="0" lvl="0" marL="0" rtl="0" algn="l">
+              <a:spcBef>
+                <a:spcPts val="0"/>
+              </a:spcBef>
+              <a:spcAft>
+                <a:spcPts val="0"/>
+              </a:spcAft>
+              <a:buNone/>
+            </a:pPr>
+            <a:r>
+              <a:rPr lang="en-GB" sz="1600">
+                <a:latin typeface="Google Sans Flex Medium"/>
+                <a:ea typeface="Google Sans Flex Medium"/>
+                <a:cs typeface="Google Sans Flex Medium"/>
+                <a:sym typeface="Google Sans Flex Medium"/>
+              </a:rPr>
+              <a:t>Additional Details: the agent behind the deck</a:t>
+            </a:r>
+            <a:endParaRPr sz="1600">
+              <a:latin typeface="Google Sans Flex Medium"/>
+              <a:ea typeface="Google Sans Flex Medium"/>
+              <a:cs typeface="Google Sans Flex Medium"/>
+              <a:sym typeface="Google Sans Flex Medium"/>
+            </a:endParaRPr>
+          </a:p>
+        </p:txBody>
+      </p:sp>
+      <p:sp>
+        <p:nvSpPr>
+          <p:cNvPr id="152" name="Rounded Rectangle 151"/>
+          <p:cNvSpPr/>
+          <p:nvPr/>
+        </p:nvSpPr>
+        <p:spPr>
+          <a:xfrm>
+            <a:off x="292608" y="1325880"/>
+            <a:ext cx="1645920" cy="1261872"/>
+          </a:xfrm>
+          <a:prstGeom prst="roundRect">
+            <a:avLst>
+              <a:gd name="adj" fmla="val 7000"/>
+            </a:avLst>
+          </a:prstGeom>
+          <a:solidFill>
+            <a:srgbClr val="E8F0FE"/>
+          </a:solidFill>
+          <a:ln>
+            <a:noFill/>
+          </a:ln>
+          <a:effectLst/>
+        </p:spPr>
+        <p:style>
+          <a:lnRef idx="1">
+            <a:schemeClr val="accent1"/>
+          </a:lnRef>
+          <a:fillRef idx="3">
+            <a:schemeClr val="accent1"/>
+          </a:fillRef>
+          <a:effectRef idx="2">
+            <a:schemeClr val="accent1"/>
+          </a:effectRef>
+          <a:fontRef idx="minor">
+            <a:schemeClr val="lt1"/>
+          </a:fontRef>
+        </p:style>
+        <p:txBody>
+          <a:bodyPr rtlCol="0" anchor="t" wrap="square" lIns="100584" rIns="100584" tIns="464515" bIns="60350"/>
+          <a:lstStyle/>
+          <a:p>
+            <a:pPr algn="l">
+              <a:spcAft>
+                <a:spcPts val="400"/>
+              </a:spcAft>
+            </a:pPr>
+            <a:r>
+              <a:rPr sz="1200" b="0" i="0">
+                <a:solidFill>
+                  <a:srgbClr val="1F1F1F"/>
+                </a:solidFill>
+                <a:latin typeface="Google Sans Flex SemiBold"/>
+                <a:ea typeface="Google Sans Flex SemiBold"/>
+                <a:cs typeface="Google Sans Flex SemiBold"/>
+                <a:sym typeface="Google Sans Flex SemiBold"/>
+              </a:rPr>
+              <a:t>Inspect</a:t>
+            </a:r>
+          </a:p>
+          <a:p>
+            <a:pPr algn="l">
+              <a:spcAft>
+                <a:spcPts val="0"/>
+              </a:spcAft>
+            </a:pPr>
+            <a:r>
+              <a:rPr sz="1000" b="0" i="0">
+                <a:solidFill>
+                  <a:srgbClr val="3C4043"/>
+                </a:solidFill>
+                <a:latin typeface="Google Sans Flex"/>
+                <a:ea typeface="Google Sans Flex"/>
+                <a:cs typeface="Google Sans Flex"/>
+                <a:sym typeface="Google Sans Flex"/>
+              </a:rPr>
+              <a:t>Document type, formulas, key numbers.</a:t>
+            </a:r>
+          </a:p>
+        </p:txBody>
+      </p:sp>
+      <p:sp>
+        <p:nvSpPr>
+          <p:cNvPr id="153" name="Oval 152"/>
+          <p:cNvSpPr/>
+          <p:nvPr/>
+        </p:nvSpPr>
+        <p:spPr>
+          <a:xfrm>
+            <a:off x="393192" y="1396288"/>
+            <a:ext cx="292608" cy="292608"/>
+          </a:xfrm>
+          <a:prstGeom prst="ellipse">
+            <a:avLst/>
+          </a:prstGeom>
+          <a:solidFill>
+            <a:srgbClr val="4285F4"/>
+          </a:solidFill>
+          <a:ln>
+            <a:noFill/>
+          </a:ln>
+          <a:effectLst/>
+        </p:spPr>
+        <p:style>
+          <a:lnRef idx="1">
+            <a:schemeClr val="accent1"/>
+          </a:lnRef>
+          <a:fillRef idx="3">
+            <a:schemeClr val="accent1"/>
+          </a:fillRef>
+          <a:effectRef idx="2">
+            <a:schemeClr val="accent1"/>
+          </a:effectRef>
+          <a:fontRef idx="minor">
+            <a:schemeClr val="lt1"/>
+          </a:fontRef>
+        </p:style>
+        <p:txBody>
+          <a:bodyPr rtlCol="0" anchor="ctr" lIns="0" rIns="0" tIns="0" bIns="0"/>
+          <a:lstStyle/>
+          <a:p>
+            <a:pPr algn="ctr"/>
+            <a:r>
+              <a:rPr sz="1200" b="0" i="0">
+                <a:solidFill>
+                  <a:srgbClr val="FFFFFF"/>
+                </a:solidFill>
+                <a:latin typeface="Google Sans Flex SemiBold"/>
+                <a:ea typeface="Google Sans Flex SemiBold"/>
+                <a:cs typeface="Google Sans Flex SemiBold"/>
+                <a:sym typeface="Google Sans Flex SemiBold"/>
+              </a:rPr>
+              <a:t>1</a:t>
+            </a:r>
+          </a:p>
+        </p:txBody>
+      </p:sp>
+      <p:sp>
+        <p:nvSpPr>
+          <p:cNvPr id="154" name="Rounded Rectangle 153"/>
+          <p:cNvSpPr/>
+          <p:nvPr/>
+        </p:nvSpPr>
+        <p:spPr>
+          <a:xfrm>
+            <a:off x="2020824" y="1325880"/>
+            <a:ext cx="1645920" cy="1261872"/>
+          </a:xfrm>
+          <a:prstGeom prst="roundRect">
+            <a:avLst>
+              <a:gd name="adj" fmla="val 7000"/>
+            </a:avLst>
+          </a:prstGeom>
+          <a:solidFill>
+            <a:srgbClr val="E6F4EA"/>
+          </a:solidFill>
+          <a:ln>
+            <a:noFill/>
+          </a:ln>
+          <a:effectLst/>
+        </p:spPr>
+        <p:style>
+          <a:lnRef idx="1">
+            <a:schemeClr val="accent1"/>
+          </a:lnRef>
+          <a:fillRef idx="3">
+            <a:schemeClr val="accent1"/>
+          </a:fillRef>
+          <a:effectRef idx="2">
+            <a:schemeClr val="accent1"/>
+          </a:effectRef>
+          <a:fontRef idx="minor">
+            <a:schemeClr val="lt1"/>
+          </a:fontRef>
+        </p:style>
+        <p:txBody>
+          <a:bodyPr rtlCol="0" anchor="t" wrap="square" lIns="100584" rIns="100584" tIns="464515" bIns="60350"/>
+          <a:lstStyle/>
+          <a:p>
+            <a:pPr algn="l">
+              <a:spcAft>
+                <a:spcPts val="400"/>
+              </a:spcAft>
+            </a:pPr>
+            <a:r>
+              <a:rPr sz="1200" b="0" i="0">
+                <a:solidFill>
+                  <a:srgbClr val="1F1F1F"/>
+                </a:solidFill>
+                <a:latin typeface="Google Sans Flex SemiBold"/>
+                <a:ea typeface="Google Sans Flex SemiBold"/>
+                <a:cs typeface="Google Sans Flex SemiBold"/>
+                <a:sym typeface="Google Sans Flex SemiBold"/>
+              </a:rPr>
+              <a:t>Recall</a:t>
+            </a:r>
+          </a:p>
+          <a:p>
+            <a:pPr algn="l">
+              <a:spcAft>
+                <a:spcPts val="0"/>
+              </a:spcAft>
+            </a:pPr>
+            <a:r>
+              <a:rPr sz="1000" b="0" i="0">
+                <a:solidFill>
+                  <a:srgbClr val="3C4043"/>
+                </a:solidFill>
+                <a:latin typeface="Google Sans Flex"/>
+                <a:ea typeface="Google Sans Flex"/>
+                <a:cs typeface="Google Sans Flex"/>
+                <a:sym typeface="Google Sans Flex"/>
+              </a:rPr>
+              <a:t>Style rules learned on past runs.</a:t>
+            </a:r>
+          </a:p>
+        </p:txBody>
+      </p:sp>
+      <p:sp>
+        <p:nvSpPr>
+          <p:cNvPr id="155" name="Oval 154"/>
+          <p:cNvSpPr/>
+          <p:nvPr/>
+        </p:nvSpPr>
+        <p:spPr>
+          <a:xfrm>
+            <a:off x="2121408" y="1396288"/>
+            <a:ext cx="292608" cy="292608"/>
+          </a:xfrm>
+          <a:prstGeom prst="ellipse">
+            <a:avLst/>
+          </a:prstGeom>
+          <a:solidFill>
+            <a:srgbClr val="1E8E3E"/>
+          </a:solidFill>
+          <a:ln>
+            <a:noFill/>
+          </a:ln>
+          <a:effectLst/>
+        </p:spPr>
+        <p:style>
+          <a:lnRef idx="1">
+            <a:schemeClr val="accent1"/>
+          </a:lnRef>
+          <a:fillRef idx="3">
+            <a:schemeClr val="accent1"/>
+          </a:fillRef>
+          <a:effectRef idx="2">
+            <a:schemeClr val="accent1"/>
+          </a:effectRef>
+          <a:fontRef idx="minor">
+            <a:schemeClr val="lt1"/>
+          </a:fontRef>
+        </p:style>
+        <p:txBody>
+          <a:bodyPr rtlCol="0" anchor="ctr" lIns="0" rIns="0" tIns="0" bIns="0"/>
+          <a:lstStyle/>
+          <a:p>
+            <a:pPr algn="ctr"/>
+            <a:r>
+              <a:rPr sz="1200" b="0" i="0">
+                <a:solidFill>
+                  <a:srgbClr val="FFFFFF"/>
+                </a:solidFill>
+                <a:latin typeface="Google Sans Flex SemiBold"/>
+                <a:ea typeface="Google Sans Flex SemiBold"/>
+                <a:cs typeface="Google Sans Flex SemiBold"/>
+                <a:sym typeface="Google Sans Flex SemiBold"/>
+              </a:rPr>
+              <a:t>2</a:t>
+            </a:r>
+          </a:p>
+        </p:txBody>
+      </p:sp>
+      <p:sp>
+        <p:nvSpPr>
+          <p:cNvPr id="156" name="Rounded Rectangle 155"/>
+          <p:cNvSpPr/>
+          <p:nvPr/>
+        </p:nvSpPr>
+        <p:spPr>
+          <a:xfrm>
+            <a:off x="3749040" y="1325880"/>
+            <a:ext cx="1645920" cy="1261872"/>
+          </a:xfrm>
+          <a:prstGeom prst="roundRect">
+            <a:avLst>
+              <a:gd name="adj" fmla="val 7000"/>
+            </a:avLst>
+          </a:prstGeom>
+          <a:solidFill>
+            <a:srgbClr val="FCE8E6"/>
+          </a:solidFill>
+          <a:ln>
+            <a:noFill/>
+          </a:ln>
+          <a:effectLst/>
+        </p:spPr>
+        <p:style>
+          <a:lnRef idx="1">
+            <a:schemeClr val="accent1"/>
+          </a:lnRef>
+          <a:fillRef idx="3">
+            <a:schemeClr val="accent1"/>
+          </a:fillRef>
+          <a:effectRef idx="2">
+            <a:schemeClr val="accent1"/>
+          </a:effectRef>
+          <a:fontRef idx="minor">
+            <a:schemeClr val="lt1"/>
+          </a:fontRef>
+        </p:style>
+        <p:txBody>
+          <a:bodyPr rtlCol="0" anchor="t" wrap="square" lIns="100584" rIns="100584" tIns="464515" bIns="60350"/>
+          <a:lstStyle/>
+          <a:p>
+            <a:pPr algn="l">
+              <a:spcAft>
+                <a:spcPts val="400"/>
+              </a:spcAft>
+            </a:pPr>
+            <a:r>
+              <a:rPr sz="1200" b="0" i="0">
+                <a:solidFill>
+                  <a:srgbClr val="1F1F1F"/>
+                </a:solidFill>
+                <a:latin typeface="Google Sans Flex SemiBold"/>
+                <a:ea typeface="Google Sans Flex SemiBold"/>
+                <a:cs typeface="Google Sans Flex SemiBold"/>
+                <a:sym typeface="Google Sans Flex SemiBold"/>
+              </a:rPr>
+              <a:t>Draft</a:t>
+            </a:r>
+          </a:p>
+          <a:p>
+            <a:pPr algn="l">
+              <a:spcAft>
+                <a:spcPts val="0"/>
+              </a:spcAft>
+            </a:pPr>
+            <a:r>
+              <a:rPr sz="1000" b="0" i="0">
+                <a:solidFill>
+                  <a:srgbClr val="3C4043"/>
+                </a:solidFill>
+                <a:latin typeface="Google Sans Flex"/>
+                <a:ea typeface="Google Sans Flex"/>
+                <a:cs typeface="Google Sans Flex"/>
+                <a:sym typeface="Google Sans Flex"/>
+              </a:rPr>
+              <a:t>Gemini writes the slides.</a:t>
+            </a:r>
+          </a:p>
+        </p:txBody>
+      </p:sp>
+      <p:sp>
+        <p:nvSpPr>
+          <p:cNvPr id="157" name="Oval 156"/>
+          <p:cNvSpPr/>
+          <p:nvPr/>
+        </p:nvSpPr>
+        <p:spPr>
+          <a:xfrm>
+            <a:off x="3849624" y="1396288"/>
+            <a:ext cx="292608" cy="292608"/>
+          </a:xfrm>
+          <a:prstGeom prst="ellipse">
+            <a:avLst/>
+          </a:prstGeom>
+          <a:solidFill>
+            <a:srgbClr val="EA4335"/>
+          </a:solidFill>
+          <a:ln>
+            <a:noFill/>
+          </a:ln>
+          <a:effectLst/>
+        </p:spPr>
+        <p:style>
+          <a:lnRef idx="1">
+            <a:schemeClr val="accent1"/>
+          </a:lnRef>
+          <a:fillRef idx="3">
+            <a:schemeClr val="accent1"/>
+          </a:fillRef>
+          <a:effectRef idx="2">
+            <a:schemeClr val="accent1"/>
+          </a:effectRef>
+          <a:fontRef idx="minor">
+            <a:schemeClr val="lt1"/>
+          </a:fontRef>
+        </p:style>
+        <p:txBody>
+          <a:bodyPr rtlCol="0" anchor="ctr" lIns="0" rIns="0" tIns="0" bIns="0"/>
+          <a:lstStyle/>
+          <a:p>
+            <a:pPr algn="ctr"/>
+            <a:r>
+              <a:rPr sz="1200" b="0" i="0">
+                <a:solidFill>
+                  <a:srgbClr val="FFFFFF"/>
+                </a:solidFill>
+                <a:latin typeface="Google Sans Flex SemiBold"/>
+                <a:ea typeface="Google Sans Flex SemiBold"/>
+                <a:cs typeface="Google Sans Flex SemiBold"/>
+                <a:sym typeface="Google Sans Flex SemiBold"/>
+              </a:rPr>
+              <a:t>3</a:t>
+            </a:r>
+          </a:p>
+        </p:txBody>
+      </p:sp>
+      <p:sp>
+        <p:nvSpPr>
+          <p:cNvPr id="158" name="Rounded Rectangle 157"/>
+          <p:cNvSpPr/>
+          <p:nvPr/>
+        </p:nvSpPr>
+        <p:spPr>
+          <a:xfrm>
+            <a:off x="5477256" y="1325880"/>
+            <a:ext cx="1645920" cy="1261872"/>
+          </a:xfrm>
+          <a:prstGeom prst="roundRect">
+            <a:avLst>
+              <a:gd name="adj" fmla="val 7000"/>
+            </a:avLst>
+          </a:prstGeom>
+          <a:solidFill>
+            <a:srgbClr val="FEF7E0"/>
+          </a:solidFill>
+          <a:ln>
+            <a:noFill/>
+          </a:ln>
+          <a:effectLst/>
+        </p:spPr>
+        <p:style>
+          <a:lnRef idx="1">
+            <a:schemeClr val="accent1"/>
+          </a:lnRef>
+          <a:fillRef idx="3">
+            <a:schemeClr val="accent1"/>
+          </a:fillRef>
+          <a:effectRef idx="2">
+            <a:schemeClr val="accent1"/>
+          </a:effectRef>
+          <a:fontRef idx="minor">
+            <a:schemeClr val="lt1"/>
+          </a:fontRef>
+        </p:style>
+        <p:txBody>
+          <a:bodyPr rtlCol="0" anchor="t" wrap="square" lIns="100584" rIns="100584" tIns="464515" bIns="60350"/>
+          <a:lstStyle/>
+          <a:p>
+            <a:pPr algn="l">
+              <a:spcAft>
+                <a:spcPts val="400"/>
+              </a:spcAft>
+            </a:pPr>
+            <a:r>
+              <a:rPr sz="1200" b="0" i="0">
+                <a:solidFill>
+                  <a:srgbClr val="1F1F1F"/>
+                </a:solidFill>
+                <a:latin typeface="Google Sans Flex SemiBold"/>
+                <a:ea typeface="Google Sans Flex SemiBold"/>
+                <a:cs typeface="Google Sans Flex SemiBold"/>
+                <a:sym typeface="Google Sans Flex SemiBold"/>
+              </a:rPr>
+              <a:t>Audit</a:t>
+            </a:r>
+          </a:p>
+          <a:p>
+            <a:pPr algn="l">
+              <a:spcAft>
+                <a:spcPts val="0"/>
+              </a:spcAft>
+            </a:pPr>
+            <a:r>
+              <a:rPr sz="1000" b="0" i="0">
+                <a:solidFill>
+                  <a:srgbClr val="3C4043"/>
+                </a:solidFill>
+                <a:latin typeface="Google Sans Flex"/>
+                <a:ea typeface="Google Sans Flex"/>
+                <a:cs typeface="Google Sans Flex"/>
+                <a:sym typeface="Google Sans Flex"/>
+              </a:rPr>
+              <a:t>Repeated headings, repeated visuals, narration pace.</a:t>
+            </a:r>
+          </a:p>
+        </p:txBody>
+      </p:sp>
+      <p:sp>
+        <p:nvSpPr>
+          <p:cNvPr id="159" name="Oval 158"/>
+          <p:cNvSpPr/>
+          <p:nvPr/>
+        </p:nvSpPr>
+        <p:spPr>
+          <a:xfrm>
+            <a:off x="5577840" y="1396288"/>
+            <a:ext cx="292608" cy="292608"/>
+          </a:xfrm>
+          <a:prstGeom prst="ellipse">
+            <a:avLst/>
+          </a:prstGeom>
+          <a:solidFill>
+            <a:srgbClr val="F9AB00"/>
+          </a:solidFill>
+          <a:ln>
+            <a:noFill/>
+          </a:ln>
+          <a:effectLst/>
+        </p:spPr>
+        <p:style>
+          <a:lnRef idx="1">
+            <a:schemeClr val="accent1"/>
+          </a:lnRef>
+          <a:fillRef idx="3">
+            <a:schemeClr val="accent1"/>
+          </a:fillRef>
+          <a:effectRef idx="2">
+            <a:schemeClr val="accent1"/>
+          </a:effectRef>
+          <a:fontRef idx="minor">
+            <a:schemeClr val="lt1"/>
+          </a:fontRef>
+        </p:style>
+        <p:txBody>
+          <a:bodyPr rtlCol="0" anchor="ctr" lIns="0" rIns="0" tIns="0" bIns="0"/>
+          <a:lstStyle/>
+          <a:p>
+            <a:pPr algn="ctr"/>
+            <a:r>
+              <a:rPr sz="1200" b="0" i="0">
+                <a:solidFill>
+                  <a:srgbClr val="FFFFFF"/>
+                </a:solidFill>
+                <a:latin typeface="Google Sans Flex SemiBold"/>
+                <a:ea typeface="Google Sans Flex SemiBold"/>
+                <a:cs typeface="Google Sans Flex SemiBold"/>
+                <a:sym typeface="Google Sans Flex SemiBold"/>
+              </a:rPr>
+              <a:t>4</a:t>
+            </a:r>
+          </a:p>
+        </p:txBody>
+      </p:sp>
+      <p:sp>
+        <p:nvSpPr>
+          <p:cNvPr id="160" name="Rounded Rectangle 159"/>
+          <p:cNvSpPr/>
+          <p:nvPr/>
+        </p:nvSpPr>
+        <p:spPr>
+          <a:xfrm>
+            <a:off x="7205472" y="1325880"/>
+            <a:ext cx="1645920" cy="1261872"/>
+          </a:xfrm>
+          <a:prstGeom prst="roundRect">
+            <a:avLst>
+              <a:gd name="adj" fmla="val 7000"/>
+            </a:avLst>
+          </a:prstGeom>
+          <a:solidFill>
+            <a:srgbClr val="E8F0FE"/>
+          </a:solidFill>
+          <a:ln>
+            <a:noFill/>
+          </a:ln>
+          <a:effectLst/>
+        </p:spPr>
+        <p:style>
+          <a:lnRef idx="1">
+            <a:schemeClr val="accent1"/>
+          </a:lnRef>
+          <a:fillRef idx="3">
+            <a:schemeClr val="accent1"/>
+          </a:fillRef>
+          <a:effectRef idx="2">
+            <a:schemeClr val="accent1"/>
+          </a:effectRef>
+          <a:fontRef idx="minor">
+            <a:schemeClr val="lt1"/>
+          </a:fontRef>
+        </p:style>
+        <p:txBody>
+          <a:bodyPr rtlCol="0" anchor="t" wrap="square" lIns="100584" rIns="100584" tIns="464515" bIns="60350"/>
+          <a:lstStyle/>
+          <a:p>
+            <a:pPr algn="l">
+              <a:spcAft>
+                <a:spcPts val="400"/>
+              </a:spcAft>
+            </a:pPr>
+            <a:r>
+              <a:rPr sz="1200" b="0" i="0">
+                <a:solidFill>
+                  <a:srgbClr val="1F1F1F"/>
+                </a:solidFill>
+                <a:latin typeface="Google Sans Flex SemiBold"/>
+                <a:ea typeface="Google Sans Flex SemiBold"/>
+                <a:cs typeface="Google Sans Flex SemiBold"/>
+                <a:sym typeface="Google Sans Flex SemiBold"/>
+              </a:rPr>
+              <a:t>Repair, save</a:t>
+            </a:r>
+          </a:p>
+          <a:p>
+            <a:pPr algn="l">
+              <a:spcAft>
+                <a:spcPts val="0"/>
+              </a:spcAft>
+            </a:pPr>
+            <a:r>
+              <a:rPr sz="1000" b="0" i="0">
+                <a:solidFill>
+                  <a:srgbClr val="3C4043"/>
+                </a:solidFill>
+                <a:latin typeface="Google Sans Flex"/>
+                <a:ea typeface="Google Sans Flex"/>
+                <a:cs typeface="Google Sans Flex"/>
+                <a:sym typeface="Google Sans Flex"/>
+              </a:rPr>
+              <a:t>Fixes headings, re-checks, keeps a receipt.</a:t>
+            </a:r>
+          </a:p>
+        </p:txBody>
+      </p:sp>
+      <p:sp>
+        <p:nvSpPr>
+          <p:cNvPr id="161" name="Oval 160"/>
+          <p:cNvSpPr/>
+          <p:nvPr/>
+        </p:nvSpPr>
+        <p:spPr>
+          <a:xfrm>
+            <a:off x="7306056" y="1396288"/>
+            <a:ext cx="292608" cy="292608"/>
+          </a:xfrm>
+          <a:prstGeom prst="ellipse">
+            <a:avLst/>
+          </a:prstGeom>
+          <a:solidFill>
+            <a:srgbClr val="4285F4"/>
+          </a:solidFill>
+          <a:ln>
+            <a:noFill/>
+          </a:ln>
+          <a:effectLst/>
+        </p:spPr>
+        <p:style>
+          <a:lnRef idx="1">
+            <a:schemeClr val="accent1"/>
+          </a:lnRef>
+          <a:fillRef idx="3">
+            <a:schemeClr val="accent1"/>
+          </a:fillRef>
+          <a:effectRef idx="2">
+            <a:schemeClr val="accent1"/>
+          </a:effectRef>
+          <a:fontRef idx="minor">
+            <a:schemeClr val="lt1"/>
+          </a:fontRef>
+        </p:style>
+        <p:txBody>
+          <a:bodyPr rtlCol="0" anchor="ctr" lIns="0" rIns="0" tIns="0" bIns="0"/>
+          <a:lstStyle/>
+          <a:p>
+            <a:pPr algn="ctr"/>
+            <a:r>
+              <a:rPr sz="1200" b="0" i="0">
+                <a:solidFill>
+                  <a:srgbClr val="FFFFFF"/>
+                </a:solidFill>
+                <a:latin typeface="Google Sans Flex SemiBold"/>
+                <a:ea typeface="Google Sans Flex SemiBold"/>
+                <a:cs typeface="Google Sans Flex SemiBold"/>
+                <a:sym typeface="Google Sans Flex SemiBold"/>
+              </a:rPr>
+              <a:t>5</a:t>
+            </a:r>
+          </a:p>
+        </p:txBody>
+      </p:sp>
+      <p:sp>
+        <p:nvSpPr>
+          <p:cNvPr id="162" name="Rounded Rectangle 161"/>
+          <p:cNvSpPr/>
+          <p:nvPr/>
+        </p:nvSpPr>
+        <p:spPr>
+          <a:xfrm>
+            <a:off x="292608" y="2724912"/>
+            <a:ext cx="2779776" cy="1572768"/>
+          </a:xfrm>
+          <a:prstGeom prst="roundRect">
+            <a:avLst>
+              <a:gd name="adj" fmla="val 7000"/>
+            </a:avLst>
+          </a:prstGeom>
+          <a:solidFill>
+            <a:srgbClr val="FCE8E6"/>
+          </a:solidFill>
+          <a:ln>
+            <a:noFill/>
+          </a:ln>
+          <a:effectLst/>
+        </p:spPr>
+        <p:style>
+          <a:lnRef idx="1">
+            <a:schemeClr val="accent1"/>
+          </a:lnRef>
+          <a:fillRef idx="3">
+            <a:schemeClr val="accent1"/>
+          </a:fillRef>
+          <a:effectRef idx="2">
+            <a:schemeClr val="accent1"/>
+          </a:effectRef>
+          <a:fontRef idx="minor">
+            <a:schemeClr val="lt1"/>
+          </a:fontRef>
+        </p:style>
+        <p:txBody>
+          <a:bodyPr rtlCol="0" anchor="t" wrap="square" lIns="118872" rIns="118872" tIns="95097" bIns="71323"/>
+          <a:lstStyle/>
+          <a:p>
+            <a:pPr algn="l">
+              <a:spcAft>
+                <a:spcPts val="400"/>
+              </a:spcAft>
+            </a:pPr>
+            <a:r>
+              <a:rPr sz="1300" b="0" i="0">
+                <a:solidFill>
+                  <a:srgbClr val="1F1F1F"/>
+                </a:solidFill>
+                <a:latin typeface="Google Sans Flex SemiBold"/>
+                <a:ea typeface="Google Sans Flex SemiBold"/>
+                <a:cs typeface="Google Sans Flex SemiBold"/>
+                <a:sym typeface="Google Sans Flex SemiBold"/>
+              </a:rPr>
+              <a:t>Why it matters</a:t>
+            </a:r>
+          </a:p>
+          <a:p>
+            <a:pPr algn="l">
+              <a:spcAft>
+                <a:spcPts val="0"/>
+              </a:spcAft>
+            </a:pPr>
+            <a:r>
+              <a:rPr sz="1050" b="0" i="0">
+                <a:solidFill>
+                  <a:srgbClr val="3C4043"/>
+                </a:solidFill>
+                <a:latin typeface="Google Sans Flex"/>
+                <a:ea typeface="Google Sans Flex"/>
+                <a:cs typeface="Google Sans Flex"/>
+                <a:sym typeface="Google Sans Flex"/>
+              </a:rPr>
+              <a:t>A flawed deck found after filming wastes the costly steps: voice, capture, encode. The audit runs first, so a flaw costs seconds, not a rerun.</a:t>
+            </a:r>
+          </a:p>
+        </p:txBody>
+      </p:sp>
+      <p:sp>
+        <p:nvSpPr>
+          <p:cNvPr id="163" name="Rounded Rectangle 162"/>
+          <p:cNvSpPr/>
+          <p:nvPr/>
+        </p:nvSpPr>
+        <p:spPr>
+          <a:xfrm>
+            <a:off x="3182112" y="2724912"/>
+            <a:ext cx="2779776" cy="1572768"/>
+          </a:xfrm>
+          <a:prstGeom prst="roundRect">
+            <a:avLst>
+              <a:gd name="adj" fmla="val 7000"/>
+            </a:avLst>
+          </a:prstGeom>
+          <a:solidFill>
+            <a:srgbClr val="E6F4EA"/>
+          </a:solidFill>
+          <a:ln>
+            <a:noFill/>
+          </a:ln>
+          <a:effectLst/>
+        </p:spPr>
+        <p:style>
+          <a:lnRef idx="1">
+            <a:schemeClr val="accent1"/>
+          </a:lnRef>
+          <a:fillRef idx="3">
+            <a:schemeClr val="accent1"/>
+          </a:fillRef>
+          <a:effectRef idx="2">
+            <a:schemeClr val="accent1"/>
+          </a:effectRef>
+          <a:fontRef idx="minor">
+            <a:schemeClr val="lt1"/>
+          </a:fontRef>
+        </p:style>
+        <p:txBody>
+          <a:bodyPr rtlCol="0" anchor="t" wrap="square" lIns="118872" rIns="118872" tIns="95097" bIns="71323"/>
+          <a:lstStyle/>
+          <a:p>
+            <a:pPr algn="l">
+              <a:spcAft>
+                <a:spcPts val="400"/>
+              </a:spcAft>
+            </a:pPr>
+            <a:r>
+              <a:rPr sz="1300" b="0" i="0">
+                <a:solidFill>
+                  <a:srgbClr val="1F1F1F"/>
+                </a:solidFill>
+                <a:latin typeface="Google Sans Flex SemiBold"/>
+                <a:ea typeface="Google Sans Flex SemiBold"/>
+                <a:cs typeface="Google Sans Flex SemiBold"/>
+                <a:sym typeface="Google Sans Flex SemiBold"/>
+              </a:rPr>
+              <a:t>What it automates</a:t>
+            </a:r>
+          </a:p>
+          <a:p>
+            <a:pPr algn="l">
+              <a:spcAft>
+                <a:spcPts val="0"/>
+              </a:spcAft>
+            </a:pPr>
+            <a:r>
+              <a:rPr sz="1050" b="0" i="0">
+                <a:solidFill>
+                  <a:srgbClr val="3C4043"/>
+                </a:solidFill>
+                <a:latin typeface="Google Sans Flex"/>
+                <a:ea typeface="Google Sans Flex"/>
+                <a:cs typeface="Google Sans Flex"/>
+                <a:sym typeface="Google Sans Flex"/>
+              </a:rPr>
+              <a:t>Picking a template and palette, spotting repeats, fixing headings, remembering what worked for this kind of file. No teacher does these by hand.</a:t>
+            </a:r>
+          </a:p>
+        </p:txBody>
+      </p:sp>
+      <p:sp>
+        <p:nvSpPr>
+          <p:cNvPr id="164" name="Rounded Rectangle 163"/>
+          <p:cNvSpPr/>
+          <p:nvPr/>
+        </p:nvSpPr>
+        <p:spPr>
+          <a:xfrm>
+            <a:off x="6071616" y="2724912"/>
+            <a:ext cx="2779776" cy="1572768"/>
+          </a:xfrm>
+          <a:prstGeom prst="roundRect">
+            <a:avLst>
+              <a:gd name="adj" fmla="val 7000"/>
+            </a:avLst>
+          </a:prstGeom>
+          <a:solidFill>
+            <a:srgbClr val="E8F0FE"/>
+          </a:solidFill>
+          <a:ln>
+            <a:noFill/>
+          </a:ln>
+          <a:effectLst/>
+        </p:spPr>
+        <p:style>
+          <a:lnRef idx="1">
+            <a:schemeClr val="accent1"/>
+          </a:lnRef>
+          <a:fillRef idx="3">
+            <a:schemeClr val="accent1"/>
+          </a:fillRef>
+          <a:effectRef idx="2">
+            <a:schemeClr val="accent1"/>
+          </a:effectRef>
+          <a:fontRef idx="minor">
+            <a:schemeClr val="lt1"/>
+          </a:fontRef>
+        </p:style>
+        <p:txBody>
+          <a:bodyPr rtlCol="0" anchor="t" wrap="square" lIns="118872" rIns="118872" tIns="95097" bIns="71323"/>
+          <a:lstStyle/>
+          <a:p>
+            <a:pPr algn="l">
+              <a:spcAft>
+                <a:spcPts val="400"/>
+              </a:spcAft>
+            </a:pPr>
+            <a:r>
+              <a:rPr sz="1300" b="0" i="0">
+                <a:solidFill>
+                  <a:srgbClr val="1F1F1F"/>
+                </a:solidFill>
+                <a:latin typeface="Google Sans Flex SemiBold"/>
+                <a:ea typeface="Google Sans Flex SemiBold"/>
+                <a:cs typeface="Google Sans Flex SemiBold"/>
+                <a:sym typeface="Google Sans Flex SemiBold"/>
+              </a:rPr>
+              <a:t>Plainly</a:t>
+            </a:r>
+          </a:p>
+          <a:p>
+            <a:pPr algn="l">
+              <a:spcAft>
+                <a:spcPts val="0"/>
+              </a:spcAft>
+            </a:pPr>
+            <a:r>
+              <a:rPr sz="1050" b="0" i="0">
+                <a:solidFill>
+                  <a:srgbClr val="3C4043"/>
+                </a:solidFill>
+                <a:latin typeface="Google Sans Flex"/>
+                <a:ea typeface="Google Sans Flex"/>
+                <a:cs typeface="Google Sans Flex"/>
+                <a:sym typeface="Google Sans Flex"/>
+              </a:rPr>
+              <a:t>The order is fixed and Gemini only writes the slides. That keeps cost bounded and every run explainable. It does not choose its own tools.</a:t>
+            </a:r>
+          </a:p>
+        </p:txBody>
+      </p:sp>
+      <p:sp>
+        <p:nvSpPr>
+          <p:cNvPr id="165" name="Rounded Rectangle 164"/>
+          <p:cNvSpPr/>
+          <p:nvPr/>
+        </p:nvSpPr>
+        <p:spPr>
+          <a:xfrm>
+            <a:off x="292608" y="4407408"/>
+            <a:ext cx="8558784" cy="365760"/>
+          </a:xfrm>
+          <a:prstGeom prst="roundRect">
+            <a:avLst>
+              <a:gd name="adj" fmla="val 50000"/>
+            </a:avLst>
+          </a:prstGeom>
+          <a:solidFill>
+            <a:srgbClr val="1F1F1F"/>
+          </a:solidFill>
+          <a:ln>
+            <a:noFill/>
+          </a:ln>
+          <a:effectLst/>
+        </p:spPr>
+        <p:style>
+          <a:lnRef idx="1">
+            <a:schemeClr val="accent1"/>
+          </a:lnRef>
+          <a:fillRef idx="3">
+            <a:schemeClr val="accent1"/>
+          </a:fillRef>
+          <a:effectRef idx="2">
+            <a:schemeClr val="accent1"/>
+          </a:effectRef>
+          <a:fontRef idx="minor">
+            <a:schemeClr val="lt1"/>
+          </a:fontRef>
+        </p:style>
+        <p:txBody>
+          <a:bodyPr rtlCol="0" anchor="ctr" wrap="square" lIns="109728" rIns="109728" tIns="27432" bIns="27432"/>
+          <a:lstStyle/>
+          <a:p>
+            <a:pPr algn="ctr"/>
+            <a:r>
+              <a:rPr sz="1200" b="0" i="0">
+                <a:solidFill>
+                  <a:srgbClr val="FFFFFF"/>
+                </a:solidFill>
+                <a:latin typeface="Google Sans Flex Medium"/>
+                <a:ea typeface="Google Sans Flex Medium"/>
+                <a:cs typeface="Google Sans Flex Medium"/>
+                <a:sym typeface="Google Sans Flex Medium"/>
+              </a:rPr>
+              <a:t>Every turn is logged: thought, tool, result, time. Saved in Firestore when hosted, SQLite locally.</a:t>
             </a:r>
           </a:p>
         </p:txBody>
@@ -12524,7 +13679,7 @@
                 <a:cs typeface="Google Sans Flex"/>
                 <a:sym typeface="Google Sans Flex"/>
               </a:rPr>
-              <a:t>Six real looks, hand-drawn motion, and a highlight that follows the voice. It plays like a teacher at the board, not a deck read aloud.</a:t>
+              <a:t>Twelve real looks, hand-drawn motion, and a highlight that follows the voice. It plays like a teacher at the board, not a deck read aloud.</a:t>
             </a:r>
           </a:p>
         </p:txBody>
@@ -14200,7 +15355,7 @@
                 <a:cs typeface="Google Sans Flex SemiBold"/>
                 <a:sym typeface="Google Sans Flex SemiBold"/>
               </a:rPr>
-              <a:t>Six real templates</a:t>
+              <a:t>Twelve real templates</a:t>
             </a:r>
           </a:p>
           <a:p>
@@ -14219,7 +15374,7 @@
                 <a:cs typeface="Google Sans Flex"/>
                 <a:sym typeface="Google Sans Flex"/>
               </a:rPr>
-              <a:t>Whiteboard, notebook, poster, editorial, broadcast, bento. Own layout, font and motion each.</a:t>
+              <a:t>Chalkboard, magazine, glass, pop, cinema, terminal and six more. Own layout, font and motion each.</a:t>
             </a:r>
           </a:p>
         </p:txBody>
@@ -17392,7 +18547,7 @@
         <p:spPr>
           <a:xfrm>
             <a:off x="6748272" y="2926080"/>
-            <a:ext cx="2103120" cy="868680"/>
+            <a:ext cx="2103120" cy="1005840"/>
           </a:xfrm>
           <a:prstGeom prst="roundRect">
             <a:avLst>
@@ -17459,7 +18614,7 @@
                 <a:cs typeface="Google Sans Flex"/>
                 <a:sym typeface="Google Sans Flex"/>
               </a:rPr>
-              <a:t>A copy of every job.</a:t>
+              <a:t>Jobs, cost log and agent memory. SQLite when local.</a:t>
             </a:r>
           </a:p>
         </p:txBody>
@@ -18300,7 +19455,7 @@
                 <a:cs typeface="Google Sans Flex"/>
                 <a:sym typeface="Google Sans Flex"/>
               </a:rPr>
-              <a:t>Keeps a copy of each job.</a:t>
+              <a:t>Jobs, cost log and agent memory when hosted. SQLite on a laptop.</a:t>
             </a:r>
           </a:p>
         </p:txBody>
@@ -18417,7 +19572,7 @@
                 <a:cs typeface="Google Sans Flex"/>
                 <a:sym typeface="Google Sans Flex"/>
               </a:rPr>
-              <a:t>Inside the container: FastAPI, Playwright and FFmpeg. The six looks and the drawn animation are plain HTML, CSS and a small script, so no extra model is called.</a:t>
+              <a:t>Inside the container: FastAPI, Playwright and FFmpeg. The twelve looks and the drawn animation are plain HTML, CSS and a small script, so no extra model is called.</a:t>
             </a:r>
           </a:p>
         </p:txBody>
